--- a/report/SunumFinal_Mustafa_Kirpik.pptx
+++ b/report/SunumFinal_Mustafa_Kirpik.pptx
@@ -743,6 +743,101 @@
             </c:numRef>
           </c:val>
         </c:ser>
+        <c:ser>
+          <c:idx val="3"/>
+          <c:order val="3"/>
+          <c:tx>
+            <c:strRef>
+              <c:f>Sheet1!$E$1</c:f>
+              <c:strCache>
+                <c:ptCount val="1"/>
+                <c:pt idx="0">
+                  <c:v>Gemma-4-E2B</c:v>
+                </c:pt>
+              </c:strCache>
+            </c:strRef>
+          </c:tx>
+          <c:spPr>
+            <a:solidFill>
+              <a:srgbClr val="C96A28"/>
+            </a:solidFill>
+            <a:effectLst/>
+          </c:spPr>
+          <c:invertIfNegative val="0"/>
+          <c:dLbls>
+            <c:numFmt formatCode="#,##0" sourceLinked="0"/>
+            <c:txPr>
+              <a:bodyPr/>
+              <a:lstStyle/>
+              <a:p>
+                <a:pPr>
+                  <a:defRPr b="0" i="0" strike="noStrike" sz="1200" u="none">
+                    <a:solidFill>
+                      <a:srgbClr val="000000"/>
+                    </a:solidFill>
+                    <a:latin typeface="Arial"/>
+                  </a:defRPr>
+                </a:pPr>
+              </a:p>
+            </c:txPr>
+            <c:showLegendKey val="0"/>
+            <c:showVal val="0"/>
+            <c:showCatName val="0"/>
+            <c:showSerName val="0"/>
+            <c:showPercent val="0"/>
+            <c:showBubbleSize val="0"/>
+            <c:showLeaderLines val="0"/>
+          </c:dLbls>
+          <c:cat>
+            <c:multiLvlStrRef>
+              <c:f>Sheet1!$A$2:$A$6</c:f>
+              <c:multiLvlStrCache>
+                <c:ptCount val="5"/>
+                <c:lvl>
+                  <c:pt idx="0">
+                    <c:v>Yardım</c:v>
+                  </c:pt>
+                  <c:pt idx="1">
+                    <c:v>Kayıp</c:v>
+                  </c:pt>
+                  <c:pt idx="2">
+                    <c:v>Altyapı</c:v>
+                  </c:pt>
+                  <c:pt idx="3">
+                    <c:v>Bağış</c:v>
+                  </c:pt>
+                  <c:pt idx="4">
+                    <c:v>Diğer</c:v>
+                  </c:pt>
+                </c:lvl>
+              </c:multiLvlStrCache>
+            </c:multiLvlStrRef>
+          </c:cat>
+          <c:val>
+            <c:numRef>
+              <c:f>Sheet1!$E$2:$E$6</c:f>
+              <c:numCache>
+                <c:formatCode>General</c:formatCode>
+                <c:ptCount val="5"/>
+                <c:pt idx="0">
+                  <c:v>0.86</c:v>
+                </c:pt>
+                <c:pt idx="1">
+                  <c:v>0.46</c:v>
+                </c:pt>
+                <c:pt idx="2">
+                  <c:v>0.91</c:v>
+                </c:pt>
+                <c:pt idx="3">
+                  <c:v>0.76</c:v>
+                </c:pt>
+                <c:pt idx="4">
+                  <c:v>0.71</c:v>
+                </c:pt>
+              </c:numCache>
+            </c:numRef>
+          </c:val>
+        </c:ser>
         <c:dLbls>
           <c:numFmt formatCode="#,##0" sourceLinked="0"/>
           <c:txPr>
@@ -882,7 +977,7 @@
         <a:lstStyle/>
         <a:p>
           <a:pPr>
-            <a:defRPr sz="1200">
+            <a:defRPr sz="1100">
               <a:solidFill>
                 <a:srgbClr val="1B2733"/>
               </a:solidFill>
@@ -953,7 +1048,7 @@
               <a:lstStyle/>
               <a:p>
                 <a:pPr>
-                  <a:defRPr b="0" i="0" strike="noStrike" sz="1400" u="none">
+                  <a:defRPr b="0" i="0" strike="noStrike" sz="1300" u="none">
                     <a:solidFill>
                       <a:srgbClr val="0F2741"/>
                     </a:solidFill>
@@ -990,9 +1085,9 @@
           </c:marker>
           <c:cat>
             <c:multiLvlStrRef>
-              <c:f>Sheet1!$A$2:$A$4</c:f>
+              <c:f>Sheet1!$A$2:$A$5</c:f>
               <c:multiLvlStrCache>
-                <c:ptCount val="3"/>
+                <c:ptCount val="4"/>
                 <c:lvl>
                   <c:pt idx="0">
                     <c:v>360M
@@ -1006,16 +1101,20 @@
                     <c:v>1.5B
 Qwen2.5</c:v>
                   </c:pt>
+                  <c:pt idx="3">
+                    <c:v>5B
+Gemma-4</c:v>
+                  </c:pt>
                 </c:lvl>
               </c:multiLvlStrCache>
             </c:multiLvlStrRef>
           </c:cat>
           <c:val>
             <c:numRef>
-              <c:f>Sheet1!$B$2:$B$4</c:f>
+              <c:f>Sheet1!$B$2:$B$5</c:f>
               <c:numCache>
                 <c:formatCode>General</c:formatCode>
-                <c:ptCount val="3"/>
+                <c:ptCount val="4"/>
                 <c:pt idx="0">
                   <c:v>0.588</c:v>
                 </c:pt>
@@ -1024,6 +1123,9 @@
                 </c:pt>
                 <c:pt idx="2">
                   <c:v>0.914</c:v>
+                </c:pt>
+                <c:pt idx="3">
+                  <c:v>0.74</c:v>
                 </c:pt>
               </c:numCache>
             </c:numRef>
@@ -1037,7 +1139,7 @@
             <a:lstStyle/>
             <a:p>
               <a:pPr>
-                <a:defRPr b="0" i="0" strike="noStrike" sz="1400" u="none">
+                <a:defRPr b="0" i="0" strike="noStrike" sz="1300" u="none">
                   <a:solidFill>
                     <a:srgbClr val="0F2741"/>
                   </a:solidFill>
@@ -1085,7 +1187,7 @@
           <a:lstStyle/>
           <a:p>
             <a:pPr>
-              <a:defRPr sz="1200" b="0" i="0" u="none" strike="noStrike">
+              <a:defRPr sz="1100" b="0" i="0" u="none" strike="noStrike">
                 <a:solidFill>
                   <a:srgbClr val="1B2733"/>
                 </a:solidFill>
@@ -4804,7 +4906,7 @@
                 <a:ea typeface="Calibri" pitchFamily="34" charset="-122"/>
                 <a:cs typeface="Calibri" pitchFamily="34" charset="-120"/>
               </a:rPr>
-              <a:t>Gemma-4 donanım kısıtıyla ertelendi (eklenecek).</a:t>
+              <a:t>Gemma-4 için modele özel hiperparametre araması yapılmadı (ortak reçete).</a:t>
             </a:r>
             <a:endParaRPr lang="en-US" sz="1300" dirty="0"/>
           </a:p>
@@ -5311,7 +5413,7 @@
               <a:buNone/>
             </a:pPr>
             <a:r>
-              <a:rPr lang="en-US" sz="1900" b="1" dirty="0">
+              <a:rPr lang="en-US" sz="1700" b="1" dirty="0">
                 <a:solidFill>
                   <a:srgbClr val="E8833A"/>
                 </a:solidFill>
@@ -5321,7 +5423,7 @@
               </a:rPr>
               <a:t>0.094 → 0.914</a:t>
             </a:r>
-            <a:endParaRPr lang="en-US" sz="1900" dirty="0"/>
+            <a:endParaRPr lang="en-US" sz="1700" dirty="0"/>
           </a:p>
         </p:txBody>
       </p:sp>
@@ -5350,7 +5452,7 @@
               <a:buNone/>
             </a:pPr>
             <a:r>
-              <a:rPr lang="en-US" sz="1200" dirty="0">
+              <a:rPr lang="en-US" sz="1150" dirty="0">
                 <a:solidFill>
                   <a:srgbClr val="D5E0EA"/>
                 </a:solidFill>
@@ -5360,7 +5462,7 @@
               </a:rPr>
               <a:t>Zero-shot çöküyor, QLoRA çözüyor (Macro-F1)</a:t>
             </a:r>
-            <a:endParaRPr lang="en-US" sz="1200" dirty="0"/>
+            <a:endParaRPr lang="en-US" sz="1150" dirty="0"/>
           </a:p>
         </p:txBody>
       </p:sp>
@@ -5411,7 +5513,7 @@
               <a:buNone/>
             </a:pPr>
             <a:r>
-              <a:rPr lang="en-US" sz="1900" b="1" dirty="0">
+              <a:rPr lang="en-US" sz="1700" b="1" dirty="0">
                 <a:solidFill>
                   <a:srgbClr val="E8833A"/>
                 </a:solidFill>
@@ -5419,9 +5521,9 @@
                 <a:ea typeface="Calibri" pitchFamily="34" charset="-122"/>
                 <a:cs typeface="Calibri" pitchFamily="34" charset="-120"/>
               </a:rPr>
-              <a:t>3 model</a:t>
+              <a:t>4 model</a:t>
             </a:r>
-            <a:endParaRPr lang="en-US" sz="1900" dirty="0"/>
+            <a:endParaRPr lang="en-US" sz="1700" dirty="0"/>
           </a:p>
         </p:txBody>
       </p:sp>
@@ -5450,7 +5552,7 @@
               <a:buNone/>
             </a:pPr>
             <a:r>
-              <a:rPr lang="en-US" sz="1200" dirty="0">
+              <a:rPr lang="en-US" sz="1150" dirty="0">
                 <a:solidFill>
                   <a:srgbClr val="D5E0EA"/>
                 </a:solidFill>
@@ -5458,9 +5560,9 @@
                 <a:ea typeface="Calibri" pitchFamily="34" charset="-122"/>
                 <a:cs typeface="Calibri" pitchFamily="34" charset="-120"/>
               </a:rPr>
-              <a:t>SmolLM2 · TinyLlama · Qwen2.5 — şart karşılandı</a:t>
+              <a:t>SmolLM2 · TinyLlama · Qwen2.5 · Gemma-4</a:t>
             </a:r>
-            <a:endParaRPr lang="en-US" sz="1200" dirty="0"/>
+            <a:endParaRPr lang="en-US" sz="1150" dirty="0"/>
           </a:p>
         </p:txBody>
       </p:sp>
@@ -5511,7 +5613,7 @@
               <a:buNone/>
             </a:pPr>
             <a:r>
-              <a:rPr lang="en-US" sz="1900" b="1" dirty="0">
+              <a:rPr lang="en-US" sz="1700" b="1" dirty="0">
                 <a:solidFill>
                   <a:srgbClr val="E8833A"/>
                 </a:solidFill>
@@ -5519,9 +5621,9 @@
                 <a:ea typeface="Calibri" pitchFamily="34" charset="-122"/>
                 <a:cs typeface="Calibri" pitchFamily="34" charset="-120"/>
               </a:rPr>
-              <a:t>&lt; 5 GB</a:t>
+              <a:t>Sweet spot 1–1.5B</a:t>
             </a:r>
-            <a:endParaRPr lang="en-US" sz="1900" dirty="0"/>
+            <a:endParaRPr lang="en-US" sz="1700" dirty="0"/>
           </a:p>
         </p:txBody>
       </p:sp>
@@ -5550,7 +5652,7 @@
               <a:buNone/>
             </a:pPr>
             <a:r>
-              <a:rPr lang="en-US" sz="1200" dirty="0">
+              <a:rPr lang="en-US" sz="1150" dirty="0">
                 <a:solidFill>
                   <a:srgbClr val="D5E0EA"/>
                 </a:solidFill>
@@ -5558,9 +5660,9 @@
                 <a:ea typeface="Calibri" pitchFamily="34" charset="-122"/>
                 <a:cs typeface="Calibri" pitchFamily="34" charset="-120"/>
               </a:rPr>
-              <a:t>Tepe GPU belleği — full fine-tune 20+ GB isterdi</a:t>
+              <a:t>5B Gemma-4 küçük veride aşırı uydurma</a:t>
             </a:r>
-            <a:endParaRPr lang="en-US" sz="1200" dirty="0"/>
+            <a:endParaRPr lang="en-US" sz="1150" dirty="0"/>
           </a:p>
         </p:txBody>
       </p:sp>
@@ -5611,7 +5713,7 @@
               <a:buNone/>
             </a:pPr>
             <a:r>
-              <a:rPr lang="en-US" sz="1900" b="1" dirty="0">
+              <a:rPr lang="en-US" sz="1700" b="1" dirty="0">
                 <a:solidFill>
                   <a:srgbClr val="E8833A"/>
                 </a:solidFill>
@@ -5619,9 +5721,9 @@
                 <a:ea typeface="Calibri" pitchFamily="34" charset="-122"/>
                 <a:cs typeface="Calibri" pitchFamily="34" charset="-120"/>
               </a:rPr>
-              <a:t>En iyi: Qwen</a:t>
+              <a:t>TinyLlama verimli</a:t>
             </a:r>
-            <a:endParaRPr lang="en-US" sz="1900" dirty="0"/>
+            <a:endParaRPr lang="en-US" sz="1700" dirty="0"/>
           </a:p>
         </p:txBody>
       </p:sp>
@@ -5650,7 +5752,7 @@
               <a:buNone/>
             </a:pPr>
             <a:r>
-              <a:rPr lang="en-US" sz="1200" dirty="0">
+              <a:rPr lang="en-US" sz="1150" dirty="0">
                 <a:solidFill>
                   <a:srgbClr val="D5E0EA"/>
                 </a:solidFill>
@@ -5658,9 +5760,9 @@
                 <a:ea typeface="Calibri" pitchFamily="34" charset="-122"/>
                 <a:cs typeface="Calibri" pitchFamily="34" charset="-120"/>
               </a:rPr>
-              <a:t>TinyLlama ise en verimli (daha az GPU, ~eşit skor)</a:t>
+              <a:t>Qwen'e ~eşit skor, %35 daha az GPU</a:t>
             </a:r>
-            <a:endParaRPr lang="en-US" sz="1200" dirty="0"/>
+            <a:endParaRPr lang="en-US" sz="1150" dirty="0"/>
           </a:p>
         </p:txBody>
       </p:sp>
@@ -5689,7 +5791,7 @@
               <a:buNone/>
             </a:pPr>
             <a:r>
-              <a:rPr lang="en-US" sz="1400" i="1" dirty="0">
+              <a:rPr lang="en-US" sz="1300" i="1" dirty="0">
                 <a:solidFill>
                   <a:srgbClr val="AFC2D4"/>
                 </a:solidFill>
@@ -5697,9 +5799,9 @@
                 <a:ea typeface="Calibri" pitchFamily="34" charset="-122"/>
                 <a:cs typeface="Calibri" pitchFamily="34" charset="-120"/>
               </a:rPr>
-              <a:t>Gelecek: Gemma-4-E2B (4. model) · 3 seed ortalama±std · few-shot · tam LoRA–QLoRA karşılaştırması</a:t>
+              <a:t>Gelecek: Gemma-4 için modele özel hiperparametre · 3 seed ortalama±std · few-shot · tam LoRA–QLoRA karşılaştırması</a:t>
             </a:r>
-            <a:endParaRPr lang="en-US" sz="1400" dirty="0"/>
+            <a:endParaRPr lang="en-US" sz="1300" dirty="0"/>
           </a:p>
         </p:txBody>
       </p:sp>
@@ -7772,7 +7874,7 @@
         <p:spPr>
           <a:xfrm>
             <a:off x="640080" y="1645920"/>
-            <a:ext cx="6035040" cy="3657600"/>
+            <a:ext cx="6035040" cy="3840480"/>
           </a:xfrm>
           <a:prstGeom prst="rect">
             <a:avLst/>
@@ -7783,6 +7885,26 @@
         <p:txBody>
           <a:bodyPr wrap="square" rtlCol="0" anchor="t"/>
           <a:lstStyle/>
+          <a:p>
+            <a:pPr indent="0" marL="0">
+              <a:spcAft>
+                <a:spcPts val="800"/>
+              </a:spcAft>
+              <a:buNone/>
+            </a:pPr>
+            <a:r>
+              <a:rPr lang="en-US" sz="1350" dirty="0">
+                <a:solidFill>
+                  <a:srgbClr val="5B6B7B"/>
+                </a:solidFill>
+                <a:latin typeface="Calibri" pitchFamily="34" charset="0"/>
+                <a:ea typeface="Calibri" pitchFamily="34" charset="-122"/>
+                <a:cs typeface="Calibri" pitchFamily="34" charset="-120"/>
+              </a:rPr>
+              <a:t>Kaynak: Kaggle "Turkey Earthquake Relief Tweets" (Ulku Tuncer Küçüktaş, 2023).</a:t>
+            </a:r>
+            <a:endParaRPr lang="en-US" sz="1350" dirty="0"/>
+          </a:p>
           <a:p>
             <a:pPr indent="0" marL="0">
               <a:spcAft>
@@ -7799,9 +7921,9 @@
                 <a:ea typeface="Calibri" pitchFamily="34" charset="-122"/>
                 <a:cs typeface="Calibri" pitchFamily="34" charset="-120"/>
               </a:rPr>
-              <a:t>793 gerçek deprem tweet'i, beş sınıfa elle etiketlendi.</a:t>
+              <a:t>Bu havuzdan 793 tweet seçilip beş sınıfa elle etiketlendi.</a:t>
             </a:r>
-            <a:endParaRPr lang="en-US" sz="1600" dirty="0"/>
+            <a:endParaRPr lang="en-US" sz="1350" dirty="0"/>
           </a:p>
           <a:p>
             <a:pPr indent="0" marL="0">
@@ -7819,9 +7941,9 @@
                 <a:ea typeface="Calibri" pitchFamily="34" charset="-122"/>
                 <a:cs typeface="Calibri" pitchFamily="34" charset="-120"/>
               </a:rPr>
-              <a:t>Zayıf etiketleme ve sentetik üretim denendi; etiket kalitesi için elle etiketli set tercih edildi (dürüstlük beyanı raporda).</a:t>
+              <a:t>Ham metin Kaggle'dan; 5 sınıflı etiketler bu çalışmaya özgü. Zayıf/sentetik etiketleme denendi, kalite için elle etiketli set tercih edildi.</a:t>
             </a:r>
-            <a:endParaRPr lang="en-US" sz="1600" dirty="0"/>
+            <a:endParaRPr lang="en-US" sz="1350" dirty="0"/>
           </a:p>
           <a:p>
             <a:pPr indent="0" marL="0">
@@ -7841,7 +7963,7 @@
               </a:rPr>
               <a:t>Ön işleme: URL/@kullanıcı anonimleştirme, boşluk normalizasyonu. Türkçe karakter, hashtag, emoji korundu.</a:t>
             </a:r>
-            <a:endParaRPr lang="en-US" sz="1600" dirty="0"/>
+            <a:endParaRPr lang="en-US" sz="1350" dirty="0"/>
           </a:p>
           <a:p>
             <a:pPr indent="0" marL="0">
@@ -7858,7 +7980,7 @@
               </a:rPr>
               <a:t>Bölme: %80/10/10 stratified → 633 / 80 / 80 · seed=42</a:t>
             </a:r>
-            <a:endParaRPr lang="en-US" sz="1600" dirty="0"/>
+            <a:endParaRPr lang="en-US" sz="1350" dirty="0"/>
           </a:p>
         </p:txBody>
       </p:sp>
@@ -8983,15 +9105,15 @@
                         <a:buNone/>
                       </a:pPr>
                       <a:r>
-                        <a:rPr lang="en-US" sz="1300" i="1" dirty="0">
+                        <a:rPr lang="en-US" sz="1300" dirty="0">
                           <a:solidFill>
-                            <a:srgbClr val="5B6B7B"/>
+                            <a:srgbClr val="000000"/>
                           </a:solidFill>
                           <a:latin typeface="Calibri" pitchFamily="34" charset="0"/>
                           <a:ea typeface="Calibri" pitchFamily="34" charset="-122"/>
                           <a:cs typeface="Calibri" pitchFamily="34" charset="-120"/>
                         </a:rPr>
-                        <a:t>Gemma-4-E2B-it (planlanan)</a:t>
+                        <a:t>Gemma-4-E2B-it (Unsloth)</a:t>
                       </a:r>
                       <a:endParaRPr lang="en-US" sz="1300" dirty="0">
                         <a:latin typeface="Calibri" charset="0"/>
@@ -9051,15 +9173,15 @@
                         <a:buNone/>
                       </a:pPr>
                       <a:r>
-                        <a:rPr lang="en-US" sz="1300" i="1" dirty="0">
+                        <a:rPr lang="en-US" sz="1300" dirty="0">
                           <a:solidFill>
-                            <a:srgbClr val="5B6B7B"/>
+                            <a:srgbClr val="000000"/>
                           </a:solidFill>
                           <a:latin typeface="Calibri" pitchFamily="34" charset="0"/>
                           <a:ea typeface="Calibri" pitchFamily="34" charset="-122"/>
                           <a:cs typeface="Calibri" pitchFamily="34" charset="-120"/>
                         </a:rPr>
-                        <a:t>~2B</a:t>
+                        <a:t>5B / ~2B</a:t>
                       </a:r>
                       <a:endParaRPr lang="en-US" sz="1300" dirty="0">
                         <a:latin typeface="Calibri" charset="0"/>
@@ -9477,7 +9599,7 @@
                 <a:gridCol w="1737360"/>
                 <a:gridCol w="1645920"/>
               </a:tblGrid>
-              <a:tr h="566928">
+              <a:tr h="493776">
                 <a:tc>
                   <a:txBody>
                     <a:bodyPr/>
@@ -9487,7 +9609,7 @@
                         <a:buNone/>
                       </a:pPr>
                       <a:r>
-                        <a:rPr lang="en-US" sz="1400" b="1" dirty="0">
+                        <a:rPr lang="en-US" sz="1300" b="1" dirty="0">
                           <a:solidFill>
                             <a:srgbClr val="FFFFFF"/>
                           </a:solidFill>
@@ -9497,7 +9619,7 @@
                         </a:rPr>
                         <a:t>Model</a:t>
                       </a:r>
-                      <a:endParaRPr lang="en-US" sz="1400" dirty="0">
+                      <a:endParaRPr lang="en-US" sz="1300" dirty="0">
                         <a:latin typeface="Calibri" charset="0"/>
                         <a:ea typeface="Calibri" charset="0"/>
                         <a:cs typeface="Calibri" charset="0"/>
@@ -9555,7 +9677,7 @@
                         <a:buNone/>
                       </a:pPr>
                       <a:r>
-                        <a:rPr lang="en-US" sz="1400" b="1" dirty="0">
+                        <a:rPr lang="en-US" sz="1300" b="1" dirty="0">
                           <a:solidFill>
                             <a:srgbClr val="FFFFFF"/>
                           </a:solidFill>
@@ -9565,7 +9687,7 @@
                         </a:rPr>
                         <a:t>Yöntem</a:t>
                       </a:r>
-                      <a:endParaRPr lang="en-US" sz="1400" dirty="0">
+                      <a:endParaRPr lang="en-US" sz="1300" dirty="0">
                         <a:latin typeface="Calibri" charset="0"/>
                         <a:ea typeface="Calibri" charset="0"/>
                         <a:cs typeface="Calibri" charset="0"/>
@@ -9623,7 +9745,7 @@
                         <a:buNone/>
                       </a:pPr>
                       <a:r>
-                        <a:rPr lang="en-US" sz="1400" b="1" dirty="0">
+                        <a:rPr lang="en-US" sz="1300" b="1" dirty="0">
                           <a:solidFill>
                             <a:srgbClr val="FFFFFF"/>
                           </a:solidFill>
@@ -9633,7 +9755,7 @@
                         </a:rPr>
                         <a:t>Acc</a:t>
                       </a:r>
-                      <a:endParaRPr lang="en-US" sz="1400" dirty="0">
+                      <a:endParaRPr lang="en-US" sz="1300" dirty="0">
                         <a:latin typeface="Calibri" charset="0"/>
                         <a:ea typeface="Calibri" charset="0"/>
                         <a:cs typeface="Calibri" charset="0"/>
@@ -9691,7 +9813,7 @@
                         <a:buNone/>
                       </a:pPr>
                       <a:r>
-                        <a:rPr lang="en-US" sz="1400" b="1" dirty="0">
+                        <a:rPr lang="en-US" sz="1300" b="1" dirty="0">
                           <a:solidFill>
                             <a:srgbClr val="FFFFFF"/>
                           </a:solidFill>
@@ -9701,7 +9823,7 @@
                         </a:rPr>
                         <a:t>Macro-F1</a:t>
                       </a:r>
-                      <a:endParaRPr lang="en-US" sz="1400" dirty="0">
+                      <a:endParaRPr lang="en-US" sz="1300" dirty="0">
                         <a:latin typeface="Calibri" charset="0"/>
                         <a:ea typeface="Calibri" charset="0"/>
                         <a:cs typeface="Calibri" charset="0"/>
@@ -9759,7 +9881,7 @@
                         <a:buNone/>
                       </a:pPr>
                       <a:r>
-                        <a:rPr lang="en-US" sz="1400" b="1" dirty="0">
+                        <a:rPr lang="en-US" sz="1300" b="1" dirty="0">
                           <a:solidFill>
                             <a:srgbClr val="FFFFFF"/>
                           </a:solidFill>
@@ -9769,7 +9891,7 @@
                         </a:rPr>
                         <a:t>Weig-F1</a:t>
                       </a:r>
-                      <a:endParaRPr lang="en-US" sz="1400" dirty="0">
+                      <a:endParaRPr lang="en-US" sz="1300" dirty="0">
                         <a:latin typeface="Calibri" charset="0"/>
                         <a:ea typeface="Calibri" charset="0"/>
                         <a:cs typeface="Calibri" charset="0"/>
@@ -9827,7 +9949,7 @@
                         <a:buNone/>
                       </a:pPr>
                       <a:r>
-                        <a:rPr lang="en-US" sz="1400" b="1" dirty="0">
+                        <a:rPr lang="en-US" sz="1300" b="1" dirty="0">
                           <a:solidFill>
                             <a:srgbClr val="FFFFFF"/>
                           </a:solidFill>
@@ -9837,7 +9959,7 @@
                         </a:rPr>
                         <a:t>GPU (GB)</a:t>
                       </a:r>
-                      <a:endParaRPr lang="en-US" sz="1400" dirty="0">
+                      <a:endParaRPr lang="en-US" sz="1300" dirty="0">
                         <a:latin typeface="Calibri" charset="0"/>
                         <a:ea typeface="Calibri" charset="0"/>
                         <a:cs typeface="Calibri" charset="0"/>
@@ -9887,7 +10009,7 @@
                   </a:tcPr>
                 </a:tc>
               </a:tr>
-              <a:tr h="566928">
+              <a:tr h="493776">
                 <a:tc>
                   <a:txBody>
                     <a:bodyPr/>
@@ -9897,7 +10019,7 @@
                         <a:buNone/>
                       </a:pPr>
                       <a:r>
-                        <a:rPr lang="en-US" sz="1300" dirty="0">
+                        <a:rPr lang="en-US" sz="1200" dirty="0">
                           <a:solidFill>
                             <a:srgbClr val="000000"/>
                           </a:solidFill>
@@ -9907,7 +10029,7 @@
                         </a:rPr>
                         <a:t>TinyLlama-1.1B</a:t>
                       </a:r>
-                      <a:endParaRPr lang="en-US" sz="1300" dirty="0">
+                      <a:endParaRPr lang="en-US" sz="1200" dirty="0">
                         <a:latin typeface="Calibri" charset="0"/>
                         <a:ea typeface="Calibri" charset="0"/>
                         <a:cs typeface="Calibri" charset="0"/>
@@ -9965,7 +10087,7 @@
                         <a:buNone/>
                       </a:pPr>
                       <a:r>
-                        <a:rPr lang="en-US" sz="1300" dirty="0">
+                        <a:rPr lang="en-US" sz="1200" dirty="0">
                           <a:solidFill>
                             <a:srgbClr val="C0392B"/>
                           </a:solidFill>
@@ -9975,7 +10097,7 @@
                         </a:rPr>
                         <a:t>Zero-shot</a:t>
                       </a:r>
-                      <a:endParaRPr lang="en-US" sz="1300" dirty="0">
+                      <a:endParaRPr lang="en-US" sz="1200" dirty="0">
                         <a:latin typeface="Calibri" charset="0"/>
                         <a:ea typeface="Calibri" charset="0"/>
                         <a:cs typeface="Calibri" charset="0"/>
@@ -10033,7 +10155,7 @@
                         <a:buNone/>
                       </a:pPr>
                       <a:r>
-                        <a:rPr lang="en-US" sz="1300" dirty="0">
+                        <a:rPr lang="en-US" sz="1200" dirty="0">
                           <a:solidFill>
                             <a:srgbClr val="000000"/>
                           </a:solidFill>
@@ -10043,7 +10165,7 @@
                         </a:rPr>
                         <a:t>0.262</a:t>
                       </a:r>
-                      <a:endParaRPr lang="en-US" sz="1300" dirty="0">
+                      <a:endParaRPr lang="en-US" sz="1200" dirty="0">
                         <a:latin typeface="Calibri" charset="0"/>
                         <a:ea typeface="Calibri" charset="0"/>
                         <a:cs typeface="Calibri" charset="0"/>
@@ -10101,7 +10223,7 @@
                         <a:buNone/>
                       </a:pPr>
                       <a:r>
-                        <a:rPr lang="en-US" sz="1300" b="1" dirty="0">
+                        <a:rPr lang="en-US" sz="1200" b="1" dirty="0">
                           <a:solidFill>
                             <a:srgbClr val="C0392B"/>
                           </a:solidFill>
@@ -10111,7 +10233,7 @@
                         </a:rPr>
                         <a:t>0.094</a:t>
                       </a:r>
-                      <a:endParaRPr lang="en-US" sz="1300" dirty="0">
+                      <a:endParaRPr lang="en-US" sz="1200" dirty="0">
                         <a:latin typeface="Calibri" charset="0"/>
                         <a:ea typeface="Calibri" charset="0"/>
                         <a:cs typeface="Calibri" charset="0"/>
@@ -10169,7 +10291,7 @@
                         <a:buNone/>
                       </a:pPr>
                       <a:r>
-                        <a:rPr lang="en-US" sz="1300" dirty="0">
+                        <a:rPr lang="en-US" sz="1200" dirty="0">
                           <a:solidFill>
                             <a:srgbClr val="000000"/>
                           </a:solidFill>
@@ -10179,7 +10301,7 @@
                         </a:rPr>
                         <a:t>0.125</a:t>
                       </a:r>
-                      <a:endParaRPr lang="en-US" sz="1300" dirty="0">
+                      <a:endParaRPr lang="en-US" sz="1200" dirty="0">
                         <a:latin typeface="Calibri" charset="0"/>
                         <a:ea typeface="Calibri" charset="0"/>
                         <a:cs typeface="Calibri" charset="0"/>
@@ -10237,7 +10359,7 @@
                         <a:buNone/>
                       </a:pPr>
                       <a:r>
-                        <a:rPr lang="en-US" sz="1300" dirty="0">
+                        <a:rPr lang="en-US" sz="1200" dirty="0">
                           <a:solidFill>
                             <a:srgbClr val="000000"/>
                           </a:solidFill>
@@ -10247,7 +10369,7 @@
                         </a:rPr>
                         <a:t>—</a:t>
                       </a:r>
-                      <a:endParaRPr lang="en-US" sz="1300" dirty="0">
+                      <a:endParaRPr lang="en-US" sz="1200" dirty="0">
                         <a:latin typeface="Calibri" charset="0"/>
                         <a:ea typeface="Calibri" charset="0"/>
                         <a:cs typeface="Calibri" charset="0"/>
@@ -10297,7 +10419,7 @@
                   </a:tcPr>
                 </a:tc>
               </a:tr>
-              <a:tr h="566928">
+              <a:tr h="493776">
                 <a:tc>
                   <a:txBody>
                     <a:bodyPr/>
@@ -10307,7 +10429,7 @@
                         <a:buNone/>
                       </a:pPr>
                       <a:r>
-                        <a:rPr lang="en-US" sz="1300" dirty="0">
+                        <a:rPr lang="en-US" sz="1200" dirty="0">
                           <a:solidFill>
                             <a:srgbClr val="000000"/>
                           </a:solidFill>
@@ -10317,7 +10439,7 @@
                         </a:rPr>
                         <a:t>SmolLM2-360M</a:t>
                       </a:r>
-                      <a:endParaRPr lang="en-US" sz="1300" dirty="0">
+                      <a:endParaRPr lang="en-US" sz="1200" dirty="0">
                         <a:latin typeface="Calibri" charset="0"/>
                         <a:ea typeface="Calibri" charset="0"/>
                         <a:cs typeface="Calibri" charset="0"/>
@@ -10375,7 +10497,7 @@
                         <a:buNone/>
                       </a:pPr>
                       <a:r>
-                        <a:rPr lang="en-US" sz="1300" dirty="0">
+                        <a:rPr lang="en-US" sz="1200" dirty="0">
                           <a:solidFill>
                             <a:srgbClr val="000000"/>
                           </a:solidFill>
@@ -10385,7 +10507,7 @@
                         </a:rPr>
                         <a:t>QLoRA</a:t>
                       </a:r>
-                      <a:endParaRPr lang="en-US" sz="1300" dirty="0">
+                      <a:endParaRPr lang="en-US" sz="1200" dirty="0">
                         <a:latin typeface="Calibri" charset="0"/>
                         <a:ea typeface="Calibri" charset="0"/>
                         <a:cs typeface="Calibri" charset="0"/>
@@ -10443,7 +10565,7 @@
                         <a:buNone/>
                       </a:pPr>
                       <a:r>
-                        <a:rPr lang="en-US" sz="1300" dirty="0">
+                        <a:rPr lang="en-US" sz="1200" dirty="0">
                           <a:solidFill>
                             <a:srgbClr val="000000"/>
                           </a:solidFill>
@@ -10453,7 +10575,7 @@
                         </a:rPr>
                         <a:t>0.662</a:t>
                       </a:r>
-                      <a:endParaRPr lang="en-US" sz="1300" dirty="0">
+                      <a:endParaRPr lang="en-US" sz="1200" dirty="0">
                         <a:latin typeface="Calibri" charset="0"/>
                         <a:ea typeface="Calibri" charset="0"/>
                         <a:cs typeface="Calibri" charset="0"/>
@@ -10511,7 +10633,7 @@
                         <a:buNone/>
                       </a:pPr>
                       <a:r>
-                        <a:rPr lang="en-US" sz="1300" dirty="0">
+                        <a:rPr lang="en-US" sz="1200" dirty="0">
                           <a:solidFill>
                             <a:srgbClr val="000000"/>
                           </a:solidFill>
@@ -10521,7 +10643,7 @@
                         </a:rPr>
                         <a:t>0.588</a:t>
                       </a:r>
-                      <a:endParaRPr lang="en-US" sz="1300" dirty="0">
+                      <a:endParaRPr lang="en-US" sz="1200" dirty="0">
                         <a:latin typeface="Calibri" charset="0"/>
                         <a:ea typeface="Calibri" charset="0"/>
                         <a:cs typeface="Calibri" charset="0"/>
@@ -10579,7 +10701,7 @@
                         <a:buNone/>
                       </a:pPr>
                       <a:r>
-                        <a:rPr lang="en-US" sz="1300" dirty="0">
+                        <a:rPr lang="en-US" sz="1200" dirty="0">
                           <a:solidFill>
                             <a:srgbClr val="000000"/>
                           </a:solidFill>
@@ -10589,7 +10711,7 @@
                         </a:rPr>
                         <a:t>0.663</a:t>
                       </a:r>
-                      <a:endParaRPr lang="en-US" sz="1300" dirty="0">
+                      <a:endParaRPr lang="en-US" sz="1200" dirty="0">
                         <a:latin typeface="Calibri" charset="0"/>
                         <a:ea typeface="Calibri" charset="0"/>
                         <a:cs typeface="Calibri" charset="0"/>
@@ -10647,7 +10769,7 @@
                         <a:buNone/>
                       </a:pPr>
                       <a:r>
-                        <a:rPr lang="en-US" sz="1300" dirty="0">
+                        <a:rPr lang="en-US" sz="1200" dirty="0">
                           <a:solidFill>
                             <a:srgbClr val="000000"/>
                           </a:solidFill>
@@ -10657,7 +10779,7 @@
                         </a:rPr>
                         <a:t>1.81</a:t>
                       </a:r>
-                      <a:endParaRPr lang="en-US" sz="1300" dirty="0">
+                      <a:endParaRPr lang="en-US" sz="1200" dirty="0">
                         <a:latin typeface="Calibri" charset="0"/>
                         <a:ea typeface="Calibri" charset="0"/>
                         <a:cs typeface="Calibri" charset="0"/>
@@ -10707,7 +10829,7 @@
                   </a:tcPr>
                 </a:tc>
               </a:tr>
-              <a:tr h="566928">
+              <a:tr h="493776">
                 <a:tc>
                   <a:txBody>
                     <a:bodyPr/>
@@ -10717,7 +10839,7 @@
                         <a:buNone/>
                       </a:pPr>
                       <a:r>
-                        <a:rPr lang="en-US" sz="1300" b="1" dirty="0">
+                        <a:rPr lang="en-US" sz="1200" b="1" dirty="0">
                           <a:solidFill>
                             <a:srgbClr val="000000"/>
                           </a:solidFill>
@@ -10727,7 +10849,7 @@
                         </a:rPr>
                         <a:t>TinyLlama-1.1B</a:t>
                       </a:r>
-                      <a:endParaRPr lang="en-US" sz="1300" dirty="0">
+                      <a:endParaRPr lang="en-US" sz="1200" dirty="0">
                         <a:latin typeface="Calibri" charset="0"/>
                         <a:ea typeface="Calibri" charset="0"/>
                         <a:cs typeface="Calibri" charset="0"/>
@@ -10785,7 +10907,7 @@
                         <a:buNone/>
                       </a:pPr>
                       <a:r>
-                        <a:rPr lang="en-US" sz="1300" b="1" dirty="0">
+                        <a:rPr lang="en-US" sz="1200" b="1" dirty="0">
                           <a:solidFill>
                             <a:srgbClr val="000000"/>
                           </a:solidFill>
@@ -10795,7 +10917,7 @@
                         </a:rPr>
                         <a:t>QLoRA</a:t>
                       </a:r>
-                      <a:endParaRPr lang="en-US" sz="1300" dirty="0">
+                      <a:endParaRPr lang="en-US" sz="1200" dirty="0">
                         <a:latin typeface="Calibri" charset="0"/>
                         <a:ea typeface="Calibri" charset="0"/>
                         <a:cs typeface="Calibri" charset="0"/>
@@ -10853,7 +10975,7 @@
                         <a:buNone/>
                       </a:pPr>
                       <a:r>
-                        <a:rPr lang="en-US" sz="1300" b="1" dirty="0">
+                        <a:rPr lang="en-US" sz="1200" b="1" dirty="0">
                           <a:solidFill>
                             <a:srgbClr val="000000"/>
                           </a:solidFill>
@@ -10863,7 +10985,7 @@
                         </a:rPr>
                         <a:t>0.925</a:t>
                       </a:r>
-                      <a:endParaRPr lang="en-US" sz="1300" dirty="0">
+                      <a:endParaRPr lang="en-US" sz="1200" dirty="0">
                         <a:latin typeface="Calibri" charset="0"/>
                         <a:ea typeface="Calibri" charset="0"/>
                         <a:cs typeface="Calibri" charset="0"/>
@@ -10921,7 +11043,7 @@
                         <a:buNone/>
                       </a:pPr>
                       <a:r>
-                        <a:rPr lang="en-US" sz="1300" b="1" dirty="0">
+                        <a:rPr lang="en-US" sz="1200" b="1" dirty="0">
                           <a:solidFill>
                             <a:srgbClr val="000000"/>
                           </a:solidFill>
@@ -10931,7 +11053,7 @@
                         </a:rPr>
                         <a:t>0.908</a:t>
                       </a:r>
-                      <a:endParaRPr lang="en-US" sz="1300" dirty="0">
+                      <a:endParaRPr lang="en-US" sz="1200" dirty="0">
                         <a:latin typeface="Calibri" charset="0"/>
                         <a:ea typeface="Calibri" charset="0"/>
                         <a:cs typeface="Calibri" charset="0"/>
@@ -10989,7 +11111,7 @@
                         <a:buNone/>
                       </a:pPr>
                       <a:r>
-                        <a:rPr lang="en-US" sz="1300" b="1" dirty="0">
+                        <a:rPr lang="en-US" sz="1200" b="1" dirty="0">
                           <a:solidFill>
                             <a:srgbClr val="000000"/>
                           </a:solidFill>
@@ -10999,7 +11121,7 @@
                         </a:rPr>
                         <a:t>0.921</a:t>
                       </a:r>
-                      <a:endParaRPr lang="en-US" sz="1300" dirty="0">
+                      <a:endParaRPr lang="en-US" sz="1200" dirty="0">
                         <a:latin typeface="Calibri" charset="0"/>
                         <a:ea typeface="Calibri" charset="0"/>
                         <a:cs typeface="Calibri" charset="0"/>
@@ -11057,7 +11179,7 @@
                         <a:buNone/>
                       </a:pPr>
                       <a:r>
-                        <a:rPr lang="en-US" sz="1300" b="1" dirty="0">
+                        <a:rPr lang="en-US" sz="1200" b="1" dirty="0">
                           <a:solidFill>
                             <a:srgbClr val="000000"/>
                           </a:solidFill>
@@ -11067,7 +11189,7 @@
                         </a:rPr>
                         <a:t>3.29</a:t>
                       </a:r>
-                      <a:endParaRPr lang="en-US" sz="1300" dirty="0">
+                      <a:endParaRPr lang="en-US" sz="1200" dirty="0">
                         <a:latin typeface="Calibri" charset="0"/>
                         <a:ea typeface="Calibri" charset="0"/>
                         <a:cs typeface="Calibri" charset="0"/>
@@ -11117,7 +11239,7 @@
                   </a:tcPr>
                 </a:tc>
               </a:tr>
-              <a:tr h="566928">
+              <a:tr h="493776">
                 <a:tc>
                   <a:txBody>
                     <a:bodyPr/>
@@ -11127,7 +11249,7 @@
                         <a:buNone/>
                       </a:pPr>
                       <a:r>
-                        <a:rPr lang="en-US" sz="1300" b="1" dirty="0">
+                        <a:rPr lang="en-US" sz="1200" b="1" dirty="0">
                           <a:solidFill>
                             <a:srgbClr val="000000"/>
                           </a:solidFill>
@@ -11137,7 +11259,143 @@
                         </a:rPr>
                         <a:t>Qwen2.5-1.5B</a:t>
                       </a:r>
-                      <a:endParaRPr lang="en-US" sz="1300" dirty="0">
+                      <a:endParaRPr lang="en-US" sz="1200" dirty="0">
+                        <a:latin typeface="Calibri" charset="0"/>
+                        <a:ea typeface="Calibri" charset="0"/>
+                        <a:cs typeface="Calibri" charset="0"/>
+                      </a:endParaRPr>
+                    </a:p>
+                  </a:txBody>
+                  <a:tcPr marL="91440" marR="91440" marT="45720" marB="45720" anchor="ctr">
+                    <a:lnL w="12700" cap="flat" cmpd="sng" algn="ctr">
+                      <a:solidFill>
+                        <a:srgbClr val="D9E1E8"/>
+                      </a:solidFill>
+                      <a:prstDash val="solid"/>
+                      <a:round/>
+                      <a:headEnd type="none" w="med" len="med"/>
+                      <a:tailEnd type="none" w="med" len="med"/>
+                    </a:lnL>
+                    <a:lnR w="12700" cap="flat" cmpd="sng" algn="ctr">
+                      <a:solidFill>
+                        <a:srgbClr val="D9E1E8"/>
+                      </a:solidFill>
+                      <a:prstDash val="solid"/>
+                      <a:round/>
+                      <a:headEnd type="none" w="med" len="med"/>
+                      <a:tailEnd type="none" w="med" len="med"/>
+                    </a:lnR>
+                    <a:lnT w="12700" cap="flat" cmpd="sng" algn="ctr">
+                      <a:solidFill>
+                        <a:srgbClr val="D9E1E8"/>
+                      </a:solidFill>
+                      <a:prstDash val="solid"/>
+                      <a:round/>
+                      <a:headEnd type="none" w="med" len="med"/>
+                      <a:tailEnd type="none" w="med" len="med"/>
+                    </a:lnT>
+                    <a:lnB w="12700" cap="flat" cmpd="sng" algn="ctr">
+                      <a:solidFill>
+                        <a:srgbClr val="D9E1E8"/>
+                      </a:solidFill>
+                      <a:prstDash val="solid"/>
+                      <a:round/>
+                      <a:headEnd type="none" w="med" len="med"/>
+                      <a:tailEnd type="none" w="med" len="med"/>
+                    </a:lnB>
+                    <a:solidFill>
+                      <a:srgbClr val="E2EFDA"/>
+                    </a:solidFill>
+                  </a:tcPr>
+                </a:tc>
+                <a:tc>
+                  <a:txBody>
+                    <a:bodyPr/>
+                    <a:lstStyle/>
+                    <a:p>
+                      <a:pPr algn="ctr" indent="0" marL="0">
+                        <a:buNone/>
+                      </a:pPr>
+                      <a:r>
+                        <a:rPr lang="en-US" sz="1200" b="1" dirty="0">
+                          <a:solidFill>
+                            <a:srgbClr val="000000"/>
+                          </a:solidFill>
+                          <a:latin typeface="Calibri" pitchFamily="34" charset="0"/>
+                          <a:ea typeface="Calibri" pitchFamily="34" charset="-122"/>
+                          <a:cs typeface="Calibri" pitchFamily="34" charset="-120"/>
+                        </a:rPr>
+                        <a:t>QLoRA</a:t>
+                      </a:r>
+                      <a:endParaRPr lang="en-US" sz="1200" dirty="0">
+                        <a:latin typeface="Calibri" charset="0"/>
+                        <a:ea typeface="Calibri" charset="0"/>
+                        <a:cs typeface="Calibri" charset="0"/>
+                      </a:endParaRPr>
+                    </a:p>
+                  </a:txBody>
+                  <a:tcPr marL="91440" marR="91440" marT="45720" marB="45720" anchor="ctr">
+                    <a:lnL w="12700" cap="flat" cmpd="sng" algn="ctr">
+                      <a:solidFill>
+                        <a:srgbClr val="D9E1E8"/>
+                      </a:solidFill>
+                      <a:prstDash val="solid"/>
+                      <a:round/>
+                      <a:headEnd type="none" w="med" len="med"/>
+                      <a:tailEnd type="none" w="med" len="med"/>
+                    </a:lnL>
+                    <a:lnR w="12700" cap="flat" cmpd="sng" algn="ctr">
+                      <a:solidFill>
+                        <a:srgbClr val="D9E1E8"/>
+                      </a:solidFill>
+                      <a:prstDash val="solid"/>
+                      <a:round/>
+                      <a:headEnd type="none" w="med" len="med"/>
+                      <a:tailEnd type="none" w="med" len="med"/>
+                    </a:lnR>
+                    <a:lnT w="12700" cap="flat" cmpd="sng" algn="ctr">
+                      <a:solidFill>
+                        <a:srgbClr val="D9E1E8"/>
+                      </a:solidFill>
+                      <a:prstDash val="solid"/>
+                      <a:round/>
+                      <a:headEnd type="none" w="med" len="med"/>
+                      <a:tailEnd type="none" w="med" len="med"/>
+                    </a:lnT>
+                    <a:lnB w="12700" cap="flat" cmpd="sng" algn="ctr">
+                      <a:solidFill>
+                        <a:srgbClr val="D9E1E8"/>
+                      </a:solidFill>
+                      <a:prstDash val="solid"/>
+                      <a:round/>
+                      <a:headEnd type="none" w="med" len="med"/>
+                      <a:tailEnd type="none" w="med" len="med"/>
+                    </a:lnB>
+                    <a:solidFill>
+                      <a:srgbClr val="E2EFDA"/>
+                    </a:solidFill>
+                  </a:tcPr>
+                </a:tc>
+                <a:tc>
+                  <a:txBody>
+                    <a:bodyPr/>
+                    <a:lstStyle/>
+                    <a:p>
+                      <a:pPr algn="ctr" indent="0" marL="0">
+                        <a:buNone/>
+                      </a:pPr>
+                      <a:r>
+                        <a:rPr lang="en-US" sz="1200" b="1" dirty="0">
+                          <a:solidFill>
+                            <a:srgbClr val="000000"/>
+                          </a:solidFill>
+                          <a:latin typeface="Calibri" pitchFamily="34" charset="0"/>
+                          <a:ea typeface="Calibri" pitchFamily="34" charset="-122"/>
+                          <a:cs typeface="Calibri" pitchFamily="34" charset="-120"/>
+                        </a:rPr>
+                        <a:t>0.925</a:t>
+                      </a:r>
+                      <a:endParaRPr lang="en-US" sz="1200" dirty="0">
                         <a:latin typeface="Calibri" charset="0"/>
                         <a:ea typeface="Calibri" charset="0"/>
                         <a:cs typeface="Calibri" charset="0"/>
@@ -11197,13 +11455,13 @@
                       <a:r>
                         <a:rPr lang="en-US" sz="1300" b="1" dirty="0">
                           <a:solidFill>
-                            <a:srgbClr val="000000"/>
+                            <a:srgbClr val="2E7D32"/>
                           </a:solidFill>
                           <a:latin typeface="Calibri" pitchFamily="34" charset="0"/>
                           <a:ea typeface="Calibri" pitchFamily="34" charset="-122"/>
                           <a:cs typeface="Calibri" pitchFamily="34" charset="-120"/>
                         </a:rPr>
-                        <a:t>QLoRA</a:t>
+                        <a:t>0.914</a:t>
                       </a:r>
                       <a:endParaRPr lang="en-US" sz="1300" dirty="0">
                         <a:latin typeface="Calibri" charset="0"/>
@@ -11263,7 +11521,7 @@
                         <a:buNone/>
                       </a:pPr>
                       <a:r>
-                        <a:rPr lang="en-US" sz="1300" b="1" dirty="0">
+                        <a:rPr lang="en-US" sz="1200" b="1" dirty="0">
                           <a:solidFill>
                             <a:srgbClr val="000000"/>
                           </a:solidFill>
@@ -11273,7 +11531,7 @@
                         </a:rPr>
                         <a:t>0.925</a:t>
                       </a:r>
-                      <a:endParaRPr lang="en-US" sz="1300" dirty="0">
+                      <a:endParaRPr lang="en-US" sz="1200" dirty="0">
                         <a:latin typeface="Calibri" charset="0"/>
                         <a:ea typeface="Calibri" charset="0"/>
                         <a:cs typeface="Calibri" charset="0"/>
@@ -11331,17 +11589,17 @@
                         <a:buNone/>
                       </a:pPr>
                       <a:r>
-                        <a:rPr lang="en-US" sz="1400" b="1" dirty="0">
+                        <a:rPr lang="en-US" sz="1200" dirty="0">
                           <a:solidFill>
-                            <a:srgbClr val="2E7D32"/>
+                            <a:srgbClr val="000000"/>
                           </a:solidFill>
                           <a:latin typeface="Calibri" pitchFamily="34" charset="0"/>
                           <a:ea typeface="Calibri" pitchFamily="34" charset="-122"/>
                           <a:cs typeface="Calibri" pitchFamily="34" charset="-120"/>
                         </a:rPr>
-                        <a:t>0.914</a:t>
+                        <a:t>5.07</a:t>
                       </a:r>
-                      <a:endParaRPr lang="en-US" sz="1400" dirty="0">
+                      <a:endParaRPr lang="en-US" sz="1200" dirty="0">
                         <a:latin typeface="Calibri" charset="0"/>
                         <a:ea typeface="Calibri" charset="0"/>
                         <a:cs typeface="Calibri" charset="0"/>
@@ -11387,6 +11645,76 @@
                     </a:lnB>
                     <a:solidFill>
                       <a:srgbClr val="E2EFDA"/>
+                    </a:solidFill>
+                  </a:tcPr>
+                </a:tc>
+              </a:tr>
+              <a:tr h="493776">
+                <a:tc>
+                  <a:txBody>
+                    <a:bodyPr/>
+                    <a:lstStyle/>
+                    <a:p>
+                      <a:pPr indent="0" marL="0">
+                        <a:buNone/>
+                      </a:pPr>
+                      <a:r>
+                        <a:rPr lang="en-US" sz="1200" dirty="0">
+                          <a:solidFill>
+                            <a:srgbClr val="000000"/>
+                          </a:solidFill>
+                          <a:latin typeface="Calibri" pitchFamily="34" charset="0"/>
+                          <a:ea typeface="Calibri" pitchFamily="34" charset="-122"/>
+                          <a:cs typeface="Calibri" pitchFamily="34" charset="-120"/>
+                        </a:rPr>
+                        <a:t>Gemma-4-E2B (5B)</a:t>
+                      </a:r>
+                      <a:endParaRPr lang="en-US" sz="1200" dirty="0">
+                        <a:latin typeface="Calibri" charset="0"/>
+                        <a:ea typeface="Calibri" charset="0"/>
+                        <a:cs typeface="Calibri" charset="0"/>
+                      </a:endParaRPr>
+                    </a:p>
+                  </a:txBody>
+                  <a:tcPr marL="91440" marR="91440" marT="45720" marB="45720" anchor="ctr">
+                    <a:lnL w="12700" cap="flat" cmpd="sng" algn="ctr">
+                      <a:solidFill>
+                        <a:srgbClr val="D9E1E8"/>
+                      </a:solidFill>
+                      <a:prstDash val="solid"/>
+                      <a:round/>
+                      <a:headEnd type="none" w="med" len="med"/>
+                      <a:tailEnd type="none" w="med" len="med"/>
+                    </a:lnL>
+                    <a:lnR w="12700" cap="flat" cmpd="sng" algn="ctr">
+                      <a:solidFill>
+                        <a:srgbClr val="D9E1E8"/>
+                      </a:solidFill>
+                      <a:prstDash val="solid"/>
+                      <a:round/>
+                      <a:headEnd type="none" w="med" len="med"/>
+                      <a:tailEnd type="none" w="med" len="med"/>
+                    </a:lnR>
+                    <a:lnT w="12700" cap="flat" cmpd="sng" algn="ctr">
+                      <a:solidFill>
+                        <a:srgbClr val="D9E1E8"/>
+                      </a:solidFill>
+                      <a:prstDash val="solid"/>
+                      <a:round/>
+                      <a:headEnd type="none" w="med" len="med"/>
+                      <a:tailEnd type="none" w="med" len="med"/>
+                    </a:lnT>
+                    <a:lnB w="12700" cap="flat" cmpd="sng" algn="ctr">
+                      <a:solidFill>
+                        <a:srgbClr val="D9E1E8"/>
+                      </a:solidFill>
+                      <a:prstDash val="solid"/>
+                      <a:round/>
+                      <a:headEnd type="none" w="med" len="med"/>
+                      <a:tailEnd type="none" w="med" len="med"/>
+                    </a:lnB>
+                    <a:solidFill>
+                      <a:srgbClr val="FFFFFF"/>
                     </a:solidFill>
                   </a:tcPr>
                 </a:tc>
@@ -11399,7 +11727,7 @@
                         <a:buNone/>
                       </a:pPr>
                       <a:r>
-                        <a:rPr lang="en-US" sz="1300" b="1" dirty="0">
+                        <a:rPr lang="en-US" sz="1200" dirty="0">
                           <a:solidFill>
                             <a:srgbClr val="000000"/>
                           </a:solidFill>
@@ -11407,9 +11735,9 @@
                           <a:ea typeface="Calibri" pitchFamily="34" charset="-122"/>
                           <a:cs typeface="Calibri" pitchFamily="34" charset="-120"/>
                         </a:rPr>
-                        <a:t>0.925</a:t>
+                        <a:t>QLoRA (Unsloth)</a:t>
                       </a:r>
-                      <a:endParaRPr lang="en-US" sz="1300" dirty="0">
+                      <a:endParaRPr lang="en-US" sz="1200" dirty="0">
                         <a:latin typeface="Calibri" charset="0"/>
                         <a:ea typeface="Calibri" charset="0"/>
                         <a:cs typeface="Calibri" charset="0"/>
@@ -11454,7 +11782,7 @@
                       <a:tailEnd type="none" w="med" len="med"/>
                     </a:lnB>
                     <a:solidFill>
-                      <a:srgbClr val="E2EFDA"/>
+                      <a:srgbClr val="FFFFFF"/>
                     </a:solidFill>
                   </a:tcPr>
                 </a:tc>
@@ -11467,7 +11795,7 @@
                         <a:buNone/>
                       </a:pPr>
                       <a:r>
-                        <a:rPr lang="en-US" sz="1300" dirty="0">
+                        <a:rPr lang="en-US" sz="1200" dirty="0">
                           <a:solidFill>
                             <a:srgbClr val="000000"/>
                           </a:solidFill>
@@ -11475,9 +11803,9 @@
                           <a:ea typeface="Calibri" pitchFamily="34" charset="-122"/>
                           <a:cs typeface="Calibri" pitchFamily="34" charset="-120"/>
                         </a:rPr>
-                        <a:t>5.07</a:t>
+                        <a:t>0.788</a:t>
                       </a:r>
-                      <a:endParaRPr lang="en-US" sz="1300" dirty="0">
+                      <a:endParaRPr lang="en-US" sz="1200" dirty="0">
                         <a:latin typeface="Calibri" charset="0"/>
                         <a:ea typeface="Calibri" charset="0"/>
                         <a:cs typeface="Calibri" charset="0"/>
@@ -11522,7 +11850,211 @@
                       <a:tailEnd type="none" w="med" len="med"/>
                     </a:lnB>
                     <a:solidFill>
-                      <a:srgbClr val="E2EFDA"/>
+                      <a:srgbClr val="FFFFFF"/>
+                    </a:solidFill>
+                  </a:tcPr>
+                </a:tc>
+                <a:tc>
+                  <a:txBody>
+                    <a:bodyPr/>
+                    <a:lstStyle/>
+                    <a:p>
+                      <a:pPr algn="ctr" indent="0" marL="0">
+                        <a:buNone/>
+                      </a:pPr>
+                      <a:r>
+                        <a:rPr lang="en-US" sz="1200" dirty="0">
+                          <a:solidFill>
+                            <a:srgbClr val="C0392B"/>
+                          </a:solidFill>
+                          <a:latin typeface="Calibri" pitchFamily="34" charset="0"/>
+                          <a:ea typeface="Calibri" pitchFamily="34" charset="-122"/>
+                          <a:cs typeface="Calibri" pitchFamily="34" charset="-120"/>
+                        </a:rPr>
+                        <a:t>0.740</a:t>
+                      </a:r>
+                      <a:endParaRPr lang="en-US" sz="1200" dirty="0">
+                        <a:latin typeface="Calibri" charset="0"/>
+                        <a:ea typeface="Calibri" charset="0"/>
+                        <a:cs typeface="Calibri" charset="0"/>
+                      </a:endParaRPr>
+                    </a:p>
+                  </a:txBody>
+                  <a:tcPr marL="91440" marR="91440" marT="45720" marB="45720" anchor="ctr">
+                    <a:lnL w="12700" cap="flat" cmpd="sng" algn="ctr">
+                      <a:solidFill>
+                        <a:srgbClr val="D9E1E8"/>
+                      </a:solidFill>
+                      <a:prstDash val="solid"/>
+                      <a:round/>
+                      <a:headEnd type="none" w="med" len="med"/>
+                      <a:tailEnd type="none" w="med" len="med"/>
+                    </a:lnL>
+                    <a:lnR w="12700" cap="flat" cmpd="sng" algn="ctr">
+                      <a:solidFill>
+                        <a:srgbClr val="D9E1E8"/>
+                      </a:solidFill>
+                      <a:prstDash val="solid"/>
+                      <a:round/>
+                      <a:headEnd type="none" w="med" len="med"/>
+                      <a:tailEnd type="none" w="med" len="med"/>
+                    </a:lnR>
+                    <a:lnT w="12700" cap="flat" cmpd="sng" algn="ctr">
+                      <a:solidFill>
+                        <a:srgbClr val="D9E1E8"/>
+                      </a:solidFill>
+                      <a:prstDash val="solid"/>
+                      <a:round/>
+                      <a:headEnd type="none" w="med" len="med"/>
+                      <a:tailEnd type="none" w="med" len="med"/>
+                    </a:lnT>
+                    <a:lnB w="12700" cap="flat" cmpd="sng" algn="ctr">
+                      <a:solidFill>
+                        <a:srgbClr val="D9E1E8"/>
+                      </a:solidFill>
+                      <a:prstDash val="solid"/>
+                      <a:round/>
+                      <a:headEnd type="none" w="med" len="med"/>
+                      <a:tailEnd type="none" w="med" len="med"/>
+                    </a:lnB>
+                    <a:solidFill>
+                      <a:srgbClr val="FFFFFF"/>
+                    </a:solidFill>
+                  </a:tcPr>
+                </a:tc>
+                <a:tc>
+                  <a:txBody>
+                    <a:bodyPr/>
+                    <a:lstStyle/>
+                    <a:p>
+                      <a:pPr algn="ctr" indent="0" marL="0">
+                        <a:buNone/>
+                      </a:pPr>
+                      <a:r>
+                        <a:rPr lang="en-US" sz="1200" dirty="0">
+                          <a:solidFill>
+                            <a:srgbClr val="000000"/>
+                          </a:solidFill>
+                          <a:latin typeface="Calibri" pitchFamily="34" charset="0"/>
+                          <a:ea typeface="Calibri" pitchFamily="34" charset="-122"/>
+                          <a:cs typeface="Calibri" pitchFamily="34" charset="-120"/>
+                        </a:rPr>
+                        <a:t>0.765</a:t>
+                      </a:r>
+                      <a:endParaRPr lang="en-US" sz="1200" dirty="0">
+                        <a:latin typeface="Calibri" charset="0"/>
+                        <a:ea typeface="Calibri" charset="0"/>
+                        <a:cs typeface="Calibri" charset="0"/>
+                      </a:endParaRPr>
+                    </a:p>
+                  </a:txBody>
+                  <a:tcPr marL="91440" marR="91440" marT="45720" marB="45720" anchor="ctr">
+                    <a:lnL w="12700" cap="flat" cmpd="sng" algn="ctr">
+                      <a:solidFill>
+                        <a:srgbClr val="D9E1E8"/>
+                      </a:solidFill>
+                      <a:prstDash val="solid"/>
+                      <a:round/>
+                      <a:headEnd type="none" w="med" len="med"/>
+                      <a:tailEnd type="none" w="med" len="med"/>
+                    </a:lnL>
+                    <a:lnR w="12700" cap="flat" cmpd="sng" algn="ctr">
+                      <a:solidFill>
+                        <a:srgbClr val="D9E1E8"/>
+                      </a:solidFill>
+                      <a:prstDash val="solid"/>
+                      <a:round/>
+                      <a:headEnd type="none" w="med" len="med"/>
+                      <a:tailEnd type="none" w="med" len="med"/>
+                    </a:lnR>
+                    <a:lnT w="12700" cap="flat" cmpd="sng" algn="ctr">
+                      <a:solidFill>
+                        <a:srgbClr val="D9E1E8"/>
+                      </a:solidFill>
+                      <a:prstDash val="solid"/>
+                      <a:round/>
+                      <a:headEnd type="none" w="med" len="med"/>
+                      <a:tailEnd type="none" w="med" len="med"/>
+                    </a:lnT>
+                    <a:lnB w="12700" cap="flat" cmpd="sng" algn="ctr">
+                      <a:solidFill>
+                        <a:srgbClr val="D9E1E8"/>
+                      </a:solidFill>
+                      <a:prstDash val="solid"/>
+                      <a:round/>
+                      <a:headEnd type="none" w="med" len="med"/>
+                      <a:tailEnd type="none" w="med" len="med"/>
+                    </a:lnB>
+                    <a:solidFill>
+                      <a:srgbClr val="FFFFFF"/>
+                    </a:solidFill>
+                  </a:tcPr>
+                </a:tc>
+                <a:tc>
+                  <a:txBody>
+                    <a:bodyPr/>
+                    <a:lstStyle/>
+                    <a:p>
+                      <a:pPr algn="ctr" indent="0" marL="0">
+                        <a:buNone/>
+                      </a:pPr>
+                      <a:r>
+                        <a:rPr lang="en-US" sz="1200" dirty="0">
+                          <a:solidFill>
+                            <a:srgbClr val="000000"/>
+                          </a:solidFill>
+                          <a:latin typeface="Calibri" pitchFamily="34" charset="0"/>
+                          <a:ea typeface="Calibri" pitchFamily="34" charset="-122"/>
+                          <a:cs typeface="Calibri" pitchFamily="34" charset="-120"/>
+                        </a:rPr>
+                        <a:t>9.73</a:t>
+                      </a:r>
+                      <a:endParaRPr lang="en-US" sz="1200" dirty="0">
+                        <a:latin typeface="Calibri" charset="0"/>
+                        <a:ea typeface="Calibri" charset="0"/>
+                        <a:cs typeface="Calibri" charset="0"/>
+                      </a:endParaRPr>
+                    </a:p>
+                  </a:txBody>
+                  <a:tcPr marL="91440" marR="91440" marT="45720" marB="45720" anchor="ctr">
+                    <a:lnL w="12700" cap="flat" cmpd="sng" algn="ctr">
+                      <a:solidFill>
+                        <a:srgbClr val="D9E1E8"/>
+                      </a:solidFill>
+                      <a:prstDash val="solid"/>
+                      <a:round/>
+                      <a:headEnd type="none" w="med" len="med"/>
+                      <a:tailEnd type="none" w="med" len="med"/>
+                    </a:lnL>
+                    <a:lnR w="12700" cap="flat" cmpd="sng" algn="ctr">
+                      <a:solidFill>
+                        <a:srgbClr val="D9E1E8"/>
+                      </a:solidFill>
+                      <a:prstDash val="solid"/>
+                      <a:round/>
+                      <a:headEnd type="none" w="med" len="med"/>
+                      <a:tailEnd type="none" w="med" len="med"/>
+                    </a:lnR>
+                    <a:lnT w="12700" cap="flat" cmpd="sng" algn="ctr">
+                      <a:solidFill>
+                        <a:srgbClr val="D9E1E8"/>
+                      </a:solidFill>
+                      <a:prstDash val="solid"/>
+                      <a:round/>
+                      <a:headEnd type="none" w="med" len="med"/>
+                      <a:tailEnd type="none" w="med" len="med"/>
+                    </a:lnT>
+                    <a:lnB w="12700" cap="flat" cmpd="sng" algn="ctr">
+                      <a:solidFill>
+                        <a:srgbClr val="D9E1E8"/>
+                      </a:solidFill>
+                      <a:prstDash val="solid"/>
+                      <a:round/>
+                      <a:headEnd type="none" w="med" len="med"/>
+                      <a:tailEnd type="none" w="med" len="med"/>
+                    </a:lnB>
+                    <a:solidFill>
+                      <a:srgbClr val="FFFFFF"/>
                     </a:solidFill>
                   </a:tcPr>
                 </a:tc>
@@ -11539,12 +12071,12 @@
         </p:nvSpPr>
         <p:spPr>
           <a:xfrm>
-            <a:off x="640080" y="5349240"/>
-            <a:ext cx="10972800" cy="868680"/>
+            <a:off x="640080" y="5166360"/>
+            <a:ext cx="10972800" cy="1051560"/>
           </a:xfrm>
           <a:prstGeom prst="roundRect">
             <a:avLst>
-              <a:gd name="adj" fmla="val 6316"/>
+              <a:gd name="adj" fmla="val 5217"/>
             </a:avLst>
           </a:prstGeom>
           <a:solidFill>
@@ -11566,8 +12098,8 @@
         </p:nvSpPr>
         <p:spPr>
           <a:xfrm>
-            <a:off x="868680" y="5440680"/>
-            <a:ext cx="10515600" cy="685800"/>
+            <a:off x="868680" y="5257800"/>
+            <a:ext cx="10515600" cy="914400"/>
           </a:xfrm>
           <a:prstGeom prst="rect">
             <a:avLst/>
@@ -11597,7 +12129,7 @@
               <a:buNone/>
             </a:pPr>
             <a:r>
-              <a:rPr lang="en-US" sz="1400" dirty="0">
+              <a:rPr lang="en-US" sz="1300" dirty="0">
                 <a:solidFill>
                   <a:srgbClr val="1B2733"/>
                 </a:solidFill>
@@ -11605,7 +12137,35 @@
                 <a:ea typeface="Calibri" pitchFamily="34" charset="-122"/>
                 <a:cs typeface="Calibri" pitchFamily="34" charset="-120"/>
               </a:rPr>
-              <a:t>Zero-shot görevde çöküyor (Macro-F1 0.094) → QLoRA çarpıcı iyileşme sağlıyor (0.914). Tüm fine-tuned modeller 0/80 ayrıştırma hatası.</a:t>
+              <a:t>Zero-shot çöküyor (0.094) → QLoRA çarpıcı iyileşme (0.914).  </a:t>
+            </a:r>
+            <a:pPr indent="0" marL="0">
+              <a:buNone/>
+            </a:pPr>
+            <a:r>
+              <a:rPr lang="en-US" sz="1300" b="1" dirty="0">
+                <a:solidFill>
+                  <a:srgbClr val="C0392B"/>
+                </a:solidFill>
+                <a:latin typeface="Calibri" pitchFamily="34" charset="0"/>
+                <a:ea typeface="Calibri" pitchFamily="34" charset="-122"/>
+                <a:cs typeface="Calibri" pitchFamily="34" charset="-120"/>
+              </a:rPr>
+              <a:t>Sürpriz: </a:t>
+            </a:r>
+            <a:pPr indent="0" marL="0">
+              <a:buNone/>
+            </a:pPr>
+            <a:r>
+              <a:rPr lang="en-US" sz="1300" dirty="0">
+                <a:solidFill>
+                  <a:srgbClr val="1B2733"/>
+                </a:solidFill>
+                <a:latin typeface="Calibri" pitchFamily="34" charset="0"/>
+                <a:ea typeface="Calibri" pitchFamily="34" charset="-122"/>
+                <a:cs typeface="Calibri" pitchFamily="34" charset="-120"/>
+              </a:rPr>
+              <a:t>en büyük model Gemma-4 (5B) en küçük modellerin gerisinde — küçük veride aşırı uydurma. Tüm fine-tuned modeller 0/80 parse hatası.</a:t>
             </a:r>
             <a:endParaRPr lang="en-US" sz="1400" dirty="0"/>
           </a:p>
@@ -11989,8 +12549,8 @@
         </p:nvSpPr>
         <p:spPr>
           <a:xfrm>
-            <a:off x="8732520" y="2377440"/>
-            <a:ext cx="2697480" cy="3200400"/>
+            <a:off x="8732520" y="2331720"/>
+            <a:ext cx="2697480" cy="3291840"/>
           </a:xfrm>
           <a:prstGeom prst="rect">
             <a:avLst/>
@@ -12004,13 +12564,13 @@
           <a:p>
             <a:pPr marL="152400" indent="-152400">
               <a:spcAft>
-                <a:spcPts val="1200"/>
+                <a:spcPts val="1000"/>
               </a:spcAft>
               <a:buSzPct val="100000"/>
               <a:buChar char="•"/>
             </a:pPr>
             <a:r>
-              <a:rPr lang="en-US" sz="1250" dirty="0">
+              <a:rPr lang="en-US" sz="1200" dirty="0">
                 <a:solidFill>
                   <a:srgbClr val="FFFFFF"/>
                 </a:solidFill>
@@ -12018,20 +12578,20 @@
                 <a:ea typeface="Calibri" pitchFamily="34" charset="-122"/>
                 <a:cs typeface="Calibri" pitchFamily="34" charset="-120"/>
               </a:rPr>
-              <a:t>SmolLM2 azınlık sınıflarda çöküyor (Kayıp 0.38, Bağış 0.42).</a:t>
+              <a:t>TinyLlama &amp; Qwen tüm sınıflarda güçlü.</a:t>
             </a:r>
-            <a:endParaRPr lang="en-US" sz="1250" dirty="0"/>
+            <a:endParaRPr lang="en-US" sz="1200" dirty="0"/>
           </a:p>
           <a:p>
             <a:pPr marL="152400" indent="-152400">
               <a:spcAft>
-                <a:spcPts val="1200"/>
+                <a:spcPts val="1000"/>
               </a:spcAft>
               <a:buSzPct val="100000"/>
               <a:buChar char="•"/>
             </a:pPr>
             <a:r>
-              <a:rPr lang="en-US" sz="1250" dirty="0">
+              <a:rPr lang="en-US" sz="1200" dirty="0">
                 <a:solidFill>
                   <a:srgbClr val="FFFFFF"/>
                 </a:solidFill>
@@ -12039,17 +12599,20 @@
                 <a:ea typeface="Calibri" pitchFamily="34" charset="-122"/>
                 <a:cs typeface="Calibri" pitchFamily="34" charset="-120"/>
               </a:rPr>
-              <a:t>TinyLlama &amp; Qwen azınlık sınıfları çözüyor.</a:t>
+              <a:t>SmolLM2 azınlık sınıflarda çöküyor.</a:t>
             </a:r>
-            <a:endParaRPr lang="en-US" sz="1250" dirty="0"/>
+            <a:endParaRPr lang="en-US" sz="1200" dirty="0"/>
           </a:p>
           <a:p>
             <a:pPr marL="152400" indent="-152400">
+              <a:spcAft>
+                <a:spcPts val="1000"/>
+              </a:spcAft>
               <a:buSzPct val="100000"/>
               <a:buChar char="•"/>
             </a:pPr>
             <a:r>
-              <a:rPr lang="en-US" sz="1250" b="1" dirty="0">
+              <a:rPr lang="en-US" sz="1200" dirty="0">
                 <a:solidFill>
                   <a:srgbClr val="FFD9B3"/>
                 </a:solidFill>
@@ -12057,9 +12620,27 @@
                 <a:ea typeface="Calibri" pitchFamily="34" charset="-122"/>
                 <a:cs typeface="Calibri" pitchFamily="34" charset="-120"/>
               </a:rPr>
-              <a:t>Bağış her modelde en zayıf — Yardım ile örtüşme.</a:t>
+              <a:t>Gemma-4 Kayıp'ta zayıf (recall 0.30) — overfit etkisi.</a:t>
             </a:r>
-            <a:endParaRPr lang="en-US" sz="1250" dirty="0"/>
+            <a:endParaRPr lang="en-US" sz="1200" dirty="0"/>
+          </a:p>
+          <a:p>
+            <a:pPr marL="152400" indent="-152400">
+              <a:buSzPct val="100000"/>
+              <a:buChar char="•"/>
+            </a:pPr>
+            <a:r>
+              <a:rPr lang="en-US" sz="1200" b="1" dirty="0">
+                <a:solidFill>
+                  <a:srgbClr val="FFD9B3"/>
+                </a:solidFill>
+                <a:latin typeface="Calibri" pitchFamily="34" charset="0"/>
+                <a:ea typeface="Calibri" pitchFamily="34" charset="-122"/>
+                <a:cs typeface="Calibri" pitchFamily="34" charset="-120"/>
+              </a:rPr>
+              <a:t>Bağış 3 modelde en zayıf — Yardım ile örtüşme.</a:t>
+            </a:r>
+            <a:endParaRPr lang="en-US" sz="1200" dirty="0"/>
           </a:p>
         </p:txBody>
       </p:sp>
@@ -12408,20 +12989,20 @@
                 <a:ea typeface="Calibri" pitchFamily="34" charset="-122"/>
                 <a:cs typeface="Calibri" pitchFamily="34" charset="-120"/>
               </a:rPr>
-              <a:t>Büyük sıçrama, sonra doygunluk</a:t>
+              <a:t>Bigger ≠ better (küçük veride)</a:t>
             </a:r>
             <a:endParaRPr lang="en-US" sz="1700" dirty="0"/>
           </a:p>
           <a:p>
             <a:pPr marL="177800" indent="-177800">
               <a:spcAft>
-                <a:spcPts val="800"/>
+                <a:spcPts val="600"/>
               </a:spcAft>
               <a:buSzPct val="100000"/>
               <a:buChar char="•"/>
             </a:pPr>
             <a:r>
-              <a:rPr lang="en-US" sz="1400" dirty="0">
+              <a:rPr lang="en-US" sz="1300" dirty="0">
                 <a:solidFill>
                   <a:srgbClr val="1B2733"/>
                 </a:solidFill>
@@ -12429,20 +13010,20 @@
                 <a:ea typeface="Calibri" pitchFamily="34" charset="-122"/>
                 <a:cs typeface="Calibri" pitchFamily="34" charset="-120"/>
               </a:rPr>
-              <a:t>360M → 1.1B: +0.32 Macro-F1 (büyük)</a:t>
+              <a:t>360M → 1.1B: +0.32 (büyük sıçrama)</a:t>
             </a:r>
             <a:endParaRPr lang="en-US" sz="1700" dirty="0"/>
           </a:p>
           <a:p>
             <a:pPr marL="177800" indent="-177800">
               <a:spcAft>
-                <a:spcPts val="800"/>
+                <a:spcPts val="600"/>
               </a:spcAft>
               <a:buSzPct val="100000"/>
               <a:buChar char="•"/>
             </a:pPr>
             <a:r>
-              <a:rPr lang="en-US" sz="1400" dirty="0">
+              <a:rPr lang="en-US" sz="1300" dirty="0">
                 <a:solidFill>
                   <a:srgbClr val="1B2733"/>
                 </a:solidFill>
@@ -12450,20 +13031,37 @@
                 <a:ea typeface="Calibri" pitchFamily="34" charset="-122"/>
                 <a:cs typeface="Calibri" pitchFamily="34" charset="-120"/>
               </a:rPr>
-              <a:t>1.1B → 1.5B: +0.006 (marjinal)</a:t>
+              <a:t>1.1B → 1.5B: +0.006 (doygunluk)</a:t>
             </a:r>
             <a:endParaRPr lang="en-US" sz="1700" dirty="0"/>
           </a:p>
           <a:p>
             <a:pPr marL="177800" indent="-177800">
               <a:spcAft>
-                <a:spcPts val="1600"/>
+                <a:spcPts val="1400"/>
               </a:spcAft>
               <a:buSzPct val="100000"/>
               <a:buChar char="•"/>
             </a:pPr>
             <a:r>
-              <a:rPr lang="en-US" sz="1400" b="1" dirty="0">
+              <a:rPr lang="en-US" sz="1300" b="1" dirty="0">
+                <a:solidFill>
+                  <a:srgbClr val="C0392B"/>
+                </a:solidFill>
+                <a:latin typeface="Calibri" pitchFamily="34" charset="0"/>
+                <a:ea typeface="Calibri" pitchFamily="34" charset="-122"/>
+                <a:cs typeface="Calibri" pitchFamily="34" charset="-120"/>
+              </a:rPr>
+              <a:t>1.5B → 5B: −0.17 (Gemma-4 aşırı uydurma!)</a:t>
+            </a:r>
+            <a:endParaRPr lang="en-US" sz="1700" dirty="0"/>
+          </a:p>
+          <a:p>
+            <a:pPr indent="0" marL="0">
+              <a:buNone/>
+            </a:pPr>
+            <a:r>
+              <a:rPr lang="en-US" sz="1300" b="1" dirty="0">
                 <a:solidFill>
                   <a:srgbClr val="2A9D8F"/>
                 </a:solidFill>
@@ -12471,30 +13069,13 @@
                 <a:ea typeface="Calibri" pitchFamily="34" charset="-122"/>
                 <a:cs typeface="Calibri" pitchFamily="34" charset="-120"/>
               </a:rPr>
-              <a:t>≈1B parametrede getiri doygunlaşıyor.</a:t>
-            </a:r>
-            <a:endParaRPr lang="en-US" sz="1700" dirty="0"/>
-          </a:p>
-          <a:p>
-            <a:pPr indent="0" marL="0">
-              <a:buNone/>
-            </a:pPr>
-            <a:r>
-              <a:rPr lang="en-US" sz="1400" b="1" dirty="0">
-                <a:solidFill>
-                  <a:srgbClr val="C96A28"/>
-                </a:solidFill>
-                <a:latin typeface="Calibri" pitchFamily="34" charset="0"/>
-                <a:ea typeface="Calibri" pitchFamily="34" charset="-122"/>
-                <a:cs typeface="Calibri" pitchFamily="34" charset="-120"/>
-              </a:rPr>
-              <a:t>Verimlilik:  </a:t>
+              <a:t>Sweet spot: </a:t>
             </a:r>
             <a:pPr indent="0" marL="0">
               <a:buNone/>
             </a:pPr>
             <a:r>
-              <a:rPr lang="en-US" sz="1400" dirty="0">
+              <a:rPr lang="en-US" sz="1300" dirty="0">
                 <a:solidFill>
                   <a:srgbClr val="1B2733"/>
                 </a:solidFill>
@@ -12502,7 +13083,7 @@
                 <a:ea typeface="Calibri" pitchFamily="34" charset="-122"/>
                 <a:cs typeface="Calibri" pitchFamily="34" charset="-120"/>
               </a:rPr>
-              <a:t>TinyLlama, Qwen'e neredeyse eşit skoru %35 daha az GPU ile (3.29 vs 5.07 GB) veriyor.</a:t>
+              <a:t>1–1.5B. TinyLlama, Qwen'e ~eşit skoru %35 daha az GPU ile veriyor (3.29 vs 5.07 GB).</a:t>
             </a:r>
             <a:endParaRPr lang="en-US" sz="1700" dirty="0"/>
           </a:p>

--- a/report/SunumFinal_Mustafa_Kirpik.pptx
+++ b/report/SunumFinal_Mustafa_Kirpik.pptx
@@ -4693,7 +4693,7 @@
                 <a:ea typeface="Calibri" pitchFamily="34" charset="-122"/>
                 <a:cs typeface="Calibri" pitchFamily="34" charset="-120"/>
               </a:rPr>
-              <a:t>DEĞERLENDIRME</a:t>
+              <a:t>PRATIK DEĞERLENDIRME</a:t>
             </a:r>
             <a:endParaRPr lang="en-US" sz="1200" dirty="0"/>
           </a:p>
@@ -4732,7 +4732,7 @@
                 <a:ea typeface="Calibri" pitchFamily="34" charset="-122"/>
                 <a:cs typeface="Calibri" pitchFamily="34" charset="-120"/>
               </a:rPr>
-              <a:t>Limitasyonlar ve Etik</a:t>
+              <a:t>Edge Cihaz Uygunluğu ve Limitasyonlar</a:t>
             </a:r>
             <a:endParaRPr lang="en-US" sz="2800" dirty="0"/>
           </a:p>
@@ -4763,41 +4763,14 @@
       </p:sp>
       <p:sp>
         <p:nvSpPr>
-          <p:cNvPr id="6" name="Shape 4"/>
+          <p:cNvPr id="6" name="Text 4"/>
           <p:cNvSpPr/>
           <p:nvPr/>
         </p:nvSpPr>
         <p:spPr>
           <a:xfrm>
             <a:off x="640080" y="1691640"/>
-            <a:ext cx="5394960" cy="4023360"/>
-          </a:xfrm>
-          <a:prstGeom prst="roundRect">
-            <a:avLst>
-              <a:gd name="adj" fmla="val 1818"/>
-            </a:avLst>
-          </a:prstGeom>
-          <a:solidFill>
-            <a:srgbClr val="FFFFFF"/>
-          </a:solidFill>
-          <a:ln w="12700">
-            <a:solidFill>
-              <a:srgbClr val="D9E1E8"/>
-            </a:solidFill>
-            <a:prstDash val="solid"/>
-          </a:ln>
-        </p:spPr>
-      </p:sp>
-      <p:sp>
-        <p:nvSpPr>
-          <p:cNvPr id="7" name="Text 5"/>
-          <p:cNvSpPr/>
-          <p:nvPr/>
-        </p:nvSpPr>
-        <p:spPr>
-          <a:xfrm>
-            <a:off x="914400" y="1920240"/>
-            <a:ext cx="4846320" cy="365760"/>
+            <a:ext cx="7315200" cy="320040"/>
           </a:xfrm>
           <a:prstGeom prst="rect">
             <a:avLst/>
@@ -4813,7 +4786,7 @@
               <a:buNone/>
             </a:pPr>
             <a:r>
-              <a:rPr lang="en-US" sz="1400" b="1" spc="100" kern="0" dirty="0">
+              <a:rPr lang="en-US" sz="1300" b="1" spc="100" kern="0" dirty="0">
                 <a:solidFill>
                   <a:srgbClr val="0F2741"/>
                 </a:solidFill>
@@ -4821,147 +4794,1765 @@
                 <a:ea typeface="Calibri" pitchFamily="34" charset="-122"/>
                 <a:cs typeface="Calibri" pitchFamily="34" charset="-120"/>
               </a:rPr>
-              <a:t>LİMİTASYONLAR</a:t>
-            </a:r>
-            <a:endParaRPr lang="en-US" sz="1400" dirty="0"/>
-          </a:p>
-        </p:txBody>
-      </p:sp>
-      <p:sp>
-        <p:nvSpPr>
-          <p:cNvPr id="8" name="Text 6"/>
-          <p:cNvSpPr/>
-          <p:nvPr/>
-        </p:nvSpPr>
-        <p:spPr>
-          <a:xfrm>
-            <a:off x="914400" y="2377440"/>
-            <a:ext cx="4937760" cy="3200400"/>
-          </a:xfrm>
-          <a:prstGeom prst="rect">
-            <a:avLst/>
-          </a:prstGeom>
-          <a:noFill/>
-          <a:ln/>
-        </p:spPr>
-        <p:txBody>
-          <a:bodyPr wrap="square" rtlCol="0" anchor="t"/>
-          <a:lstStyle/>
-          <a:p>
-            <a:pPr marL="152400" indent="-152400">
-              <a:spcAft>
-                <a:spcPts val="1000"/>
-              </a:spcAft>
-              <a:buSzPct val="100000"/>
-              <a:buChar char="•"/>
-            </a:pPr>
-            <a:r>
-              <a:rPr lang="en-US" sz="1300" dirty="0">
-                <a:solidFill>
-                  <a:srgbClr val="1B2733"/>
-                </a:solidFill>
-                <a:latin typeface="Calibri" pitchFamily="34" charset="0"/>
-                <a:ea typeface="Calibri" pitchFamily="34" charset="-122"/>
-                <a:cs typeface="Calibri" pitchFamily="34" charset="-120"/>
-              </a:rPr>
-              <a:t>Küçük veri (793); test sadece 80 → azınlık sınıf varyansı yüksek.</a:t>
-            </a:r>
-            <a:endParaRPr lang="en-US" sz="1300" dirty="0"/>
-          </a:p>
-          <a:p>
-            <a:pPr marL="152400" indent="-152400">
-              <a:spcAft>
-                <a:spcPts val="1000"/>
-              </a:spcAft>
-              <a:buSzPct val="100000"/>
-              <a:buChar char="•"/>
-            </a:pPr>
-            <a:r>
-              <a:rPr lang="en-US" sz="1300" dirty="0">
-                <a:solidFill>
-                  <a:srgbClr val="1B2733"/>
-                </a:solidFill>
-                <a:latin typeface="Calibri" pitchFamily="34" charset="0"/>
-                <a:ea typeface="Calibri" pitchFamily="34" charset="-122"/>
-                <a:cs typeface="Calibri" pitchFamily="34" charset="-120"/>
-              </a:rPr>
-              <a:t>Tek seed (42); çok-seed ortalama±std gelecek işe bırakıldı.</a:t>
-            </a:r>
-            <a:endParaRPr lang="en-US" sz="1300" dirty="0"/>
-          </a:p>
-          <a:p>
-            <a:pPr marL="152400" indent="-152400">
-              <a:spcAft>
-                <a:spcPts val="1000"/>
-              </a:spcAft>
-              <a:buSzPct val="100000"/>
-              <a:buChar char="•"/>
-            </a:pPr>
-            <a:r>
-              <a:rPr lang="en-US" sz="1300" dirty="0">
-                <a:solidFill>
-                  <a:srgbClr val="1B2733"/>
-                </a:solidFill>
-                <a:latin typeface="Calibri" pitchFamily="34" charset="0"/>
-                <a:ea typeface="Calibri" pitchFamily="34" charset="-122"/>
-                <a:cs typeface="Calibri" pitchFamily="34" charset="-120"/>
-              </a:rPr>
-              <a:t>Gemma-4 için modele özel hiperparametre araması yapılmadı (ortak reçete).</a:t>
-            </a:r>
-            <a:endParaRPr lang="en-US" sz="1300" dirty="0"/>
-          </a:p>
-          <a:p>
-            <a:pPr marL="152400" indent="-152400">
-              <a:buSzPct val="100000"/>
-              <a:buChar char="•"/>
-            </a:pPr>
-            <a:r>
-              <a:rPr lang="en-US" sz="1300" dirty="0">
-                <a:solidFill>
-                  <a:srgbClr val="1B2733"/>
-                </a:solidFill>
-                <a:latin typeface="Calibri" pitchFamily="34" charset="0"/>
-                <a:ea typeface="Calibri" pitchFamily="34" charset="-122"/>
-                <a:cs typeface="Calibri" pitchFamily="34" charset="-120"/>
-              </a:rPr>
-              <a:t>Twitter tabanı genel nüfusu temsil etmez.</a:t>
+              <a:t>EDGE CIHAZ UYGUNLUĞU</a:t>
             </a:r>
             <a:endParaRPr lang="en-US" sz="1300" dirty="0"/>
           </a:p>
         </p:txBody>
       </p:sp>
-      <p:sp>
-        <p:nvSpPr>
-          <p:cNvPr id="9" name="Shape 7"/>
+      <p:graphicFrame>
+        <p:nvGraphicFramePr>
+          <p:cNvPr id="12" name="Table 0"/>
+          <p:cNvGraphicFramePr>
+            <a:graphicFrameLocks noGrp="1"/>
+          </p:cNvGraphicFramePr>
+          <p:nvPr>
+            <p:extLst>
+              <p:ext uri="{D42A27DB-BD31-4B8C-83A1-F6EECF244321}">
+                <p14:modId xmlns:p14="http://schemas.microsoft.com/office/powerpoint/2010/main" val="1579011935"/>
+              </p:ext>
+            </p:extLst>
+          </p:nvPr>
+        </p:nvGraphicFramePr>
+        <p:xfrm>
+          <a:off x="640080" y="2057400"/>
+          <a:ext cx="7315200" cy="914400"/>
+        </p:xfrm>
+        <a:graphic>
+          <a:graphicData uri="http://schemas.openxmlformats.org/drawingml/2006/table">
+            <a:tbl>
+              <a:tblPr/>
+              <a:tblGrid>
+                <a:gridCol w="1828800"/>
+                <a:gridCol w="1280160"/>
+                <a:gridCol w="1280160"/>
+                <a:gridCol w="1188720"/>
+                <a:gridCol w="1737360"/>
+              </a:tblGrid>
+              <a:tr h="411480">
+                <a:tc>
+                  <a:txBody>
+                    <a:bodyPr/>
+                    <a:lstStyle/>
+                    <a:p>
+                      <a:pPr algn="ctr" indent="0" marL="0">
+                        <a:buNone/>
+                      </a:pPr>
+                      <a:r>
+                        <a:rPr lang="en-US" sz="1100" b="1" dirty="0">
+                          <a:solidFill>
+                            <a:srgbClr val="FFFFFF"/>
+                          </a:solidFill>
+                          <a:latin typeface="Calibri" pitchFamily="34" charset="0"/>
+                          <a:ea typeface="Calibri" pitchFamily="34" charset="-122"/>
+                          <a:cs typeface="Calibri" pitchFamily="34" charset="-120"/>
+                        </a:rPr>
+                        <a:t>Model</a:t>
+                      </a:r>
+                      <a:endParaRPr lang="en-US" sz="1100" dirty="0">
+                        <a:latin typeface="Calibri" charset="0"/>
+                        <a:ea typeface="Calibri" charset="0"/>
+                        <a:cs typeface="Calibri" charset="0"/>
+                      </a:endParaRPr>
+                    </a:p>
+                  </a:txBody>
+                  <a:tcPr marL="91440" marR="91440" marT="45720" marB="45720" anchor="ctr">
+                    <a:lnL w="12700" cap="flat" cmpd="sng" algn="ctr">
+                      <a:solidFill>
+                        <a:srgbClr val="D9E1E8"/>
+                      </a:solidFill>
+                      <a:prstDash val="solid"/>
+                      <a:round/>
+                      <a:headEnd type="none" w="med" len="med"/>
+                      <a:tailEnd type="none" w="med" len="med"/>
+                    </a:lnL>
+                    <a:lnR w="12700" cap="flat" cmpd="sng" algn="ctr">
+                      <a:solidFill>
+                        <a:srgbClr val="D9E1E8"/>
+                      </a:solidFill>
+                      <a:prstDash val="solid"/>
+                      <a:round/>
+                      <a:headEnd type="none" w="med" len="med"/>
+                      <a:tailEnd type="none" w="med" len="med"/>
+                    </a:lnR>
+                    <a:lnT w="12700" cap="flat" cmpd="sng" algn="ctr">
+                      <a:solidFill>
+                        <a:srgbClr val="D9E1E8"/>
+                      </a:solidFill>
+                      <a:prstDash val="solid"/>
+                      <a:round/>
+                      <a:headEnd type="none" w="med" len="med"/>
+                      <a:tailEnd type="none" w="med" len="med"/>
+                    </a:lnT>
+                    <a:lnB w="12700" cap="flat" cmpd="sng" algn="ctr">
+                      <a:solidFill>
+                        <a:srgbClr val="D9E1E8"/>
+                      </a:solidFill>
+                      <a:prstDash val="solid"/>
+                      <a:round/>
+                      <a:headEnd type="none" w="med" len="med"/>
+                      <a:tailEnd type="none" w="med" len="med"/>
+                    </a:lnB>
+                    <a:solidFill>
+                      <a:srgbClr val="16395C"/>
+                    </a:solidFill>
+                  </a:tcPr>
+                </a:tc>
+                <a:tc>
+                  <a:txBody>
+                    <a:bodyPr/>
+                    <a:lstStyle/>
+                    <a:p>
+                      <a:pPr algn="ctr" indent="0" marL="0">
+                        <a:buNone/>
+                      </a:pPr>
+                      <a:r>
+                        <a:rPr lang="en-US" sz="1100" b="1" dirty="0">
+                          <a:solidFill>
+                            <a:srgbClr val="FFFFFF"/>
+                          </a:solidFill>
+                          <a:latin typeface="Calibri" pitchFamily="34" charset="0"/>
+                          <a:ea typeface="Calibri" pitchFamily="34" charset="-122"/>
+                          <a:cs typeface="Calibri" pitchFamily="34" charset="-120"/>
+                        </a:rPr>
+                        <a:t>Tepe GPU</a:t>
+                      </a:r>
+                      <a:endParaRPr lang="en-US" sz="1100" dirty="0">
+                        <a:latin typeface="Calibri" charset="0"/>
+                        <a:ea typeface="Calibri" charset="0"/>
+                        <a:cs typeface="Calibri" charset="0"/>
+                      </a:endParaRPr>
+                    </a:p>
+                  </a:txBody>
+                  <a:tcPr marL="91440" marR="91440" marT="45720" marB="45720" anchor="ctr">
+                    <a:lnL w="12700" cap="flat" cmpd="sng" algn="ctr">
+                      <a:solidFill>
+                        <a:srgbClr val="D9E1E8"/>
+                      </a:solidFill>
+                      <a:prstDash val="solid"/>
+                      <a:round/>
+                      <a:headEnd type="none" w="med" len="med"/>
+                      <a:tailEnd type="none" w="med" len="med"/>
+                    </a:lnL>
+                    <a:lnR w="12700" cap="flat" cmpd="sng" algn="ctr">
+                      <a:solidFill>
+                        <a:srgbClr val="D9E1E8"/>
+                      </a:solidFill>
+                      <a:prstDash val="solid"/>
+                      <a:round/>
+                      <a:headEnd type="none" w="med" len="med"/>
+                      <a:tailEnd type="none" w="med" len="med"/>
+                    </a:lnR>
+                    <a:lnT w="12700" cap="flat" cmpd="sng" algn="ctr">
+                      <a:solidFill>
+                        <a:srgbClr val="D9E1E8"/>
+                      </a:solidFill>
+                      <a:prstDash val="solid"/>
+                      <a:round/>
+                      <a:headEnd type="none" w="med" len="med"/>
+                      <a:tailEnd type="none" w="med" len="med"/>
+                    </a:lnT>
+                    <a:lnB w="12700" cap="flat" cmpd="sng" algn="ctr">
+                      <a:solidFill>
+                        <a:srgbClr val="D9E1E8"/>
+                      </a:solidFill>
+                      <a:prstDash val="solid"/>
+                      <a:round/>
+                      <a:headEnd type="none" w="med" len="med"/>
+                      <a:tailEnd type="none" w="med" len="med"/>
+                    </a:lnB>
+                    <a:solidFill>
+                      <a:srgbClr val="16395C"/>
+                    </a:solidFill>
+                  </a:tcPr>
+                </a:tc>
+                <a:tc>
+                  <a:txBody>
+                    <a:bodyPr/>
+                    <a:lstStyle/>
+                    <a:p>
+                      <a:pPr algn="ctr" indent="0" marL="0">
+                        <a:buNone/>
+                      </a:pPr>
+                      <a:r>
+                        <a:rPr lang="en-US" sz="1100" b="1" dirty="0">
+                          <a:solidFill>
+                            <a:srgbClr val="FFFFFF"/>
+                          </a:solidFill>
+                          <a:latin typeface="Calibri" pitchFamily="34" charset="0"/>
+                          <a:ea typeface="Calibri" pitchFamily="34" charset="-122"/>
+                          <a:cs typeface="Calibri" pitchFamily="34" charset="-120"/>
+                        </a:rPr>
+                        <a:t>Adaptör</a:t>
+                      </a:r>
+                      <a:endParaRPr lang="en-US" sz="1100" dirty="0">
+                        <a:latin typeface="Calibri" charset="0"/>
+                        <a:ea typeface="Calibri" charset="0"/>
+                        <a:cs typeface="Calibri" charset="0"/>
+                      </a:endParaRPr>
+                    </a:p>
+                  </a:txBody>
+                  <a:tcPr marL="91440" marR="91440" marT="45720" marB="45720" anchor="ctr">
+                    <a:lnL w="12700" cap="flat" cmpd="sng" algn="ctr">
+                      <a:solidFill>
+                        <a:srgbClr val="D9E1E8"/>
+                      </a:solidFill>
+                      <a:prstDash val="solid"/>
+                      <a:round/>
+                      <a:headEnd type="none" w="med" len="med"/>
+                      <a:tailEnd type="none" w="med" len="med"/>
+                    </a:lnL>
+                    <a:lnR w="12700" cap="flat" cmpd="sng" algn="ctr">
+                      <a:solidFill>
+                        <a:srgbClr val="D9E1E8"/>
+                      </a:solidFill>
+                      <a:prstDash val="solid"/>
+                      <a:round/>
+                      <a:headEnd type="none" w="med" len="med"/>
+                      <a:tailEnd type="none" w="med" len="med"/>
+                    </a:lnR>
+                    <a:lnT w="12700" cap="flat" cmpd="sng" algn="ctr">
+                      <a:solidFill>
+                        <a:srgbClr val="D9E1E8"/>
+                      </a:solidFill>
+                      <a:prstDash val="solid"/>
+                      <a:round/>
+                      <a:headEnd type="none" w="med" len="med"/>
+                      <a:tailEnd type="none" w="med" len="med"/>
+                    </a:lnT>
+                    <a:lnB w="12700" cap="flat" cmpd="sng" algn="ctr">
+                      <a:solidFill>
+                        <a:srgbClr val="D9E1E8"/>
+                      </a:solidFill>
+                      <a:prstDash val="solid"/>
+                      <a:round/>
+                      <a:headEnd type="none" w="med" len="med"/>
+                      <a:tailEnd type="none" w="med" len="med"/>
+                    </a:lnB>
+                    <a:solidFill>
+                      <a:srgbClr val="16395C"/>
+                    </a:solidFill>
+                  </a:tcPr>
+                </a:tc>
+                <a:tc>
+                  <a:txBody>
+                    <a:bodyPr/>
+                    <a:lstStyle/>
+                    <a:p>
+                      <a:pPr algn="ctr" indent="0" marL="0">
+                        <a:buNone/>
+                      </a:pPr>
+                      <a:r>
+                        <a:rPr lang="en-US" sz="1100" b="1" dirty="0">
+                          <a:solidFill>
+                            <a:srgbClr val="FFFFFF"/>
+                          </a:solidFill>
+                          <a:latin typeface="Calibri" pitchFamily="34" charset="0"/>
+                          <a:ea typeface="Calibri" pitchFamily="34" charset="-122"/>
+                          <a:cs typeface="Calibri" pitchFamily="34" charset="-120"/>
+                        </a:rPr>
+                        <a:t>Inf (ms)</a:t>
+                      </a:r>
+                      <a:endParaRPr lang="en-US" sz="1100" dirty="0">
+                        <a:latin typeface="Calibri" charset="0"/>
+                        <a:ea typeface="Calibri" charset="0"/>
+                        <a:cs typeface="Calibri" charset="0"/>
+                      </a:endParaRPr>
+                    </a:p>
+                  </a:txBody>
+                  <a:tcPr marL="91440" marR="91440" marT="45720" marB="45720" anchor="ctr">
+                    <a:lnL w="12700" cap="flat" cmpd="sng" algn="ctr">
+                      <a:solidFill>
+                        <a:srgbClr val="D9E1E8"/>
+                      </a:solidFill>
+                      <a:prstDash val="solid"/>
+                      <a:round/>
+                      <a:headEnd type="none" w="med" len="med"/>
+                      <a:tailEnd type="none" w="med" len="med"/>
+                    </a:lnL>
+                    <a:lnR w="12700" cap="flat" cmpd="sng" algn="ctr">
+                      <a:solidFill>
+                        <a:srgbClr val="D9E1E8"/>
+                      </a:solidFill>
+                      <a:prstDash val="solid"/>
+                      <a:round/>
+                      <a:headEnd type="none" w="med" len="med"/>
+                      <a:tailEnd type="none" w="med" len="med"/>
+                    </a:lnR>
+                    <a:lnT w="12700" cap="flat" cmpd="sng" algn="ctr">
+                      <a:solidFill>
+                        <a:srgbClr val="D9E1E8"/>
+                      </a:solidFill>
+                      <a:prstDash val="solid"/>
+                      <a:round/>
+                      <a:headEnd type="none" w="med" len="med"/>
+                      <a:tailEnd type="none" w="med" len="med"/>
+                    </a:lnT>
+                    <a:lnB w="12700" cap="flat" cmpd="sng" algn="ctr">
+                      <a:solidFill>
+                        <a:srgbClr val="D9E1E8"/>
+                      </a:solidFill>
+                      <a:prstDash val="solid"/>
+                      <a:round/>
+                      <a:headEnd type="none" w="med" len="med"/>
+                      <a:tailEnd type="none" w="med" len="med"/>
+                    </a:lnB>
+                    <a:solidFill>
+                      <a:srgbClr val="16395C"/>
+                    </a:solidFill>
+                  </a:tcPr>
+                </a:tc>
+                <a:tc>
+                  <a:txBody>
+                    <a:bodyPr/>
+                    <a:lstStyle/>
+                    <a:p>
+                      <a:pPr algn="ctr" indent="0" marL="0">
+                        <a:buNone/>
+                      </a:pPr>
+                      <a:r>
+                        <a:rPr lang="en-US" sz="1100" b="1" dirty="0">
+                          <a:solidFill>
+                            <a:srgbClr val="FFFFFF"/>
+                          </a:solidFill>
+                          <a:latin typeface="Calibri" pitchFamily="34" charset="0"/>
+                          <a:ea typeface="Calibri" pitchFamily="34" charset="-122"/>
+                          <a:cs typeface="Calibri" pitchFamily="34" charset="-120"/>
+                        </a:rPr>
+                        <a:t>Uygunluk</a:t>
+                      </a:r>
+                      <a:endParaRPr lang="en-US" sz="1100" dirty="0">
+                        <a:latin typeface="Calibri" charset="0"/>
+                        <a:ea typeface="Calibri" charset="0"/>
+                        <a:cs typeface="Calibri" charset="0"/>
+                      </a:endParaRPr>
+                    </a:p>
+                  </a:txBody>
+                  <a:tcPr marL="91440" marR="91440" marT="45720" marB="45720" anchor="ctr">
+                    <a:lnL w="12700" cap="flat" cmpd="sng" algn="ctr">
+                      <a:solidFill>
+                        <a:srgbClr val="D9E1E8"/>
+                      </a:solidFill>
+                      <a:prstDash val="solid"/>
+                      <a:round/>
+                      <a:headEnd type="none" w="med" len="med"/>
+                      <a:tailEnd type="none" w="med" len="med"/>
+                    </a:lnL>
+                    <a:lnR w="12700" cap="flat" cmpd="sng" algn="ctr">
+                      <a:solidFill>
+                        <a:srgbClr val="D9E1E8"/>
+                      </a:solidFill>
+                      <a:prstDash val="solid"/>
+                      <a:round/>
+                      <a:headEnd type="none" w="med" len="med"/>
+                      <a:tailEnd type="none" w="med" len="med"/>
+                    </a:lnR>
+                    <a:lnT w="12700" cap="flat" cmpd="sng" algn="ctr">
+                      <a:solidFill>
+                        <a:srgbClr val="D9E1E8"/>
+                      </a:solidFill>
+                      <a:prstDash val="solid"/>
+                      <a:round/>
+                      <a:headEnd type="none" w="med" len="med"/>
+                      <a:tailEnd type="none" w="med" len="med"/>
+                    </a:lnT>
+                    <a:lnB w="12700" cap="flat" cmpd="sng" algn="ctr">
+                      <a:solidFill>
+                        <a:srgbClr val="D9E1E8"/>
+                      </a:solidFill>
+                      <a:prstDash val="solid"/>
+                      <a:round/>
+                      <a:headEnd type="none" w="med" len="med"/>
+                      <a:tailEnd type="none" w="med" len="med"/>
+                    </a:lnB>
+                    <a:solidFill>
+                      <a:srgbClr val="16395C"/>
+                    </a:solidFill>
+                  </a:tcPr>
+                </a:tc>
+              </a:tr>
+              <a:tr h="411480">
+                <a:tc>
+                  <a:txBody>
+                    <a:bodyPr/>
+                    <a:lstStyle/>
+                    <a:p>
+                      <a:pPr indent="0" marL="0">
+                        <a:buNone/>
+                      </a:pPr>
+                      <a:r>
+                        <a:rPr lang="en-US" sz="1100" dirty="0">
+                          <a:solidFill>
+                            <a:srgbClr val="000000"/>
+                          </a:solidFill>
+                          <a:latin typeface="Calibri" pitchFamily="34" charset="0"/>
+                          <a:ea typeface="Calibri" pitchFamily="34" charset="-122"/>
+                          <a:cs typeface="Calibri" pitchFamily="34" charset="-120"/>
+                        </a:rPr>
+                        <a:t>SmolLM2-360M</a:t>
+                      </a:r>
+                      <a:endParaRPr lang="en-US" sz="1100" dirty="0">
+                        <a:latin typeface="Calibri" charset="0"/>
+                        <a:ea typeface="Calibri" charset="0"/>
+                        <a:cs typeface="Calibri" charset="0"/>
+                      </a:endParaRPr>
+                    </a:p>
+                  </a:txBody>
+                  <a:tcPr marL="91440" marR="91440" marT="45720" marB="45720" anchor="ctr">
+                    <a:lnL w="12700" cap="flat" cmpd="sng" algn="ctr">
+                      <a:solidFill>
+                        <a:srgbClr val="D9E1E8"/>
+                      </a:solidFill>
+                      <a:prstDash val="solid"/>
+                      <a:round/>
+                      <a:headEnd type="none" w="med" len="med"/>
+                      <a:tailEnd type="none" w="med" len="med"/>
+                    </a:lnL>
+                    <a:lnR w="12700" cap="flat" cmpd="sng" algn="ctr">
+                      <a:solidFill>
+                        <a:srgbClr val="D9E1E8"/>
+                      </a:solidFill>
+                      <a:prstDash val="solid"/>
+                      <a:round/>
+                      <a:headEnd type="none" w="med" len="med"/>
+                      <a:tailEnd type="none" w="med" len="med"/>
+                    </a:lnR>
+                    <a:lnT w="12700" cap="flat" cmpd="sng" algn="ctr">
+                      <a:solidFill>
+                        <a:srgbClr val="D9E1E8"/>
+                      </a:solidFill>
+                      <a:prstDash val="solid"/>
+                      <a:round/>
+                      <a:headEnd type="none" w="med" len="med"/>
+                      <a:tailEnd type="none" w="med" len="med"/>
+                    </a:lnT>
+                    <a:lnB w="12700" cap="flat" cmpd="sng" algn="ctr">
+                      <a:solidFill>
+                        <a:srgbClr val="D9E1E8"/>
+                      </a:solidFill>
+                      <a:prstDash val="solid"/>
+                      <a:round/>
+                      <a:headEnd type="none" w="med" len="med"/>
+                      <a:tailEnd type="none" w="med" len="med"/>
+                    </a:lnB>
+                    <a:solidFill>
+                      <a:srgbClr val="FFFFFF"/>
+                    </a:solidFill>
+                  </a:tcPr>
+                </a:tc>
+                <a:tc>
+                  <a:txBody>
+                    <a:bodyPr/>
+                    <a:lstStyle/>
+                    <a:p>
+                      <a:pPr algn="ctr" indent="0" marL="0">
+                        <a:buNone/>
+                      </a:pPr>
+                      <a:r>
+                        <a:rPr lang="en-US" sz="1100" dirty="0">
+                          <a:solidFill>
+                            <a:srgbClr val="000000"/>
+                          </a:solidFill>
+                          <a:latin typeface="Calibri" pitchFamily="34" charset="0"/>
+                          <a:ea typeface="Calibri" pitchFamily="34" charset="-122"/>
+                          <a:cs typeface="Calibri" pitchFamily="34" charset="-120"/>
+                        </a:rPr>
+                        <a:t>1.81 GB</a:t>
+                      </a:r>
+                      <a:endParaRPr lang="en-US" sz="1100" dirty="0">
+                        <a:latin typeface="Calibri" charset="0"/>
+                        <a:ea typeface="Calibri" charset="0"/>
+                        <a:cs typeface="Calibri" charset="0"/>
+                      </a:endParaRPr>
+                    </a:p>
+                  </a:txBody>
+                  <a:tcPr marL="91440" marR="91440" marT="45720" marB="45720" anchor="ctr">
+                    <a:lnL w="12700" cap="flat" cmpd="sng" algn="ctr">
+                      <a:solidFill>
+                        <a:srgbClr val="D9E1E8"/>
+                      </a:solidFill>
+                      <a:prstDash val="solid"/>
+                      <a:round/>
+                      <a:headEnd type="none" w="med" len="med"/>
+                      <a:tailEnd type="none" w="med" len="med"/>
+                    </a:lnL>
+                    <a:lnR w="12700" cap="flat" cmpd="sng" algn="ctr">
+                      <a:solidFill>
+                        <a:srgbClr val="D9E1E8"/>
+                      </a:solidFill>
+                      <a:prstDash val="solid"/>
+                      <a:round/>
+                      <a:headEnd type="none" w="med" len="med"/>
+                      <a:tailEnd type="none" w="med" len="med"/>
+                    </a:lnR>
+                    <a:lnT w="12700" cap="flat" cmpd="sng" algn="ctr">
+                      <a:solidFill>
+                        <a:srgbClr val="D9E1E8"/>
+                      </a:solidFill>
+                      <a:prstDash val="solid"/>
+                      <a:round/>
+                      <a:headEnd type="none" w="med" len="med"/>
+                      <a:tailEnd type="none" w="med" len="med"/>
+                    </a:lnT>
+                    <a:lnB w="12700" cap="flat" cmpd="sng" algn="ctr">
+                      <a:solidFill>
+                        <a:srgbClr val="D9E1E8"/>
+                      </a:solidFill>
+                      <a:prstDash val="solid"/>
+                      <a:round/>
+                      <a:headEnd type="none" w="med" len="med"/>
+                      <a:tailEnd type="none" w="med" len="med"/>
+                    </a:lnB>
+                    <a:solidFill>
+                      <a:srgbClr val="FFFFFF"/>
+                    </a:solidFill>
+                  </a:tcPr>
+                </a:tc>
+                <a:tc>
+                  <a:txBody>
+                    <a:bodyPr/>
+                    <a:lstStyle/>
+                    <a:p>
+                      <a:pPr algn="ctr" indent="0" marL="0">
+                        <a:buNone/>
+                      </a:pPr>
+                      <a:r>
+                        <a:rPr lang="en-US" sz="1100" dirty="0">
+                          <a:solidFill>
+                            <a:srgbClr val="000000"/>
+                          </a:solidFill>
+                          <a:latin typeface="Calibri" pitchFamily="34" charset="0"/>
+                          <a:ea typeface="Calibri" pitchFamily="34" charset="-122"/>
+                          <a:cs typeface="Calibri" pitchFamily="34" charset="-120"/>
+                        </a:rPr>
+                        <a:t>6.6 MB</a:t>
+                      </a:r>
+                      <a:endParaRPr lang="en-US" sz="1100" dirty="0">
+                        <a:latin typeface="Calibri" charset="0"/>
+                        <a:ea typeface="Calibri" charset="0"/>
+                        <a:cs typeface="Calibri" charset="0"/>
+                      </a:endParaRPr>
+                    </a:p>
+                  </a:txBody>
+                  <a:tcPr marL="91440" marR="91440" marT="45720" marB="45720" anchor="ctr">
+                    <a:lnL w="12700" cap="flat" cmpd="sng" algn="ctr">
+                      <a:solidFill>
+                        <a:srgbClr val="D9E1E8"/>
+                      </a:solidFill>
+                      <a:prstDash val="solid"/>
+                      <a:round/>
+                      <a:headEnd type="none" w="med" len="med"/>
+                      <a:tailEnd type="none" w="med" len="med"/>
+                    </a:lnL>
+                    <a:lnR w="12700" cap="flat" cmpd="sng" algn="ctr">
+                      <a:solidFill>
+                        <a:srgbClr val="D9E1E8"/>
+                      </a:solidFill>
+                      <a:prstDash val="solid"/>
+                      <a:round/>
+                      <a:headEnd type="none" w="med" len="med"/>
+                      <a:tailEnd type="none" w="med" len="med"/>
+                    </a:lnR>
+                    <a:lnT w="12700" cap="flat" cmpd="sng" algn="ctr">
+                      <a:solidFill>
+                        <a:srgbClr val="D9E1E8"/>
+                      </a:solidFill>
+                      <a:prstDash val="solid"/>
+                      <a:round/>
+                      <a:headEnd type="none" w="med" len="med"/>
+                      <a:tailEnd type="none" w="med" len="med"/>
+                    </a:lnT>
+                    <a:lnB w="12700" cap="flat" cmpd="sng" algn="ctr">
+                      <a:solidFill>
+                        <a:srgbClr val="D9E1E8"/>
+                      </a:solidFill>
+                      <a:prstDash val="solid"/>
+                      <a:round/>
+                      <a:headEnd type="none" w="med" len="med"/>
+                      <a:tailEnd type="none" w="med" len="med"/>
+                    </a:lnB>
+                    <a:solidFill>
+                      <a:srgbClr val="FFFFFF"/>
+                    </a:solidFill>
+                  </a:tcPr>
+                </a:tc>
+                <a:tc>
+                  <a:txBody>
+                    <a:bodyPr/>
+                    <a:lstStyle/>
+                    <a:p>
+                      <a:pPr algn="ctr" indent="0" marL="0">
+                        <a:buNone/>
+                      </a:pPr>
+                      <a:r>
+                        <a:rPr lang="en-US" sz="1100" dirty="0">
+                          <a:solidFill>
+                            <a:srgbClr val="000000"/>
+                          </a:solidFill>
+                          <a:latin typeface="Calibri" pitchFamily="34" charset="0"/>
+                          <a:ea typeface="Calibri" pitchFamily="34" charset="-122"/>
+                          <a:cs typeface="Calibri" pitchFamily="34" charset="-120"/>
+                        </a:rPr>
+                        <a:t>1542</a:t>
+                      </a:r>
+                      <a:endParaRPr lang="en-US" sz="1100" dirty="0">
+                        <a:latin typeface="Calibri" charset="0"/>
+                        <a:ea typeface="Calibri" charset="0"/>
+                        <a:cs typeface="Calibri" charset="0"/>
+                      </a:endParaRPr>
+                    </a:p>
+                  </a:txBody>
+                  <a:tcPr marL="91440" marR="91440" marT="45720" marB="45720" anchor="ctr">
+                    <a:lnL w="12700" cap="flat" cmpd="sng" algn="ctr">
+                      <a:solidFill>
+                        <a:srgbClr val="D9E1E8"/>
+                      </a:solidFill>
+                      <a:prstDash val="solid"/>
+                      <a:round/>
+                      <a:headEnd type="none" w="med" len="med"/>
+                      <a:tailEnd type="none" w="med" len="med"/>
+                    </a:lnL>
+                    <a:lnR w="12700" cap="flat" cmpd="sng" algn="ctr">
+                      <a:solidFill>
+                        <a:srgbClr val="D9E1E8"/>
+                      </a:solidFill>
+                      <a:prstDash val="solid"/>
+                      <a:round/>
+                      <a:headEnd type="none" w="med" len="med"/>
+                      <a:tailEnd type="none" w="med" len="med"/>
+                    </a:lnR>
+                    <a:lnT w="12700" cap="flat" cmpd="sng" algn="ctr">
+                      <a:solidFill>
+                        <a:srgbClr val="D9E1E8"/>
+                      </a:solidFill>
+                      <a:prstDash val="solid"/>
+                      <a:round/>
+                      <a:headEnd type="none" w="med" len="med"/>
+                      <a:tailEnd type="none" w="med" len="med"/>
+                    </a:lnT>
+                    <a:lnB w="12700" cap="flat" cmpd="sng" algn="ctr">
+                      <a:solidFill>
+                        <a:srgbClr val="D9E1E8"/>
+                      </a:solidFill>
+                      <a:prstDash val="solid"/>
+                      <a:round/>
+                      <a:headEnd type="none" w="med" len="med"/>
+                      <a:tailEnd type="none" w="med" len="med"/>
+                    </a:lnB>
+                    <a:solidFill>
+                      <a:srgbClr val="FFFFFF"/>
+                    </a:solidFill>
+                  </a:tcPr>
+                </a:tc>
+                <a:tc>
+                  <a:txBody>
+                    <a:bodyPr/>
+                    <a:lstStyle/>
+                    <a:p>
+                      <a:pPr algn="ctr" indent="0" marL="0">
+                        <a:buNone/>
+                      </a:pPr>
+                      <a:r>
+                        <a:rPr lang="en-US" sz="1000" dirty="0">
+                          <a:solidFill>
+                            <a:srgbClr val="5B6B7B"/>
+                          </a:solidFill>
+                          <a:latin typeface="Calibri" pitchFamily="34" charset="0"/>
+                          <a:ea typeface="Calibri" pitchFamily="34" charset="-122"/>
+                          <a:cs typeface="Calibri" pitchFamily="34" charset="-120"/>
+                        </a:rPr>
+                        <a:t>Üst telefon NPU</a:t>
+                      </a:r>
+                      <a:endParaRPr lang="en-US" sz="1000" dirty="0">
+                        <a:latin typeface="Calibri" charset="0"/>
+                        <a:ea typeface="Calibri" charset="0"/>
+                        <a:cs typeface="Calibri" charset="0"/>
+                      </a:endParaRPr>
+                    </a:p>
+                  </a:txBody>
+                  <a:tcPr marL="91440" marR="91440" marT="45720" marB="45720" anchor="ctr">
+                    <a:lnL w="12700" cap="flat" cmpd="sng" algn="ctr">
+                      <a:solidFill>
+                        <a:srgbClr val="D9E1E8"/>
+                      </a:solidFill>
+                      <a:prstDash val="solid"/>
+                      <a:round/>
+                      <a:headEnd type="none" w="med" len="med"/>
+                      <a:tailEnd type="none" w="med" len="med"/>
+                    </a:lnL>
+                    <a:lnR w="12700" cap="flat" cmpd="sng" algn="ctr">
+                      <a:solidFill>
+                        <a:srgbClr val="D9E1E8"/>
+                      </a:solidFill>
+                      <a:prstDash val="solid"/>
+                      <a:round/>
+                      <a:headEnd type="none" w="med" len="med"/>
+                      <a:tailEnd type="none" w="med" len="med"/>
+                    </a:lnR>
+                    <a:lnT w="12700" cap="flat" cmpd="sng" algn="ctr">
+                      <a:solidFill>
+                        <a:srgbClr val="D9E1E8"/>
+                      </a:solidFill>
+                      <a:prstDash val="solid"/>
+                      <a:round/>
+                      <a:headEnd type="none" w="med" len="med"/>
+                      <a:tailEnd type="none" w="med" len="med"/>
+                    </a:lnT>
+                    <a:lnB w="12700" cap="flat" cmpd="sng" algn="ctr">
+                      <a:solidFill>
+                        <a:srgbClr val="D9E1E8"/>
+                      </a:solidFill>
+                      <a:prstDash val="solid"/>
+                      <a:round/>
+                      <a:headEnd type="none" w="med" len="med"/>
+                      <a:tailEnd type="none" w="med" len="med"/>
+                    </a:lnB>
+                    <a:solidFill>
+                      <a:srgbClr val="FFFFFF"/>
+                    </a:solidFill>
+                  </a:tcPr>
+                </a:tc>
+              </a:tr>
+              <a:tr h="411480">
+                <a:tc>
+                  <a:txBody>
+                    <a:bodyPr/>
+                    <a:lstStyle/>
+                    <a:p>
+                      <a:pPr indent="0" marL="0">
+                        <a:buNone/>
+                      </a:pPr>
+                      <a:r>
+                        <a:rPr lang="en-US" sz="1100" b="1" dirty="0">
+                          <a:solidFill>
+                            <a:srgbClr val="000000"/>
+                          </a:solidFill>
+                          <a:latin typeface="Calibri" pitchFamily="34" charset="0"/>
+                          <a:ea typeface="Calibri" pitchFamily="34" charset="-122"/>
+                          <a:cs typeface="Calibri" pitchFamily="34" charset="-120"/>
+                        </a:rPr>
+                        <a:t>TinyLlama-1.1B</a:t>
+                      </a:r>
+                      <a:endParaRPr lang="en-US" sz="1100" dirty="0">
+                        <a:latin typeface="Calibri" charset="0"/>
+                        <a:ea typeface="Calibri" charset="0"/>
+                        <a:cs typeface="Calibri" charset="0"/>
+                      </a:endParaRPr>
+                    </a:p>
+                  </a:txBody>
+                  <a:tcPr marL="91440" marR="91440" marT="45720" marB="45720" anchor="ctr">
+                    <a:lnL w="12700" cap="flat" cmpd="sng" algn="ctr">
+                      <a:solidFill>
+                        <a:srgbClr val="D9E1E8"/>
+                      </a:solidFill>
+                      <a:prstDash val="solid"/>
+                      <a:round/>
+                      <a:headEnd type="none" w="med" len="med"/>
+                      <a:tailEnd type="none" w="med" len="med"/>
+                    </a:lnL>
+                    <a:lnR w="12700" cap="flat" cmpd="sng" algn="ctr">
+                      <a:solidFill>
+                        <a:srgbClr val="D9E1E8"/>
+                      </a:solidFill>
+                      <a:prstDash val="solid"/>
+                      <a:round/>
+                      <a:headEnd type="none" w="med" len="med"/>
+                      <a:tailEnd type="none" w="med" len="med"/>
+                    </a:lnR>
+                    <a:lnT w="12700" cap="flat" cmpd="sng" algn="ctr">
+                      <a:solidFill>
+                        <a:srgbClr val="D9E1E8"/>
+                      </a:solidFill>
+                      <a:prstDash val="solid"/>
+                      <a:round/>
+                      <a:headEnd type="none" w="med" len="med"/>
+                      <a:tailEnd type="none" w="med" len="med"/>
+                    </a:lnT>
+                    <a:lnB w="12700" cap="flat" cmpd="sng" algn="ctr">
+                      <a:solidFill>
+                        <a:srgbClr val="D9E1E8"/>
+                      </a:solidFill>
+                      <a:prstDash val="solid"/>
+                      <a:round/>
+                      <a:headEnd type="none" w="med" len="med"/>
+                      <a:tailEnd type="none" w="med" len="med"/>
+                    </a:lnB>
+                    <a:solidFill>
+                      <a:srgbClr val="E2EFDA"/>
+                    </a:solidFill>
+                  </a:tcPr>
+                </a:tc>
+                <a:tc>
+                  <a:txBody>
+                    <a:bodyPr/>
+                    <a:lstStyle/>
+                    <a:p>
+                      <a:pPr algn="ctr" indent="0" marL="0">
+                        <a:buNone/>
+                      </a:pPr>
+                      <a:r>
+                        <a:rPr lang="en-US" sz="1100" dirty="0">
+                          <a:solidFill>
+                            <a:srgbClr val="000000"/>
+                          </a:solidFill>
+                          <a:latin typeface="Calibri" pitchFamily="34" charset="0"/>
+                          <a:ea typeface="Calibri" pitchFamily="34" charset="-122"/>
+                          <a:cs typeface="Calibri" pitchFamily="34" charset="-120"/>
+                        </a:rPr>
+                        <a:t>3.29 GB</a:t>
+                      </a:r>
+                      <a:endParaRPr lang="en-US" sz="1100" dirty="0">
+                        <a:latin typeface="Calibri" charset="0"/>
+                        <a:ea typeface="Calibri" charset="0"/>
+                        <a:cs typeface="Calibri" charset="0"/>
+                      </a:endParaRPr>
+                    </a:p>
+                  </a:txBody>
+                  <a:tcPr marL="91440" marR="91440" marT="45720" marB="45720" anchor="ctr">
+                    <a:lnL w="12700" cap="flat" cmpd="sng" algn="ctr">
+                      <a:solidFill>
+                        <a:srgbClr val="D9E1E8"/>
+                      </a:solidFill>
+                      <a:prstDash val="solid"/>
+                      <a:round/>
+                      <a:headEnd type="none" w="med" len="med"/>
+                      <a:tailEnd type="none" w="med" len="med"/>
+                    </a:lnL>
+                    <a:lnR w="12700" cap="flat" cmpd="sng" algn="ctr">
+                      <a:solidFill>
+                        <a:srgbClr val="D9E1E8"/>
+                      </a:solidFill>
+                      <a:prstDash val="solid"/>
+                      <a:round/>
+                      <a:headEnd type="none" w="med" len="med"/>
+                      <a:tailEnd type="none" w="med" len="med"/>
+                    </a:lnR>
+                    <a:lnT w="12700" cap="flat" cmpd="sng" algn="ctr">
+                      <a:solidFill>
+                        <a:srgbClr val="D9E1E8"/>
+                      </a:solidFill>
+                      <a:prstDash val="solid"/>
+                      <a:round/>
+                      <a:headEnd type="none" w="med" len="med"/>
+                      <a:tailEnd type="none" w="med" len="med"/>
+                    </a:lnT>
+                    <a:lnB w="12700" cap="flat" cmpd="sng" algn="ctr">
+                      <a:solidFill>
+                        <a:srgbClr val="D9E1E8"/>
+                      </a:solidFill>
+                      <a:prstDash val="solid"/>
+                      <a:round/>
+                      <a:headEnd type="none" w="med" len="med"/>
+                      <a:tailEnd type="none" w="med" len="med"/>
+                    </a:lnB>
+                    <a:solidFill>
+                      <a:srgbClr val="E2EFDA"/>
+                    </a:solidFill>
+                  </a:tcPr>
+                </a:tc>
+                <a:tc>
+                  <a:txBody>
+                    <a:bodyPr/>
+                    <a:lstStyle/>
+                    <a:p>
+                      <a:pPr algn="ctr" indent="0" marL="0">
+                        <a:buNone/>
+                      </a:pPr>
+                      <a:r>
+                        <a:rPr lang="en-US" sz="1100" dirty="0">
+                          <a:solidFill>
+                            <a:srgbClr val="000000"/>
+                          </a:solidFill>
+                          <a:latin typeface="Calibri" pitchFamily="34" charset="0"/>
+                          <a:ea typeface="Calibri" pitchFamily="34" charset="-122"/>
+                          <a:cs typeface="Calibri" pitchFamily="34" charset="-120"/>
+                        </a:rPr>
+                        <a:t>9.0 MB</a:t>
+                      </a:r>
+                      <a:endParaRPr lang="en-US" sz="1100" dirty="0">
+                        <a:latin typeface="Calibri" charset="0"/>
+                        <a:ea typeface="Calibri" charset="0"/>
+                        <a:cs typeface="Calibri" charset="0"/>
+                      </a:endParaRPr>
+                    </a:p>
+                  </a:txBody>
+                  <a:tcPr marL="91440" marR="91440" marT="45720" marB="45720" anchor="ctr">
+                    <a:lnL w="12700" cap="flat" cmpd="sng" algn="ctr">
+                      <a:solidFill>
+                        <a:srgbClr val="D9E1E8"/>
+                      </a:solidFill>
+                      <a:prstDash val="solid"/>
+                      <a:round/>
+                      <a:headEnd type="none" w="med" len="med"/>
+                      <a:tailEnd type="none" w="med" len="med"/>
+                    </a:lnL>
+                    <a:lnR w="12700" cap="flat" cmpd="sng" algn="ctr">
+                      <a:solidFill>
+                        <a:srgbClr val="D9E1E8"/>
+                      </a:solidFill>
+                      <a:prstDash val="solid"/>
+                      <a:round/>
+                      <a:headEnd type="none" w="med" len="med"/>
+                      <a:tailEnd type="none" w="med" len="med"/>
+                    </a:lnR>
+                    <a:lnT w="12700" cap="flat" cmpd="sng" algn="ctr">
+                      <a:solidFill>
+                        <a:srgbClr val="D9E1E8"/>
+                      </a:solidFill>
+                      <a:prstDash val="solid"/>
+                      <a:round/>
+                      <a:headEnd type="none" w="med" len="med"/>
+                      <a:tailEnd type="none" w="med" len="med"/>
+                    </a:lnT>
+                    <a:lnB w="12700" cap="flat" cmpd="sng" algn="ctr">
+                      <a:solidFill>
+                        <a:srgbClr val="D9E1E8"/>
+                      </a:solidFill>
+                      <a:prstDash val="solid"/>
+                      <a:round/>
+                      <a:headEnd type="none" w="med" len="med"/>
+                      <a:tailEnd type="none" w="med" len="med"/>
+                    </a:lnB>
+                    <a:solidFill>
+                      <a:srgbClr val="E2EFDA"/>
+                    </a:solidFill>
+                  </a:tcPr>
+                </a:tc>
+                <a:tc>
+                  <a:txBody>
+                    <a:bodyPr/>
+                    <a:lstStyle/>
+                    <a:p>
+                      <a:pPr algn="ctr" indent="0" marL="0">
+                        <a:buNone/>
+                      </a:pPr>
+                      <a:r>
+                        <a:rPr lang="en-US" sz="1100" dirty="0">
+                          <a:solidFill>
+                            <a:srgbClr val="000000"/>
+                          </a:solidFill>
+                          <a:latin typeface="Calibri" pitchFamily="34" charset="0"/>
+                          <a:ea typeface="Calibri" pitchFamily="34" charset="-122"/>
+                          <a:cs typeface="Calibri" pitchFamily="34" charset="-120"/>
+                        </a:rPr>
+                        <a:t>960</a:t>
+                      </a:r>
+                      <a:endParaRPr lang="en-US" sz="1100" dirty="0">
+                        <a:latin typeface="Calibri" charset="0"/>
+                        <a:ea typeface="Calibri" charset="0"/>
+                        <a:cs typeface="Calibri" charset="0"/>
+                      </a:endParaRPr>
+                    </a:p>
+                  </a:txBody>
+                  <a:tcPr marL="91440" marR="91440" marT="45720" marB="45720" anchor="ctr">
+                    <a:lnL w="12700" cap="flat" cmpd="sng" algn="ctr">
+                      <a:solidFill>
+                        <a:srgbClr val="D9E1E8"/>
+                      </a:solidFill>
+                      <a:prstDash val="solid"/>
+                      <a:round/>
+                      <a:headEnd type="none" w="med" len="med"/>
+                      <a:tailEnd type="none" w="med" len="med"/>
+                    </a:lnL>
+                    <a:lnR w="12700" cap="flat" cmpd="sng" algn="ctr">
+                      <a:solidFill>
+                        <a:srgbClr val="D9E1E8"/>
+                      </a:solidFill>
+                      <a:prstDash val="solid"/>
+                      <a:round/>
+                      <a:headEnd type="none" w="med" len="med"/>
+                      <a:tailEnd type="none" w="med" len="med"/>
+                    </a:lnR>
+                    <a:lnT w="12700" cap="flat" cmpd="sng" algn="ctr">
+                      <a:solidFill>
+                        <a:srgbClr val="D9E1E8"/>
+                      </a:solidFill>
+                      <a:prstDash val="solid"/>
+                      <a:round/>
+                      <a:headEnd type="none" w="med" len="med"/>
+                      <a:tailEnd type="none" w="med" len="med"/>
+                    </a:lnT>
+                    <a:lnB w="12700" cap="flat" cmpd="sng" algn="ctr">
+                      <a:solidFill>
+                        <a:srgbClr val="D9E1E8"/>
+                      </a:solidFill>
+                      <a:prstDash val="solid"/>
+                      <a:round/>
+                      <a:headEnd type="none" w="med" len="med"/>
+                      <a:tailEnd type="none" w="med" len="med"/>
+                    </a:lnB>
+                    <a:solidFill>
+                      <a:srgbClr val="E2EFDA"/>
+                    </a:solidFill>
+                  </a:tcPr>
+                </a:tc>
+                <a:tc>
+                  <a:txBody>
+                    <a:bodyPr/>
+                    <a:lstStyle/>
+                    <a:p>
+                      <a:pPr algn="ctr" indent="0" marL="0">
+                        <a:buNone/>
+                      </a:pPr>
+                      <a:r>
+                        <a:rPr lang="en-US" sz="1000" b="1" dirty="0">
+                          <a:solidFill>
+                            <a:srgbClr val="2E7D32"/>
+                          </a:solidFill>
+                          <a:latin typeface="Calibri" pitchFamily="34" charset="0"/>
+                          <a:ea typeface="Calibri" pitchFamily="34" charset="-122"/>
+                          <a:cs typeface="Calibri" pitchFamily="34" charset="-120"/>
+                        </a:rPr>
+                        <a:t>Önerilen edge ★</a:t>
+                      </a:r>
+                      <a:endParaRPr lang="en-US" sz="1000" dirty="0">
+                        <a:latin typeface="Calibri" charset="0"/>
+                        <a:ea typeface="Calibri" charset="0"/>
+                        <a:cs typeface="Calibri" charset="0"/>
+                      </a:endParaRPr>
+                    </a:p>
+                  </a:txBody>
+                  <a:tcPr marL="91440" marR="91440" marT="45720" marB="45720" anchor="ctr">
+                    <a:lnL w="12700" cap="flat" cmpd="sng" algn="ctr">
+                      <a:solidFill>
+                        <a:srgbClr val="D9E1E8"/>
+                      </a:solidFill>
+                      <a:prstDash val="solid"/>
+                      <a:round/>
+                      <a:headEnd type="none" w="med" len="med"/>
+                      <a:tailEnd type="none" w="med" len="med"/>
+                    </a:lnL>
+                    <a:lnR w="12700" cap="flat" cmpd="sng" algn="ctr">
+                      <a:solidFill>
+                        <a:srgbClr val="D9E1E8"/>
+                      </a:solidFill>
+                      <a:prstDash val="solid"/>
+                      <a:round/>
+                      <a:headEnd type="none" w="med" len="med"/>
+                      <a:tailEnd type="none" w="med" len="med"/>
+                    </a:lnR>
+                    <a:lnT w="12700" cap="flat" cmpd="sng" algn="ctr">
+                      <a:solidFill>
+                        <a:srgbClr val="D9E1E8"/>
+                      </a:solidFill>
+                      <a:prstDash val="solid"/>
+                      <a:round/>
+                      <a:headEnd type="none" w="med" len="med"/>
+                      <a:tailEnd type="none" w="med" len="med"/>
+                    </a:lnT>
+                    <a:lnB w="12700" cap="flat" cmpd="sng" algn="ctr">
+                      <a:solidFill>
+                        <a:srgbClr val="D9E1E8"/>
+                      </a:solidFill>
+                      <a:prstDash val="solid"/>
+                      <a:round/>
+                      <a:headEnd type="none" w="med" len="med"/>
+                      <a:tailEnd type="none" w="med" len="med"/>
+                    </a:lnB>
+                    <a:solidFill>
+                      <a:srgbClr val="E2EFDA"/>
+                    </a:solidFill>
+                  </a:tcPr>
+                </a:tc>
+              </a:tr>
+              <a:tr h="411480">
+                <a:tc>
+                  <a:txBody>
+                    <a:bodyPr/>
+                    <a:lstStyle/>
+                    <a:p>
+                      <a:pPr indent="0" marL="0">
+                        <a:buNone/>
+                      </a:pPr>
+                      <a:r>
+                        <a:rPr lang="en-US" sz="1100" dirty="0">
+                          <a:solidFill>
+                            <a:srgbClr val="000000"/>
+                          </a:solidFill>
+                          <a:latin typeface="Calibri" pitchFamily="34" charset="0"/>
+                          <a:ea typeface="Calibri" pitchFamily="34" charset="-122"/>
+                          <a:cs typeface="Calibri" pitchFamily="34" charset="-120"/>
+                        </a:rPr>
+                        <a:t>Qwen2.5-1.5B</a:t>
+                      </a:r>
+                      <a:endParaRPr lang="en-US" sz="1100" dirty="0">
+                        <a:latin typeface="Calibri" charset="0"/>
+                        <a:ea typeface="Calibri" charset="0"/>
+                        <a:cs typeface="Calibri" charset="0"/>
+                      </a:endParaRPr>
+                    </a:p>
+                  </a:txBody>
+                  <a:tcPr marL="91440" marR="91440" marT="45720" marB="45720" anchor="ctr">
+                    <a:lnL w="12700" cap="flat" cmpd="sng" algn="ctr">
+                      <a:solidFill>
+                        <a:srgbClr val="D9E1E8"/>
+                      </a:solidFill>
+                      <a:prstDash val="solid"/>
+                      <a:round/>
+                      <a:headEnd type="none" w="med" len="med"/>
+                      <a:tailEnd type="none" w="med" len="med"/>
+                    </a:lnL>
+                    <a:lnR w="12700" cap="flat" cmpd="sng" algn="ctr">
+                      <a:solidFill>
+                        <a:srgbClr val="D9E1E8"/>
+                      </a:solidFill>
+                      <a:prstDash val="solid"/>
+                      <a:round/>
+                      <a:headEnd type="none" w="med" len="med"/>
+                      <a:tailEnd type="none" w="med" len="med"/>
+                    </a:lnR>
+                    <a:lnT w="12700" cap="flat" cmpd="sng" algn="ctr">
+                      <a:solidFill>
+                        <a:srgbClr val="D9E1E8"/>
+                      </a:solidFill>
+                      <a:prstDash val="solid"/>
+                      <a:round/>
+                      <a:headEnd type="none" w="med" len="med"/>
+                      <a:tailEnd type="none" w="med" len="med"/>
+                    </a:lnT>
+                    <a:lnB w="12700" cap="flat" cmpd="sng" algn="ctr">
+                      <a:solidFill>
+                        <a:srgbClr val="D9E1E8"/>
+                      </a:solidFill>
+                      <a:prstDash val="solid"/>
+                      <a:round/>
+                      <a:headEnd type="none" w="med" len="med"/>
+                      <a:tailEnd type="none" w="med" len="med"/>
+                    </a:lnB>
+                    <a:solidFill>
+                      <a:srgbClr val="FFFFFF"/>
+                    </a:solidFill>
+                  </a:tcPr>
+                </a:tc>
+                <a:tc>
+                  <a:txBody>
+                    <a:bodyPr/>
+                    <a:lstStyle/>
+                    <a:p>
+                      <a:pPr algn="ctr" indent="0" marL="0">
+                        <a:buNone/>
+                      </a:pPr>
+                      <a:r>
+                        <a:rPr lang="en-US" sz="1100" dirty="0">
+                          <a:solidFill>
+                            <a:srgbClr val="000000"/>
+                          </a:solidFill>
+                          <a:latin typeface="Calibri" pitchFamily="34" charset="0"/>
+                          <a:ea typeface="Calibri" pitchFamily="34" charset="-122"/>
+                          <a:cs typeface="Calibri" pitchFamily="34" charset="-120"/>
+                        </a:rPr>
+                        <a:t>5.07 GB</a:t>
+                      </a:r>
+                      <a:endParaRPr lang="en-US" sz="1100" dirty="0">
+                        <a:latin typeface="Calibri" charset="0"/>
+                        <a:ea typeface="Calibri" charset="0"/>
+                        <a:cs typeface="Calibri" charset="0"/>
+                      </a:endParaRPr>
+                    </a:p>
+                  </a:txBody>
+                  <a:tcPr marL="91440" marR="91440" marT="45720" marB="45720" anchor="ctr">
+                    <a:lnL w="12700" cap="flat" cmpd="sng" algn="ctr">
+                      <a:solidFill>
+                        <a:srgbClr val="D9E1E8"/>
+                      </a:solidFill>
+                      <a:prstDash val="solid"/>
+                      <a:round/>
+                      <a:headEnd type="none" w="med" len="med"/>
+                      <a:tailEnd type="none" w="med" len="med"/>
+                    </a:lnL>
+                    <a:lnR w="12700" cap="flat" cmpd="sng" algn="ctr">
+                      <a:solidFill>
+                        <a:srgbClr val="D9E1E8"/>
+                      </a:solidFill>
+                      <a:prstDash val="solid"/>
+                      <a:round/>
+                      <a:headEnd type="none" w="med" len="med"/>
+                      <a:tailEnd type="none" w="med" len="med"/>
+                    </a:lnR>
+                    <a:lnT w="12700" cap="flat" cmpd="sng" algn="ctr">
+                      <a:solidFill>
+                        <a:srgbClr val="D9E1E8"/>
+                      </a:solidFill>
+                      <a:prstDash val="solid"/>
+                      <a:round/>
+                      <a:headEnd type="none" w="med" len="med"/>
+                      <a:tailEnd type="none" w="med" len="med"/>
+                    </a:lnT>
+                    <a:lnB w="12700" cap="flat" cmpd="sng" algn="ctr">
+                      <a:solidFill>
+                        <a:srgbClr val="D9E1E8"/>
+                      </a:solidFill>
+                      <a:prstDash val="solid"/>
+                      <a:round/>
+                      <a:headEnd type="none" w="med" len="med"/>
+                      <a:tailEnd type="none" w="med" len="med"/>
+                    </a:lnB>
+                    <a:solidFill>
+                      <a:srgbClr val="FFFFFF"/>
+                    </a:solidFill>
+                  </a:tcPr>
+                </a:tc>
+                <a:tc>
+                  <a:txBody>
+                    <a:bodyPr/>
+                    <a:lstStyle/>
+                    <a:p>
+                      <a:pPr algn="ctr" indent="0" marL="0">
+                        <a:buNone/>
+                      </a:pPr>
+                      <a:r>
+                        <a:rPr lang="en-US" sz="1100" dirty="0">
+                          <a:solidFill>
+                            <a:srgbClr val="000000"/>
+                          </a:solidFill>
+                          <a:latin typeface="Calibri" pitchFamily="34" charset="0"/>
+                          <a:ea typeface="Calibri" pitchFamily="34" charset="-122"/>
+                          <a:cs typeface="Calibri" pitchFamily="34" charset="-120"/>
+                        </a:rPr>
+                        <a:t>8.7 MB</a:t>
+                      </a:r>
+                      <a:endParaRPr lang="en-US" sz="1100" dirty="0">
+                        <a:latin typeface="Calibri" charset="0"/>
+                        <a:ea typeface="Calibri" charset="0"/>
+                        <a:cs typeface="Calibri" charset="0"/>
+                      </a:endParaRPr>
+                    </a:p>
+                  </a:txBody>
+                  <a:tcPr marL="91440" marR="91440" marT="45720" marB="45720" anchor="ctr">
+                    <a:lnL w="12700" cap="flat" cmpd="sng" algn="ctr">
+                      <a:solidFill>
+                        <a:srgbClr val="D9E1E8"/>
+                      </a:solidFill>
+                      <a:prstDash val="solid"/>
+                      <a:round/>
+                      <a:headEnd type="none" w="med" len="med"/>
+                      <a:tailEnd type="none" w="med" len="med"/>
+                    </a:lnL>
+                    <a:lnR w="12700" cap="flat" cmpd="sng" algn="ctr">
+                      <a:solidFill>
+                        <a:srgbClr val="D9E1E8"/>
+                      </a:solidFill>
+                      <a:prstDash val="solid"/>
+                      <a:round/>
+                      <a:headEnd type="none" w="med" len="med"/>
+                      <a:tailEnd type="none" w="med" len="med"/>
+                    </a:lnR>
+                    <a:lnT w="12700" cap="flat" cmpd="sng" algn="ctr">
+                      <a:solidFill>
+                        <a:srgbClr val="D9E1E8"/>
+                      </a:solidFill>
+                      <a:prstDash val="solid"/>
+                      <a:round/>
+                      <a:headEnd type="none" w="med" len="med"/>
+                      <a:tailEnd type="none" w="med" len="med"/>
+                    </a:lnT>
+                    <a:lnB w="12700" cap="flat" cmpd="sng" algn="ctr">
+                      <a:solidFill>
+                        <a:srgbClr val="D9E1E8"/>
+                      </a:solidFill>
+                      <a:prstDash val="solid"/>
+                      <a:round/>
+                      <a:headEnd type="none" w="med" len="med"/>
+                      <a:tailEnd type="none" w="med" len="med"/>
+                    </a:lnB>
+                    <a:solidFill>
+                      <a:srgbClr val="FFFFFF"/>
+                    </a:solidFill>
+                  </a:tcPr>
+                </a:tc>
+                <a:tc>
+                  <a:txBody>
+                    <a:bodyPr/>
+                    <a:lstStyle/>
+                    <a:p>
+                      <a:pPr algn="ctr" indent="0" marL="0">
+                        <a:buNone/>
+                      </a:pPr>
+                      <a:r>
+                        <a:rPr lang="en-US" sz="1100" dirty="0">
+                          <a:solidFill>
+                            <a:srgbClr val="000000"/>
+                          </a:solidFill>
+                          <a:latin typeface="Calibri" pitchFamily="34" charset="0"/>
+                          <a:ea typeface="Calibri" pitchFamily="34" charset="-122"/>
+                          <a:cs typeface="Calibri" pitchFamily="34" charset="-120"/>
+                        </a:rPr>
+                        <a:t>1120</a:t>
+                      </a:r>
+                      <a:endParaRPr lang="en-US" sz="1100" dirty="0">
+                        <a:latin typeface="Calibri" charset="0"/>
+                        <a:ea typeface="Calibri" charset="0"/>
+                        <a:cs typeface="Calibri" charset="0"/>
+                      </a:endParaRPr>
+                    </a:p>
+                  </a:txBody>
+                  <a:tcPr marL="91440" marR="91440" marT="45720" marB="45720" anchor="ctr">
+                    <a:lnL w="12700" cap="flat" cmpd="sng" algn="ctr">
+                      <a:solidFill>
+                        <a:srgbClr val="D9E1E8"/>
+                      </a:solidFill>
+                      <a:prstDash val="solid"/>
+                      <a:round/>
+                      <a:headEnd type="none" w="med" len="med"/>
+                      <a:tailEnd type="none" w="med" len="med"/>
+                    </a:lnL>
+                    <a:lnR w="12700" cap="flat" cmpd="sng" algn="ctr">
+                      <a:solidFill>
+                        <a:srgbClr val="D9E1E8"/>
+                      </a:solidFill>
+                      <a:prstDash val="solid"/>
+                      <a:round/>
+                      <a:headEnd type="none" w="med" len="med"/>
+                      <a:tailEnd type="none" w="med" len="med"/>
+                    </a:lnR>
+                    <a:lnT w="12700" cap="flat" cmpd="sng" algn="ctr">
+                      <a:solidFill>
+                        <a:srgbClr val="D9E1E8"/>
+                      </a:solidFill>
+                      <a:prstDash val="solid"/>
+                      <a:round/>
+                      <a:headEnd type="none" w="med" len="med"/>
+                      <a:tailEnd type="none" w="med" len="med"/>
+                    </a:lnT>
+                    <a:lnB w="12700" cap="flat" cmpd="sng" algn="ctr">
+                      <a:solidFill>
+                        <a:srgbClr val="D9E1E8"/>
+                      </a:solidFill>
+                      <a:prstDash val="solid"/>
+                      <a:round/>
+                      <a:headEnd type="none" w="med" len="med"/>
+                      <a:tailEnd type="none" w="med" len="med"/>
+                    </a:lnB>
+                    <a:solidFill>
+                      <a:srgbClr val="FFFFFF"/>
+                    </a:solidFill>
+                  </a:tcPr>
+                </a:tc>
+                <a:tc>
+                  <a:txBody>
+                    <a:bodyPr/>
+                    <a:lstStyle/>
+                    <a:p>
+                      <a:pPr algn="ctr" indent="0" marL="0">
+                        <a:buNone/>
+                      </a:pPr>
+                      <a:r>
+                        <a:rPr lang="en-US" sz="1000" dirty="0">
+                          <a:solidFill>
+                            <a:srgbClr val="5B6B7B"/>
+                          </a:solidFill>
+                          <a:latin typeface="Calibri" pitchFamily="34" charset="0"/>
+                          <a:ea typeface="Calibri" pitchFamily="34" charset="-122"/>
+                          <a:cs typeface="Calibri" pitchFamily="34" charset="-120"/>
+                        </a:rPr>
+                        <a:t>Tablet / laptop</a:t>
+                      </a:r>
+                      <a:endParaRPr lang="en-US" sz="1000" dirty="0">
+                        <a:latin typeface="Calibri" charset="0"/>
+                        <a:ea typeface="Calibri" charset="0"/>
+                        <a:cs typeface="Calibri" charset="0"/>
+                      </a:endParaRPr>
+                    </a:p>
+                  </a:txBody>
+                  <a:tcPr marL="91440" marR="91440" marT="45720" marB="45720" anchor="ctr">
+                    <a:lnL w="12700" cap="flat" cmpd="sng" algn="ctr">
+                      <a:solidFill>
+                        <a:srgbClr val="D9E1E8"/>
+                      </a:solidFill>
+                      <a:prstDash val="solid"/>
+                      <a:round/>
+                      <a:headEnd type="none" w="med" len="med"/>
+                      <a:tailEnd type="none" w="med" len="med"/>
+                    </a:lnL>
+                    <a:lnR w="12700" cap="flat" cmpd="sng" algn="ctr">
+                      <a:solidFill>
+                        <a:srgbClr val="D9E1E8"/>
+                      </a:solidFill>
+                      <a:prstDash val="solid"/>
+                      <a:round/>
+                      <a:headEnd type="none" w="med" len="med"/>
+                      <a:tailEnd type="none" w="med" len="med"/>
+                    </a:lnR>
+                    <a:lnT w="12700" cap="flat" cmpd="sng" algn="ctr">
+                      <a:solidFill>
+                        <a:srgbClr val="D9E1E8"/>
+                      </a:solidFill>
+                      <a:prstDash val="solid"/>
+                      <a:round/>
+                      <a:headEnd type="none" w="med" len="med"/>
+                      <a:tailEnd type="none" w="med" len="med"/>
+                    </a:lnT>
+                    <a:lnB w="12700" cap="flat" cmpd="sng" algn="ctr">
+                      <a:solidFill>
+                        <a:srgbClr val="D9E1E8"/>
+                      </a:solidFill>
+                      <a:prstDash val="solid"/>
+                      <a:round/>
+                      <a:headEnd type="none" w="med" len="med"/>
+                      <a:tailEnd type="none" w="med" len="med"/>
+                    </a:lnB>
+                    <a:solidFill>
+                      <a:srgbClr val="FFFFFF"/>
+                    </a:solidFill>
+                  </a:tcPr>
+                </a:tc>
+              </a:tr>
+              <a:tr h="411480">
+                <a:tc>
+                  <a:txBody>
+                    <a:bodyPr/>
+                    <a:lstStyle/>
+                    <a:p>
+                      <a:pPr indent="0" marL="0">
+                        <a:buNone/>
+                      </a:pPr>
+                      <a:r>
+                        <a:rPr lang="en-US" sz="1100" dirty="0">
+                          <a:solidFill>
+                            <a:srgbClr val="000000"/>
+                          </a:solidFill>
+                          <a:latin typeface="Calibri" pitchFamily="34" charset="0"/>
+                          <a:ea typeface="Calibri" pitchFamily="34" charset="-122"/>
+                          <a:cs typeface="Calibri" pitchFamily="34" charset="-120"/>
+                        </a:rPr>
+                        <a:t>Gemma-4-E2B</a:t>
+                      </a:r>
+                      <a:endParaRPr lang="en-US" sz="1100" dirty="0">
+                        <a:latin typeface="Calibri" charset="0"/>
+                        <a:ea typeface="Calibri" charset="0"/>
+                        <a:cs typeface="Calibri" charset="0"/>
+                      </a:endParaRPr>
+                    </a:p>
+                  </a:txBody>
+                  <a:tcPr marL="91440" marR="91440" marT="45720" marB="45720" anchor="ctr">
+                    <a:lnL w="12700" cap="flat" cmpd="sng" algn="ctr">
+                      <a:solidFill>
+                        <a:srgbClr val="D9E1E8"/>
+                      </a:solidFill>
+                      <a:prstDash val="solid"/>
+                      <a:round/>
+                      <a:headEnd type="none" w="med" len="med"/>
+                      <a:tailEnd type="none" w="med" len="med"/>
+                    </a:lnL>
+                    <a:lnR w="12700" cap="flat" cmpd="sng" algn="ctr">
+                      <a:solidFill>
+                        <a:srgbClr val="D9E1E8"/>
+                      </a:solidFill>
+                      <a:prstDash val="solid"/>
+                      <a:round/>
+                      <a:headEnd type="none" w="med" len="med"/>
+                      <a:tailEnd type="none" w="med" len="med"/>
+                    </a:lnR>
+                    <a:lnT w="12700" cap="flat" cmpd="sng" algn="ctr">
+                      <a:solidFill>
+                        <a:srgbClr val="D9E1E8"/>
+                      </a:solidFill>
+                      <a:prstDash val="solid"/>
+                      <a:round/>
+                      <a:headEnd type="none" w="med" len="med"/>
+                      <a:tailEnd type="none" w="med" len="med"/>
+                    </a:lnT>
+                    <a:lnB w="12700" cap="flat" cmpd="sng" algn="ctr">
+                      <a:solidFill>
+                        <a:srgbClr val="D9E1E8"/>
+                      </a:solidFill>
+                      <a:prstDash val="solid"/>
+                      <a:round/>
+                      <a:headEnd type="none" w="med" len="med"/>
+                      <a:tailEnd type="none" w="med" len="med"/>
+                    </a:lnB>
+                    <a:solidFill>
+                      <a:srgbClr val="FFFFFF"/>
+                    </a:solidFill>
+                  </a:tcPr>
+                </a:tc>
+                <a:tc>
+                  <a:txBody>
+                    <a:bodyPr/>
+                    <a:lstStyle/>
+                    <a:p>
+                      <a:pPr algn="ctr" indent="0" marL="0">
+                        <a:buNone/>
+                      </a:pPr>
+                      <a:r>
+                        <a:rPr lang="en-US" sz="1100" dirty="0">
+                          <a:solidFill>
+                            <a:srgbClr val="000000"/>
+                          </a:solidFill>
+                          <a:latin typeface="Calibri" pitchFamily="34" charset="0"/>
+                          <a:ea typeface="Calibri" pitchFamily="34" charset="-122"/>
+                          <a:cs typeface="Calibri" pitchFamily="34" charset="-120"/>
+                        </a:rPr>
+                        <a:t>9.73 GB</a:t>
+                      </a:r>
+                      <a:endParaRPr lang="en-US" sz="1100" dirty="0">
+                        <a:latin typeface="Calibri" charset="0"/>
+                        <a:ea typeface="Calibri" charset="0"/>
+                        <a:cs typeface="Calibri" charset="0"/>
+                      </a:endParaRPr>
+                    </a:p>
+                  </a:txBody>
+                  <a:tcPr marL="91440" marR="91440" marT="45720" marB="45720" anchor="ctr">
+                    <a:lnL w="12700" cap="flat" cmpd="sng" algn="ctr">
+                      <a:solidFill>
+                        <a:srgbClr val="D9E1E8"/>
+                      </a:solidFill>
+                      <a:prstDash val="solid"/>
+                      <a:round/>
+                      <a:headEnd type="none" w="med" len="med"/>
+                      <a:tailEnd type="none" w="med" len="med"/>
+                    </a:lnL>
+                    <a:lnR w="12700" cap="flat" cmpd="sng" algn="ctr">
+                      <a:solidFill>
+                        <a:srgbClr val="D9E1E8"/>
+                      </a:solidFill>
+                      <a:prstDash val="solid"/>
+                      <a:round/>
+                      <a:headEnd type="none" w="med" len="med"/>
+                      <a:tailEnd type="none" w="med" len="med"/>
+                    </a:lnR>
+                    <a:lnT w="12700" cap="flat" cmpd="sng" algn="ctr">
+                      <a:solidFill>
+                        <a:srgbClr val="D9E1E8"/>
+                      </a:solidFill>
+                      <a:prstDash val="solid"/>
+                      <a:round/>
+                      <a:headEnd type="none" w="med" len="med"/>
+                      <a:tailEnd type="none" w="med" len="med"/>
+                    </a:lnT>
+                    <a:lnB w="12700" cap="flat" cmpd="sng" algn="ctr">
+                      <a:solidFill>
+                        <a:srgbClr val="D9E1E8"/>
+                      </a:solidFill>
+                      <a:prstDash val="solid"/>
+                      <a:round/>
+                      <a:headEnd type="none" w="med" len="med"/>
+                      <a:tailEnd type="none" w="med" len="med"/>
+                    </a:lnB>
+                    <a:solidFill>
+                      <a:srgbClr val="FFFFFF"/>
+                    </a:solidFill>
+                  </a:tcPr>
+                </a:tc>
+                <a:tc>
+                  <a:txBody>
+                    <a:bodyPr/>
+                    <a:lstStyle/>
+                    <a:p>
+                      <a:pPr algn="ctr" indent="0" marL="0">
+                        <a:buNone/>
+                      </a:pPr>
+                      <a:r>
+                        <a:rPr lang="en-US" sz="1100" dirty="0">
+                          <a:solidFill>
+                            <a:srgbClr val="000000"/>
+                          </a:solidFill>
+                          <a:latin typeface="Calibri" pitchFamily="34" charset="0"/>
+                          <a:ea typeface="Calibri" pitchFamily="34" charset="-122"/>
+                          <a:cs typeface="Calibri" pitchFamily="34" charset="-120"/>
+                        </a:rPr>
+                        <a:t>62.1 MB</a:t>
+                      </a:r>
+                      <a:endParaRPr lang="en-US" sz="1100" dirty="0">
+                        <a:latin typeface="Calibri" charset="0"/>
+                        <a:ea typeface="Calibri" charset="0"/>
+                        <a:cs typeface="Calibri" charset="0"/>
+                      </a:endParaRPr>
+                    </a:p>
+                  </a:txBody>
+                  <a:tcPr marL="91440" marR="91440" marT="45720" marB="45720" anchor="ctr">
+                    <a:lnL w="12700" cap="flat" cmpd="sng" algn="ctr">
+                      <a:solidFill>
+                        <a:srgbClr val="D9E1E8"/>
+                      </a:solidFill>
+                      <a:prstDash val="solid"/>
+                      <a:round/>
+                      <a:headEnd type="none" w="med" len="med"/>
+                      <a:tailEnd type="none" w="med" len="med"/>
+                    </a:lnL>
+                    <a:lnR w="12700" cap="flat" cmpd="sng" algn="ctr">
+                      <a:solidFill>
+                        <a:srgbClr val="D9E1E8"/>
+                      </a:solidFill>
+                      <a:prstDash val="solid"/>
+                      <a:round/>
+                      <a:headEnd type="none" w="med" len="med"/>
+                      <a:tailEnd type="none" w="med" len="med"/>
+                    </a:lnR>
+                    <a:lnT w="12700" cap="flat" cmpd="sng" algn="ctr">
+                      <a:solidFill>
+                        <a:srgbClr val="D9E1E8"/>
+                      </a:solidFill>
+                      <a:prstDash val="solid"/>
+                      <a:round/>
+                      <a:headEnd type="none" w="med" len="med"/>
+                      <a:tailEnd type="none" w="med" len="med"/>
+                    </a:lnT>
+                    <a:lnB w="12700" cap="flat" cmpd="sng" algn="ctr">
+                      <a:solidFill>
+                        <a:srgbClr val="D9E1E8"/>
+                      </a:solidFill>
+                      <a:prstDash val="solid"/>
+                      <a:round/>
+                      <a:headEnd type="none" w="med" len="med"/>
+                      <a:tailEnd type="none" w="med" len="med"/>
+                    </a:lnB>
+                    <a:solidFill>
+                      <a:srgbClr val="FFFFFF"/>
+                    </a:solidFill>
+                  </a:tcPr>
+                </a:tc>
+                <a:tc>
+                  <a:txBody>
+                    <a:bodyPr/>
+                    <a:lstStyle/>
+                    <a:p>
+                      <a:pPr algn="ctr" indent="0" marL="0">
+                        <a:buNone/>
+                      </a:pPr>
+                      <a:r>
+                        <a:rPr lang="en-US" sz="1100" dirty="0">
+                          <a:solidFill>
+                            <a:srgbClr val="000000"/>
+                          </a:solidFill>
+                          <a:latin typeface="Calibri" pitchFamily="34" charset="0"/>
+                          <a:ea typeface="Calibri" pitchFamily="34" charset="-122"/>
+                          <a:cs typeface="Calibri" pitchFamily="34" charset="-120"/>
+                        </a:rPr>
+                        <a:t>1798</a:t>
+                      </a:r>
+                      <a:endParaRPr lang="en-US" sz="1100" dirty="0">
+                        <a:latin typeface="Calibri" charset="0"/>
+                        <a:ea typeface="Calibri" charset="0"/>
+                        <a:cs typeface="Calibri" charset="0"/>
+                      </a:endParaRPr>
+                    </a:p>
+                  </a:txBody>
+                  <a:tcPr marL="91440" marR="91440" marT="45720" marB="45720" anchor="ctr">
+                    <a:lnL w="12700" cap="flat" cmpd="sng" algn="ctr">
+                      <a:solidFill>
+                        <a:srgbClr val="D9E1E8"/>
+                      </a:solidFill>
+                      <a:prstDash val="solid"/>
+                      <a:round/>
+                      <a:headEnd type="none" w="med" len="med"/>
+                      <a:tailEnd type="none" w="med" len="med"/>
+                    </a:lnL>
+                    <a:lnR w="12700" cap="flat" cmpd="sng" algn="ctr">
+                      <a:solidFill>
+                        <a:srgbClr val="D9E1E8"/>
+                      </a:solidFill>
+                      <a:prstDash val="solid"/>
+                      <a:round/>
+                      <a:headEnd type="none" w="med" len="med"/>
+                      <a:tailEnd type="none" w="med" len="med"/>
+                    </a:lnR>
+                    <a:lnT w="12700" cap="flat" cmpd="sng" algn="ctr">
+                      <a:solidFill>
+                        <a:srgbClr val="D9E1E8"/>
+                      </a:solidFill>
+                      <a:prstDash val="solid"/>
+                      <a:round/>
+                      <a:headEnd type="none" w="med" len="med"/>
+                      <a:tailEnd type="none" w="med" len="med"/>
+                    </a:lnT>
+                    <a:lnB w="12700" cap="flat" cmpd="sng" algn="ctr">
+                      <a:solidFill>
+                        <a:srgbClr val="D9E1E8"/>
+                      </a:solidFill>
+                      <a:prstDash val="solid"/>
+                      <a:round/>
+                      <a:headEnd type="none" w="med" len="med"/>
+                      <a:tailEnd type="none" w="med" len="med"/>
+                    </a:lnB>
+                    <a:solidFill>
+                      <a:srgbClr val="FFFFFF"/>
+                    </a:solidFill>
+                  </a:tcPr>
+                </a:tc>
+                <a:tc>
+                  <a:txBody>
+                    <a:bodyPr/>
+                    <a:lstStyle/>
+                    <a:p>
+                      <a:pPr algn="ctr" indent="0" marL="0">
+                        <a:buNone/>
+                      </a:pPr>
+                      <a:r>
+                        <a:rPr lang="en-US" sz="1000" dirty="0">
+                          <a:solidFill>
+                            <a:srgbClr val="C0392B"/>
+                          </a:solidFill>
+                          <a:latin typeface="Calibri" pitchFamily="34" charset="0"/>
+                          <a:ea typeface="Calibri" pitchFamily="34" charset="-122"/>
+                          <a:cs typeface="Calibri" pitchFamily="34" charset="-120"/>
+                        </a:rPr>
+                        <a:t>Edge için uygun değil</a:t>
+                      </a:r>
+                      <a:endParaRPr lang="en-US" sz="1000" dirty="0">
+                        <a:latin typeface="Calibri" charset="0"/>
+                        <a:ea typeface="Calibri" charset="0"/>
+                        <a:cs typeface="Calibri" charset="0"/>
+                      </a:endParaRPr>
+                    </a:p>
+                  </a:txBody>
+                  <a:tcPr marL="91440" marR="91440" marT="45720" marB="45720" anchor="ctr">
+                    <a:lnL w="12700" cap="flat" cmpd="sng" algn="ctr">
+                      <a:solidFill>
+                        <a:srgbClr val="D9E1E8"/>
+                      </a:solidFill>
+                      <a:prstDash val="solid"/>
+                      <a:round/>
+                      <a:headEnd type="none" w="med" len="med"/>
+                      <a:tailEnd type="none" w="med" len="med"/>
+                    </a:lnL>
+                    <a:lnR w="12700" cap="flat" cmpd="sng" algn="ctr">
+                      <a:solidFill>
+                        <a:srgbClr val="D9E1E8"/>
+                      </a:solidFill>
+                      <a:prstDash val="solid"/>
+                      <a:round/>
+                      <a:headEnd type="none" w="med" len="med"/>
+                      <a:tailEnd type="none" w="med" len="med"/>
+                    </a:lnR>
+                    <a:lnT w="12700" cap="flat" cmpd="sng" algn="ctr">
+                      <a:solidFill>
+                        <a:srgbClr val="D9E1E8"/>
+                      </a:solidFill>
+                      <a:prstDash val="solid"/>
+                      <a:round/>
+                      <a:headEnd type="none" w="med" len="med"/>
+                      <a:tailEnd type="none" w="med" len="med"/>
+                    </a:lnT>
+                    <a:lnB w="12700" cap="flat" cmpd="sng" algn="ctr">
+                      <a:solidFill>
+                        <a:srgbClr val="D9E1E8"/>
+                      </a:solidFill>
+                      <a:prstDash val="solid"/>
+                      <a:round/>
+                      <a:headEnd type="none" w="med" len="med"/>
+                      <a:tailEnd type="none" w="med" len="med"/>
+                    </a:lnB>
+                    <a:solidFill>
+                      <a:srgbClr val="FFFFFF"/>
+                    </a:solidFill>
+                  </a:tcPr>
+                </a:tc>
+              </a:tr>
+            </a:tbl>
+          </a:graphicData>
+        </a:graphic>
+      </p:graphicFrame>
+      <p:sp>
+        <p:nvSpPr>
+          <p:cNvPr id="8" name="Text 5"/>
           <p:cNvSpPr/>
           <p:nvPr/>
         </p:nvSpPr>
         <p:spPr>
           <a:xfrm>
-            <a:off x="6217920" y="1691640"/>
-            <a:ext cx="5394960" cy="4023360"/>
-          </a:xfrm>
-          <a:prstGeom prst="roundRect">
-            <a:avLst>
-              <a:gd name="adj" fmla="val 1818"/>
-            </a:avLst>
-          </a:prstGeom>
-          <a:solidFill>
-            <a:srgbClr val="0F2741"/>
-          </a:solidFill>
-          <a:ln/>
-        </p:spPr>
-      </p:sp>
-      <p:sp>
-        <p:nvSpPr>
-          <p:cNvPr id="10" name="Text 8"/>
-          <p:cNvSpPr/>
-          <p:nvPr/>
-        </p:nvSpPr>
-        <p:spPr>
-          <a:xfrm>
-            <a:off x="6492240" y="1920240"/>
-            <a:ext cx="4846320" cy="365760"/>
+            <a:off x="640080" y="4114800"/>
+            <a:ext cx="7315200" cy="640080"/>
           </a:xfrm>
           <a:prstGeom prst="rect">
             <a:avLst/>
@@ -4977,7 +6568,68 @@
               <a:buNone/>
             </a:pPr>
             <a:r>
-              <a:rPr lang="en-US" sz="1400" b="1" spc="100" kern="0" dirty="0">
+              <a:rPr lang="en-US" sz="1100" i="1" dirty="0">
+                <a:solidFill>
+                  <a:srgbClr val="5B6B7B"/>
+                </a:solidFill>
+                <a:latin typeface="Calibri" pitchFamily="34" charset="0"/>
+                <a:ea typeface="Calibri" pitchFamily="34" charset="-122"/>
+                <a:cs typeface="Calibri" pitchFamily="34" charset="-120"/>
+              </a:rPr>
+              <a:t>Önerilen edge varsayılanı: TinyLlama-1.1B — Qwen'e yakın skor (0.91), 4-bit base + adaptör ≈ 560 MB toplam.</a:t>
+            </a:r>
+            <a:endParaRPr lang="en-US" sz="1100" dirty="0"/>
+          </a:p>
+        </p:txBody>
+      </p:sp>
+      <p:sp>
+        <p:nvSpPr>
+          <p:cNvPr id="9" name="Shape 6"/>
+          <p:cNvSpPr/>
+          <p:nvPr/>
+        </p:nvSpPr>
+        <p:spPr>
+          <a:xfrm>
+            <a:off x="8138160" y="1691640"/>
+            <a:ext cx="3657600" cy="4206240"/>
+          </a:xfrm>
+          <a:prstGeom prst="roundRect">
+            <a:avLst>
+              <a:gd name="adj" fmla="val 2000"/>
+            </a:avLst>
+          </a:prstGeom>
+          <a:solidFill>
+            <a:srgbClr val="0F2741"/>
+          </a:solidFill>
+          <a:ln/>
+        </p:spPr>
+      </p:sp>
+      <p:sp>
+        <p:nvSpPr>
+          <p:cNvPr id="10" name="Text 7"/>
+          <p:cNvSpPr/>
+          <p:nvPr/>
+        </p:nvSpPr>
+        <p:spPr>
+          <a:xfrm>
+            <a:off x="8321040" y="1874520"/>
+            <a:ext cx="3383280" cy="274320"/>
+          </a:xfrm>
+          <a:prstGeom prst="rect">
+            <a:avLst/>
+          </a:prstGeom>
+          <a:noFill/>
+          <a:ln/>
+        </p:spPr>
+        <p:txBody>
+          <a:bodyPr wrap="square" rtlCol="0" anchor="ctr"/>
+          <a:lstStyle/>
+          <a:p>
+            <a:pPr indent="0" marL="0">
+              <a:buNone/>
+            </a:pPr>
+            <a:r>
+              <a:rPr lang="en-US" sz="1200" b="1" spc="100" kern="0" dirty="0">
                 <a:solidFill>
                   <a:srgbClr val="E8833A"/>
                 </a:solidFill>
@@ -4985,22 +6637,22 @@
                 <a:ea typeface="Calibri" pitchFamily="34" charset="-122"/>
                 <a:cs typeface="Calibri" pitchFamily="34" charset="-120"/>
               </a:rPr>
-              <a:t>ETİK</a:t>
+              <a:t>LİMİTASYONLAR</a:t>
             </a:r>
-            <a:endParaRPr lang="en-US" sz="1400" dirty="0"/>
+            <a:endParaRPr lang="en-US" sz="1200" dirty="0"/>
           </a:p>
         </p:txBody>
       </p:sp>
       <p:sp>
         <p:nvSpPr>
-          <p:cNvPr id="11" name="Text 9"/>
+          <p:cNvPr id="11" name="Text 8"/>
           <p:cNvSpPr/>
           <p:nvPr/>
         </p:nvSpPr>
         <p:spPr>
           <a:xfrm>
-            <a:off x="6492240" y="2377440"/>
-            <a:ext cx="4937760" cy="3200400"/>
+            <a:off x="8321040" y="2194560"/>
+            <a:ext cx="3291840" cy="1691640"/>
           </a:xfrm>
           <a:prstGeom prst="rect">
             <a:avLst/>
@@ -5014,13 +6666,13 @@
           <a:p>
             <a:pPr marL="152400" indent="-152400">
               <a:spcAft>
-                <a:spcPts val="1000"/>
+                <a:spcPts val="600"/>
               </a:spcAft>
               <a:buSzPct val="100000"/>
               <a:buChar char="•"/>
             </a:pPr>
             <a:r>
-              <a:rPr lang="en-US" sz="1300" dirty="0">
+              <a:rPr lang="en-US" sz="1100" dirty="0">
                 <a:solidFill>
                   <a:srgbClr val="FFFFFF"/>
                 </a:solidFill>
@@ -5028,20 +6680,20 @@
                 <a:ea typeface="Calibri" pitchFamily="34" charset="-122"/>
                 <a:cs typeface="Calibri" pitchFamily="34" charset="-120"/>
               </a:rPr>
-              <a:t>Veriler yalnızca akademik amaç; kullanıcı etiketleri anonimleştirildi.</a:t>
+              <a:t>Küçük veri (793); test 80.</a:t>
             </a:r>
-            <a:endParaRPr lang="en-US" sz="1300" dirty="0"/>
+            <a:endParaRPr lang="en-US" sz="1100" dirty="0"/>
           </a:p>
           <a:p>
             <a:pPr marL="152400" indent="-152400">
               <a:spcAft>
-                <a:spcPts val="1000"/>
+                <a:spcPts val="600"/>
               </a:spcAft>
               <a:buSzPct val="100000"/>
               <a:buChar char="•"/>
             </a:pPr>
             <a:r>
-              <a:rPr lang="en-US" sz="1300" dirty="0">
+              <a:rPr lang="en-US" sz="1100" dirty="0">
                 <a:solidFill>
                   <a:srgbClr val="FFFFFF"/>
                 </a:solidFill>
@@ -5049,9 +6701,9 @@
                 <a:ea typeface="Calibri" pitchFamily="34" charset="-122"/>
                 <a:cs typeface="Calibri" pitchFamily="34" charset="-120"/>
               </a:rPr>
-              <a:t>Karar destek aracı — insan operatör onayı esas; tek başına karar verici değil.</a:t>
+              <a:t>3 seed devam ediyor.</a:t>
             </a:r>
-            <a:endParaRPr lang="en-US" sz="1300" dirty="0"/>
+            <a:endParaRPr lang="en-US" sz="1100" dirty="0"/>
           </a:p>
           <a:p>
             <a:pPr marL="152400" indent="-152400">
@@ -5059,7 +6711,7 @@
               <a:buChar char="•"/>
             </a:pPr>
             <a:r>
-              <a:rPr lang="en-US" sz="1300" dirty="0">
+              <a:rPr lang="en-US" sz="1100" dirty="0">
                 <a:solidFill>
                   <a:srgbClr val="FFFFFF"/>
                 </a:solidFill>
@@ -5067,15 +6719,136 @@
                 <a:ea typeface="Calibri" pitchFamily="34" charset="-122"/>
                 <a:cs typeface="Calibri" pitchFamily="34" charset="-120"/>
               </a:rPr>
-              <a:t>Açık kaynak + seed=42 ile tam tekrarlanabilirlik.</a:t>
+              <a:t>Gemma-4'e modele özel HP yok.</a:t>
             </a:r>
-            <a:endParaRPr lang="en-US" sz="1300" dirty="0"/>
+            <a:endParaRPr lang="en-US" sz="1100" dirty="0"/>
           </a:p>
         </p:txBody>
       </p:sp>
       <p:sp>
         <p:nvSpPr>
-          <p:cNvPr id="12" name="Shape 10"/>
+          <p:cNvPr id="12" name="Text 9"/>
+          <p:cNvSpPr/>
+          <p:nvPr/>
+        </p:nvSpPr>
+        <p:spPr>
+          <a:xfrm>
+            <a:off x="8321040" y="3977640"/>
+            <a:ext cx="3383280" cy="274320"/>
+          </a:xfrm>
+          <a:prstGeom prst="rect">
+            <a:avLst/>
+          </a:prstGeom>
+          <a:noFill/>
+          <a:ln/>
+        </p:spPr>
+        <p:txBody>
+          <a:bodyPr wrap="square" rtlCol="0" anchor="ctr"/>
+          <a:lstStyle/>
+          <a:p>
+            <a:pPr indent="0" marL="0">
+              <a:buNone/>
+            </a:pPr>
+            <a:r>
+              <a:rPr lang="en-US" sz="1200" b="1" spc="100" kern="0" dirty="0">
+                <a:solidFill>
+                  <a:srgbClr val="E8833A"/>
+                </a:solidFill>
+                <a:latin typeface="Calibri" pitchFamily="34" charset="0"/>
+                <a:ea typeface="Calibri" pitchFamily="34" charset="-122"/>
+                <a:cs typeface="Calibri" pitchFamily="34" charset="-120"/>
+              </a:rPr>
+              <a:t>ETİK</a:t>
+            </a:r>
+            <a:endParaRPr lang="en-US" sz="1200" dirty="0"/>
+          </a:p>
+        </p:txBody>
+      </p:sp>
+      <p:sp>
+        <p:nvSpPr>
+          <p:cNvPr id="13" name="Text 10"/>
+          <p:cNvSpPr/>
+          <p:nvPr/>
+        </p:nvSpPr>
+        <p:spPr>
+          <a:xfrm>
+            <a:off x="8321040" y="4297680"/>
+            <a:ext cx="3291840" cy="1463040"/>
+          </a:xfrm>
+          <a:prstGeom prst="rect">
+            <a:avLst/>
+          </a:prstGeom>
+          <a:noFill/>
+          <a:ln/>
+        </p:spPr>
+        <p:txBody>
+          <a:bodyPr wrap="square" rtlCol="0" anchor="t"/>
+          <a:lstStyle/>
+          <a:p>
+            <a:pPr marL="152400" indent="-152400">
+              <a:spcAft>
+                <a:spcPts val="600"/>
+              </a:spcAft>
+              <a:buSzPct val="100000"/>
+              <a:buChar char="•"/>
+            </a:pPr>
+            <a:r>
+              <a:rPr lang="en-US" sz="1100" dirty="0">
+                <a:solidFill>
+                  <a:srgbClr val="FFFFFF"/>
+                </a:solidFill>
+                <a:latin typeface="Calibri" pitchFamily="34" charset="0"/>
+                <a:ea typeface="Calibri" pitchFamily="34" charset="-122"/>
+                <a:cs typeface="Calibri" pitchFamily="34" charset="-120"/>
+              </a:rPr>
+              <a:t>Akademik amaç; veriler anonim.</a:t>
+            </a:r>
+            <a:endParaRPr lang="en-US" sz="1100" dirty="0"/>
+          </a:p>
+          <a:p>
+            <a:pPr marL="152400" indent="-152400">
+              <a:spcAft>
+                <a:spcPts val="600"/>
+              </a:spcAft>
+              <a:buSzPct val="100000"/>
+              <a:buChar char="•"/>
+            </a:pPr>
+            <a:r>
+              <a:rPr lang="en-US" sz="1100" dirty="0">
+                <a:solidFill>
+                  <a:srgbClr val="FFFFFF"/>
+                </a:solidFill>
+                <a:latin typeface="Calibri" pitchFamily="34" charset="0"/>
+                <a:ea typeface="Calibri" pitchFamily="34" charset="-122"/>
+                <a:cs typeface="Calibri" pitchFamily="34" charset="-120"/>
+              </a:rPr>
+              <a:t>Karar destek; insan onayı esas.</a:t>
+            </a:r>
+            <a:endParaRPr lang="en-US" sz="1100" dirty="0"/>
+          </a:p>
+          <a:p>
+            <a:pPr marL="152400" indent="-152400">
+              <a:buSzPct val="100000"/>
+              <a:buChar char="•"/>
+            </a:pPr>
+            <a:r>
+              <a:rPr lang="en-US" sz="1100" dirty="0">
+                <a:solidFill>
+                  <a:srgbClr val="FFFFFF"/>
+                </a:solidFill>
+                <a:latin typeface="Calibri" pitchFamily="34" charset="0"/>
+                <a:ea typeface="Calibri" pitchFamily="34" charset="-122"/>
+                <a:cs typeface="Calibri" pitchFamily="34" charset="-120"/>
+              </a:rPr>
+              <a:t>Açık kaynak, seed=42 tekrarlı.</a:t>
+            </a:r>
+            <a:endParaRPr lang="en-US" sz="1100" dirty="0"/>
+          </a:p>
+        </p:txBody>
+      </p:sp>
+      <p:sp>
+        <p:nvSpPr>
+          <p:cNvPr id="14" name="Shape 11"/>
           <p:cNvSpPr/>
           <p:nvPr/>
         </p:nvSpPr>
@@ -5098,7 +6871,7 @@
       </p:sp>
       <p:sp>
         <p:nvSpPr>
-          <p:cNvPr id="13" name="Text 11"/>
+          <p:cNvPr id="15" name="Text 12"/>
           <p:cNvSpPr/>
           <p:nvPr/>
         </p:nvSpPr>
@@ -5137,7 +6910,7 @@
       </p:sp>
       <p:sp>
         <p:nvSpPr>
-          <p:cNvPr id="14" name="Text 12"/>
+          <p:cNvPr id="16" name="Text 13"/>
           <p:cNvSpPr/>
           <p:nvPr/>
         </p:nvSpPr>
@@ -5176,7 +6949,7 @@
       </p:sp>
       <p:sp>
         <p:nvSpPr>
-          <p:cNvPr id="15" name="Text 13"/>
+          <p:cNvPr id="17" name="Text 14"/>
           <p:cNvSpPr/>
           <p:nvPr/>
         </p:nvSpPr>
@@ -9584,22 +11357,24 @@
           </p:nvPr>
         </p:nvGraphicFramePr>
         <p:xfrm>
-          <a:off x="640080" y="1783080"/>
-          <a:ext cx="10972800" cy="914400"/>
+          <a:off x="457200" y="1691640"/>
+          <a:ext cx="11338560" cy="914400"/>
         </p:xfrm>
         <a:graphic>
           <a:graphicData uri="http://schemas.openxmlformats.org/drawingml/2006/table">
             <a:tbl>
               <a:tblPr/>
               <a:tblGrid>
-                <a:gridCol w="2377440"/>
-                <a:gridCol w="1828800"/>
-                <a:gridCol w="1463040"/>
-                <a:gridCol w="1920240"/>
-                <a:gridCol w="1737360"/>
-                <a:gridCol w="1645920"/>
+                <a:gridCol w="1554480"/>
+                <a:gridCol w="914400"/>
+                <a:gridCol w="914400"/>
+                <a:gridCol w="1097280"/>
+                <a:gridCol w="1417320"/>
+                <a:gridCol w="1188720"/>
+                <a:gridCol w="1280160"/>
+                <a:gridCol w="1508760"/>
               </a:tblGrid>
-              <a:tr h="493776">
+              <a:tr h="384048">
                 <a:tc>
                   <a:txBody>
                     <a:bodyPr/>
@@ -9609,7 +11384,7 @@
                         <a:buNone/>
                       </a:pPr>
                       <a:r>
-                        <a:rPr lang="en-US" sz="1300" b="1" dirty="0">
+                        <a:rPr lang="en-US" sz="1100" b="1" dirty="0">
                           <a:solidFill>
                             <a:srgbClr val="FFFFFF"/>
                           </a:solidFill>
@@ -9619,7 +11394,7 @@
                         </a:rPr>
                         <a:t>Model</a:t>
                       </a:r>
-                      <a:endParaRPr lang="en-US" sz="1300" dirty="0">
+                      <a:endParaRPr lang="en-US" sz="1100" dirty="0">
                         <a:latin typeface="Calibri" charset="0"/>
                         <a:ea typeface="Calibri" charset="0"/>
                         <a:cs typeface="Calibri" charset="0"/>
@@ -9677,7 +11452,7 @@
                         <a:buNone/>
                       </a:pPr>
                       <a:r>
-                        <a:rPr lang="en-US" sz="1300" b="1" dirty="0">
+                        <a:rPr lang="en-US" sz="1100" b="1" dirty="0">
                           <a:solidFill>
                             <a:srgbClr val="FFFFFF"/>
                           </a:solidFill>
@@ -9685,9 +11460,9 @@
                           <a:ea typeface="Calibri" pitchFamily="34" charset="-122"/>
                           <a:cs typeface="Calibri" pitchFamily="34" charset="-120"/>
                         </a:rPr>
-                        <a:t>Yöntem</a:t>
+                        <a:t>Param</a:t>
                       </a:r>
-                      <a:endParaRPr lang="en-US" sz="1300" dirty="0">
+                      <a:endParaRPr lang="en-US" sz="1100" dirty="0">
                         <a:latin typeface="Calibri" charset="0"/>
                         <a:ea typeface="Calibri" charset="0"/>
                         <a:cs typeface="Calibri" charset="0"/>
@@ -9745,7 +11520,7 @@
                         <a:buNone/>
                       </a:pPr>
                       <a:r>
-                        <a:rPr lang="en-US" sz="1300" b="1" dirty="0">
+                        <a:rPr lang="en-US" sz="1100" b="1" dirty="0">
                           <a:solidFill>
                             <a:srgbClr val="FFFFFF"/>
                           </a:solidFill>
@@ -9753,9 +11528,9 @@
                           <a:ea typeface="Calibri" pitchFamily="34" charset="-122"/>
                           <a:cs typeface="Calibri" pitchFamily="34" charset="-120"/>
                         </a:rPr>
-                        <a:t>Acc</a:t>
+                        <a:t>FT</a:t>
                       </a:r>
-                      <a:endParaRPr lang="en-US" sz="1300" dirty="0">
+                      <a:endParaRPr lang="en-US" sz="1100" dirty="0">
                         <a:latin typeface="Calibri" charset="0"/>
                         <a:ea typeface="Calibri" charset="0"/>
                         <a:cs typeface="Calibri" charset="0"/>
@@ -9813,7 +11588,7 @@
                         <a:buNone/>
                       </a:pPr>
                       <a:r>
-                        <a:rPr lang="en-US" sz="1300" b="1" dirty="0">
+                        <a:rPr lang="en-US" sz="1100" b="1" dirty="0">
                           <a:solidFill>
                             <a:srgbClr val="FFFFFF"/>
                           </a:solidFill>
@@ -9821,9 +11596,9 @@
                           <a:ea typeface="Calibri" pitchFamily="34" charset="-122"/>
                           <a:cs typeface="Calibri" pitchFamily="34" charset="-120"/>
                         </a:rPr>
-                        <a:t>Macro-F1</a:t>
+                        <a:t>Acc</a:t>
                       </a:r>
-                      <a:endParaRPr lang="en-US" sz="1300" dirty="0">
+                      <a:endParaRPr lang="en-US" sz="1100" dirty="0">
                         <a:latin typeface="Calibri" charset="0"/>
                         <a:ea typeface="Calibri" charset="0"/>
                         <a:cs typeface="Calibri" charset="0"/>
@@ -9881,7 +11656,7 @@
                         <a:buNone/>
                       </a:pPr>
                       <a:r>
-                        <a:rPr lang="en-US" sz="1300" b="1" dirty="0">
+                        <a:rPr lang="en-US" sz="1100" b="1" dirty="0">
                           <a:solidFill>
                             <a:srgbClr val="FFFFFF"/>
                           </a:solidFill>
@@ -9889,9 +11664,9 @@
                           <a:ea typeface="Calibri" pitchFamily="34" charset="-122"/>
                           <a:cs typeface="Calibri" pitchFamily="34" charset="-120"/>
                         </a:rPr>
-                        <a:t>Weig-F1</a:t>
+                        <a:t>Macro-F1</a:t>
                       </a:r>
-                      <a:endParaRPr lang="en-US" sz="1300" dirty="0">
+                      <a:endParaRPr lang="en-US" sz="1100" dirty="0">
                         <a:latin typeface="Calibri" charset="0"/>
                         <a:ea typeface="Calibri" charset="0"/>
                         <a:cs typeface="Calibri" charset="0"/>
@@ -9949,7 +11724,7 @@
                         <a:buNone/>
                       </a:pPr>
                       <a:r>
-                        <a:rPr lang="en-US" sz="1300" b="1" dirty="0">
+                        <a:rPr lang="en-US" sz="1100" b="1" dirty="0">
                           <a:solidFill>
                             <a:srgbClr val="FFFFFF"/>
                           </a:solidFill>
@@ -9957,9 +11732,9 @@
                           <a:ea typeface="Calibri" pitchFamily="34" charset="-122"/>
                           <a:cs typeface="Calibri" pitchFamily="34" charset="-120"/>
                         </a:rPr>
-                        <a:t>GPU (GB)</a:t>
+                        <a:t>Eğt(s)</a:t>
                       </a:r>
-                      <a:endParaRPr lang="en-US" sz="1300" dirty="0">
+                      <a:endParaRPr lang="en-US" sz="1100" dirty="0">
                         <a:latin typeface="Calibri" charset="0"/>
                         <a:ea typeface="Calibri" charset="0"/>
                         <a:cs typeface="Calibri" charset="0"/>
@@ -10008,8 +11783,144 @@
                     </a:solidFill>
                   </a:tcPr>
                 </a:tc>
+                <a:tc>
+                  <a:txBody>
+                    <a:bodyPr/>
+                    <a:lstStyle/>
+                    <a:p>
+                      <a:pPr algn="ctr" indent="0" marL="0">
+                        <a:buNone/>
+                      </a:pPr>
+                      <a:r>
+                        <a:rPr lang="en-US" sz="1100" b="1" dirty="0">
+                          <a:solidFill>
+                            <a:srgbClr val="FFFFFF"/>
+                          </a:solidFill>
+                          <a:latin typeface="Calibri" pitchFamily="34" charset="0"/>
+                          <a:ea typeface="Calibri" pitchFamily="34" charset="-122"/>
+                          <a:cs typeface="Calibri" pitchFamily="34" charset="-120"/>
+                        </a:rPr>
+                        <a:t>Inf(ms)</a:t>
+                      </a:r>
+                      <a:endParaRPr lang="en-US" sz="1100" dirty="0">
+                        <a:latin typeface="Calibri" charset="0"/>
+                        <a:ea typeface="Calibri" charset="0"/>
+                        <a:cs typeface="Calibri" charset="0"/>
+                      </a:endParaRPr>
+                    </a:p>
+                  </a:txBody>
+                  <a:tcPr marL="91440" marR="91440" marT="45720" marB="45720" anchor="ctr">
+                    <a:lnL w="12700" cap="flat" cmpd="sng" algn="ctr">
+                      <a:solidFill>
+                        <a:srgbClr val="D9E1E8"/>
+                      </a:solidFill>
+                      <a:prstDash val="solid"/>
+                      <a:round/>
+                      <a:headEnd type="none" w="med" len="med"/>
+                      <a:tailEnd type="none" w="med" len="med"/>
+                    </a:lnL>
+                    <a:lnR w="12700" cap="flat" cmpd="sng" algn="ctr">
+                      <a:solidFill>
+                        <a:srgbClr val="D9E1E8"/>
+                      </a:solidFill>
+                      <a:prstDash val="solid"/>
+                      <a:round/>
+                      <a:headEnd type="none" w="med" len="med"/>
+                      <a:tailEnd type="none" w="med" len="med"/>
+                    </a:lnR>
+                    <a:lnT w="12700" cap="flat" cmpd="sng" algn="ctr">
+                      <a:solidFill>
+                        <a:srgbClr val="D9E1E8"/>
+                      </a:solidFill>
+                      <a:prstDash val="solid"/>
+                      <a:round/>
+                      <a:headEnd type="none" w="med" len="med"/>
+                      <a:tailEnd type="none" w="med" len="med"/>
+                    </a:lnT>
+                    <a:lnB w="12700" cap="flat" cmpd="sng" algn="ctr">
+                      <a:solidFill>
+                        <a:srgbClr val="D9E1E8"/>
+                      </a:solidFill>
+                      <a:prstDash val="solid"/>
+                      <a:round/>
+                      <a:headEnd type="none" w="med" len="med"/>
+                      <a:tailEnd type="none" w="med" len="med"/>
+                    </a:lnB>
+                    <a:solidFill>
+                      <a:srgbClr val="0F2741"/>
+                    </a:solidFill>
+                  </a:tcPr>
+                </a:tc>
+                <a:tc>
+                  <a:txBody>
+                    <a:bodyPr/>
+                    <a:lstStyle/>
+                    <a:p>
+                      <a:pPr algn="ctr" indent="0" marL="0">
+                        <a:buNone/>
+                      </a:pPr>
+                      <a:r>
+                        <a:rPr lang="en-US" sz="1100" b="1" dirty="0">
+                          <a:solidFill>
+                            <a:srgbClr val="FFFFFF"/>
+                          </a:solidFill>
+                          <a:latin typeface="Calibri" pitchFamily="34" charset="0"/>
+                          <a:ea typeface="Calibri" pitchFamily="34" charset="-122"/>
+                          <a:cs typeface="Calibri" pitchFamily="34" charset="-120"/>
+                        </a:rPr>
+                        <a:t>Size(MB)</a:t>
+                      </a:r>
+                      <a:endParaRPr lang="en-US" sz="1100" dirty="0">
+                        <a:latin typeface="Calibri" charset="0"/>
+                        <a:ea typeface="Calibri" charset="0"/>
+                        <a:cs typeface="Calibri" charset="0"/>
+                      </a:endParaRPr>
+                    </a:p>
+                  </a:txBody>
+                  <a:tcPr marL="91440" marR="91440" marT="45720" marB="45720" anchor="ctr">
+                    <a:lnL w="12700" cap="flat" cmpd="sng" algn="ctr">
+                      <a:solidFill>
+                        <a:srgbClr val="D9E1E8"/>
+                      </a:solidFill>
+                      <a:prstDash val="solid"/>
+                      <a:round/>
+                      <a:headEnd type="none" w="med" len="med"/>
+                      <a:tailEnd type="none" w="med" len="med"/>
+                    </a:lnL>
+                    <a:lnR w="12700" cap="flat" cmpd="sng" algn="ctr">
+                      <a:solidFill>
+                        <a:srgbClr val="D9E1E8"/>
+                      </a:solidFill>
+                      <a:prstDash val="solid"/>
+                      <a:round/>
+                      <a:headEnd type="none" w="med" len="med"/>
+                      <a:tailEnd type="none" w="med" len="med"/>
+                    </a:lnR>
+                    <a:lnT w="12700" cap="flat" cmpd="sng" algn="ctr">
+                      <a:solidFill>
+                        <a:srgbClr val="D9E1E8"/>
+                      </a:solidFill>
+                      <a:prstDash val="solid"/>
+                      <a:round/>
+                      <a:headEnd type="none" w="med" len="med"/>
+                      <a:tailEnd type="none" w="med" len="med"/>
+                    </a:lnT>
+                    <a:lnB w="12700" cap="flat" cmpd="sng" algn="ctr">
+                      <a:solidFill>
+                        <a:srgbClr val="D9E1E8"/>
+                      </a:solidFill>
+                      <a:prstDash val="solid"/>
+                      <a:round/>
+                      <a:headEnd type="none" w="med" len="med"/>
+                      <a:tailEnd type="none" w="med" len="med"/>
+                    </a:lnB>
+                    <a:solidFill>
+                      <a:srgbClr val="0F2741"/>
+                    </a:solidFill>
+                  </a:tcPr>
+                </a:tc>
               </a:tr>
-              <a:tr h="493776">
+              <a:tr h="384048">
                 <a:tc>
                   <a:txBody>
                     <a:bodyPr/>
@@ -10019,7 +11930,7 @@
                         <a:buNone/>
                       </a:pPr>
                       <a:r>
-                        <a:rPr lang="en-US" sz="1200" dirty="0">
+                        <a:rPr lang="en-US" sz="1000" dirty="0">
                           <a:solidFill>
                             <a:srgbClr val="000000"/>
                           </a:solidFill>
@@ -10027,9 +11938,9 @@
                           <a:ea typeface="Calibri" pitchFamily="34" charset="-122"/>
                           <a:cs typeface="Calibri" pitchFamily="34" charset="-120"/>
                         </a:rPr>
-                        <a:t>TinyLlama-1.1B</a:t>
+                        <a:t>SmolLM2</a:t>
                       </a:r>
-                      <a:endParaRPr lang="en-US" sz="1200" dirty="0">
+                      <a:endParaRPr lang="en-US" sz="1000" dirty="0">
                         <a:latin typeface="Calibri" charset="0"/>
                         <a:ea typeface="Calibri" charset="0"/>
                         <a:cs typeface="Calibri" charset="0"/>
@@ -10087,17 +11998,17 @@
                         <a:buNone/>
                       </a:pPr>
                       <a:r>
-                        <a:rPr lang="en-US" sz="1200" dirty="0">
+                        <a:rPr lang="en-US" sz="1000" dirty="0">
                           <a:solidFill>
-                            <a:srgbClr val="C0392B"/>
+                            <a:srgbClr val="000000"/>
                           </a:solidFill>
                           <a:latin typeface="Calibri" pitchFamily="34" charset="0"/>
                           <a:ea typeface="Calibri" pitchFamily="34" charset="-122"/>
                           <a:cs typeface="Calibri" pitchFamily="34" charset="-120"/>
                         </a:rPr>
-                        <a:t>Zero-shot</a:t>
+                        <a:t>360M</a:t>
                       </a:r>
-                      <a:endParaRPr lang="en-US" sz="1200" dirty="0">
+                      <a:endParaRPr lang="en-US" sz="1000" dirty="0">
                         <a:latin typeface="Calibri" charset="0"/>
                         <a:ea typeface="Calibri" charset="0"/>
                         <a:cs typeface="Calibri" charset="0"/>
@@ -10155,17 +12066,17 @@
                         <a:buNone/>
                       </a:pPr>
                       <a:r>
-                        <a:rPr lang="en-US" sz="1200" dirty="0">
+                        <a:rPr lang="en-US" sz="1000" dirty="0">
                           <a:solidFill>
-                            <a:srgbClr val="000000"/>
+                            <a:srgbClr val="C0392B"/>
                           </a:solidFill>
                           <a:latin typeface="Calibri" pitchFamily="34" charset="0"/>
                           <a:ea typeface="Calibri" pitchFamily="34" charset="-122"/>
                           <a:cs typeface="Calibri" pitchFamily="34" charset="-120"/>
                         </a:rPr>
-                        <a:t>0.262</a:t>
+                        <a:t>Zero</a:t>
                       </a:r>
-                      <a:endParaRPr lang="en-US" sz="1200" dirty="0">
+                      <a:endParaRPr lang="en-US" sz="1000" dirty="0">
                         <a:latin typeface="Calibri" charset="0"/>
                         <a:ea typeface="Calibri" charset="0"/>
                         <a:cs typeface="Calibri" charset="0"/>
@@ -10223,17 +12134,17 @@
                         <a:buNone/>
                       </a:pPr>
                       <a:r>
-                        <a:rPr lang="en-US" sz="1200" b="1" dirty="0">
+                        <a:rPr lang="en-US" sz="1000" dirty="0">
                           <a:solidFill>
-                            <a:srgbClr val="C0392B"/>
+                            <a:srgbClr val="000000"/>
                           </a:solidFill>
                           <a:latin typeface="Calibri" pitchFamily="34" charset="0"/>
                           <a:ea typeface="Calibri" pitchFamily="34" charset="-122"/>
                           <a:cs typeface="Calibri" pitchFamily="34" charset="-120"/>
                         </a:rPr>
-                        <a:t>0.094</a:t>
+                        <a:t>0.412</a:t>
                       </a:r>
-                      <a:endParaRPr lang="en-US" sz="1200" dirty="0">
+                      <a:endParaRPr lang="en-US" sz="1000" dirty="0">
                         <a:latin typeface="Calibri" charset="0"/>
                         <a:ea typeface="Calibri" charset="0"/>
                         <a:cs typeface="Calibri" charset="0"/>
@@ -10291,17 +12202,17 @@
                         <a:buNone/>
                       </a:pPr>
                       <a:r>
-                        <a:rPr lang="en-US" sz="1200" dirty="0">
+                        <a:rPr lang="en-US" sz="1000" dirty="0">
                           <a:solidFill>
-                            <a:srgbClr val="000000"/>
+                            <a:srgbClr val="C0392B"/>
                           </a:solidFill>
                           <a:latin typeface="Calibri" pitchFamily="34" charset="0"/>
                           <a:ea typeface="Calibri" pitchFamily="34" charset="-122"/>
                           <a:cs typeface="Calibri" pitchFamily="34" charset="-120"/>
                         </a:rPr>
-                        <a:t>0.125</a:t>
+                        <a:t>0.215</a:t>
                       </a:r>
-                      <a:endParaRPr lang="en-US" sz="1200" dirty="0">
+                      <a:endParaRPr lang="en-US" sz="1000" dirty="0">
                         <a:latin typeface="Calibri" charset="0"/>
                         <a:ea typeface="Calibri" charset="0"/>
                         <a:cs typeface="Calibri" charset="0"/>
@@ -10359,7 +12270,7 @@
                         <a:buNone/>
                       </a:pPr>
                       <a:r>
-                        <a:rPr lang="en-US" sz="1200" dirty="0">
+                        <a:rPr lang="en-US" sz="1000" dirty="0">
                           <a:solidFill>
                             <a:srgbClr val="000000"/>
                           </a:solidFill>
@@ -10369,77 +12280,7 @@
                         </a:rPr>
                         <a:t>—</a:t>
                       </a:r>
-                      <a:endParaRPr lang="en-US" sz="1200" dirty="0">
-                        <a:latin typeface="Calibri" charset="0"/>
-                        <a:ea typeface="Calibri" charset="0"/>
-                        <a:cs typeface="Calibri" charset="0"/>
-                      </a:endParaRPr>
-                    </a:p>
-                  </a:txBody>
-                  <a:tcPr marL="91440" marR="91440" marT="45720" marB="45720" anchor="ctr">
-                    <a:lnL w="12700" cap="flat" cmpd="sng" algn="ctr">
-                      <a:solidFill>
-                        <a:srgbClr val="D9E1E8"/>
-                      </a:solidFill>
-                      <a:prstDash val="solid"/>
-                      <a:round/>
-                      <a:headEnd type="none" w="med" len="med"/>
-                      <a:tailEnd type="none" w="med" len="med"/>
-                    </a:lnL>
-                    <a:lnR w="12700" cap="flat" cmpd="sng" algn="ctr">
-                      <a:solidFill>
-                        <a:srgbClr val="D9E1E8"/>
-                      </a:solidFill>
-                      <a:prstDash val="solid"/>
-                      <a:round/>
-                      <a:headEnd type="none" w="med" len="med"/>
-                      <a:tailEnd type="none" w="med" len="med"/>
-                    </a:lnR>
-                    <a:lnT w="12700" cap="flat" cmpd="sng" algn="ctr">
-                      <a:solidFill>
-                        <a:srgbClr val="D9E1E8"/>
-                      </a:solidFill>
-                      <a:prstDash val="solid"/>
-                      <a:round/>
-                      <a:headEnd type="none" w="med" len="med"/>
-                      <a:tailEnd type="none" w="med" len="med"/>
-                    </a:lnT>
-                    <a:lnB w="12700" cap="flat" cmpd="sng" algn="ctr">
-                      <a:solidFill>
-                        <a:srgbClr val="D9E1E8"/>
-                      </a:solidFill>
-                      <a:prstDash val="solid"/>
-                      <a:round/>
-                      <a:headEnd type="none" w="med" len="med"/>
-                      <a:tailEnd type="none" w="med" len="med"/>
-                    </a:lnB>
-                    <a:solidFill>
-                      <a:srgbClr val="FFFFFF"/>
-                    </a:solidFill>
-                  </a:tcPr>
-                </a:tc>
-              </a:tr>
-              <a:tr h="493776">
-                <a:tc>
-                  <a:txBody>
-                    <a:bodyPr/>
-                    <a:lstStyle/>
-                    <a:p>
-                      <a:pPr indent="0" marL="0">
-                        <a:buNone/>
-                      </a:pPr>
-                      <a:r>
-                        <a:rPr lang="en-US" sz="1200" dirty="0">
-                          <a:solidFill>
-                            <a:srgbClr val="000000"/>
-                          </a:solidFill>
-                          <a:latin typeface="Calibri" pitchFamily="34" charset="0"/>
-                          <a:ea typeface="Calibri" pitchFamily="34" charset="-122"/>
-                          <a:cs typeface="Calibri" pitchFamily="34" charset="-120"/>
-                        </a:rPr>
-                        <a:t>SmolLM2-360M</a:t>
-                      </a:r>
-                      <a:endParaRPr lang="en-US" sz="1200" dirty="0">
+                      <a:endParaRPr lang="en-US" sz="1000" dirty="0">
                         <a:latin typeface="Calibri" charset="0"/>
                         <a:ea typeface="Calibri" charset="0"/>
                         <a:cs typeface="Calibri" charset="0"/>
@@ -10497,7 +12338,7 @@
                         <a:buNone/>
                       </a:pPr>
                       <a:r>
-                        <a:rPr lang="en-US" sz="1200" dirty="0">
+                        <a:rPr lang="en-US" sz="1000" dirty="0">
                           <a:solidFill>
                             <a:srgbClr val="000000"/>
                           </a:solidFill>
@@ -10505,9 +12346,9 @@
                           <a:ea typeface="Calibri" pitchFamily="34" charset="-122"/>
                           <a:cs typeface="Calibri" pitchFamily="34" charset="-120"/>
                         </a:rPr>
-                        <a:t>QLoRA</a:t>
+                        <a:t>—</a:t>
                       </a:r>
-                      <a:endParaRPr lang="en-US" sz="1200" dirty="0">
+                      <a:endParaRPr lang="en-US" sz="1000" dirty="0">
                         <a:latin typeface="Calibri" charset="0"/>
                         <a:ea typeface="Calibri" charset="0"/>
                         <a:cs typeface="Calibri" charset="0"/>
@@ -10565,7 +12406,7 @@
                         <a:buNone/>
                       </a:pPr>
                       <a:r>
-                        <a:rPr lang="en-US" sz="1200" dirty="0">
+                        <a:rPr lang="en-US" sz="1000" dirty="0">
                           <a:solidFill>
                             <a:srgbClr val="000000"/>
                           </a:solidFill>
@@ -10573,9 +12414,79 @@
                           <a:ea typeface="Calibri" pitchFamily="34" charset="-122"/>
                           <a:cs typeface="Calibri" pitchFamily="34" charset="-120"/>
                         </a:rPr>
-                        <a:t>0.662</a:t>
+                        <a:t>—</a:t>
                       </a:r>
-                      <a:endParaRPr lang="en-US" sz="1200" dirty="0">
+                      <a:endParaRPr lang="en-US" sz="1000" dirty="0">
+                        <a:latin typeface="Calibri" charset="0"/>
+                        <a:ea typeface="Calibri" charset="0"/>
+                        <a:cs typeface="Calibri" charset="0"/>
+                      </a:endParaRPr>
+                    </a:p>
+                  </a:txBody>
+                  <a:tcPr marL="91440" marR="91440" marT="45720" marB="45720" anchor="ctr">
+                    <a:lnL w="12700" cap="flat" cmpd="sng" algn="ctr">
+                      <a:solidFill>
+                        <a:srgbClr val="D9E1E8"/>
+                      </a:solidFill>
+                      <a:prstDash val="solid"/>
+                      <a:round/>
+                      <a:headEnd type="none" w="med" len="med"/>
+                      <a:tailEnd type="none" w="med" len="med"/>
+                    </a:lnL>
+                    <a:lnR w="12700" cap="flat" cmpd="sng" algn="ctr">
+                      <a:solidFill>
+                        <a:srgbClr val="D9E1E8"/>
+                      </a:solidFill>
+                      <a:prstDash val="solid"/>
+                      <a:round/>
+                      <a:headEnd type="none" w="med" len="med"/>
+                      <a:tailEnd type="none" w="med" len="med"/>
+                    </a:lnR>
+                    <a:lnT w="12700" cap="flat" cmpd="sng" algn="ctr">
+                      <a:solidFill>
+                        <a:srgbClr val="D9E1E8"/>
+                      </a:solidFill>
+                      <a:prstDash val="solid"/>
+                      <a:round/>
+                      <a:headEnd type="none" w="med" len="med"/>
+                      <a:tailEnd type="none" w="med" len="med"/>
+                    </a:lnT>
+                    <a:lnB w="12700" cap="flat" cmpd="sng" algn="ctr">
+                      <a:solidFill>
+                        <a:srgbClr val="D9E1E8"/>
+                      </a:solidFill>
+                      <a:prstDash val="solid"/>
+                      <a:round/>
+                      <a:headEnd type="none" w="med" len="med"/>
+                      <a:tailEnd type="none" w="med" len="med"/>
+                    </a:lnB>
+                    <a:solidFill>
+                      <a:srgbClr val="FFFFFF"/>
+                    </a:solidFill>
+                  </a:tcPr>
+                </a:tc>
+              </a:tr>
+              <a:tr h="384048">
+                <a:tc>
+                  <a:txBody>
+                    <a:bodyPr/>
+                    <a:lstStyle/>
+                    <a:p>
+                      <a:pPr indent="0" marL="0">
+                        <a:buNone/>
+                      </a:pPr>
+                      <a:r>
+                        <a:rPr lang="en-US" sz="1000" dirty="0">
+                          <a:solidFill>
+                            <a:srgbClr val="000000"/>
+                          </a:solidFill>
+                          <a:latin typeface="Calibri" pitchFamily="34" charset="0"/>
+                          <a:ea typeface="Calibri" pitchFamily="34" charset="-122"/>
+                          <a:cs typeface="Calibri" pitchFamily="34" charset="-120"/>
+                        </a:rPr>
+                        <a:t>TinyLlama</a:t>
+                      </a:r>
+                      <a:endParaRPr lang="en-US" sz="1000" dirty="0">
                         <a:latin typeface="Calibri" charset="0"/>
                         <a:ea typeface="Calibri" charset="0"/>
                         <a:cs typeface="Calibri" charset="0"/>
@@ -10633,7 +12544,7 @@
                         <a:buNone/>
                       </a:pPr>
                       <a:r>
-                        <a:rPr lang="en-US" sz="1200" dirty="0">
+                        <a:rPr lang="en-US" sz="1000" dirty="0">
                           <a:solidFill>
                             <a:srgbClr val="000000"/>
                           </a:solidFill>
@@ -10641,9 +12552,9 @@
                           <a:ea typeface="Calibri" pitchFamily="34" charset="-122"/>
                           <a:cs typeface="Calibri" pitchFamily="34" charset="-120"/>
                         </a:rPr>
-                        <a:t>0.588</a:t>
+                        <a:t>1.1B</a:t>
                       </a:r>
-                      <a:endParaRPr lang="en-US" sz="1200" dirty="0">
+                      <a:endParaRPr lang="en-US" sz="1000" dirty="0">
                         <a:latin typeface="Calibri" charset="0"/>
                         <a:ea typeface="Calibri" charset="0"/>
                         <a:cs typeface="Calibri" charset="0"/>
@@ -10701,17 +12612,17 @@
                         <a:buNone/>
                       </a:pPr>
                       <a:r>
-                        <a:rPr lang="en-US" sz="1200" dirty="0">
+                        <a:rPr lang="en-US" sz="1000" dirty="0">
                           <a:solidFill>
-                            <a:srgbClr val="000000"/>
+                            <a:srgbClr val="C0392B"/>
                           </a:solidFill>
                           <a:latin typeface="Calibri" pitchFamily="34" charset="0"/>
                           <a:ea typeface="Calibri" pitchFamily="34" charset="-122"/>
                           <a:cs typeface="Calibri" pitchFamily="34" charset="-120"/>
                         </a:rPr>
-                        <a:t>0.663</a:t>
+                        <a:t>Zero</a:t>
                       </a:r>
-                      <a:endParaRPr lang="en-US" sz="1200" dirty="0">
+                      <a:endParaRPr lang="en-US" sz="1000" dirty="0">
                         <a:latin typeface="Calibri" charset="0"/>
                         <a:ea typeface="Calibri" charset="0"/>
                         <a:cs typeface="Calibri" charset="0"/>
@@ -10769,7 +12680,7 @@
                         <a:buNone/>
                       </a:pPr>
                       <a:r>
-                        <a:rPr lang="en-US" sz="1200" dirty="0">
+                        <a:rPr lang="en-US" sz="1000" dirty="0">
                           <a:solidFill>
                             <a:srgbClr val="000000"/>
                           </a:solidFill>
@@ -10777,79 +12688,9 @@
                           <a:ea typeface="Calibri" pitchFamily="34" charset="-122"/>
                           <a:cs typeface="Calibri" pitchFamily="34" charset="-120"/>
                         </a:rPr>
-                        <a:t>1.81</a:t>
+                        <a:t>0.262</a:t>
                       </a:r>
-                      <a:endParaRPr lang="en-US" sz="1200" dirty="0">
-                        <a:latin typeface="Calibri" charset="0"/>
-                        <a:ea typeface="Calibri" charset="0"/>
-                        <a:cs typeface="Calibri" charset="0"/>
-                      </a:endParaRPr>
-                    </a:p>
-                  </a:txBody>
-                  <a:tcPr marL="91440" marR="91440" marT="45720" marB="45720" anchor="ctr">
-                    <a:lnL w="12700" cap="flat" cmpd="sng" algn="ctr">
-                      <a:solidFill>
-                        <a:srgbClr val="D9E1E8"/>
-                      </a:solidFill>
-                      <a:prstDash val="solid"/>
-                      <a:round/>
-                      <a:headEnd type="none" w="med" len="med"/>
-                      <a:tailEnd type="none" w="med" len="med"/>
-                    </a:lnL>
-                    <a:lnR w="12700" cap="flat" cmpd="sng" algn="ctr">
-                      <a:solidFill>
-                        <a:srgbClr val="D9E1E8"/>
-                      </a:solidFill>
-                      <a:prstDash val="solid"/>
-                      <a:round/>
-                      <a:headEnd type="none" w="med" len="med"/>
-                      <a:tailEnd type="none" w="med" len="med"/>
-                    </a:lnR>
-                    <a:lnT w="12700" cap="flat" cmpd="sng" algn="ctr">
-                      <a:solidFill>
-                        <a:srgbClr val="D9E1E8"/>
-                      </a:solidFill>
-                      <a:prstDash val="solid"/>
-                      <a:round/>
-                      <a:headEnd type="none" w="med" len="med"/>
-                      <a:tailEnd type="none" w="med" len="med"/>
-                    </a:lnT>
-                    <a:lnB w="12700" cap="flat" cmpd="sng" algn="ctr">
-                      <a:solidFill>
-                        <a:srgbClr val="D9E1E8"/>
-                      </a:solidFill>
-                      <a:prstDash val="solid"/>
-                      <a:round/>
-                      <a:headEnd type="none" w="med" len="med"/>
-                      <a:tailEnd type="none" w="med" len="med"/>
-                    </a:lnB>
-                    <a:solidFill>
-                      <a:srgbClr val="FFFFFF"/>
-                    </a:solidFill>
-                  </a:tcPr>
-                </a:tc>
-              </a:tr>
-              <a:tr h="493776">
-                <a:tc>
-                  <a:txBody>
-                    <a:bodyPr/>
-                    <a:lstStyle/>
-                    <a:p>
-                      <a:pPr indent="0" marL="0">
-                        <a:buNone/>
-                      </a:pPr>
-                      <a:r>
-                        <a:rPr lang="en-US" sz="1200" b="1" dirty="0">
-                          <a:solidFill>
-                            <a:srgbClr val="000000"/>
-                          </a:solidFill>
-                          <a:latin typeface="Calibri" pitchFamily="34" charset="0"/>
-                          <a:ea typeface="Calibri" pitchFamily="34" charset="-122"/>
-                          <a:cs typeface="Calibri" pitchFamily="34" charset="-120"/>
-                        </a:rPr>
-                        <a:t>TinyLlama-1.1B</a:t>
-                      </a:r>
-                      <a:endParaRPr lang="en-US" sz="1200" dirty="0">
+                      <a:endParaRPr lang="en-US" sz="1000" dirty="0">
                         <a:latin typeface="Calibri" charset="0"/>
                         <a:ea typeface="Calibri" charset="0"/>
                         <a:cs typeface="Calibri" charset="0"/>
@@ -10907,17 +12748,17 @@
                         <a:buNone/>
                       </a:pPr>
                       <a:r>
-                        <a:rPr lang="en-US" sz="1200" b="1" dirty="0">
+                        <a:rPr lang="en-US" sz="1000" dirty="0">
                           <a:solidFill>
-                            <a:srgbClr val="000000"/>
+                            <a:srgbClr val="C0392B"/>
                           </a:solidFill>
                           <a:latin typeface="Calibri" pitchFamily="34" charset="0"/>
                           <a:ea typeface="Calibri" pitchFamily="34" charset="-122"/>
                           <a:cs typeface="Calibri" pitchFamily="34" charset="-120"/>
                         </a:rPr>
-                        <a:t>QLoRA</a:t>
+                        <a:t>0.094</a:t>
                       </a:r>
-                      <a:endParaRPr lang="en-US" sz="1200" dirty="0">
+                      <a:endParaRPr lang="en-US" sz="1000" dirty="0">
                         <a:latin typeface="Calibri" charset="0"/>
                         <a:ea typeface="Calibri" charset="0"/>
                         <a:cs typeface="Calibri" charset="0"/>
@@ -10975,7 +12816,7 @@
                         <a:buNone/>
                       </a:pPr>
                       <a:r>
-                        <a:rPr lang="en-US" sz="1200" b="1" dirty="0">
+                        <a:rPr lang="en-US" sz="1000" dirty="0">
                           <a:solidFill>
                             <a:srgbClr val="000000"/>
                           </a:solidFill>
@@ -10983,9 +12824,9 @@
                           <a:ea typeface="Calibri" pitchFamily="34" charset="-122"/>
                           <a:cs typeface="Calibri" pitchFamily="34" charset="-120"/>
                         </a:rPr>
-                        <a:t>0.925</a:t>
+                        <a:t>—</a:t>
                       </a:r>
-                      <a:endParaRPr lang="en-US" sz="1200" dirty="0">
+                      <a:endParaRPr lang="en-US" sz="1000" dirty="0">
                         <a:latin typeface="Calibri" charset="0"/>
                         <a:ea typeface="Calibri" charset="0"/>
                         <a:cs typeface="Calibri" charset="0"/>
@@ -11043,7 +12884,7 @@
                         <a:buNone/>
                       </a:pPr>
                       <a:r>
-                        <a:rPr lang="en-US" sz="1200" b="1" dirty="0">
+                        <a:rPr lang="en-US" sz="1000" dirty="0">
                           <a:solidFill>
                             <a:srgbClr val="000000"/>
                           </a:solidFill>
@@ -11051,9 +12892,9 @@
                           <a:ea typeface="Calibri" pitchFamily="34" charset="-122"/>
                           <a:cs typeface="Calibri" pitchFamily="34" charset="-120"/>
                         </a:rPr>
-                        <a:t>0.908</a:t>
+                        <a:t>—</a:t>
                       </a:r>
-                      <a:endParaRPr lang="en-US" sz="1200" dirty="0">
+                      <a:endParaRPr lang="en-US" sz="1000" dirty="0">
                         <a:latin typeface="Calibri" charset="0"/>
                         <a:ea typeface="Calibri" charset="0"/>
                         <a:cs typeface="Calibri" charset="0"/>
@@ -11111,7 +12952,7 @@
                         <a:buNone/>
                       </a:pPr>
                       <a:r>
-                        <a:rPr lang="en-US" sz="1200" b="1" dirty="0">
+                        <a:rPr lang="en-US" sz="1000" dirty="0">
                           <a:solidFill>
                             <a:srgbClr val="000000"/>
                           </a:solidFill>
@@ -11119,9 +12960,79 @@
                           <a:ea typeface="Calibri" pitchFamily="34" charset="-122"/>
                           <a:cs typeface="Calibri" pitchFamily="34" charset="-120"/>
                         </a:rPr>
-                        <a:t>0.921</a:t>
+                        <a:t>—</a:t>
                       </a:r>
-                      <a:endParaRPr lang="en-US" sz="1200" dirty="0">
+                      <a:endParaRPr lang="en-US" sz="1000" dirty="0">
+                        <a:latin typeface="Calibri" charset="0"/>
+                        <a:ea typeface="Calibri" charset="0"/>
+                        <a:cs typeface="Calibri" charset="0"/>
+                      </a:endParaRPr>
+                    </a:p>
+                  </a:txBody>
+                  <a:tcPr marL="91440" marR="91440" marT="45720" marB="45720" anchor="ctr">
+                    <a:lnL w="12700" cap="flat" cmpd="sng" algn="ctr">
+                      <a:solidFill>
+                        <a:srgbClr val="D9E1E8"/>
+                      </a:solidFill>
+                      <a:prstDash val="solid"/>
+                      <a:round/>
+                      <a:headEnd type="none" w="med" len="med"/>
+                      <a:tailEnd type="none" w="med" len="med"/>
+                    </a:lnL>
+                    <a:lnR w="12700" cap="flat" cmpd="sng" algn="ctr">
+                      <a:solidFill>
+                        <a:srgbClr val="D9E1E8"/>
+                      </a:solidFill>
+                      <a:prstDash val="solid"/>
+                      <a:round/>
+                      <a:headEnd type="none" w="med" len="med"/>
+                      <a:tailEnd type="none" w="med" len="med"/>
+                    </a:lnR>
+                    <a:lnT w="12700" cap="flat" cmpd="sng" algn="ctr">
+                      <a:solidFill>
+                        <a:srgbClr val="D9E1E8"/>
+                      </a:solidFill>
+                      <a:prstDash val="solid"/>
+                      <a:round/>
+                      <a:headEnd type="none" w="med" len="med"/>
+                      <a:tailEnd type="none" w="med" len="med"/>
+                    </a:lnT>
+                    <a:lnB w="12700" cap="flat" cmpd="sng" algn="ctr">
+                      <a:solidFill>
+                        <a:srgbClr val="D9E1E8"/>
+                      </a:solidFill>
+                      <a:prstDash val="solid"/>
+                      <a:round/>
+                      <a:headEnd type="none" w="med" len="med"/>
+                      <a:tailEnd type="none" w="med" len="med"/>
+                    </a:lnB>
+                    <a:solidFill>
+                      <a:srgbClr val="FFFFFF"/>
+                    </a:solidFill>
+                  </a:tcPr>
+                </a:tc>
+              </a:tr>
+              <a:tr h="384048">
+                <a:tc>
+                  <a:txBody>
+                    <a:bodyPr/>
+                    <a:lstStyle/>
+                    <a:p>
+                      <a:pPr indent="0" marL="0">
+                        <a:buNone/>
+                      </a:pPr>
+                      <a:r>
+                        <a:rPr lang="en-US" sz="1000" dirty="0">
+                          <a:solidFill>
+                            <a:srgbClr val="000000"/>
+                          </a:solidFill>
+                          <a:latin typeface="Calibri" pitchFamily="34" charset="0"/>
+                          <a:ea typeface="Calibri" pitchFamily="34" charset="-122"/>
+                          <a:cs typeface="Calibri" pitchFamily="34" charset="-120"/>
+                        </a:rPr>
+                        <a:t>Qwen2.5</a:t>
+                      </a:r>
+                      <a:endParaRPr lang="en-US" sz="1000" dirty="0">
                         <a:latin typeface="Calibri" charset="0"/>
                         <a:ea typeface="Calibri" charset="0"/>
                         <a:cs typeface="Calibri" charset="0"/>
@@ -11179,7 +13090,7 @@
                         <a:buNone/>
                       </a:pPr>
                       <a:r>
-                        <a:rPr lang="en-US" sz="1200" b="1" dirty="0">
+                        <a:rPr lang="en-US" sz="1000" dirty="0">
                           <a:solidFill>
                             <a:srgbClr val="000000"/>
                           </a:solidFill>
@@ -11187,9 +13098,9 @@
                           <a:ea typeface="Calibri" pitchFamily="34" charset="-122"/>
                           <a:cs typeface="Calibri" pitchFamily="34" charset="-120"/>
                         </a:rPr>
-                        <a:t>3.29</a:t>
+                        <a:t>1.5B</a:t>
                       </a:r>
-                      <a:endParaRPr lang="en-US" sz="1200" dirty="0">
+                      <a:endParaRPr lang="en-US" sz="1000" dirty="0">
                         <a:latin typeface="Calibri" charset="0"/>
                         <a:ea typeface="Calibri" charset="0"/>
                         <a:cs typeface="Calibri" charset="0"/>
@@ -11238,8 +13149,416 @@
                     </a:solidFill>
                   </a:tcPr>
                 </a:tc>
+                <a:tc>
+                  <a:txBody>
+                    <a:bodyPr/>
+                    <a:lstStyle/>
+                    <a:p>
+                      <a:pPr algn="ctr" indent="0" marL="0">
+                        <a:buNone/>
+                      </a:pPr>
+                      <a:r>
+                        <a:rPr lang="en-US" sz="1000" dirty="0">
+                          <a:solidFill>
+                            <a:srgbClr val="C0392B"/>
+                          </a:solidFill>
+                          <a:latin typeface="Calibri" pitchFamily="34" charset="0"/>
+                          <a:ea typeface="Calibri" pitchFamily="34" charset="-122"/>
+                          <a:cs typeface="Calibri" pitchFamily="34" charset="-120"/>
+                        </a:rPr>
+                        <a:t>Zero</a:t>
+                      </a:r>
+                      <a:endParaRPr lang="en-US" sz="1000" dirty="0">
+                        <a:latin typeface="Calibri" charset="0"/>
+                        <a:ea typeface="Calibri" charset="0"/>
+                        <a:cs typeface="Calibri" charset="0"/>
+                      </a:endParaRPr>
+                    </a:p>
+                  </a:txBody>
+                  <a:tcPr marL="91440" marR="91440" marT="45720" marB="45720" anchor="ctr">
+                    <a:lnL w="12700" cap="flat" cmpd="sng" algn="ctr">
+                      <a:solidFill>
+                        <a:srgbClr val="D9E1E8"/>
+                      </a:solidFill>
+                      <a:prstDash val="solid"/>
+                      <a:round/>
+                      <a:headEnd type="none" w="med" len="med"/>
+                      <a:tailEnd type="none" w="med" len="med"/>
+                    </a:lnL>
+                    <a:lnR w="12700" cap="flat" cmpd="sng" algn="ctr">
+                      <a:solidFill>
+                        <a:srgbClr val="D9E1E8"/>
+                      </a:solidFill>
+                      <a:prstDash val="solid"/>
+                      <a:round/>
+                      <a:headEnd type="none" w="med" len="med"/>
+                      <a:tailEnd type="none" w="med" len="med"/>
+                    </a:lnR>
+                    <a:lnT w="12700" cap="flat" cmpd="sng" algn="ctr">
+                      <a:solidFill>
+                        <a:srgbClr val="D9E1E8"/>
+                      </a:solidFill>
+                      <a:prstDash val="solid"/>
+                      <a:round/>
+                      <a:headEnd type="none" w="med" len="med"/>
+                      <a:tailEnd type="none" w="med" len="med"/>
+                    </a:lnT>
+                    <a:lnB w="12700" cap="flat" cmpd="sng" algn="ctr">
+                      <a:solidFill>
+                        <a:srgbClr val="D9E1E8"/>
+                      </a:solidFill>
+                      <a:prstDash val="solid"/>
+                      <a:round/>
+                      <a:headEnd type="none" w="med" len="med"/>
+                      <a:tailEnd type="none" w="med" len="med"/>
+                    </a:lnB>
+                    <a:solidFill>
+                      <a:srgbClr val="FFFFFF"/>
+                    </a:solidFill>
+                  </a:tcPr>
+                </a:tc>
+                <a:tc>
+                  <a:txBody>
+                    <a:bodyPr/>
+                    <a:lstStyle/>
+                    <a:p>
+                      <a:pPr algn="ctr" indent="0" marL="0">
+                        <a:buNone/>
+                      </a:pPr>
+                      <a:r>
+                        <a:rPr lang="en-US" sz="1000" dirty="0">
+                          <a:solidFill>
+                            <a:srgbClr val="000000"/>
+                          </a:solidFill>
+                          <a:latin typeface="Calibri" pitchFamily="34" charset="0"/>
+                          <a:ea typeface="Calibri" pitchFamily="34" charset="-122"/>
+                          <a:cs typeface="Calibri" pitchFamily="34" charset="-120"/>
+                        </a:rPr>
+                        <a:t>0.400</a:t>
+                      </a:r>
+                      <a:endParaRPr lang="en-US" sz="1000" dirty="0">
+                        <a:latin typeface="Calibri" charset="0"/>
+                        <a:ea typeface="Calibri" charset="0"/>
+                        <a:cs typeface="Calibri" charset="0"/>
+                      </a:endParaRPr>
+                    </a:p>
+                  </a:txBody>
+                  <a:tcPr marL="91440" marR="91440" marT="45720" marB="45720" anchor="ctr">
+                    <a:lnL w="12700" cap="flat" cmpd="sng" algn="ctr">
+                      <a:solidFill>
+                        <a:srgbClr val="D9E1E8"/>
+                      </a:solidFill>
+                      <a:prstDash val="solid"/>
+                      <a:round/>
+                      <a:headEnd type="none" w="med" len="med"/>
+                      <a:tailEnd type="none" w="med" len="med"/>
+                    </a:lnL>
+                    <a:lnR w="12700" cap="flat" cmpd="sng" algn="ctr">
+                      <a:solidFill>
+                        <a:srgbClr val="D9E1E8"/>
+                      </a:solidFill>
+                      <a:prstDash val="solid"/>
+                      <a:round/>
+                      <a:headEnd type="none" w="med" len="med"/>
+                      <a:tailEnd type="none" w="med" len="med"/>
+                    </a:lnR>
+                    <a:lnT w="12700" cap="flat" cmpd="sng" algn="ctr">
+                      <a:solidFill>
+                        <a:srgbClr val="D9E1E8"/>
+                      </a:solidFill>
+                      <a:prstDash val="solid"/>
+                      <a:round/>
+                      <a:headEnd type="none" w="med" len="med"/>
+                      <a:tailEnd type="none" w="med" len="med"/>
+                    </a:lnT>
+                    <a:lnB w="12700" cap="flat" cmpd="sng" algn="ctr">
+                      <a:solidFill>
+                        <a:srgbClr val="D9E1E8"/>
+                      </a:solidFill>
+                      <a:prstDash val="solid"/>
+                      <a:round/>
+                      <a:headEnd type="none" w="med" len="med"/>
+                      <a:tailEnd type="none" w="med" len="med"/>
+                    </a:lnB>
+                    <a:solidFill>
+                      <a:srgbClr val="FFFFFF"/>
+                    </a:solidFill>
+                  </a:tcPr>
+                </a:tc>
+                <a:tc>
+                  <a:txBody>
+                    <a:bodyPr/>
+                    <a:lstStyle/>
+                    <a:p>
+                      <a:pPr algn="ctr" indent="0" marL="0">
+                        <a:buNone/>
+                      </a:pPr>
+                      <a:r>
+                        <a:rPr lang="en-US" sz="1000" dirty="0">
+                          <a:solidFill>
+                            <a:srgbClr val="C0392B"/>
+                          </a:solidFill>
+                          <a:latin typeface="Calibri" pitchFamily="34" charset="0"/>
+                          <a:ea typeface="Calibri" pitchFamily="34" charset="-122"/>
+                          <a:cs typeface="Calibri" pitchFamily="34" charset="-120"/>
+                        </a:rPr>
+                        <a:t>0.391</a:t>
+                      </a:r>
+                      <a:endParaRPr lang="en-US" sz="1000" dirty="0">
+                        <a:latin typeface="Calibri" charset="0"/>
+                        <a:ea typeface="Calibri" charset="0"/>
+                        <a:cs typeface="Calibri" charset="0"/>
+                      </a:endParaRPr>
+                    </a:p>
+                  </a:txBody>
+                  <a:tcPr marL="91440" marR="91440" marT="45720" marB="45720" anchor="ctr">
+                    <a:lnL w="12700" cap="flat" cmpd="sng" algn="ctr">
+                      <a:solidFill>
+                        <a:srgbClr val="D9E1E8"/>
+                      </a:solidFill>
+                      <a:prstDash val="solid"/>
+                      <a:round/>
+                      <a:headEnd type="none" w="med" len="med"/>
+                      <a:tailEnd type="none" w="med" len="med"/>
+                    </a:lnL>
+                    <a:lnR w="12700" cap="flat" cmpd="sng" algn="ctr">
+                      <a:solidFill>
+                        <a:srgbClr val="D9E1E8"/>
+                      </a:solidFill>
+                      <a:prstDash val="solid"/>
+                      <a:round/>
+                      <a:headEnd type="none" w="med" len="med"/>
+                      <a:tailEnd type="none" w="med" len="med"/>
+                    </a:lnR>
+                    <a:lnT w="12700" cap="flat" cmpd="sng" algn="ctr">
+                      <a:solidFill>
+                        <a:srgbClr val="D9E1E8"/>
+                      </a:solidFill>
+                      <a:prstDash val="solid"/>
+                      <a:round/>
+                      <a:headEnd type="none" w="med" len="med"/>
+                      <a:tailEnd type="none" w="med" len="med"/>
+                    </a:lnT>
+                    <a:lnB w="12700" cap="flat" cmpd="sng" algn="ctr">
+                      <a:solidFill>
+                        <a:srgbClr val="D9E1E8"/>
+                      </a:solidFill>
+                      <a:prstDash val="solid"/>
+                      <a:round/>
+                      <a:headEnd type="none" w="med" len="med"/>
+                      <a:tailEnd type="none" w="med" len="med"/>
+                    </a:lnB>
+                    <a:solidFill>
+                      <a:srgbClr val="FFFFFF"/>
+                    </a:solidFill>
+                  </a:tcPr>
+                </a:tc>
+                <a:tc>
+                  <a:txBody>
+                    <a:bodyPr/>
+                    <a:lstStyle/>
+                    <a:p>
+                      <a:pPr algn="ctr" indent="0" marL="0">
+                        <a:buNone/>
+                      </a:pPr>
+                      <a:r>
+                        <a:rPr lang="en-US" sz="1000" dirty="0">
+                          <a:solidFill>
+                            <a:srgbClr val="000000"/>
+                          </a:solidFill>
+                          <a:latin typeface="Calibri" pitchFamily="34" charset="0"/>
+                          <a:ea typeface="Calibri" pitchFamily="34" charset="-122"/>
+                          <a:cs typeface="Calibri" pitchFamily="34" charset="-120"/>
+                        </a:rPr>
+                        <a:t>—</a:t>
+                      </a:r>
+                      <a:endParaRPr lang="en-US" sz="1000" dirty="0">
+                        <a:latin typeface="Calibri" charset="0"/>
+                        <a:ea typeface="Calibri" charset="0"/>
+                        <a:cs typeface="Calibri" charset="0"/>
+                      </a:endParaRPr>
+                    </a:p>
+                  </a:txBody>
+                  <a:tcPr marL="91440" marR="91440" marT="45720" marB="45720" anchor="ctr">
+                    <a:lnL w="12700" cap="flat" cmpd="sng" algn="ctr">
+                      <a:solidFill>
+                        <a:srgbClr val="D9E1E8"/>
+                      </a:solidFill>
+                      <a:prstDash val="solid"/>
+                      <a:round/>
+                      <a:headEnd type="none" w="med" len="med"/>
+                      <a:tailEnd type="none" w="med" len="med"/>
+                    </a:lnL>
+                    <a:lnR w="12700" cap="flat" cmpd="sng" algn="ctr">
+                      <a:solidFill>
+                        <a:srgbClr val="D9E1E8"/>
+                      </a:solidFill>
+                      <a:prstDash val="solid"/>
+                      <a:round/>
+                      <a:headEnd type="none" w="med" len="med"/>
+                      <a:tailEnd type="none" w="med" len="med"/>
+                    </a:lnR>
+                    <a:lnT w="12700" cap="flat" cmpd="sng" algn="ctr">
+                      <a:solidFill>
+                        <a:srgbClr val="D9E1E8"/>
+                      </a:solidFill>
+                      <a:prstDash val="solid"/>
+                      <a:round/>
+                      <a:headEnd type="none" w="med" len="med"/>
+                      <a:tailEnd type="none" w="med" len="med"/>
+                    </a:lnT>
+                    <a:lnB w="12700" cap="flat" cmpd="sng" algn="ctr">
+                      <a:solidFill>
+                        <a:srgbClr val="D9E1E8"/>
+                      </a:solidFill>
+                      <a:prstDash val="solid"/>
+                      <a:round/>
+                      <a:headEnd type="none" w="med" len="med"/>
+                      <a:tailEnd type="none" w="med" len="med"/>
+                    </a:lnB>
+                    <a:solidFill>
+                      <a:srgbClr val="FFFFFF"/>
+                    </a:solidFill>
+                  </a:tcPr>
+                </a:tc>
+                <a:tc>
+                  <a:txBody>
+                    <a:bodyPr/>
+                    <a:lstStyle/>
+                    <a:p>
+                      <a:pPr algn="ctr" indent="0" marL="0">
+                        <a:buNone/>
+                      </a:pPr>
+                      <a:r>
+                        <a:rPr lang="en-US" sz="1000" dirty="0">
+                          <a:solidFill>
+                            <a:srgbClr val="000000"/>
+                          </a:solidFill>
+                          <a:latin typeface="Calibri" pitchFamily="34" charset="0"/>
+                          <a:ea typeface="Calibri" pitchFamily="34" charset="-122"/>
+                          <a:cs typeface="Calibri" pitchFamily="34" charset="-120"/>
+                        </a:rPr>
+                        <a:t>—</a:t>
+                      </a:r>
+                      <a:endParaRPr lang="en-US" sz="1000" dirty="0">
+                        <a:latin typeface="Calibri" charset="0"/>
+                        <a:ea typeface="Calibri" charset="0"/>
+                        <a:cs typeface="Calibri" charset="0"/>
+                      </a:endParaRPr>
+                    </a:p>
+                  </a:txBody>
+                  <a:tcPr marL="91440" marR="91440" marT="45720" marB="45720" anchor="ctr">
+                    <a:lnL w="12700" cap="flat" cmpd="sng" algn="ctr">
+                      <a:solidFill>
+                        <a:srgbClr val="D9E1E8"/>
+                      </a:solidFill>
+                      <a:prstDash val="solid"/>
+                      <a:round/>
+                      <a:headEnd type="none" w="med" len="med"/>
+                      <a:tailEnd type="none" w="med" len="med"/>
+                    </a:lnL>
+                    <a:lnR w="12700" cap="flat" cmpd="sng" algn="ctr">
+                      <a:solidFill>
+                        <a:srgbClr val="D9E1E8"/>
+                      </a:solidFill>
+                      <a:prstDash val="solid"/>
+                      <a:round/>
+                      <a:headEnd type="none" w="med" len="med"/>
+                      <a:tailEnd type="none" w="med" len="med"/>
+                    </a:lnR>
+                    <a:lnT w="12700" cap="flat" cmpd="sng" algn="ctr">
+                      <a:solidFill>
+                        <a:srgbClr val="D9E1E8"/>
+                      </a:solidFill>
+                      <a:prstDash val="solid"/>
+                      <a:round/>
+                      <a:headEnd type="none" w="med" len="med"/>
+                      <a:tailEnd type="none" w="med" len="med"/>
+                    </a:lnT>
+                    <a:lnB w="12700" cap="flat" cmpd="sng" algn="ctr">
+                      <a:solidFill>
+                        <a:srgbClr val="D9E1E8"/>
+                      </a:solidFill>
+                      <a:prstDash val="solid"/>
+                      <a:round/>
+                      <a:headEnd type="none" w="med" len="med"/>
+                      <a:tailEnd type="none" w="med" len="med"/>
+                    </a:lnB>
+                    <a:solidFill>
+                      <a:srgbClr val="FFFFFF"/>
+                    </a:solidFill>
+                  </a:tcPr>
+                </a:tc>
+                <a:tc>
+                  <a:txBody>
+                    <a:bodyPr/>
+                    <a:lstStyle/>
+                    <a:p>
+                      <a:pPr algn="ctr" indent="0" marL="0">
+                        <a:buNone/>
+                      </a:pPr>
+                      <a:r>
+                        <a:rPr lang="en-US" sz="1000" dirty="0">
+                          <a:solidFill>
+                            <a:srgbClr val="000000"/>
+                          </a:solidFill>
+                          <a:latin typeface="Calibri" pitchFamily="34" charset="0"/>
+                          <a:ea typeface="Calibri" pitchFamily="34" charset="-122"/>
+                          <a:cs typeface="Calibri" pitchFamily="34" charset="-120"/>
+                        </a:rPr>
+                        <a:t>—</a:t>
+                      </a:r>
+                      <a:endParaRPr lang="en-US" sz="1000" dirty="0">
+                        <a:latin typeface="Calibri" charset="0"/>
+                        <a:ea typeface="Calibri" charset="0"/>
+                        <a:cs typeface="Calibri" charset="0"/>
+                      </a:endParaRPr>
+                    </a:p>
+                  </a:txBody>
+                  <a:tcPr marL="91440" marR="91440" marT="45720" marB="45720" anchor="ctr">
+                    <a:lnL w="12700" cap="flat" cmpd="sng" algn="ctr">
+                      <a:solidFill>
+                        <a:srgbClr val="D9E1E8"/>
+                      </a:solidFill>
+                      <a:prstDash val="solid"/>
+                      <a:round/>
+                      <a:headEnd type="none" w="med" len="med"/>
+                      <a:tailEnd type="none" w="med" len="med"/>
+                    </a:lnL>
+                    <a:lnR w="12700" cap="flat" cmpd="sng" algn="ctr">
+                      <a:solidFill>
+                        <a:srgbClr val="D9E1E8"/>
+                      </a:solidFill>
+                      <a:prstDash val="solid"/>
+                      <a:round/>
+                      <a:headEnd type="none" w="med" len="med"/>
+                      <a:tailEnd type="none" w="med" len="med"/>
+                    </a:lnR>
+                    <a:lnT w="12700" cap="flat" cmpd="sng" algn="ctr">
+                      <a:solidFill>
+                        <a:srgbClr val="D9E1E8"/>
+                      </a:solidFill>
+                      <a:prstDash val="solid"/>
+                      <a:round/>
+                      <a:headEnd type="none" w="med" len="med"/>
+                      <a:tailEnd type="none" w="med" len="med"/>
+                    </a:lnT>
+                    <a:lnB w="12700" cap="flat" cmpd="sng" algn="ctr">
+                      <a:solidFill>
+                        <a:srgbClr val="D9E1E8"/>
+                      </a:solidFill>
+                      <a:prstDash val="solid"/>
+                      <a:round/>
+                      <a:headEnd type="none" w="med" len="med"/>
+                      <a:tailEnd type="none" w="med" len="med"/>
+                    </a:lnB>
+                    <a:solidFill>
+                      <a:srgbClr val="FFFFFF"/>
+                    </a:solidFill>
+                  </a:tcPr>
+                </a:tc>
               </a:tr>
-              <a:tr h="493776">
+              <a:tr h="384048">
                 <a:tc>
                   <a:txBody>
                     <a:bodyPr/>
@@ -11249,7 +13568,7 @@
                         <a:buNone/>
                       </a:pPr>
                       <a:r>
-                        <a:rPr lang="en-US" sz="1200" b="1" dirty="0">
+                        <a:rPr lang="en-US" sz="1000" dirty="0">
                           <a:solidFill>
                             <a:srgbClr val="000000"/>
                           </a:solidFill>
@@ -11257,9 +13576,1101 @@
                           <a:ea typeface="Calibri" pitchFamily="34" charset="-122"/>
                           <a:cs typeface="Calibri" pitchFamily="34" charset="-120"/>
                         </a:rPr>
-                        <a:t>Qwen2.5-1.5B</a:t>
+                        <a:t>SmolLM2</a:t>
                       </a:r>
-                      <a:endParaRPr lang="en-US" sz="1200" dirty="0">
+                      <a:endParaRPr lang="en-US" sz="1000" dirty="0">
+                        <a:latin typeface="Calibri" charset="0"/>
+                        <a:ea typeface="Calibri" charset="0"/>
+                        <a:cs typeface="Calibri" charset="0"/>
+                      </a:endParaRPr>
+                    </a:p>
+                  </a:txBody>
+                  <a:tcPr marL="91440" marR="91440" marT="45720" marB="45720" anchor="ctr">
+                    <a:lnL w="12700" cap="flat" cmpd="sng" algn="ctr">
+                      <a:solidFill>
+                        <a:srgbClr val="D9E1E8"/>
+                      </a:solidFill>
+                      <a:prstDash val="solid"/>
+                      <a:round/>
+                      <a:headEnd type="none" w="med" len="med"/>
+                      <a:tailEnd type="none" w="med" len="med"/>
+                    </a:lnL>
+                    <a:lnR w="12700" cap="flat" cmpd="sng" algn="ctr">
+                      <a:solidFill>
+                        <a:srgbClr val="D9E1E8"/>
+                      </a:solidFill>
+                      <a:prstDash val="solid"/>
+                      <a:round/>
+                      <a:headEnd type="none" w="med" len="med"/>
+                      <a:tailEnd type="none" w="med" len="med"/>
+                    </a:lnR>
+                    <a:lnT w="12700" cap="flat" cmpd="sng" algn="ctr">
+                      <a:solidFill>
+                        <a:srgbClr val="D9E1E8"/>
+                      </a:solidFill>
+                      <a:prstDash val="solid"/>
+                      <a:round/>
+                      <a:headEnd type="none" w="med" len="med"/>
+                      <a:tailEnd type="none" w="med" len="med"/>
+                    </a:lnT>
+                    <a:lnB w="12700" cap="flat" cmpd="sng" algn="ctr">
+                      <a:solidFill>
+                        <a:srgbClr val="D9E1E8"/>
+                      </a:solidFill>
+                      <a:prstDash val="solid"/>
+                      <a:round/>
+                      <a:headEnd type="none" w="med" len="med"/>
+                      <a:tailEnd type="none" w="med" len="med"/>
+                    </a:lnB>
+                    <a:solidFill>
+                      <a:srgbClr val="FFFFFF"/>
+                    </a:solidFill>
+                  </a:tcPr>
+                </a:tc>
+                <a:tc>
+                  <a:txBody>
+                    <a:bodyPr/>
+                    <a:lstStyle/>
+                    <a:p>
+                      <a:pPr algn="ctr" indent="0" marL="0">
+                        <a:buNone/>
+                      </a:pPr>
+                      <a:r>
+                        <a:rPr lang="en-US" sz="1000" dirty="0">
+                          <a:solidFill>
+                            <a:srgbClr val="000000"/>
+                          </a:solidFill>
+                          <a:latin typeface="Calibri" pitchFamily="34" charset="0"/>
+                          <a:ea typeface="Calibri" pitchFamily="34" charset="-122"/>
+                          <a:cs typeface="Calibri" pitchFamily="34" charset="-120"/>
+                        </a:rPr>
+                        <a:t>360M</a:t>
+                      </a:r>
+                      <a:endParaRPr lang="en-US" sz="1000" dirty="0">
+                        <a:latin typeface="Calibri" charset="0"/>
+                        <a:ea typeface="Calibri" charset="0"/>
+                        <a:cs typeface="Calibri" charset="0"/>
+                      </a:endParaRPr>
+                    </a:p>
+                  </a:txBody>
+                  <a:tcPr marL="91440" marR="91440" marT="45720" marB="45720" anchor="ctr">
+                    <a:lnL w="12700" cap="flat" cmpd="sng" algn="ctr">
+                      <a:solidFill>
+                        <a:srgbClr val="D9E1E8"/>
+                      </a:solidFill>
+                      <a:prstDash val="solid"/>
+                      <a:round/>
+                      <a:headEnd type="none" w="med" len="med"/>
+                      <a:tailEnd type="none" w="med" len="med"/>
+                    </a:lnL>
+                    <a:lnR w="12700" cap="flat" cmpd="sng" algn="ctr">
+                      <a:solidFill>
+                        <a:srgbClr val="D9E1E8"/>
+                      </a:solidFill>
+                      <a:prstDash val="solid"/>
+                      <a:round/>
+                      <a:headEnd type="none" w="med" len="med"/>
+                      <a:tailEnd type="none" w="med" len="med"/>
+                    </a:lnR>
+                    <a:lnT w="12700" cap="flat" cmpd="sng" algn="ctr">
+                      <a:solidFill>
+                        <a:srgbClr val="D9E1E8"/>
+                      </a:solidFill>
+                      <a:prstDash val="solid"/>
+                      <a:round/>
+                      <a:headEnd type="none" w="med" len="med"/>
+                      <a:tailEnd type="none" w="med" len="med"/>
+                    </a:lnT>
+                    <a:lnB w="12700" cap="flat" cmpd="sng" algn="ctr">
+                      <a:solidFill>
+                        <a:srgbClr val="D9E1E8"/>
+                      </a:solidFill>
+                      <a:prstDash val="solid"/>
+                      <a:round/>
+                      <a:headEnd type="none" w="med" len="med"/>
+                      <a:tailEnd type="none" w="med" len="med"/>
+                    </a:lnB>
+                    <a:solidFill>
+                      <a:srgbClr val="FFFFFF"/>
+                    </a:solidFill>
+                  </a:tcPr>
+                </a:tc>
+                <a:tc>
+                  <a:txBody>
+                    <a:bodyPr/>
+                    <a:lstStyle/>
+                    <a:p>
+                      <a:pPr algn="ctr" indent="0" marL="0">
+                        <a:buNone/>
+                      </a:pPr>
+                      <a:r>
+                        <a:rPr lang="en-US" sz="1000" dirty="0">
+                          <a:solidFill>
+                            <a:srgbClr val="000000"/>
+                          </a:solidFill>
+                          <a:latin typeface="Calibri" pitchFamily="34" charset="0"/>
+                          <a:ea typeface="Calibri" pitchFamily="34" charset="-122"/>
+                          <a:cs typeface="Calibri" pitchFamily="34" charset="-120"/>
+                        </a:rPr>
+                        <a:t>QLoRA</a:t>
+                      </a:r>
+                      <a:endParaRPr lang="en-US" sz="1000" dirty="0">
+                        <a:latin typeface="Calibri" charset="0"/>
+                        <a:ea typeface="Calibri" charset="0"/>
+                        <a:cs typeface="Calibri" charset="0"/>
+                      </a:endParaRPr>
+                    </a:p>
+                  </a:txBody>
+                  <a:tcPr marL="91440" marR="91440" marT="45720" marB="45720" anchor="ctr">
+                    <a:lnL w="12700" cap="flat" cmpd="sng" algn="ctr">
+                      <a:solidFill>
+                        <a:srgbClr val="D9E1E8"/>
+                      </a:solidFill>
+                      <a:prstDash val="solid"/>
+                      <a:round/>
+                      <a:headEnd type="none" w="med" len="med"/>
+                      <a:tailEnd type="none" w="med" len="med"/>
+                    </a:lnL>
+                    <a:lnR w="12700" cap="flat" cmpd="sng" algn="ctr">
+                      <a:solidFill>
+                        <a:srgbClr val="D9E1E8"/>
+                      </a:solidFill>
+                      <a:prstDash val="solid"/>
+                      <a:round/>
+                      <a:headEnd type="none" w="med" len="med"/>
+                      <a:tailEnd type="none" w="med" len="med"/>
+                    </a:lnR>
+                    <a:lnT w="12700" cap="flat" cmpd="sng" algn="ctr">
+                      <a:solidFill>
+                        <a:srgbClr val="D9E1E8"/>
+                      </a:solidFill>
+                      <a:prstDash val="solid"/>
+                      <a:round/>
+                      <a:headEnd type="none" w="med" len="med"/>
+                      <a:tailEnd type="none" w="med" len="med"/>
+                    </a:lnT>
+                    <a:lnB w="12700" cap="flat" cmpd="sng" algn="ctr">
+                      <a:solidFill>
+                        <a:srgbClr val="D9E1E8"/>
+                      </a:solidFill>
+                      <a:prstDash val="solid"/>
+                      <a:round/>
+                      <a:headEnd type="none" w="med" len="med"/>
+                      <a:tailEnd type="none" w="med" len="med"/>
+                    </a:lnB>
+                    <a:solidFill>
+                      <a:srgbClr val="FFFFFF"/>
+                    </a:solidFill>
+                  </a:tcPr>
+                </a:tc>
+                <a:tc>
+                  <a:txBody>
+                    <a:bodyPr/>
+                    <a:lstStyle/>
+                    <a:p>
+                      <a:pPr algn="ctr" indent="0" marL="0">
+                        <a:buNone/>
+                      </a:pPr>
+                      <a:r>
+                        <a:rPr lang="en-US" sz="1000" dirty="0">
+                          <a:solidFill>
+                            <a:srgbClr val="000000"/>
+                          </a:solidFill>
+                          <a:latin typeface="Calibri" pitchFamily="34" charset="0"/>
+                          <a:ea typeface="Calibri" pitchFamily="34" charset="-122"/>
+                          <a:cs typeface="Calibri" pitchFamily="34" charset="-120"/>
+                        </a:rPr>
+                        <a:t>0.662</a:t>
+                      </a:r>
+                      <a:endParaRPr lang="en-US" sz="1000" dirty="0">
+                        <a:latin typeface="Calibri" charset="0"/>
+                        <a:ea typeface="Calibri" charset="0"/>
+                        <a:cs typeface="Calibri" charset="0"/>
+                      </a:endParaRPr>
+                    </a:p>
+                  </a:txBody>
+                  <a:tcPr marL="91440" marR="91440" marT="45720" marB="45720" anchor="ctr">
+                    <a:lnL w="12700" cap="flat" cmpd="sng" algn="ctr">
+                      <a:solidFill>
+                        <a:srgbClr val="D9E1E8"/>
+                      </a:solidFill>
+                      <a:prstDash val="solid"/>
+                      <a:round/>
+                      <a:headEnd type="none" w="med" len="med"/>
+                      <a:tailEnd type="none" w="med" len="med"/>
+                    </a:lnL>
+                    <a:lnR w="12700" cap="flat" cmpd="sng" algn="ctr">
+                      <a:solidFill>
+                        <a:srgbClr val="D9E1E8"/>
+                      </a:solidFill>
+                      <a:prstDash val="solid"/>
+                      <a:round/>
+                      <a:headEnd type="none" w="med" len="med"/>
+                      <a:tailEnd type="none" w="med" len="med"/>
+                    </a:lnR>
+                    <a:lnT w="12700" cap="flat" cmpd="sng" algn="ctr">
+                      <a:solidFill>
+                        <a:srgbClr val="D9E1E8"/>
+                      </a:solidFill>
+                      <a:prstDash val="solid"/>
+                      <a:round/>
+                      <a:headEnd type="none" w="med" len="med"/>
+                      <a:tailEnd type="none" w="med" len="med"/>
+                    </a:lnT>
+                    <a:lnB w="12700" cap="flat" cmpd="sng" algn="ctr">
+                      <a:solidFill>
+                        <a:srgbClr val="D9E1E8"/>
+                      </a:solidFill>
+                      <a:prstDash val="solid"/>
+                      <a:round/>
+                      <a:headEnd type="none" w="med" len="med"/>
+                      <a:tailEnd type="none" w="med" len="med"/>
+                    </a:lnB>
+                    <a:solidFill>
+                      <a:srgbClr val="FFFFFF"/>
+                    </a:solidFill>
+                  </a:tcPr>
+                </a:tc>
+                <a:tc>
+                  <a:txBody>
+                    <a:bodyPr/>
+                    <a:lstStyle/>
+                    <a:p>
+                      <a:pPr algn="ctr" indent="0" marL="0">
+                        <a:buNone/>
+                      </a:pPr>
+                      <a:r>
+                        <a:rPr lang="en-US" sz="1000" dirty="0">
+                          <a:solidFill>
+                            <a:srgbClr val="000000"/>
+                          </a:solidFill>
+                          <a:latin typeface="Calibri" pitchFamily="34" charset="0"/>
+                          <a:ea typeface="Calibri" pitchFamily="34" charset="-122"/>
+                          <a:cs typeface="Calibri" pitchFamily="34" charset="-120"/>
+                        </a:rPr>
+                        <a:t>0.588</a:t>
+                      </a:r>
+                      <a:endParaRPr lang="en-US" sz="1000" dirty="0">
+                        <a:latin typeface="Calibri" charset="0"/>
+                        <a:ea typeface="Calibri" charset="0"/>
+                        <a:cs typeface="Calibri" charset="0"/>
+                      </a:endParaRPr>
+                    </a:p>
+                  </a:txBody>
+                  <a:tcPr marL="91440" marR="91440" marT="45720" marB="45720" anchor="ctr">
+                    <a:lnL w="12700" cap="flat" cmpd="sng" algn="ctr">
+                      <a:solidFill>
+                        <a:srgbClr val="D9E1E8"/>
+                      </a:solidFill>
+                      <a:prstDash val="solid"/>
+                      <a:round/>
+                      <a:headEnd type="none" w="med" len="med"/>
+                      <a:tailEnd type="none" w="med" len="med"/>
+                    </a:lnL>
+                    <a:lnR w="12700" cap="flat" cmpd="sng" algn="ctr">
+                      <a:solidFill>
+                        <a:srgbClr val="D9E1E8"/>
+                      </a:solidFill>
+                      <a:prstDash val="solid"/>
+                      <a:round/>
+                      <a:headEnd type="none" w="med" len="med"/>
+                      <a:tailEnd type="none" w="med" len="med"/>
+                    </a:lnR>
+                    <a:lnT w="12700" cap="flat" cmpd="sng" algn="ctr">
+                      <a:solidFill>
+                        <a:srgbClr val="D9E1E8"/>
+                      </a:solidFill>
+                      <a:prstDash val="solid"/>
+                      <a:round/>
+                      <a:headEnd type="none" w="med" len="med"/>
+                      <a:tailEnd type="none" w="med" len="med"/>
+                    </a:lnT>
+                    <a:lnB w="12700" cap="flat" cmpd="sng" algn="ctr">
+                      <a:solidFill>
+                        <a:srgbClr val="D9E1E8"/>
+                      </a:solidFill>
+                      <a:prstDash val="solid"/>
+                      <a:round/>
+                      <a:headEnd type="none" w="med" len="med"/>
+                      <a:tailEnd type="none" w="med" len="med"/>
+                    </a:lnB>
+                    <a:solidFill>
+                      <a:srgbClr val="FFFFFF"/>
+                    </a:solidFill>
+                  </a:tcPr>
+                </a:tc>
+                <a:tc>
+                  <a:txBody>
+                    <a:bodyPr/>
+                    <a:lstStyle/>
+                    <a:p>
+                      <a:pPr algn="ctr" indent="0" marL="0">
+                        <a:buNone/>
+                      </a:pPr>
+                      <a:r>
+                        <a:rPr lang="en-US" sz="1000" dirty="0">
+                          <a:solidFill>
+                            <a:srgbClr val="000000"/>
+                          </a:solidFill>
+                          <a:latin typeface="Calibri" pitchFamily="34" charset="0"/>
+                          <a:ea typeface="Calibri" pitchFamily="34" charset="-122"/>
+                          <a:cs typeface="Calibri" pitchFamily="34" charset="-120"/>
+                        </a:rPr>
+                        <a:t>696</a:t>
+                      </a:r>
+                      <a:endParaRPr lang="en-US" sz="1000" dirty="0">
+                        <a:latin typeface="Calibri" charset="0"/>
+                        <a:ea typeface="Calibri" charset="0"/>
+                        <a:cs typeface="Calibri" charset="0"/>
+                      </a:endParaRPr>
+                    </a:p>
+                  </a:txBody>
+                  <a:tcPr marL="91440" marR="91440" marT="45720" marB="45720" anchor="ctr">
+                    <a:lnL w="12700" cap="flat" cmpd="sng" algn="ctr">
+                      <a:solidFill>
+                        <a:srgbClr val="D9E1E8"/>
+                      </a:solidFill>
+                      <a:prstDash val="solid"/>
+                      <a:round/>
+                      <a:headEnd type="none" w="med" len="med"/>
+                      <a:tailEnd type="none" w="med" len="med"/>
+                    </a:lnL>
+                    <a:lnR w="12700" cap="flat" cmpd="sng" algn="ctr">
+                      <a:solidFill>
+                        <a:srgbClr val="D9E1E8"/>
+                      </a:solidFill>
+                      <a:prstDash val="solid"/>
+                      <a:round/>
+                      <a:headEnd type="none" w="med" len="med"/>
+                      <a:tailEnd type="none" w="med" len="med"/>
+                    </a:lnR>
+                    <a:lnT w="12700" cap="flat" cmpd="sng" algn="ctr">
+                      <a:solidFill>
+                        <a:srgbClr val="D9E1E8"/>
+                      </a:solidFill>
+                      <a:prstDash val="solid"/>
+                      <a:round/>
+                      <a:headEnd type="none" w="med" len="med"/>
+                      <a:tailEnd type="none" w="med" len="med"/>
+                    </a:lnT>
+                    <a:lnB w="12700" cap="flat" cmpd="sng" algn="ctr">
+                      <a:solidFill>
+                        <a:srgbClr val="D9E1E8"/>
+                      </a:solidFill>
+                      <a:prstDash val="solid"/>
+                      <a:round/>
+                      <a:headEnd type="none" w="med" len="med"/>
+                      <a:tailEnd type="none" w="med" len="med"/>
+                    </a:lnB>
+                    <a:solidFill>
+                      <a:srgbClr val="FFFFFF"/>
+                    </a:solidFill>
+                  </a:tcPr>
+                </a:tc>
+                <a:tc>
+                  <a:txBody>
+                    <a:bodyPr/>
+                    <a:lstStyle/>
+                    <a:p>
+                      <a:pPr algn="ctr" indent="0" marL="0">
+                        <a:buNone/>
+                      </a:pPr>
+                      <a:r>
+                        <a:rPr lang="en-US" sz="1000" dirty="0">
+                          <a:solidFill>
+                            <a:srgbClr val="000000"/>
+                          </a:solidFill>
+                          <a:latin typeface="Calibri" pitchFamily="34" charset="0"/>
+                          <a:ea typeface="Calibri" pitchFamily="34" charset="-122"/>
+                          <a:cs typeface="Calibri" pitchFamily="34" charset="-120"/>
+                        </a:rPr>
+                        <a:t>1542</a:t>
+                      </a:r>
+                      <a:endParaRPr lang="en-US" sz="1000" dirty="0">
+                        <a:latin typeface="Calibri" charset="0"/>
+                        <a:ea typeface="Calibri" charset="0"/>
+                        <a:cs typeface="Calibri" charset="0"/>
+                      </a:endParaRPr>
+                    </a:p>
+                  </a:txBody>
+                  <a:tcPr marL="91440" marR="91440" marT="45720" marB="45720" anchor="ctr">
+                    <a:lnL w="12700" cap="flat" cmpd="sng" algn="ctr">
+                      <a:solidFill>
+                        <a:srgbClr val="D9E1E8"/>
+                      </a:solidFill>
+                      <a:prstDash val="solid"/>
+                      <a:round/>
+                      <a:headEnd type="none" w="med" len="med"/>
+                      <a:tailEnd type="none" w="med" len="med"/>
+                    </a:lnL>
+                    <a:lnR w="12700" cap="flat" cmpd="sng" algn="ctr">
+                      <a:solidFill>
+                        <a:srgbClr val="D9E1E8"/>
+                      </a:solidFill>
+                      <a:prstDash val="solid"/>
+                      <a:round/>
+                      <a:headEnd type="none" w="med" len="med"/>
+                      <a:tailEnd type="none" w="med" len="med"/>
+                    </a:lnR>
+                    <a:lnT w="12700" cap="flat" cmpd="sng" algn="ctr">
+                      <a:solidFill>
+                        <a:srgbClr val="D9E1E8"/>
+                      </a:solidFill>
+                      <a:prstDash val="solid"/>
+                      <a:round/>
+                      <a:headEnd type="none" w="med" len="med"/>
+                      <a:tailEnd type="none" w="med" len="med"/>
+                    </a:lnT>
+                    <a:lnB w="12700" cap="flat" cmpd="sng" algn="ctr">
+                      <a:solidFill>
+                        <a:srgbClr val="D9E1E8"/>
+                      </a:solidFill>
+                      <a:prstDash val="solid"/>
+                      <a:round/>
+                      <a:headEnd type="none" w="med" len="med"/>
+                      <a:tailEnd type="none" w="med" len="med"/>
+                    </a:lnB>
+                    <a:solidFill>
+                      <a:srgbClr val="FFFFFF"/>
+                    </a:solidFill>
+                  </a:tcPr>
+                </a:tc>
+                <a:tc>
+                  <a:txBody>
+                    <a:bodyPr/>
+                    <a:lstStyle/>
+                    <a:p>
+                      <a:pPr algn="ctr" indent="0" marL="0">
+                        <a:buNone/>
+                      </a:pPr>
+                      <a:r>
+                        <a:rPr lang="en-US" sz="1000" dirty="0">
+                          <a:solidFill>
+                            <a:srgbClr val="000000"/>
+                          </a:solidFill>
+                          <a:latin typeface="Calibri" pitchFamily="34" charset="0"/>
+                          <a:ea typeface="Calibri" pitchFamily="34" charset="-122"/>
+                          <a:cs typeface="Calibri" pitchFamily="34" charset="-120"/>
+                        </a:rPr>
+                        <a:t>6.6</a:t>
+                      </a:r>
+                      <a:endParaRPr lang="en-US" sz="1000" dirty="0">
+                        <a:latin typeface="Calibri" charset="0"/>
+                        <a:ea typeface="Calibri" charset="0"/>
+                        <a:cs typeface="Calibri" charset="0"/>
+                      </a:endParaRPr>
+                    </a:p>
+                  </a:txBody>
+                  <a:tcPr marL="91440" marR="91440" marT="45720" marB="45720" anchor="ctr">
+                    <a:lnL w="12700" cap="flat" cmpd="sng" algn="ctr">
+                      <a:solidFill>
+                        <a:srgbClr val="D9E1E8"/>
+                      </a:solidFill>
+                      <a:prstDash val="solid"/>
+                      <a:round/>
+                      <a:headEnd type="none" w="med" len="med"/>
+                      <a:tailEnd type="none" w="med" len="med"/>
+                    </a:lnL>
+                    <a:lnR w="12700" cap="flat" cmpd="sng" algn="ctr">
+                      <a:solidFill>
+                        <a:srgbClr val="D9E1E8"/>
+                      </a:solidFill>
+                      <a:prstDash val="solid"/>
+                      <a:round/>
+                      <a:headEnd type="none" w="med" len="med"/>
+                      <a:tailEnd type="none" w="med" len="med"/>
+                    </a:lnR>
+                    <a:lnT w="12700" cap="flat" cmpd="sng" algn="ctr">
+                      <a:solidFill>
+                        <a:srgbClr val="D9E1E8"/>
+                      </a:solidFill>
+                      <a:prstDash val="solid"/>
+                      <a:round/>
+                      <a:headEnd type="none" w="med" len="med"/>
+                      <a:tailEnd type="none" w="med" len="med"/>
+                    </a:lnT>
+                    <a:lnB w="12700" cap="flat" cmpd="sng" algn="ctr">
+                      <a:solidFill>
+                        <a:srgbClr val="D9E1E8"/>
+                      </a:solidFill>
+                      <a:prstDash val="solid"/>
+                      <a:round/>
+                      <a:headEnd type="none" w="med" len="med"/>
+                      <a:tailEnd type="none" w="med" len="med"/>
+                    </a:lnB>
+                    <a:solidFill>
+                      <a:srgbClr val="FFFFFF"/>
+                    </a:solidFill>
+                  </a:tcPr>
+                </a:tc>
+              </a:tr>
+              <a:tr h="384048">
+                <a:tc>
+                  <a:txBody>
+                    <a:bodyPr/>
+                    <a:lstStyle/>
+                    <a:p>
+                      <a:pPr indent="0" marL="0">
+                        <a:buNone/>
+                      </a:pPr>
+                      <a:r>
+                        <a:rPr lang="en-US" sz="1000" b="1" dirty="0">
+                          <a:solidFill>
+                            <a:srgbClr val="000000"/>
+                          </a:solidFill>
+                          <a:latin typeface="Calibri" pitchFamily="34" charset="0"/>
+                          <a:ea typeface="Calibri" pitchFamily="34" charset="-122"/>
+                          <a:cs typeface="Calibri" pitchFamily="34" charset="-120"/>
+                        </a:rPr>
+                        <a:t>TinyLlama</a:t>
+                      </a:r>
+                      <a:endParaRPr lang="en-US" sz="1000" dirty="0">
+                        <a:latin typeface="Calibri" charset="0"/>
+                        <a:ea typeface="Calibri" charset="0"/>
+                        <a:cs typeface="Calibri" charset="0"/>
+                      </a:endParaRPr>
+                    </a:p>
+                  </a:txBody>
+                  <a:tcPr marL="91440" marR="91440" marT="45720" marB="45720" anchor="ctr">
+                    <a:lnL w="12700" cap="flat" cmpd="sng" algn="ctr">
+                      <a:solidFill>
+                        <a:srgbClr val="D9E1E8"/>
+                      </a:solidFill>
+                      <a:prstDash val="solid"/>
+                      <a:round/>
+                      <a:headEnd type="none" w="med" len="med"/>
+                      <a:tailEnd type="none" w="med" len="med"/>
+                    </a:lnL>
+                    <a:lnR w="12700" cap="flat" cmpd="sng" algn="ctr">
+                      <a:solidFill>
+                        <a:srgbClr val="D9E1E8"/>
+                      </a:solidFill>
+                      <a:prstDash val="solid"/>
+                      <a:round/>
+                      <a:headEnd type="none" w="med" len="med"/>
+                      <a:tailEnd type="none" w="med" len="med"/>
+                    </a:lnR>
+                    <a:lnT w="12700" cap="flat" cmpd="sng" algn="ctr">
+                      <a:solidFill>
+                        <a:srgbClr val="D9E1E8"/>
+                      </a:solidFill>
+                      <a:prstDash val="solid"/>
+                      <a:round/>
+                      <a:headEnd type="none" w="med" len="med"/>
+                      <a:tailEnd type="none" w="med" len="med"/>
+                    </a:lnT>
+                    <a:lnB w="12700" cap="flat" cmpd="sng" algn="ctr">
+                      <a:solidFill>
+                        <a:srgbClr val="D9E1E8"/>
+                      </a:solidFill>
+                      <a:prstDash val="solid"/>
+                      <a:round/>
+                      <a:headEnd type="none" w="med" len="med"/>
+                      <a:tailEnd type="none" w="med" len="med"/>
+                    </a:lnB>
+                    <a:solidFill>
+                      <a:srgbClr val="FFFFFF"/>
+                    </a:solidFill>
+                  </a:tcPr>
+                </a:tc>
+                <a:tc>
+                  <a:txBody>
+                    <a:bodyPr/>
+                    <a:lstStyle/>
+                    <a:p>
+                      <a:pPr algn="ctr" indent="0" marL="0">
+                        <a:buNone/>
+                      </a:pPr>
+                      <a:r>
+                        <a:rPr lang="en-US" sz="1000" b="1" dirty="0">
+                          <a:solidFill>
+                            <a:srgbClr val="000000"/>
+                          </a:solidFill>
+                          <a:latin typeface="Calibri" pitchFamily="34" charset="0"/>
+                          <a:ea typeface="Calibri" pitchFamily="34" charset="-122"/>
+                          <a:cs typeface="Calibri" pitchFamily="34" charset="-120"/>
+                        </a:rPr>
+                        <a:t>1.1B</a:t>
+                      </a:r>
+                      <a:endParaRPr lang="en-US" sz="1000" dirty="0">
+                        <a:latin typeface="Calibri" charset="0"/>
+                        <a:ea typeface="Calibri" charset="0"/>
+                        <a:cs typeface="Calibri" charset="0"/>
+                      </a:endParaRPr>
+                    </a:p>
+                  </a:txBody>
+                  <a:tcPr marL="91440" marR="91440" marT="45720" marB="45720" anchor="ctr">
+                    <a:lnL w="12700" cap="flat" cmpd="sng" algn="ctr">
+                      <a:solidFill>
+                        <a:srgbClr val="D9E1E8"/>
+                      </a:solidFill>
+                      <a:prstDash val="solid"/>
+                      <a:round/>
+                      <a:headEnd type="none" w="med" len="med"/>
+                      <a:tailEnd type="none" w="med" len="med"/>
+                    </a:lnL>
+                    <a:lnR w="12700" cap="flat" cmpd="sng" algn="ctr">
+                      <a:solidFill>
+                        <a:srgbClr val="D9E1E8"/>
+                      </a:solidFill>
+                      <a:prstDash val="solid"/>
+                      <a:round/>
+                      <a:headEnd type="none" w="med" len="med"/>
+                      <a:tailEnd type="none" w="med" len="med"/>
+                    </a:lnR>
+                    <a:lnT w="12700" cap="flat" cmpd="sng" algn="ctr">
+                      <a:solidFill>
+                        <a:srgbClr val="D9E1E8"/>
+                      </a:solidFill>
+                      <a:prstDash val="solid"/>
+                      <a:round/>
+                      <a:headEnd type="none" w="med" len="med"/>
+                      <a:tailEnd type="none" w="med" len="med"/>
+                    </a:lnT>
+                    <a:lnB w="12700" cap="flat" cmpd="sng" algn="ctr">
+                      <a:solidFill>
+                        <a:srgbClr val="D9E1E8"/>
+                      </a:solidFill>
+                      <a:prstDash val="solid"/>
+                      <a:round/>
+                      <a:headEnd type="none" w="med" len="med"/>
+                      <a:tailEnd type="none" w="med" len="med"/>
+                    </a:lnB>
+                    <a:solidFill>
+                      <a:srgbClr val="FFFFFF"/>
+                    </a:solidFill>
+                  </a:tcPr>
+                </a:tc>
+                <a:tc>
+                  <a:txBody>
+                    <a:bodyPr/>
+                    <a:lstStyle/>
+                    <a:p>
+                      <a:pPr algn="ctr" indent="0" marL="0">
+                        <a:buNone/>
+                      </a:pPr>
+                      <a:r>
+                        <a:rPr lang="en-US" sz="1000" b="1" dirty="0">
+                          <a:solidFill>
+                            <a:srgbClr val="000000"/>
+                          </a:solidFill>
+                          <a:latin typeface="Calibri" pitchFamily="34" charset="0"/>
+                          <a:ea typeface="Calibri" pitchFamily="34" charset="-122"/>
+                          <a:cs typeface="Calibri" pitchFamily="34" charset="-120"/>
+                        </a:rPr>
+                        <a:t>QLoRA</a:t>
+                      </a:r>
+                      <a:endParaRPr lang="en-US" sz="1000" dirty="0">
+                        <a:latin typeface="Calibri" charset="0"/>
+                        <a:ea typeface="Calibri" charset="0"/>
+                        <a:cs typeface="Calibri" charset="0"/>
+                      </a:endParaRPr>
+                    </a:p>
+                  </a:txBody>
+                  <a:tcPr marL="91440" marR="91440" marT="45720" marB="45720" anchor="ctr">
+                    <a:lnL w="12700" cap="flat" cmpd="sng" algn="ctr">
+                      <a:solidFill>
+                        <a:srgbClr val="D9E1E8"/>
+                      </a:solidFill>
+                      <a:prstDash val="solid"/>
+                      <a:round/>
+                      <a:headEnd type="none" w="med" len="med"/>
+                      <a:tailEnd type="none" w="med" len="med"/>
+                    </a:lnL>
+                    <a:lnR w="12700" cap="flat" cmpd="sng" algn="ctr">
+                      <a:solidFill>
+                        <a:srgbClr val="D9E1E8"/>
+                      </a:solidFill>
+                      <a:prstDash val="solid"/>
+                      <a:round/>
+                      <a:headEnd type="none" w="med" len="med"/>
+                      <a:tailEnd type="none" w="med" len="med"/>
+                    </a:lnR>
+                    <a:lnT w="12700" cap="flat" cmpd="sng" algn="ctr">
+                      <a:solidFill>
+                        <a:srgbClr val="D9E1E8"/>
+                      </a:solidFill>
+                      <a:prstDash val="solid"/>
+                      <a:round/>
+                      <a:headEnd type="none" w="med" len="med"/>
+                      <a:tailEnd type="none" w="med" len="med"/>
+                    </a:lnT>
+                    <a:lnB w="12700" cap="flat" cmpd="sng" algn="ctr">
+                      <a:solidFill>
+                        <a:srgbClr val="D9E1E8"/>
+                      </a:solidFill>
+                      <a:prstDash val="solid"/>
+                      <a:round/>
+                      <a:headEnd type="none" w="med" len="med"/>
+                      <a:tailEnd type="none" w="med" len="med"/>
+                    </a:lnB>
+                    <a:solidFill>
+                      <a:srgbClr val="FFFFFF"/>
+                    </a:solidFill>
+                  </a:tcPr>
+                </a:tc>
+                <a:tc>
+                  <a:txBody>
+                    <a:bodyPr/>
+                    <a:lstStyle/>
+                    <a:p>
+                      <a:pPr algn="ctr" indent="0" marL="0">
+                        <a:buNone/>
+                      </a:pPr>
+                      <a:r>
+                        <a:rPr lang="en-US" sz="1000" b="1" dirty="0">
+                          <a:solidFill>
+                            <a:srgbClr val="000000"/>
+                          </a:solidFill>
+                          <a:latin typeface="Calibri" pitchFamily="34" charset="0"/>
+                          <a:ea typeface="Calibri" pitchFamily="34" charset="-122"/>
+                          <a:cs typeface="Calibri" pitchFamily="34" charset="-120"/>
+                        </a:rPr>
+                        <a:t>0.925</a:t>
+                      </a:r>
+                      <a:endParaRPr lang="en-US" sz="1000" dirty="0">
+                        <a:latin typeface="Calibri" charset="0"/>
+                        <a:ea typeface="Calibri" charset="0"/>
+                        <a:cs typeface="Calibri" charset="0"/>
+                      </a:endParaRPr>
+                    </a:p>
+                  </a:txBody>
+                  <a:tcPr marL="91440" marR="91440" marT="45720" marB="45720" anchor="ctr">
+                    <a:lnL w="12700" cap="flat" cmpd="sng" algn="ctr">
+                      <a:solidFill>
+                        <a:srgbClr val="D9E1E8"/>
+                      </a:solidFill>
+                      <a:prstDash val="solid"/>
+                      <a:round/>
+                      <a:headEnd type="none" w="med" len="med"/>
+                      <a:tailEnd type="none" w="med" len="med"/>
+                    </a:lnL>
+                    <a:lnR w="12700" cap="flat" cmpd="sng" algn="ctr">
+                      <a:solidFill>
+                        <a:srgbClr val="D9E1E8"/>
+                      </a:solidFill>
+                      <a:prstDash val="solid"/>
+                      <a:round/>
+                      <a:headEnd type="none" w="med" len="med"/>
+                      <a:tailEnd type="none" w="med" len="med"/>
+                    </a:lnR>
+                    <a:lnT w="12700" cap="flat" cmpd="sng" algn="ctr">
+                      <a:solidFill>
+                        <a:srgbClr val="D9E1E8"/>
+                      </a:solidFill>
+                      <a:prstDash val="solid"/>
+                      <a:round/>
+                      <a:headEnd type="none" w="med" len="med"/>
+                      <a:tailEnd type="none" w="med" len="med"/>
+                    </a:lnT>
+                    <a:lnB w="12700" cap="flat" cmpd="sng" algn="ctr">
+                      <a:solidFill>
+                        <a:srgbClr val="D9E1E8"/>
+                      </a:solidFill>
+                      <a:prstDash val="solid"/>
+                      <a:round/>
+                      <a:headEnd type="none" w="med" len="med"/>
+                      <a:tailEnd type="none" w="med" len="med"/>
+                    </a:lnB>
+                    <a:solidFill>
+                      <a:srgbClr val="FFFFFF"/>
+                    </a:solidFill>
+                  </a:tcPr>
+                </a:tc>
+                <a:tc>
+                  <a:txBody>
+                    <a:bodyPr/>
+                    <a:lstStyle/>
+                    <a:p>
+                      <a:pPr algn="ctr" indent="0" marL="0">
+                        <a:buNone/>
+                      </a:pPr>
+                      <a:r>
+                        <a:rPr lang="en-US" sz="1000" b="1" dirty="0">
+                          <a:solidFill>
+                            <a:srgbClr val="000000"/>
+                          </a:solidFill>
+                          <a:latin typeface="Calibri" pitchFamily="34" charset="0"/>
+                          <a:ea typeface="Calibri" pitchFamily="34" charset="-122"/>
+                          <a:cs typeface="Calibri" pitchFamily="34" charset="-120"/>
+                        </a:rPr>
+                        <a:t>0.908</a:t>
+                      </a:r>
+                      <a:endParaRPr lang="en-US" sz="1000" dirty="0">
+                        <a:latin typeface="Calibri" charset="0"/>
+                        <a:ea typeface="Calibri" charset="0"/>
+                        <a:cs typeface="Calibri" charset="0"/>
+                      </a:endParaRPr>
+                    </a:p>
+                  </a:txBody>
+                  <a:tcPr marL="91440" marR="91440" marT="45720" marB="45720" anchor="ctr">
+                    <a:lnL w="12700" cap="flat" cmpd="sng" algn="ctr">
+                      <a:solidFill>
+                        <a:srgbClr val="D9E1E8"/>
+                      </a:solidFill>
+                      <a:prstDash val="solid"/>
+                      <a:round/>
+                      <a:headEnd type="none" w="med" len="med"/>
+                      <a:tailEnd type="none" w="med" len="med"/>
+                    </a:lnL>
+                    <a:lnR w="12700" cap="flat" cmpd="sng" algn="ctr">
+                      <a:solidFill>
+                        <a:srgbClr val="D9E1E8"/>
+                      </a:solidFill>
+                      <a:prstDash val="solid"/>
+                      <a:round/>
+                      <a:headEnd type="none" w="med" len="med"/>
+                      <a:tailEnd type="none" w="med" len="med"/>
+                    </a:lnR>
+                    <a:lnT w="12700" cap="flat" cmpd="sng" algn="ctr">
+                      <a:solidFill>
+                        <a:srgbClr val="D9E1E8"/>
+                      </a:solidFill>
+                      <a:prstDash val="solid"/>
+                      <a:round/>
+                      <a:headEnd type="none" w="med" len="med"/>
+                      <a:tailEnd type="none" w="med" len="med"/>
+                    </a:lnT>
+                    <a:lnB w="12700" cap="flat" cmpd="sng" algn="ctr">
+                      <a:solidFill>
+                        <a:srgbClr val="D9E1E8"/>
+                      </a:solidFill>
+                      <a:prstDash val="solid"/>
+                      <a:round/>
+                      <a:headEnd type="none" w="med" len="med"/>
+                      <a:tailEnd type="none" w="med" len="med"/>
+                    </a:lnB>
+                    <a:solidFill>
+                      <a:srgbClr val="FFFFFF"/>
+                    </a:solidFill>
+                  </a:tcPr>
+                </a:tc>
+                <a:tc>
+                  <a:txBody>
+                    <a:bodyPr/>
+                    <a:lstStyle/>
+                    <a:p>
+                      <a:pPr algn="ctr" indent="0" marL="0">
+                        <a:buNone/>
+                      </a:pPr>
+                      <a:r>
+                        <a:rPr lang="en-US" sz="1000" b="1" dirty="0">
+                          <a:solidFill>
+                            <a:srgbClr val="000000"/>
+                          </a:solidFill>
+                          <a:latin typeface="Calibri" pitchFamily="34" charset="0"/>
+                          <a:ea typeface="Calibri" pitchFamily="34" charset="-122"/>
+                          <a:cs typeface="Calibri" pitchFamily="34" charset="-120"/>
+                        </a:rPr>
+                        <a:t>1697</a:t>
+                      </a:r>
+                      <a:endParaRPr lang="en-US" sz="1000" dirty="0">
+                        <a:latin typeface="Calibri" charset="0"/>
+                        <a:ea typeface="Calibri" charset="0"/>
+                        <a:cs typeface="Calibri" charset="0"/>
+                      </a:endParaRPr>
+                    </a:p>
+                  </a:txBody>
+                  <a:tcPr marL="91440" marR="91440" marT="45720" marB="45720" anchor="ctr">
+                    <a:lnL w="12700" cap="flat" cmpd="sng" algn="ctr">
+                      <a:solidFill>
+                        <a:srgbClr val="D9E1E8"/>
+                      </a:solidFill>
+                      <a:prstDash val="solid"/>
+                      <a:round/>
+                      <a:headEnd type="none" w="med" len="med"/>
+                      <a:tailEnd type="none" w="med" len="med"/>
+                    </a:lnL>
+                    <a:lnR w="12700" cap="flat" cmpd="sng" algn="ctr">
+                      <a:solidFill>
+                        <a:srgbClr val="D9E1E8"/>
+                      </a:solidFill>
+                      <a:prstDash val="solid"/>
+                      <a:round/>
+                      <a:headEnd type="none" w="med" len="med"/>
+                      <a:tailEnd type="none" w="med" len="med"/>
+                    </a:lnR>
+                    <a:lnT w="12700" cap="flat" cmpd="sng" algn="ctr">
+                      <a:solidFill>
+                        <a:srgbClr val="D9E1E8"/>
+                      </a:solidFill>
+                      <a:prstDash val="solid"/>
+                      <a:round/>
+                      <a:headEnd type="none" w="med" len="med"/>
+                      <a:tailEnd type="none" w="med" len="med"/>
+                    </a:lnT>
+                    <a:lnB w="12700" cap="flat" cmpd="sng" algn="ctr">
+                      <a:solidFill>
+                        <a:srgbClr val="D9E1E8"/>
+                      </a:solidFill>
+                      <a:prstDash val="solid"/>
+                      <a:round/>
+                      <a:headEnd type="none" w="med" len="med"/>
+                      <a:tailEnd type="none" w="med" len="med"/>
+                    </a:lnB>
+                    <a:solidFill>
+                      <a:srgbClr val="FFFFFF"/>
+                    </a:solidFill>
+                  </a:tcPr>
+                </a:tc>
+                <a:tc>
+                  <a:txBody>
+                    <a:bodyPr/>
+                    <a:lstStyle/>
+                    <a:p>
+                      <a:pPr algn="ctr" indent="0" marL="0">
+                        <a:buNone/>
+                      </a:pPr>
+                      <a:r>
+                        <a:rPr lang="en-US" sz="1000" b="1" dirty="0">
+                          <a:solidFill>
+                            <a:srgbClr val="000000"/>
+                          </a:solidFill>
+                          <a:latin typeface="Calibri" pitchFamily="34" charset="0"/>
+                          <a:ea typeface="Calibri" pitchFamily="34" charset="-122"/>
+                          <a:cs typeface="Calibri" pitchFamily="34" charset="-120"/>
+                        </a:rPr>
+                        <a:t>960</a:t>
+                      </a:r>
+                      <a:endParaRPr lang="en-US" sz="1000" dirty="0">
+                        <a:latin typeface="Calibri" charset="0"/>
+                        <a:ea typeface="Calibri" charset="0"/>
+                        <a:cs typeface="Calibri" charset="0"/>
+                      </a:endParaRPr>
+                    </a:p>
+                  </a:txBody>
+                  <a:tcPr marL="91440" marR="91440" marT="45720" marB="45720" anchor="ctr">
+                    <a:lnL w="12700" cap="flat" cmpd="sng" algn="ctr">
+                      <a:solidFill>
+                        <a:srgbClr val="D9E1E8"/>
+                      </a:solidFill>
+                      <a:prstDash val="solid"/>
+                      <a:round/>
+                      <a:headEnd type="none" w="med" len="med"/>
+                      <a:tailEnd type="none" w="med" len="med"/>
+                    </a:lnL>
+                    <a:lnR w="12700" cap="flat" cmpd="sng" algn="ctr">
+                      <a:solidFill>
+                        <a:srgbClr val="D9E1E8"/>
+                      </a:solidFill>
+                      <a:prstDash val="solid"/>
+                      <a:round/>
+                      <a:headEnd type="none" w="med" len="med"/>
+                      <a:tailEnd type="none" w="med" len="med"/>
+                    </a:lnR>
+                    <a:lnT w="12700" cap="flat" cmpd="sng" algn="ctr">
+                      <a:solidFill>
+                        <a:srgbClr val="D9E1E8"/>
+                      </a:solidFill>
+                      <a:prstDash val="solid"/>
+                      <a:round/>
+                      <a:headEnd type="none" w="med" len="med"/>
+                      <a:tailEnd type="none" w="med" len="med"/>
+                    </a:lnT>
+                    <a:lnB w="12700" cap="flat" cmpd="sng" algn="ctr">
+                      <a:solidFill>
+                        <a:srgbClr val="D9E1E8"/>
+                      </a:solidFill>
+                      <a:prstDash val="solid"/>
+                      <a:round/>
+                      <a:headEnd type="none" w="med" len="med"/>
+                      <a:tailEnd type="none" w="med" len="med"/>
+                    </a:lnB>
+                    <a:solidFill>
+                      <a:srgbClr val="FFFFFF"/>
+                    </a:solidFill>
+                  </a:tcPr>
+                </a:tc>
+                <a:tc>
+                  <a:txBody>
+                    <a:bodyPr/>
+                    <a:lstStyle/>
+                    <a:p>
+                      <a:pPr algn="ctr" indent="0" marL="0">
+                        <a:buNone/>
+                      </a:pPr>
+                      <a:r>
+                        <a:rPr lang="en-US" sz="1000" b="1" dirty="0">
+                          <a:solidFill>
+                            <a:srgbClr val="000000"/>
+                          </a:solidFill>
+                          <a:latin typeface="Calibri" pitchFamily="34" charset="0"/>
+                          <a:ea typeface="Calibri" pitchFamily="34" charset="-122"/>
+                          <a:cs typeface="Calibri" pitchFamily="34" charset="-120"/>
+                        </a:rPr>
+                        <a:t>9.0</a:t>
+                      </a:r>
+                      <a:endParaRPr lang="en-US" sz="1000" dirty="0">
+                        <a:latin typeface="Calibri" charset="0"/>
+                        <a:ea typeface="Calibri" charset="0"/>
+                        <a:cs typeface="Calibri" charset="0"/>
+                      </a:endParaRPr>
+                    </a:p>
+                  </a:txBody>
+                  <a:tcPr marL="91440" marR="91440" marT="45720" marB="45720" anchor="ctr">
+                    <a:lnL w="12700" cap="flat" cmpd="sng" algn="ctr">
+                      <a:solidFill>
+                        <a:srgbClr val="D9E1E8"/>
+                      </a:solidFill>
+                      <a:prstDash val="solid"/>
+                      <a:round/>
+                      <a:headEnd type="none" w="med" len="med"/>
+                      <a:tailEnd type="none" w="med" len="med"/>
+                    </a:lnL>
+                    <a:lnR w="12700" cap="flat" cmpd="sng" algn="ctr">
+                      <a:solidFill>
+                        <a:srgbClr val="D9E1E8"/>
+                      </a:solidFill>
+                      <a:prstDash val="solid"/>
+                      <a:round/>
+                      <a:headEnd type="none" w="med" len="med"/>
+                      <a:tailEnd type="none" w="med" len="med"/>
+                    </a:lnR>
+                    <a:lnT w="12700" cap="flat" cmpd="sng" algn="ctr">
+                      <a:solidFill>
+                        <a:srgbClr val="D9E1E8"/>
+                      </a:solidFill>
+                      <a:prstDash val="solid"/>
+                      <a:round/>
+                      <a:headEnd type="none" w="med" len="med"/>
+                      <a:tailEnd type="none" w="med" len="med"/>
+                    </a:lnT>
+                    <a:lnB w="12700" cap="flat" cmpd="sng" algn="ctr">
+                      <a:solidFill>
+                        <a:srgbClr val="D9E1E8"/>
+                      </a:solidFill>
+                      <a:prstDash val="solid"/>
+                      <a:round/>
+                      <a:headEnd type="none" w="med" len="med"/>
+                      <a:tailEnd type="none" w="med" len="med"/>
+                    </a:lnB>
+                    <a:solidFill>
+                      <a:srgbClr val="FFFFFF"/>
+                    </a:solidFill>
+                  </a:tcPr>
+                </a:tc>
+              </a:tr>
+              <a:tr h="384048">
+                <a:tc>
+                  <a:txBody>
+                    <a:bodyPr/>
+                    <a:lstStyle/>
+                    <a:p>
+                      <a:pPr indent="0" marL="0">
+                        <a:buNone/>
+                      </a:pPr>
+                      <a:r>
+                        <a:rPr lang="en-US" sz="1000" b="1" dirty="0">
+                          <a:solidFill>
+                            <a:srgbClr val="000000"/>
+                          </a:solidFill>
+                          <a:latin typeface="Calibri" pitchFamily="34" charset="0"/>
+                          <a:ea typeface="Calibri" pitchFamily="34" charset="-122"/>
+                          <a:cs typeface="Calibri" pitchFamily="34" charset="-120"/>
+                        </a:rPr>
+                        <a:t>Qwen2.5</a:t>
+                      </a:r>
+                      <a:endParaRPr lang="en-US" sz="1000" dirty="0">
                         <a:latin typeface="Calibri" charset="0"/>
                         <a:ea typeface="Calibri" charset="0"/>
                         <a:cs typeface="Calibri" charset="0"/>
@@ -11317,7 +14728,7 @@
                         <a:buNone/>
                       </a:pPr>
                       <a:r>
-                        <a:rPr lang="en-US" sz="1200" b="1" dirty="0">
+                        <a:rPr lang="en-US" sz="1000" b="1" dirty="0">
                           <a:solidFill>
                             <a:srgbClr val="000000"/>
                           </a:solidFill>
@@ -11325,9 +14736,9 @@
                           <a:ea typeface="Calibri" pitchFamily="34" charset="-122"/>
                           <a:cs typeface="Calibri" pitchFamily="34" charset="-120"/>
                         </a:rPr>
-                        <a:t>QLoRA</a:t>
+                        <a:t>1.5B</a:t>
                       </a:r>
-                      <a:endParaRPr lang="en-US" sz="1200" dirty="0">
+                      <a:endParaRPr lang="en-US" sz="1000" dirty="0">
                         <a:latin typeface="Calibri" charset="0"/>
                         <a:ea typeface="Calibri" charset="0"/>
                         <a:cs typeface="Calibri" charset="0"/>
@@ -11385,7 +14796,7 @@
                         <a:buNone/>
                       </a:pPr>
                       <a:r>
-                        <a:rPr lang="en-US" sz="1200" b="1" dirty="0">
+                        <a:rPr lang="en-US" sz="1000" b="1" dirty="0">
                           <a:solidFill>
                             <a:srgbClr val="000000"/>
                           </a:solidFill>
@@ -11393,9 +14804,9 @@
                           <a:ea typeface="Calibri" pitchFamily="34" charset="-122"/>
                           <a:cs typeface="Calibri" pitchFamily="34" charset="-120"/>
                         </a:rPr>
-                        <a:t>0.925</a:t>
+                        <a:t>QLoRA</a:t>
                       </a:r>
-                      <a:endParaRPr lang="en-US" sz="1200" dirty="0">
+                      <a:endParaRPr lang="en-US" sz="1000" dirty="0">
                         <a:latin typeface="Calibri" charset="0"/>
                         <a:ea typeface="Calibri" charset="0"/>
                         <a:cs typeface="Calibri" charset="0"/>
@@ -11453,17 +14864,17 @@
                         <a:buNone/>
                       </a:pPr>
                       <a:r>
-                        <a:rPr lang="en-US" sz="1300" b="1" dirty="0">
+                        <a:rPr lang="en-US" sz="1000" b="1" dirty="0">
                           <a:solidFill>
-                            <a:srgbClr val="2E7D32"/>
+                            <a:srgbClr val="000000"/>
                           </a:solidFill>
                           <a:latin typeface="Calibri" pitchFamily="34" charset="0"/>
                           <a:ea typeface="Calibri" pitchFamily="34" charset="-122"/>
                           <a:cs typeface="Calibri" pitchFamily="34" charset="-120"/>
                         </a:rPr>
-                        <a:t>0.914</a:t>
+                        <a:t>0.925</a:t>
                       </a:r>
-                      <a:endParaRPr lang="en-US" sz="1300" dirty="0">
+                      <a:endParaRPr lang="en-US" sz="1000" dirty="0">
                         <a:latin typeface="Calibri" charset="0"/>
                         <a:ea typeface="Calibri" charset="0"/>
                         <a:cs typeface="Calibri" charset="0"/>
@@ -11521,17 +14932,17 @@
                         <a:buNone/>
                       </a:pPr>
                       <a:r>
-                        <a:rPr lang="en-US" sz="1200" b="1" dirty="0">
+                        <a:rPr lang="en-US" sz="1100" b="1" dirty="0">
                           <a:solidFill>
-                            <a:srgbClr val="000000"/>
+                            <a:srgbClr val="2E7D32"/>
                           </a:solidFill>
                           <a:latin typeface="Calibri" pitchFamily="34" charset="0"/>
                           <a:ea typeface="Calibri" pitchFamily="34" charset="-122"/>
                           <a:cs typeface="Calibri" pitchFamily="34" charset="-120"/>
                         </a:rPr>
-                        <a:t>0.925</a:t>
+                        <a:t>0.914</a:t>
                       </a:r>
-                      <a:endParaRPr lang="en-US" sz="1200" dirty="0">
+                      <a:endParaRPr lang="en-US" sz="1100" dirty="0">
                         <a:latin typeface="Calibri" charset="0"/>
                         <a:ea typeface="Calibri" charset="0"/>
                         <a:cs typeface="Calibri" charset="0"/>
@@ -11589,7 +15000,7 @@
                         <a:buNone/>
                       </a:pPr>
                       <a:r>
-                        <a:rPr lang="en-US" sz="1200" dirty="0">
+                        <a:rPr lang="en-US" sz="1000" dirty="0">
                           <a:solidFill>
                             <a:srgbClr val="000000"/>
                           </a:solidFill>
@@ -11597,9 +15008,9 @@
                           <a:ea typeface="Calibri" pitchFamily="34" charset="-122"/>
                           <a:cs typeface="Calibri" pitchFamily="34" charset="-120"/>
                         </a:rPr>
-                        <a:t>5.07</a:t>
+                        <a:t>2151</a:t>
                       </a:r>
-                      <a:endParaRPr lang="en-US" sz="1200" dirty="0">
+                      <a:endParaRPr lang="en-US" sz="1000" dirty="0">
                         <a:latin typeface="Calibri" charset="0"/>
                         <a:ea typeface="Calibri" charset="0"/>
                         <a:cs typeface="Calibri" charset="0"/>
@@ -11648,8 +15059,144 @@
                     </a:solidFill>
                   </a:tcPr>
                 </a:tc>
+                <a:tc>
+                  <a:txBody>
+                    <a:bodyPr/>
+                    <a:lstStyle/>
+                    <a:p>
+                      <a:pPr algn="ctr" indent="0" marL="0">
+                        <a:buNone/>
+                      </a:pPr>
+                      <a:r>
+                        <a:rPr lang="en-US" sz="1000" dirty="0">
+                          <a:solidFill>
+                            <a:srgbClr val="000000"/>
+                          </a:solidFill>
+                          <a:latin typeface="Calibri" pitchFamily="34" charset="0"/>
+                          <a:ea typeface="Calibri" pitchFamily="34" charset="-122"/>
+                          <a:cs typeface="Calibri" pitchFamily="34" charset="-120"/>
+                        </a:rPr>
+                        <a:t>1120</a:t>
+                      </a:r>
+                      <a:endParaRPr lang="en-US" sz="1000" dirty="0">
+                        <a:latin typeface="Calibri" charset="0"/>
+                        <a:ea typeface="Calibri" charset="0"/>
+                        <a:cs typeface="Calibri" charset="0"/>
+                      </a:endParaRPr>
+                    </a:p>
+                  </a:txBody>
+                  <a:tcPr marL="91440" marR="91440" marT="45720" marB="45720" anchor="ctr">
+                    <a:lnL w="12700" cap="flat" cmpd="sng" algn="ctr">
+                      <a:solidFill>
+                        <a:srgbClr val="D9E1E8"/>
+                      </a:solidFill>
+                      <a:prstDash val="solid"/>
+                      <a:round/>
+                      <a:headEnd type="none" w="med" len="med"/>
+                      <a:tailEnd type="none" w="med" len="med"/>
+                    </a:lnL>
+                    <a:lnR w="12700" cap="flat" cmpd="sng" algn="ctr">
+                      <a:solidFill>
+                        <a:srgbClr val="D9E1E8"/>
+                      </a:solidFill>
+                      <a:prstDash val="solid"/>
+                      <a:round/>
+                      <a:headEnd type="none" w="med" len="med"/>
+                      <a:tailEnd type="none" w="med" len="med"/>
+                    </a:lnR>
+                    <a:lnT w="12700" cap="flat" cmpd="sng" algn="ctr">
+                      <a:solidFill>
+                        <a:srgbClr val="D9E1E8"/>
+                      </a:solidFill>
+                      <a:prstDash val="solid"/>
+                      <a:round/>
+                      <a:headEnd type="none" w="med" len="med"/>
+                      <a:tailEnd type="none" w="med" len="med"/>
+                    </a:lnT>
+                    <a:lnB w="12700" cap="flat" cmpd="sng" algn="ctr">
+                      <a:solidFill>
+                        <a:srgbClr val="D9E1E8"/>
+                      </a:solidFill>
+                      <a:prstDash val="solid"/>
+                      <a:round/>
+                      <a:headEnd type="none" w="med" len="med"/>
+                      <a:tailEnd type="none" w="med" len="med"/>
+                    </a:lnB>
+                    <a:solidFill>
+                      <a:srgbClr val="E2EFDA"/>
+                    </a:solidFill>
+                  </a:tcPr>
+                </a:tc>
+                <a:tc>
+                  <a:txBody>
+                    <a:bodyPr/>
+                    <a:lstStyle/>
+                    <a:p>
+                      <a:pPr algn="ctr" indent="0" marL="0">
+                        <a:buNone/>
+                      </a:pPr>
+                      <a:r>
+                        <a:rPr lang="en-US" sz="1000" dirty="0">
+                          <a:solidFill>
+                            <a:srgbClr val="000000"/>
+                          </a:solidFill>
+                          <a:latin typeface="Calibri" pitchFamily="34" charset="0"/>
+                          <a:ea typeface="Calibri" pitchFamily="34" charset="-122"/>
+                          <a:cs typeface="Calibri" pitchFamily="34" charset="-120"/>
+                        </a:rPr>
+                        <a:t>8.7</a:t>
+                      </a:r>
+                      <a:endParaRPr lang="en-US" sz="1000" dirty="0">
+                        <a:latin typeface="Calibri" charset="0"/>
+                        <a:ea typeface="Calibri" charset="0"/>
+                        <a:cs typeface="Calibri" charset="0"/>
+                      </a:endParaRPr>
+                    </a:p>
+                  </a:txBody>
+                  <a:tcPr marL="91440" marR="91440" marT="45720" marB="45720" anchor="ctr">
+                    <a:lnL w="12700" cap="flat" cmpd="sng" algn="ctr">
+                      <a:solidFill>
+                        <a:srgbClr val="D9E1E8"/>
+                      </a:solidFill>
+                      <a:prstDash val="solid"/>
+                      <a:round/>
+                      <a:headEnd type="none" w="med" len="med"/>
+                      <a:tailEnd type="none" w="med" len="med"/>
+                    </a:lnL>
+                    <a:lnR w="12700" cap="flat" cmpd="sng" algn="ctr">
+                      <a:solidFill>
+                        <a:srgbClr val="D9E1E8"/>
+                      </a:solidFill>
+                      <a:prstDash val="solid"/>
+                      <a:round/>
+                      <a:headEnd type="none" w="med" len="med"/>
+                      <a:tailEnd type="none" w="med" len="med"/>
+                    </a:lnR>
+                    <a:lnT w="12700" cap="flat" cmpd="sng" algn="ctr">
+                      <a:solidFill>
+                        <a:srgbClr val="D9E1E8"/>
+                      </a:solidFill>
+                      <a:prstDash val="solid"/>
+                      <a:round/>
+                      <a:headEnd type="none" w="med" len="med"/>
+                      <a:tailEnd type="none" w="med" len="med"/>
+                    </a:lnT>
+                    <a:lnB w="12700" cap="flat" cmpd="sng" algn="ctr">
+                      <a:solidFill>
+                        <a:srgbClr val="D9E1E8"/>
+                      </a:solidFill>
+                      <a:prstDash val="solid"/>
+                      <a:round/>
+                      <a:headEnd type="none" w="med" len="med"/>
+                      <a:tailEnd type="none" w="med" len="med"/>
+                    </a:lnB>
+                    <a:solidFill>
+                      <a:srgbClr val="E2EFDA"/>
+                    </a:solidFill>
+                  </a:tcPr>
+                </a:tc>
               </a:tr>
-              <a:tr h="493776">
+              <a:tr h="384048">
                 <a:tc>
                   <a:txBody>
                     <a:bodyPr/>
@@ -11659,7 +15206,7 @@
                         <a:buNone/>
                       </a:pPr>
                       <a:r>
-                        <a:rPr lang="en-US" sz="1200" dirty="0">
+                        <a:rPr lang="en-US" sz="1000" dirty="0">
                           <a:solidFill>
                             <a:srgbClr val="000000"/>
                           </a:solidFill>
@@ -11667,9 +15214,9 @@
                           <a:ea typeface="Calibri" pitchFamily="34" charset="-122"/>
                           <a:cs typeface="Calibri" pitchFamily="34" charset="-120"/>
                         </a:rPr>
-                        <a:t>Gemma-4-E2B (5B)</a:t>
+                        <a:t>Gemma-4-E2B</a:t>
                       </a:r>
-                      <a:endParaRPr lang="en-US" sz="1200" dirty="0">
+                      <a:endParaRPr lang="en-US" sz="1000" dirty="0">
                         <a:latin typeface="Calibri" charset="0"/>
                         <a:ea typeface="Calibri" charset="0"/>
                         <a:cs typeface="Calibri" charset="0"/>
@@ -11727,7 +15274,7 @@
                         <a:buNone/>
                       </a:pPr>
                       <a:r>
-                        <a:rPr lang="en-US" sz="1200" dirty="0">
+                        <a:rPr lang="en-US" sz="1000" dirty="0">
                           <a:solidFill>
                             <a:srgbClr val="000000"/>
                           </a:solidFill>
@@ -11735,9 +15282,9 @@
                           <a:ea typeface="Calibri" pitchFamily="34" charset="-122"/>
                           <a:cs typeface="Calibri" pitchFamily="34" charset="-120"/>
                         </a:rPr>
-                        <a:t>QLoRA (Unsloth)</a:t>
+                        <a:t>5B</a:t>
                       </a:r>
-                      <a:endParaRPr lang="en-US" sz="1200" dirty="0">
+                      <a:endParaRPr lang="en-US" sz="1000" dirty="0">
                         <a:latin typeface="Calibri" charset="0"/>
                         <a:ea typeface="Calibri" charset="0"/>
                         <a:cs typeface="Calibri" charset="0"/>
@@ -11795,7 +15342,7 @@
                         <a:buNone/>
                       </a:pPr>
                       <a:r>
-                        <a:rPr lang="en-US" sz="1200" dirty="0">
+                        <a:rPr lang="en-US" sz="1000" dirty="0">
                           <a:solidFill>
                             <a:srgbClr val="000000"/>
                           </a:solidFill>
@@ -11803,9 +15350,9 @@
                           <a:ea typeface="Calibri" pitchFamily="34" charset="-122"/>
                           <a:cs typeface="Calibri" pitchFamily="34" charset="-120"/>
                         </a:rPr>
-                        <a:t>0.788</a:t>
+                        <a:t>QLoRA</a:t>
                       </a:r>
-                      <a:endParaRPr lang="en-US" sz="1200" dirty="0">
+                      <a:endParaRPr lang="en-US" sz="1000" dirty="0">
                         <a:latin typeface="Calibri" charset="0"/>
                         <a:ea typeface="Calibri" charset="0"/>
                         <a:cs typeface="Calibri" charset="0"/>
@@ -11863,17 +15410,17 @@
                         <a:buNone/>
                       </a:pPr>
                       <a:r>
-                        <a:rPr lang="en-US" sz="1200" dirty="0">
+                        <a:rPr lang="en-US" sz="1000" dirty="0">
                           <a:solidFill>
-                            <a:srgbClr val="C0392B"/>
+                            <a:srgbClr val="000000"/>
                           </a:solidFill>
                           <a:latin typeface="Calibri" pitchFamily="34" charset="0"/>
                           <a:ea typeface="Calibri" pitchFamily="34" charset="-122"/>
                           <a:cs typeface="Calibri" pitchFamily="34" charset="-120"/>
                         </a:rPr>
-                        <a:t>0.740</a:t>
+                        <a:t>0.788</a:t>
                       </a:r>
-                      <a:endParaRPr lang="en-US" sz="1200" dirty="0">
+                      <a:endParaRPr lang="en-US" sz="1000" dirty="0">
                         <a:latin typeface="Calibri" charset="0"/>
                         <a:ea typeface="Calibri" charset="0"/>
                         <a:cs typeface="Calibri" charset="0"/>
@@ -11931,17 +15478,17 @@
                         <a:buNone/>
                       </a:pPr>
                       <a:r>
-                        <a:rPr lang="en-US" sz="1200" dirty="0">
+                        <a:rPr lang="en-US" sz="1000" dirty="0">
                           <a:solidFill>
-                            <a:srgbClr val="000000"/>
+                            <a:srgbClr val="C0392B"/>
                           </a:solidFill>
                           <a:latin typeface="Calibri" pitchFamily="34" charset="0"/>
                           <a:ea typeface="Calibri" pitchFamily="34" charset="-122"/>
                           <a:cs typeface="Calibri" pitchFamily="34" charset="-120"/>
                         </a:rPr>
-                        <a:t>0.765</a:t>
+                        <a:t>0.740</a:t>
                       </a:r>
-                      <a:endParaRPr lang="en-US" sz="1200" dirty="0">
+                      <a:endParaRPr lang="en-US" sz="1000" dirty="0">
                         <a:latin typeface="Calibri" charset="0"/>
                         <a:ea typeface="Calibri" charset="0"/>
                         <a:cs typeface="Calibri" charset="0"/>
@@ -11999,7 +15546,7 @@
                         <a:buNone/>
                       </a:pPr>
                       <a:r>
-                        <a:rPr lang="en-US" sz="1200" dirty="0">
+                        <a:rPr lang="en-US" sz="1000" dirty="0">
                           <a:solidFill>
                             <a:srgbClr val="000000"/>
                           </a:solidFill>
@@ -12007,9 +15554,145 @@
                           <a:ea typeface="Calibri" pitchFamily="34" charset="-122"/>
                           <a:cs typeface="Calibri" pitchFamily="34" charset="-120"/>
                         </a:rPr>
-                        <a:t>9.73</a:t>
+                        <a:t>718</a:t>
                       </a:r>
-                      <a:endParaRPr lang="en-US" sz="1200" dirty="0">
+                      <a:endParaRPr lang="en-US" sz="1000" dirty="0">
+                        <a:latin typeface="Calibri" charset="0"/>
+                        <a:ea typeface="Calibri" charset="0"/>
+                        <a:cs typeface="Calibri" charset="0"/>
+                      </a:endParaRPr>
+                    </a:p>
+                  </a:txBody>
+                  <a:tcPr marL="91440" marR="91440" marT="45720" marB="45720" anchor="ctr">
+                    <a:lnL w="12700" cap="flat" cmpd="sng" algn="ctr">
+                      <a:solidFill>
+                        <a:srgbClr val="D9E1E8"/>
+                      </a:solidFill>
+                      <a:prstDash val="solid"/>
+                      <a:round/>
+                      <a:headEnd type="none" w="med" len="med"/>
+                      <a:tailEnd type="none" w="med" len="med"/>
+                    </a:lnL>
+                    <a:lnR w="12700" cap="flat" cmpd="sng" algn="ctr">
+                      <a:solidFill>
+                        <a:srgbClr val="D9E1E8"/>
+                      </a:solidFill>
+                      <a:prstDash val="solid"/>
+                      <a:round/>
+                      <a:headEnd type="none" w="med" len="med"/>
+                      <a:tailEnd type="none" w="med" len="med"/>
+                    </a:lnR>
+                    <a:lnT w="12700" cap="flat" cmpd="sng" algn="ctr">
+                      <a:solidFill>
+                        <a:srgbClr val="D9E1E8"/>
+                      </a:solidFill>
+                      <a:prstDash val="solid"/>
+                      <a:round/>
+                      <a:headEnd type="none" w="med" len="med"/>
+                      <a:tailEnd type="none" w="med" len="med"/>
+                    </a:lnT>
+                    <a:lnB w="12700" cap="flat" cmpd="sng" algn="ctr">
+                      <a:solidFill>
+                        <a:srgbClr val="D9E1E8"/>
+                      </a:solidFill>
+                      <a:prstDash val="solid"/>
+                      <a:round/>
+                      <a:headEnd type="none" w="med" len="med"/>
+                      <a:tailEnd type="none" w="med" len="med"/>
+                    </a:lnB>
+                    <a:solidFill>
+                      <a:srgbClr val="FFFFFF"/>
+                    </a:solidFill>
+                  </a:tcPr>
+                </a:tc>
+                <a:tc>
+                  <a:txBody>
+                    <a:bodyPr/>
+                    <a:lstStyle/>
+                    <a:p>
+                      <a:pPr algn="ctr" indent="0" marL="0">
+                        <a:buNone/>
+                      </a:pPr>
+                      <a:r>
+                        <a:rPr lang="en-US" sz="1000" dirty="0">
+                          <a:solidFill>
+                            <a:srgbClr val="000000"/>
+                          </a:solidFill>
+                          <a:latin typeface="Calibri" pitchFamily="34" charset="0"/>
+                          <a:ea typeface="Calibri" pitchFamily="34" charset="-122"/>
+                          <a:cs typeface="Calibri" pitchFamily="34" charset="-120"/>
+                        </a:rPr>
+                        <a:t>1798</a:t>
+                      </a:r>
+                      <a:endParaRPr lang="en-US" sz="1000" dirty="0">
+                        <a:latin typeface="Calibri" charset="0"/>
+                        <a:ea typeface="Calibri" charset="0"/>
+                        <a:cs typeface="Calibri" charset="0"/>
+                      </a:endParaRPr>
+                    </a:p>
+                  </a:txBody>
+                  <a:tcPr marL="91440" marR="91440" marT="45720" marB="45720" anchor="ctr">
+                    <a:lnL w="12700" cap="flat" cmpd="sng" algn="ctr">
+                      <a:solidFill>
+                        <a:srgbClr val="D9E1E8"/>
+                      </a:solidFill>
+                      <a:prstDash val="solid"/>
+                      <a:round/>
+                      <a:headEnd type="none" w="med" len="med"/>
+                      <a:tailEnd type="none" w="med" len="med"/>
+                    </a:lnL>
+                    <a:lnR w="12700" cap="flat" cmpd="sng" algn="ctr">
+                      <a:solidFill>
+                        <a:srgbClr val="D9E1E8"/>
+                      </a:solidFill>
+                      <a:prstDash val="solid"/>
+                      <a:round/>
+                      <a:headEnd type="none" w="med" len="med"/>
+                      <a:tailEnd type="none" w="med" len="med"/>
+                    </a:lnR>
+                    <a:lnT w="12700" cap="flat" cmpd="sng" algn="ctr">
+                      <a:solidFill>
+                        <a:srgbClr val="D9E1E8"/>
+                      </a:solidFill>
+                      <a:prstDash val="solid"/>
+                      <a:round/>
+                      <a:headEnd type="none" w="med" len="med"/>
+                      <a:tailEnd type="none" w="med" len="med"/>
+                    </a:lnT>
+                    <a:lnB w="12700" cap="flat" cmpd="sng" algn="ctr">
+                      <a:solidFill>
+                        <a:srgbClr val="D9E1E8"/>
+                      </a:solidFill>
+                      <a:prstDash val="solid"/>
+                      <a:round/>
+                      <a:headEnd type="none" w="med" len="med"/>
+                      <a:tailEnd type="none" w="med" len="med"/>
+                    </a:lnB>
+                    <a:solidFill>
+                      <a:srgbClr val="FFFFFF"/>
+                    </a:solidFill>
+                  </a:tcPr>
+                </a:tc>
+                <a:tc>
+                  <a:txBody>
+                    <a:bodyPr/>
+                    <a:lstStyle/>
+                    <a:p>
+                      <a:pPr algn="ctr" indent="0" marL="0">
+                        <a:buNone/>
+                      </a:pPr>
+                      <a:r>
+                        <a:rPr lang="en-US" sz="1000" dirty="0">
+                          <a:solidFill>
+                            <a:srgbClr val="000000"/>
+                          </a:solidFill>
+                          <a:latin typeface="Calibri" pitchFamily="34" charset="0"/>
+                          <a:ea typeface="Calibri" pitchFamily="34" charset="-122"/>
+                          <a:cs typeface="Calibri" pitchFamily="34" charset="-120"/>
+                        </a:rPr>
+                        <a:t>62.1</a:t>
+                      </a:r>
+                      <a:endParaRPr lang="en-US" sz="1000" dirty="0">
                         <a:latin typeface="Calibri" charset="0"/>
                         <a:ea typeface="Calibri" charset="0"/>
                         <a:cs typeface="Calibri" charset="0"/>
@@ -12071,12 +15754,12 @@
         </p:nvSpPr>
         <p:spPr>
           <a:xfrm>
-            <a:off x="640080" y="5166360"/>
-            <a:ext cx="10972800" cy="1051560"/>
+            <a:off x="457200" y="5074920"/>
+            <a:ext cx="11338560" cy="1143000"/>
           </a:xfrm>
           <a:prstGeom prst="roundRect">
             <a:avLst>
-              <a:gd name="adj" fmla="val 5217"/>
+              <a:gd name="adj" fmla="val 4800"/>
             </a:avLst>
           </a:prstGeom>
           <a:solidFill>
@@ -12098,8 +15781,8 @@
         </p:nvSpPr>
         <p:spPr>
           <a:xfrm>
-            <a:off x="868680" y="5257800"/>
-            <a:ext cx="10515600" cy="914400"/>
+            <a:off x="685800" y="5138928"/>
+            <a:ext cx="10881360" cy="1005840"/>
           </a:xfrm>
           <a:prstGeom prst="rect">
             <a:avLst/>
@@ -12115,7 +15798,7 @@
               <a:buNone/>
             </a:pPr>
             <a:r>
-              <a:rPr lang="en-US" sz="1400" b="1" dirty="0">
+              <a:rPr lang="en-US" sz="1300" b="1" dirty="0">
                 <a:solidFill>
                   <a:srgbClr val="C96A28"/>
                 </a:solidFill>
@@ -12126,10 +15809,13 @@
               <a:t>Temel bulgu:  </a:t>
             </a:r>
             <a:pPr indent="0" marL="0">
+              <a:spcAft>
+                <a:spcPts val="400"/>
+              </a:spcAft>
               <a:buNone/>
             </a:pPr>
             <a:r>
-              <a:rPr lang="en-US" sz="1300" dirty="0">
+              <a:rPr lang="en-US" sz="1200" dirty="0">
                 <a:solidFill>
                   <a:srgbClr val="1B2733"/>
                 </a:solidFill>
@@ -12137,13 +15823,16 @@
                 <a:ea typeface="Calibri" pitchFamily="34" charset="-122"/>
                 <a:cs typeface="Calibri" pitchFamily="34" charset="-120"/>
               </a:rPr>
-              <a:t>Zero-shot çöküyor (0.094) → QLoRA çarpıcı iyileşme (0.914).  </a:t>
+              <a:t>Zero-shot tüm modellerde zayıf (en iyi 0.39) → QLoRA çarpıcı iyileşme (0.914). Qwen zero-shot'ta bile 0/80 parse hatası; TinyLlama 79/80 çöküş. </a:t>
             </a:r>
+            <a:endParaRPr lang="en-US" sz="1300" dirty="0"/>
+          </a:p>
+          <a:p>
             <a:pPr indent="0" marL="0">
               <a:buNone/>
             </a:pPr>
             <a:r>
-              <a:rPr lang="en-US" sz="1300" b="1" dirty="0">
+              <a:rPr lang="en-US" sz="1200" b="1" dirty="0">
                 <a:solidFill>
                   <a:srgbClr val="C0392B"/>
                 </a:solidFill>
@@ -12151,23 +15840,23 @@
                 <a:ea typeface="Calibri" pitchFamily="34" charset="-122"/>
                 <a:cs typeface="Calibri" pitchFamily="34" charset="-120"/>
               </a:rPr>
-              <a:t>Sürpriz: </a:t>
+              <a:t>Sürpriz: en büyük model Gemma-4 (5B) en küçüklerin gerisinde — küçük veride aşırı uydurma. </a:t>
             </a:r>
             <a:pPr indent="0" marL="0">
               <a:buNone/>
             </a:pPr>
             <a:r>
-              <a:rPr lang="en-US" sz="1300" dirty="0">
+              <a:rPr lang="en-US" sz="1200" b="1" dirty="0">
                 <a:solidFill>
-                  <a:srgbClr val="1B2733"/>
+                  <a:srgbClr val="2A9D8F"/>
                 </a:solidFill>
                 <a:latin typeface="Calibri" pitchFamily="34" charset="0"/>
                 <a:ea typeface="Calibri" pitchFamily="34" charset="-122"/>
                 <a:cs typeface="Calibri" pitchFamily="34" charset="-120"/>
               </a:rPr>
-              <a:t>en büyük model Gemma-4 (5B) en küçük modellerin gerisinde — küçük veride aşırı uydurma. Tüm fine-tuned modeller 0/80 parse hatası.</a:t>
+              <a:t>Adaptör boyutları küçük (6.6–62 MB): üretim için pratik.</a:t>
             </a:r>
-            <a:endParaRPr lang="en-US" sz="1400" dirty="0"/>
+            <a:endParaRPr lang="en-US" sz="1300" dirty="0"/>
           </a:p>
         </p:txBody>
       </p:sp>

--- a/report/SunumFinal_Mustafa_Kirpik.pptx
+++ b/report/SunumFinal_Mustafa_Kirpik.pptx
@@ -3401,7 +3401,7 @@
                 <a:ea typeface="Calibri" pitchFamily="34" charset="-122"/>
                 <a:cs typeface="Calibri" pitchFamily="34" charset="-120"/>
               </a:rPr>
-              <a:t>LoRA vs QLoRA (Projenin Ana Katkısı)</a:t>
+              <a:t>LoRA vs QLoRA — Projenin Ana Katkısı</a:t>
             </a:r>
             <a:endParaRPr lang="en-US" sz="2800" dirty="0"/>
           </a:p>
@@ -3438,8 +3438,8 @@
         </p:nvSpPr>
         <p:spPr>
           <a:xfrm>
-            <a:off x="640080" y="1645920"/>
-            <a:ext cx="10972800" cy="640080"/>
+            <a:off x="640080" y="1600200"/>
+            <a:ext cx="10972800" cy="777240"/>
           </a:xfrm>
           <a:prstGeom prst="rect">
             <a:avLst/>
@@ -3455,7 +3455,7 @@
               <a:buNone/>
             </a:pPr>
             <a:r>
-              <a:rPr lang="en-US" sz="1500" dirty="0">
+              <a:rPr lang="en-US" sz="1300" i="1" dirty="0">
                 <a:solidFill>
                   <a:srgbClr val="1B2733"/>
                 </a:solidFill>
@@ -3463,9 +3463,23 @@
                 <a:ea typeface="Calibri" pitchFamily="34" charset="-122"/>
                 <a:cs typeface="Calibri" pitchFamily="34" charset="-120"/>
               </a:rPr>
-              <a:t>Saliha Göçergi'nin LoRA sonuçları + bu çalışmanın QLoRA sonuçları → aynı veri, model ve seed ile adil karşılaştırma.</a:t>
+              <a:t>İki çalışma birbirinin tam kopyası değil; </a:t>
             </a:r>
-            <a:endParaRPr lang="en-US" sz="1500" dirty="0"/>
+            <a:pPr indent="0" marL="0">
+              <a:buNone/>
+            </a:pPr>
+            <a:r>
+              <a:rPr lang="en-US" sz="1300" dirty="0">
+                <a:solidFill>
+                  <a:srgbClr val="5B6B7B"/>
+                </a:solidFill>
+                <a:latin typeface="Calibri" pitchFamily="34" charset="0"/>
+                <a:ea typeface="Calibri" pitchFamily="34" charset="-122"/>
+                <a:cs typeface="Calibri" pitchFamily="34" charset="-120"/>
+              </a:rPr>
+              <a:t>Saliha: SEQ_CLS + class-weighted CE + dedup 755 örnek + LoRA r=8; bu çalışma: üretken SFT + 793 örnek + QLoRA r=16. Sayıları metodolojik bağlamla yorumlamak gerek.</a:t>
+            </a:r>
+            <a:endParaRPr lang="en-US" sz="1300" dirty="0"/>
           </a:p>
         </p:txBody>
       </p:sp>
@@ -3485,18 +3499,19 @@
         </p:nvGraphicFramePr>
         <p:xfrm>
           <a:off x="640080" y="2468880"/>
-          <a:ext cx="7315200" cy="914400"/>
+          <a:ext cx="10972800" cy="914400"/>
         </p:xfrm>
         <a:graphic>
           <a:graphicData uri="http://schemas.openxmlformats.org/drawingml/2006/table">
             <a:tbl>
               <a:tblPr/>
               <a:tblGrid>
-                <a:gridCol w="3108960"/>
-                <a:gridCol w="2103120"/>
-                <a:gridCol w="2103120"/>
+                <a:gridCol w="1371600"/>
+                <a:gridCol w="1554480"/>
+                <a:gridCol w="4023360"/>
+                <a:gridCol w="4023360"/>
               </a:tblGrid>
-              <a:tr h="594360">
+              <a:tr h="320040">
                 <a:tc>
                   <a:txBody>
                     <a:bodyPr/>
@@ -3506,7 +3521,7 @@
                         <a:buNone/>
                       </a:pPr>
                       <a:r>
-                        <a:rPr lang="en-US" sz="1400" b="1" dirty="0">
+                        <a:rPr lang="en-US" sz="1200" b="1" dirty="0">
                           <a:solidFill>
                             <a:srgbClr val="FFFFFF"/>
                           </a:solidFill>
@@ -3514,9 +3529,9 @@
                           <a:ea typeface="Calibri" pitchFamily="34" charset="-122"/>
                           <a:cs typeface="Calibri" pitchFamily="34" charset="-120"/>
                         </a:rPr>
-                        <a:t>Boyut</a:t>
+                        <a:t>Model</a:t>
                       </a:r>
-                      <a:endParaRPr lang="en-US" sz="1400" dirty="0">
+                      <a:endParaRPr lang="en-US" sz="1200" dirty="0">
                         <a:latin typeface="Calibri" charset="0"/>
                         <a:ea typeface="Calibri" charset="0"/>
                         <a:cs typeface="Calibri" charset="0"/>
@@ -3574,7 +3589,7 @@
                         <a:buNone/>
                       </a:pPr>
                       <a:r>
-                        <a:rPr lang="en-US" sz="1400" b="1" dirty="0">
+                        <a:rPr lang="en-US" sz="1200" b="1" dirty="0">
                           <a:solidFill>
                             <a:srgbClr val="FFFFFF"/>
                           </a:solidFill>
@@ -3582,9 +3597,9 @@
                           <a:ea typeface="Calibri" pitchFamily="34" charset="-122"/>
                           <a:cs typeface="Calibri" pitchFamily="34" charset="-120"/>
                         </a:rPr>
-                        <a:t>LoRA</a:t>
+                        <a:t>Metrik</a:t>
                       </a:r>
-                      <a:endParaRPr lang="en-US" sz="1400" dirty="0">
+                      <a:endParaRPr lang="en-US" sz="1200" dirty="0">
                         <a:latin typeface="Calibri" charset="0"/>
                         <a:ea typeface="Calibri" charset="0"/>
                         <a:cs typeface="Calibri" charset="0"/>
@@ -3642,7 +3657,7 @@
                         <a:buNone/>
                       </a:pPr>
                       <a:r>
-                        <a:rPr lang="en-US" sz="1400" b="1" dirty="0">
+                        <a:rPr lang="en-US" sz="1200" b="1" dirty="0">
                           <a:solidFill>
                             <a:srgbClr val="FFFFFF"/>
                           </a:solidFill>
@@ -3650,9 +3665,9 @@
                           <a:ea typeface="Calibri" pitchFamily="34" charset="-122"/>
                           <a:cs typeface="Calibri" pitchFamily="34" charset="-120"/>
                         </a:rPr>
-                        <a:t>QLoRA</a:t>
+                        <a:t>LoRA (Saliha, 3-seed)</a:t>
                       </a:r>
-                      <a:endParaRPr lang="en-US" sz="1400" dirty="0">
+                      <a:endParaRPr lang="en-US" sz="1200" dirty="0">
                         <a:latin typeface="Calibri" charset="0"/>
                         <a:ea typeface="Calibri" charset="0"/>
                         <a:cs typeface="Calibri" charset="0"/>
@@ -3701,8 +3716,76 @@
                     </a:solidFill>
                   </a:tcPr>
                 </a:tc>
+                <a:tc>
+                  <a:txBody>
+                    <a:bodyPr/>
+                    <a:lstStyle/>
+                    <a:p>
+                      <a:pPr algn="ctr" indent="0" marL="0">
+                        <a:buNone/>
+                      </a:pPr>
+                      <a:r>
+                        <a:rPr lang="en-US" sz="1200" b="1" dirty="0">
+                          <a:solidFill>
+                            <a:srgbClr val="FFFFFF"/>
+                          </a:solidFill>
+                          <a:latin typeface="Calibri" pitchFamily="34" charset="0"/>
+                          <a:ea typeface="Calibri" pitchFamily="34" charset="-122"/>
+                          <a:cs typeface="Calibri" pitchFamily="34" charset="-120"/>
+                        </a:rPr>
+                        <a:t>QLoRA (bu çalışma)</a:t>
+                      </a:r>
+                      <a:endParaRPr lang="en-US" sz="1200" dirty="0">
+                        <a:latin typeface="Calibri" charset="0"/>
+                        <a:ea typeface="Calibri" charset="0"/>
+                        <a:cs typeface="Calibri" charset="0"/>
+                      </a:endParaRPr>
+                    </a:p>
+                  </a:txBody>
+                  <a:tcPr marL="91440" marR="91440" marT="45720" marB="45720" anchor="ctr">
+                    <a:lnL w="12700" cap="flat" cmpd="sng" algn="ctr">
+                      <a:solidFill>
+                        <a:srgbClr val="D9E1E8"/>
+                      </a:solidFill>
+                      <a:prstDash val="solid"/>
+                      <a:round/>
+                      <a:headEnd type="none" w="med" len="med"/>
+                      <a:tailEnd type="none" w="med" len="med"/>
+                    </a:lnL>
+                    <a:lnR w="12700" cap="flat" cmpd="sng" algn="ctr">
+                      <a:solidFill>
+                        <a:srgbClr val="D9E1E8"/>
+                      </a:solidFill>
+                      <a:prstDash val="solid"/>
+                      <a:round/>
+                      <a:headEnd type="none" w="med" len="med"/>
+                      <a:tailEnd type="none" w="med" len="med"/>
+                    </a:lnR>
+                    <a:lnT w="12700" cap="flat" cmpd="sng" algn="ctr">
+                      <a:solidFill>
+                        <a:srgbClr val="D9E1E8"/>
+                      </a:solidFill>
+                      <a:prstDash val="solid"/>
+                      <a:round/>
+                      <a:headEnd type="none" w="med" len="med"/>
+                      <a:tailEnd type="none" w="med" len="med"/>
+                    </a:lnT>
+                    <a:lnB w="12700" cap="flat" cmpd="sng" algn="ctr">
+                      <a:solidFill>
+                        <a:srgbClr val="D9E1E8"/>
+                      </a:solidFill>
+                      <a:prstDash val="solid"/>
+                      <a:round/>
+                      <a:headEnd type="none" w="med" len="med"/>
+                      <a:tailEnd type="none" w="med" len="med"/>
+                    </a:lnB>
+                    <a:solidFill>
+                      <a:srgbClr val="0F2741"/>
+                    </a:solidFill>
+                  </a:tcPr>
+                </a:tc>
               </a:tr>
-              <a:tr h="594360">
+              <a:tr h="320040">
                 <a:tc>
                   <a:txBody>
                     <a:bodyPr/>
@@ -3712,7 +3795,7 @@
                         <a:buNone/>
                       </a:pPr>
                       <a:r>
-                        <a:rPr lang="en-US" sz="1300" dirty="0">
+                        <a:rPr lang="en-US" sz="1100" b="1" dirty="0">
                           <a:solidFill>
                             <a:srgbClr val="000000"/>
                           </a:solidFill>
@@ -3720,9 +3803,77 @@
                           <a:ea typeface="Calibri" pitchFamily="34" charset="-122"/>
                           <a:cs typeface="Calibri" pitchFamily="34" charset="-120"/>
                         </a:rPr>
-                        <a:t>Accuracy / Macro-F1</a:t>
+                        <a:t>SmolLM2</a:t>
                       </a:r>
-                      <a:endParaRPr lang="en-US" sz="1300" dirty="0">
+                      <a:endParaRPr lang="en-US" sz="1100" dirty="0">
+                        <a:latin typeface="Calibri" charset="0"/>
+                        <a:ea typeface="Calibri" charset="0"/>
+                        <a:cs typeface="Calibri" charset="0"/>
+                      </a:endParaRPr>
+                    </a:p>
+                  </a:txBody>
+                  <a:tcPr marL="91440" marR="91440" marT="45720" marB="45720" anchor="ctr">
+                    <a:lnL w="12700" cap="flat" cmpd="sng" algn="ctr">
+                      <a:solidFill>
+                        <a:srgbClr val="D9E1E8"/>
+                      </a:solidFill>
+                      <a:prstDash val="solid"/>
+                      <a:round/>
+                      <a:headEnd type="none" w="med" len="med"/>
+                      <a:tailEnd type="none" w="med" len="med"/>
+                    </a:lnL>
+                    <a:lnR w="12700" cap="flat" cmpd="sng" algn="ctr">
+                      <a:solidFill>
+                        <a:srgbClr val="D9E1E8"/>
+                      </a:solidFill>
+                      <a:prstDash val="solid"/>
+                      <a:round/>
+                      <a:headEnd type="none" w="med" len="med"/>
+                      <a:tailEnd type="none" w="med" len="med"/>
+                    </a:lnR>
+                    <a:lnT w="12700" cap="flat" cmpd="sng" algn="ctr">
+                      <a:solidFill>
+                        <a:srgbClr val="D9E1E8"/>
+                      </a:solidFill>
+                      <a:prstDash val="solid"/>
+                      <a:round/>
+                      <a:headEnd type="none" w="med" len="med"/>
+                      <a:tailEnd type="none" w="med" len="med"/>
+                    </a:lnT>
+                    <a:lnB w="12700" cap="flat" cmpd="sng" algn="ctr">
+                      <a:solidFill>
+                        <a:srgbClr val="D9E1E8"/>
+                      </a:solidFill>
+                      <a:prstDash val="solid"/>
+                      <a:round/>
+                      <a:headEnd type="none" w="med" len="med"/>
+                      <a:tailEnd type="none" w="med" len="med"/>
+                    </a:lnB>
+                    <a:solidFill>
+                      <a:srgbClr val="FFFFFF"/>
+                    </a:solidFill>
+                  </a:tcPr>
+                </a:tc>
+                <a:tc>
+                  <a:txBody>
+                    <a:bodyPr/>
+                    <a:lstStyle/>
+                    <a:p>
+                      <a:pPr indent="0" marL="0">
+                        <a:buNone/>
+                      </a:pPr>
+                      <a:r>
+                        <a:rPr lang="en-US" sz="1100" dirty="0">
+                          <a:solidFill>
+                            <a:srgbClr val="000000"/>
+                          </a:solidFill>
+                          <a:latin typeface="Calibri" pitchFamily="34" charset="0"/>
+                          <a:ea typeface="Calibri" pitchFamily="34" charset="-122"/>
+                          <a:cs typeface="Calibri" pitchFamily="34" charset="-120"/>
+                        </a:rPr>
+                        <a:t>Macro-F1</a:t>
+                      </a:r>
+                      <a:endParaRPr lang="en-US" sz="1100" dirty="0">
                         <a:latin typeface="Calibri" charset="0"/>
                         <a:ea typeface="Calibri" charset="0"/>
                         <a:cs typeface="Calibri" charset="0"/>
@@ -3780,17 +3931,17 @@
                         <a:buNone/>
                       </a:pPr>
                       <a:r>
-                        <a:rPr lang="en-US" sz="1200" i="1" dirty="0">
+                        <a:rPr lang="en-US" sz="1100" dirty="0">
                           <a:solidFill>
-                            <a:srgbClr val="5B6B7B"/>
+                            <a:srgbClr val="C0392B"/>
                           </a:solidFill>
                           <a:latin typeface="Calibri" pitchFamily="34" charset="0"/>
                           <a:ea typeface="Calibri" pitchFamily="34" charset="-122"/>
                           <a:cs typeface="Calibri" pitchFamily="34" charset="-120"/>
                         </a:rPr>
-                        <a:t>(beklenen ≈)</a:t>
+                        <a:t>0.102 ± 0.000  (çöktü)</a:t>
                       </a:r>
-                      <a:endParaRPr lang="en-US" sz="1200" dirty="0">
+                      <a:endParaRPr lang="en-US" sz="1100" dirty="0">
                         <a:latin typeface="Calibri" charset="0"/>
                         <a:ea typeface="Calibri" charset="0"/>
                         <a:cs typeface="Calibri" charset="0"/>
@@ -3848,17 +3999,17 @@
                         <a:buNone/>
                       </a:pPr>
                       <a:r>
-                        <a:rPr lang="en-US" sz="1300" dirty="0">
+                        <a:rPr lang="en-US" sz="1100" b="1" dirty="0">
                           <a:solidFill>
-                            <a:srgbClr val="000000"/>
+                            <a:srgbClr val="2E7D32"/>
                           </a:solidFill>
                           <a:latin typeface="Calibri" pitchFamily="34" charset="0"/>
                           <a:ea typeface="Calibri" pitchFamily="34" charset="-122"/>
                           <a:cs typeface="Calibri" pitchFamily="34" charset="-120"/>
                         </a:rPr>
-                        <a:t>0.925 / 0.91</a:t>
+                        <a:t>0.588</a:t>
                       </a:r>
-                      <a:endParaRPr lang="en-US" sz="1300" dirty="0">
+                      <a:endParaRPr lang="en-US" sz="1100" dirty="0">
                         <a:latin typeface="Calibri" charset="0"/>
                         <a:ea typeface="Calibri" charset="0"/>
                         <a:cs typeface="Calibri" charset="0"/>
@@ -3908,7 +4059,7 @@
                   </a:tcPr>
                 </a:tc>
               </a:tr>
-              <a:tr h="594360">
+              <a:tr h="320040">
                 <a:tc>
                   <a:txBody>
                     <a:bodyPr/>
@@ -3918,7 +4069,7 @@
                         <a:buNone/>
                       </a:pPr>
                       <a:r>
-                        <a:rPr lang="en-US" sz="1300" dirty="0">
+                        <a:rPr lang="en-US" sz="1100" dirty="0">
                           <a:solidFill>
                             <a:srgbClr val="000000"/>
                           </a:solidFill>
@@ -3926,9 +4077,9 @@
                           <a:ea typeface="Calibri" pitchFamily="34" charset="-122"/>
                           <a:cs typeface="Calibri" pitchFamily="34" charset="-120"/>
                         </a:rPr>
-                        <a:t>Tepe GPU belleği</a:t>
+                        <a:t>Boyut / Hız</a:t>
                       </a:r>
-                      <a:endParaRPr lang="en-US" sz="1300" dirty="0">
+                      <a:endParaRPr lang="en-US" sz="1100" dirty="0">
                         <a:latin typeface="Calibri" charset="0"/>
                         <a:ea typeface="Calibri" charset="0"/>
                         <a:cs typeface="Calibri" charset="0"/>
@@ -3986,17 +4137,17 @@
                         <a:buNone/>
                       </a:pPr>
                       <a:r>
-                        <a:rPr lang="en-US" sz="1200" i="1" dirty="0">
+                        <a:rPr lang="en-US" sz="1100" dirty="0">
                           <a:solidFill>
-                            <a:srgbClr val="5B6B7B"/>
+                            <a:srgbClr val="000000"/>
                           </a:solidFill>
                           <a:latin typeface="Calibri" pitchFamily="34" charset="0"/>
                           <a:ea typeface="Calibri" pitchFamily="34" charset="-122"/>
                           <a:cs typeface="Calibri" pitchFamily="34" charset="-120"/>
                         </a:rPr>
-                        <a:t>(daha yüksek)</a:t>
+                        <a:t>690 MB · 64 ms</a:t>
                       </a:r>
-                      <a:endParaRPr lang="en-US" sz="1200" dirty="0">
+                      <a:endParaRPr lang="en-US" sz="1100" dirty="0">
                         <a:latin typeface="Calibri" charset="0"/>
                         <a:ea typeface="Calibri" charset="0"/>
                         <a:cs typeface="Calibri" charset="0"/>
@@ -4054,17 +4205,17 @@
                         <a:buNone/>
                       </a:pPr>
                       <a:r>
-                        <a:rPr lang="en-US" sz="1300" b="1" dirty="0">
+                        <a:rPr lang="en-US" sz="1100" dirty="0">
                           <a:solidFill>
-                            <a:srgbClr val="2A9D8F"/>
+                            <a:srgbClr val="000000"/>
                           </a:solidFill>
                           <a:latin typeface="Calibri" pitchFamily="34" charset="0"/>
                           <a:ea typeface="Calibri" pitchFamily="34" charset="-122"/>
                           <a:cs typeface="Calibri" pitchFamily="34" charset="-120"/>
                         </a:rPr>
-                        <a:t>1.8 – 5.1 GB</a:t>
+                        <a:t>6.6 MB · 1542 ms</a:t>
                       </a:r>
-                      <a:endParaRPr lang="en-US" sz="1300" dirty="0">
+                      <a:endParaRPr lang="en-US" sz="1100" dirty="0">
                         <a:latin typeface="Calibri" charset="0"/>
                         <a:ea typeface="Calibri" charset="0"/>
                         <a:cs typeface="Calibri" charset="0"/>
@@ -4114,7 +4265,7 @@
                   </a:tcPr>
                 </a:tc>
               </a:tr>
-              <a:tr h="594360">
+              <a:tr h="320040">
                 <a:tc>
                   <a:txBody>
                     <a:bodyPr/>
@@ -4124,7 +4275,7 @@
                         <a:buNone/>
                       </a:pPr>
                       <a:r>
-                        <a:rPr lang="en-US" sz="1300" dirty="0">
+                        <a:rPr lang="en-US" sz="1100" b="1" dirty="0">
                           <a:solidFill>
                             <a:srgbClr val="000000"/>
                           </a:solidFill>
@@ -4132,9 +4283,77 @@
                           <a:ea typeface="Calibri" pitchFamily="34" charset="-122"/>
                           <a:cs typeface="Calibri" pitchFamily="34" charset="-120"/>
                         </a:rPr>
-                        <a:t>Eğitim süresi</a:t>
+                        <a:t>TinyLlama</a:t>
                       </a:r>
-                      <a:endParaRPr lang="en-US" sz="1300" dirty="0">
+                      <a:endParaRPr lang="en-US" sz="1100" dirty="0">
+                        <a:latin typeface="Calibri" charset="0"/>
+                        <a:ea typeface="Calibri" charset="0"/>
+                        <a:cs typeface="Calibri" charset="0"/>
+                      </a:endParaRPr>
+                    </a:p>
+                  </a:txBody>
+                  <a:tcPr marL="91440" marR="91440" marT="45720" marB="45720" anchor="ctr">
+                    <a:lnL w="12700" cap="flat" cmpd="sng" algn="ctr">
+                      <a:solidFill>
+                        <a:srgbClr val="D9E1E8"/>
+                      </a:solidFill>
+                      <a:prstDash val="solid"/>
+                      <a:round/>
+                      <a:headEnd type="none" w="med" len="med"/>
+                      <a:tailEnd type="none" w="med" len="med"/>
+                    </a:lnL>
+                    <a:lnR w="12700" cap="flat" cmpd="sng" algn="ctr">
+                      <a:solidFill>
+                        <a:srgbClr val="D9E1E8"/>
+                      </a:solidFill>
+                      <a:prstDash val="solid"/>
+                      <a:round/>
+                      <a:headEnd type="none" w="med" len="med"/>
+                      <a:tailEnd type="none" w="med" len="med"/>
+                    </a:lnR>
+                    <a:lnT w="12700" cap="flat" cmpd="sng" algn="ctr">
+                      <a:solidFill>
+                        <a:srgbClr val="D9E1E8"/>
+                      </a:solidFill>
+                      <a:prstDash val="solid"/>
+                      <a:round/>
+                      <a:headEnd type="none" w="med" len="med"/>
+                      <a:tailEnd type="none" w="med" len="med"/>
+                    </a:lnT>
+                    <a:lnB w="12700" cap="flat" cmpd="sng" algn="ctr">
+                      <a:solidFill>
+                        <a:srgbClr val="D9E1E8"/>
+                      </a:solidFill>
+                      <a:prstDash val="solid"/>
+                      <a:round/>
+                      <a:headEnd type="none" w="med" len="med"/>
+                      <a:tailEnd type="none" w="med" len="med"/>
+                    </a:lnB>
+                    <a:solidFill>
+                      <a:srgbClr val="FFFFFF"/>
+                    </a:solidFill>
+                  </a:tcPr>
+                </a:tc>
+                <a:tc>
+                  <a:txBody>
+                    <a:bodyPr/>
+                    <a:lstStyle/>
+                    <a:p>
+                      <a:pPr indent="0" marL="0">
+                        <a:buNone/>
+                      </a:pPr>
+                      <a:r>
+                        <a:rPr lang="en-US" sz="1100" dirty="0">
+                          <a:solidFill>
+                            <a:srgbClr val="000000"/>
+                          </a:solidFill>
+                          <a:latin typeface="Calibri" pitchFamily="34" charset="0"/>
+                          <a:ea typeface="Calibri" pitchFamily="34" charset="-122"/>
+                          <a:cs typeface="Calibri" pitchFamily="34" charset="-120"/>
+                        </a:rPr>
+                        <a:t>Macro-F1</a:t>
+                      </a:r>
+                      <a:endParaRPr lang="en-US" sz="1100" dirty="0">
                         <a:latin typeface="Calibri" charset="0"/>
                         <a:ea typeface="Calibri" charset="0"/>
                         <a:cs typeface="Calibri" charset="0"/>
@@ -4192,17 +4411,17 @@
                         <a:buNone/>
                       </a:pPr>
                       <a:r>
-                        <a:rPr lang="en-US" sz="1200" dirty="0">
+                        <a:rPr lang="en-US" sz="1100" dirty="0">
                           <a:solidFill>
-                            <a:srgbClr val="5B6B7B"/>
+                            <a:srgbClr val="000000"/>
                           </a:solidFill>
                           <a:latin typeface="Calibri" pitchFamily="34" charset="0"/>
                           <a:ea typeface="Calibri" pitchFamily="34" charset="-122"/>
                           <a:cs typeface="Calibri" pitchFamily="34" charset="-120"/>
                         </a:rPr>
-                        <a:t>—</a:t>
+                        <a:t>0.922 ± 0.033</a:t>
                       </a:r>
-                      <a:endParaRPr lang="en-US" sz="1200" dirty="0">
+                      <a:endParaRPr lang="en-US" sz="1100" dirty="0">
                         <a:latin typeface="Calibri" charset="0"/>
                         <a:ea typeface="Calibri" charset="0"/>
                         <a:cs typeface="Calibri" charset="0"/>
@@ -4260,7 +4479,7 @@
                         <a:buNone/>
                       </a:pPr>
                       <a:r>
-                        <a:rPr lang="en-US" sz="1300" dirty="0">
+                        <a:rPr lang="en-US" sz="1100" dirty="0">
                           <a:solidFill>
                             <a:srgbClr val="000000"/>
                           </a:solidFill>
@@ -4268,9 +4487,9 @@
                           <a:ea typeface="Calibri" pitchFamily="34" charset="-122"/>
                           <a:cs typeface="Calibri" pitchFamily="34" charset="-120"/>
                         </a:rPr>
-                        <a:t>12 – 36 dk</a:t>
+                        <a:t>0.908</a:t>
                       </a:r>
-                      <a:endParaRPr lang="en-US" sz="1300" dirty="0">
+                      <a:endParaRPr lang="en-US" sz="1100" dirty="0">
                         <a:latin typeface="Calibri" charset="0"/>
                         <a:ea typeface="Calibri" charset="0"/>
                         <a:cs typeface="Calibri" charset="0"/>
@@ -4316,6 +4535,1172 @@
                     </a:lnB>
                     <a:solidFill>
                       <a:srgbClr val="FFFFFF"/>
+                    </a:solidFill>
+                  </a:tcPr>
+                </a:tc>
+              </a:tr>
+              <a:tr h="320040">
+                <a:tc>
+                  <a:txBody>
+                    <a:bodyPr/>
+                    <a:lstStyle/>
+                    <a:p>
+                      <a:pPr indent="0" marL="0">
+                        <a:buNone/>
+                      </a:pPr>
+                      <a:r>
+                        <a:rPr lang="en-US" sz="1100" dirty="0">
+                          <a:solidFill>
+                            <a:srgbClr val="000000"/>
+                          </a:solidFill>
+                          <a:latin typeface="Calibri" pitchFamily="34" charset="0"/>
+                          <a:ea typeface="Calibri" pitchFamily="34" charset="-122"/>
+                          <a:cs typeface="Calibri" pitchFamily="34" charset="-120"/>
+                        </a:rPr>
+                        <a:t>Boyut / Hız</a:t>
+                      </a:r>
+                      <a:endParaRPr lang="en-US" sz="1100" dirty="0">
+                        <a:latin typeface="Calibri" charset="0"/>
+                        <a:ea typeface="Calibri" charset="0"/>
+                        <a:cs typeface="Calibri" charset="0"/>
+                      </a:endParaRPr>
+                    </a:p>
+                  </a:txBody>
+                  <a:tcPr marL="91440" marR="91440" marT="45720" marB="45720" anchor="ctr">
+                    <a:lnL w="12700" cap="flat" cmpd="sng" algn="ctr">
+                      <a:solidFill>
+                        <a:srgbClr val="D9E1E8"/>
+                      </a:solidFill>
+                      <a:prstDash val="solid"/>
+                      <a:round/>
+                      <a:headEnd type="none" w="med" len="med"/>
+                      <a:tailEnd type="none" w="med" len="med"/>
+                    </a:lnL>
+                    <a:lnR w="12700" cap="flat" cmpd="sng" algn="ctr">
+                      <a:solidFill>
+                        <a:srgbClr val="D9E1E8"/>
+                      </a:solidFill>
+                      <a:prstDash val="solid"/>
+                      <a:round/>
+                      <a:headEnd type="none" w="med" len="med"/>
+                      <a:tailEnd type="none" w="med" len="med"/>
+                    </a:lnR>
+                    <a:lnT w="12700" cap="flat" cmpd="sng" algn="ctr">
+                      <a:solidFill>
+                        <a:srgbClr val="D9E1E8"/>
+                      </a:solidFill>
+                      <a:prstDash val="solid"/>
+                      <a:round/>
+                      <a:headEnd type="none" w="med" len="med"/>
+                      <a:tailEnd type="none" w="med" len="med"/>
+                    </a:lnT>
+                    <a:lnB w="12700" cap="flat" cmpd="sng" algn="ctr">
+                      <a:solidFill>
+                        <a:srgbClr val="D9E1E8"/>
+                      </a:solidFill>
+                      <a:prstDash val="solid"/>
+                      <a:round/>
+                      <a:headEnd type="none" w="med" len="med"/>
+                      <a:tailEnd type="none" w="med" len="med"/>
+                    </a:lnB>
+                    <a:solidFill>
+                      <a:srgbClr val="FFFFFF"/>
+                    </a:solidFill>
+                  </a:tcPr>
+                </a:tc>
+                <a:tc>
+                  <a:txBody>
+                    <a:bodyPr/>
+                    <a:lstStyle/>
+                    <a:p>
+                      <a:pPr algn="ctr" indent="0" marL="0">
+                        <a:buNone/>
+                      </a:pPr>
+                      <a:r>
+                        <a:rPr lang="en-US" sz="1100" dirty="0">
+                          <a:solidFill>
+                            <a:srgbClr val="2A9D8F"/>
+                          </a:solidFill>
+                          <a:latin typeface="Calibri" pitchFamily="34" charset="0"/>
+                          <a:ea typeface="Calibri" pitchFamily="34" charset="-122"/>
+                          <a:cs typeface="Calibri" pitchFamily="34" charset="-120"/>
+                        </a:rPr>
+                        <a:t>1973 MB · 45 ms ⚡</a:t>
+                      </a:r>
+                      <a:endParaRPr lang="en-US" sz="1100" dirty="0">
+                        <a:latin typeface="Calibri" charset="0"/>
+                        <a:ea typeface="Calibri" charset="0"/>
+                        <a:cs typeface="Calibri" charset="0"/>
+                      </a:endParaRPr>
+                    </a:p>
+                  </a:txBody>
+                  <a:tcPr marL="91440" marR="91440" marT="45720" marB="45720" anchor="ctr">
+                    <a:lnL w="12700" cap="flat" cmpd="sng" algn="ctr">
+                      <a:solidFill>
+                        <a:srgbClr val="D9E1E8"/>
+                      </a:solidFill>
+                      <a:prstDash val="solid"/>
+                      <a:round/>
+                      <a:headEnd type="none" w="med" len="med"/>
+                      <a:tailEnd type="none" w="med" len="med"/>
+                    </a:lnL>
+                    <a:lnR w="12700" cap="flat" cmpd="sng" algn="ctr">
+                      <a:solidFill>
+                        <a:srgbClr val="D9E1E8"/>
+                      </a:solidFill>
+                      <a:prstDash val="solid"/>
+                      <a:round/>
+                      <a:headEnd type="none" w="med" len="med"/>
+                      <a:tailEnd type="none" w="med" len="med"/>
+                    </a:lnR>
+                    <a:lnT w="12700" cap="flat" cmpd="sng" algn="ctr">
+                      <a:solidFill>
+                        <a:srgbClr val="D9E1E8"/>
+                      </a:solidFill>
+                      <a:prstDash val="solid"/>
+                      <a:round/>
+                      <a:headEnd type="none" w="med" len="med"/>
+                      <a:tailEnd type="none" w="med" len="med"/>
+                    </a:lnT>
+                    <a:lnB w="12700" cap="flat" cmpd="sng" algn="ctr">
+                      <a:solidFill>
+                        <a:srgbClr val="D9E1E8"/>
+                      </a:solidFill>
+                      <a:prstDash val="solid"/>
+                      <a:round/>
+                      <a:headEnd type="none" w="med" len="med"/>
+                      <a:tailEnd type="none" w="med" len="med"/>
+                    </a:lnB>
+                    <a:solidFill>
+                      <a:srgbClr val="FFFFFF"/>
+                    </a:solidFill>
+                  </a:tcPr>
+                </a:tc>
+                <a:tc>
+                  <a:txBody>
+                    <a:bodyPr/>
+                    <a:lstStyle/>
+                    <a:p>
+                      <a:pPr algn="ctr" indent="0" marL="0">
+                        <a:buNone/>
+                      </a:pPr>
+                      <a:r>
+                        <a:rPr lang="en-US" sz="1100" dirty="0">
+                          <a:solidFill>
+                            <a:srgbClr val="2A9D8F"/>
+                          </a:solidFill>
+                          <a:latin typeface="Calibri" pitchFamily="34" charset="0"/>
+                          <a:ea typeface="Calibri" pitchFamily="34" charset="-122"/>
+                          <a:cs typeface="Calibri" pitchFamily="34" charset="-120"/>
+                        </a:rPr>
+                        <a:t>9 MB ⭐ · 960 ms</a:t>
+                      </a:r>
+                      <a:endParaRPr lang="en-US" sz="1100" dirty="0">
+                        <a:latin typeface="Calibri" charset="0"/>
+                        <a:ea typeface="Calibri" charset="0"/>
+                        <a:cs typeface="Calibri" charset="0"/>
+                      </a:endParaRPr>
+                    </a:p>
+                  </a:txBody>
+                  <a:tcPr marL="91440" marR="91440" marT="45720" marB="45720" anchor="ctr">
+                    <a:lnL w="12700" cap="flat" cmpd="sng" algn="ctr">
+                      <a:solidFill>
+                        <a:srgbClr val="D9E1E8"/>
+                      </a:solidFill>
+                      <a:prstDash val="solid"/>
+                      <a:round/>
+                      <a:headEnd type="none" w="med" len="med"/>
+                      <a:tailEnd type="none" w="med" len="med"/>
+                    </a:lnL>
+                    <a:lnR w="12700" cap="flat" cmpd="sng" algn="ctr">
+                      <a:solidFill>
+                        <a:srgbClr val="D9E1E8"/>
+                      </a:solidFill>
+                      <a:prstDash val="solid"/>
+                      <a:round/>
+                      <a:headEnd type="none" w="med" len="med"/>
+                      <a:tailEnd type="none" w="med" len="med"/>
+                    </a:lnR>
+                    <a:lnT w="12700" cap="flat" cmpd="sng" algn="ctr">
+                      <a:solidFill>
+                        <a:srgbClr val="D9E1E8"/>
+                      </a:solidFill>
+                      <a:prstDash val="solid"/>
+                      <a:round/>
+                      <a:headEnd type="none" w="med" len="med"/>
+                      <a:tailEnd type="none" w="med" len="med"/>
+                    </a:lnT>
+                    <a:lnB w="12700" cap="flat" cmpd="sng" algn="ctr">
+                      <a:solidFill>
+                        <a:srgbClr val="D9E1E8"/>
+                      </a:solidFill>
+                      <a:prstDash val="solid"/>
+                      <a:round/>
+                      <a:headEnd type="none" w="med" len="med"/>
+                      <a:tailEnd type="none" w="med" len="med"/>
+                    </a:lnB>
+                    <a:solidFill>
+                      <a:srgbClr val="FFFFFF"/>
+                    </a:solidFill>
+                  </a:tcPr>
+                </a:tc>
+              </a:tr>
+              <a:tr h="320040">
+                <a:tc>
+                  <a:txBody>
+                    <a:bodyPr/>
+                    <a:lstStyle/>
+                    <a:p>
+                      <a:pPr indent="0" marL="0">
+                        <a:buNone/>
+                      </a:pPr>
+                      <a:r>
+                        <a:rPr lang="en-US" sz="1100" b="1" dirty="0">
+                          <a:solidFill>
+                            <a:srgbClr val="000000"/>
+                          </a:solidFill>
+                          <a:latin typeface="Calibri" pitchFamily="34" charset="0"/>
+                          <a:ea typeface="Calibri" pitchFamily="34" charset="-122"/>
+                          <a:cs typeface="Calibri" pitchFamily="34" charset="-120"/>
+                        </a:rPr>
+                        <a:t>Qwen2.5</a:t>
+                      </a:r>
+                      <a:endParaRPr lang="en-US" sz="1100" dirty="0">
+                        <a:latin typeface="Calibri" charset="0"/>
+                        <a:ea typeface="Calibri" charset="0"/>
+                        <a:cs typeface="Calibri" charset="0"/>
+                      </a:endParaRPr>
+                    </a:p>
+                  </a:txBody>
+                  <a:tcPr marL="91440" marR="91440" marT="45720" marB="45720" anchor="ctr">
+                    <a:lnL w="12700" cap="flat" cmpd="sng" algn="ctr">
+                      <a:solidFill>
+                        <a:srgbClr val="D9E1E8"/>
+                      </a:solidFill>
+                      <a:prstDash val="solid"/>
+                      <a:round/>
+                      <a:headEnd type="none" w="med" len="med"/>
+                      <a:tailEnd type="none" w="med" len="med"/>
+                    </a:lnL>
+                    <a:lnR w="12700" cap="flat" cmpd="sng" algn="ctr">
+                      <a:solidFill>
+                        <a:srgbClr val="D9E1E8"/>
+                      </a:solidFill>
+                      <a:prstDash val="solid"/>
+                      <a:round/>
+                      <a:headEnd type="none" w="med" len="med"/>
+                      <a:tailEnd type="none" w="med" len="med"/>
+                    </a:lnR>
+                    <a:lnT w="12700" cap="flat" cmpd="sng" algn="ctr">
+                      <a:solidFill>
+                        <a:srgbClr val="D9E1E8"/>
+                      </a:solidFill>
+                      <a:prstDash val="solid"/>
+                      <a:round/>
+                      <a:headEnd type="none" w="med" len="med"/>
+                      <a:tailEnd type="none" w="med" len="med"/>
+                    </a:lnT>
+                    <a:lnB w="12700" cap="flat" cmpd="sng" algn="ctr">
+                      <a:solidFill>
+                        <a:srgbClr val="D9E1E8"/>
+                      </a:solidFill>
+                      <a:prstDash val="solid"/>
+                      <a:round/>
+                      <a:headEnd type="none" w="med" len="med"/>
+                      <a:tailEnd type="none" w="med" len="med"/>
+                    </a:lnB>
+                    <a:solidFill>
+                      <a:srgbClr val="FFFFFF"/>
+                    </a:solidFill>
+                  </a:tcPr>
+                </a:tc>
+                <a:tc>
+                  <a:txBody>
+                    <a:bodyPr/>
+                    <a:lstStyle/>
+                    <a:p>
+                      <a:pPr indent="0" marL="0">
+                        <a:buNone/>
+                      </a:pPr>
+                      <a:r>
+                        <a:rPr lang="en-US" sz="1100" dirty="0">
+                          <a:solidFill>
+                            <a:srgbClr val="000000"/>
+                          </a:solidFill>
+                          <a:latin typeface="Calibri" pitchFamily="34" charset="0"/>
+                          <a:ea typeface="Calibri" pitchFamily="34" charset="-122"/>
+                          <a:cs typeface="Calibri" pitchFamily="34" charset="-120"/>
+                        </a:rPr>
+                        <a:t>Macro-F1</a:t>
+                      </a:r>
+                      <a:endParaRPr lang="en-US" sz="1100" dirty="0">
+                        <a:latin typeface="Calibri" charset="0"/>
+                        <a:ea typeface="Calibri" charset="0"/>
+                        <a:cs typeface="Calibri" charset="0"/>
+                      </a:endParaRPr>
+                    </a:p>
+                  </a:txBody>
+                  <a:tcPr marL="91440" marR="91440" marT="45720" marB="45720" anchor="ctr">
+                    <a:lnL w="12700" cap="flat" cmpd="sng" algn="ctr">
+                      <a:solidFill>
+                        <a:srgbClr val="D9E1E8"/>
+                      </a:solidFill>
+                      <a:prstDash val="solid"/>
+                      <a:round/>
+                      <a:headEnd type="none" w="med" len="med"/>
+                      <a:tailEnd type="none" w="med" len="med"/>
+                    </a:lnL>
+                    <a:lnR w="12700" cap="flat" cmpd="sng" algn="ctr">
+                      <a:solidFill>
+                        <a:srgbClr val="D9E1E8"/>
+                      </a:solidFill>
+                      <a:prstDash val="solid"/>
+                      <a:round/>
+                      <a:headEnd type="none" w="med" len="med"/>
+                      <a:tailEnd type="none" w="med" len="med"/>
+                    </a:lnR>
+                    <a:lnT w="12700" cap="flat" cmpd="sng" algn="ctr">
+                      <a:solidFill>
+                        <a:srgbClr val="D9E1E8"/>
+                      </a:solidFill>
+                      <a:prstDash val="solid"/>
+                      <a:round/>
+                      <a:headEnd type="none" w="med" len="med"/>
+                      <a:tailEnd type="none" w="med" len="med"/>
+                    </a:lnT>
+                    <a:lnB w="12700" cap="flat" cmpd="sng" algn="ctr">
+                      <a:solidFill>
+                        <a:srgbClr val="D9E1E8"/>
+                      </a:solidFill>
+                      <a:prstDash val="solid"/>
+                      <a:round/>
+                      <a:headEnd type="none" w="med" len="med"/>
+                      <a:tailEnd type="none" w="med" len="med"/>
+                    </a:lnB>
+                    <a:solidFill>
+                      <a:srgbClr val="FFFFFF"/>
+                    </a:solidFill>
+                  </a:tcPr>
+                </a:tc>
+                <a:tc>
+                  <a:txBody>
+                    <a:bodyPr/>
+                    <a:lstStyle/>
+                    <a:p>
+                      <a:pPr algn="ctr" indent="0" marL="0">
+                        <a:buNone/>
+                      </a:pPr>
+                      <a:r>
+                        <a:rPr lang="en-US" sz="1100" dirty="0">
+                          <a:solidFill>
+                            <a:srgbClr val="000000"/>
+                          </a:solidFill>
+                          <a:latin typeface="Calibri" pitchFamily="34" charset="0"/>
+                          <a:ea typeface="Calibri" pitchFamily="34" charset="-122"/>
+                          <a:cs typeface="Calibri" pitchFamily="34" charset="-120"/>
+                        </a:rPr>
+                        <a:t>0.895 ± 0.006</a:t>
+                      </a:r>
+                      <a:endParaRPr lang="en-US" sz="1100" dirty="0">
+                        <a:latin typeface="Calibri" charset="0"/>
+                        <a:ea typeface="Calibri" charset="0"/>
+                        <a:cs typeface="Calibri" charset="0"/>
+                      </a:endParaRPr>
+                    </a:p>
+                  </a:txBody>
+                  <a:tcPr marL="91440" marR="91440" marT="45720" marB="45720" anchor="ctr">
+                    <a:lnL w="12700" cap="flat" cmpd="sng" algn="ctr">
+                      <a:solidFill>
+                        <a:srgbClr val="D9E1E8"/>
+                      </a:solidFill>
+                      <a:prstDash val="solid"/>
+                      <a:round/>
+                      <a:headEnd type="none" w="med" len="med"/>
+                      <a:tailEnd type="none" w="med" len="med"/>
+                    </a:lnL>
+                    <a:lnR w="12700" cap="flat" cmpd="sng" algn="ctr">
+                      <a:solidFill>
+                        <a:srgbClr val="D9E1E8"/>
+                      </a:solidFill>
+                      <a:prstDash val="solid"/>
+                      <a:round/>
+                      <a:headEnd type="none" w="med" len="med"/>
+                      <a:tailEnd type="none" w="med" len="med"/>
+                    </a:lnR>
+                    <a:lnT w="12700" cap="flat" cmpd="sng" algn="ctr">
+                      <a:solidFill>
+                        <a:srgbClr val="D9E1E8"/>
+                      </a:solidFill>
+                      <a:prstDash val="solid"/>
+                      <a:round/>
+                      <a:headEnd type="none" w="med" len="med"/>
+                      <a:tailEnd type="none" w="med" len="med"/>
+                    </a:lnT>
+                    <a:lnB w="12700" cap="flat" cmpd="sng" algn="ctr">
+                      <a:solidFill>
+                        <a:srgbClr val="D9E1E8"/>
+                      </a:solidFill>
+                      <a:prstDash val="solid"/>
+                      <a:round/>
+                      <a:headEnd type="none" w="med" len="med"/>
+                      <a:tailEnd type="none" w="med" len="med"/>
+                    </a:lnB>
+                    <a:solidFill>
+                      <a:srgbClr val="FFFFFF"/>
+                    </a:solidFill>
+                  </a:tcPr>
+                </a:tc>
+                <a:tc>
+                  <a:txBody>
+                    <a:bodyPr/>
+                    <a:lstStyle/>
+                    <a:p>
+                      <a:pPr algn="ctr" indent="0" marL="0">
+                        <a:buNone/>
+                      </a:pPr>
+                      <a:r>
+                        <a:rPr lang="en-US" sz="1100" dirty="0">
+                          <a:solidFill>
+                            <a:srgbClr val="000000"/>
+                          </a:solidFill>
+                          <a:latin typeface="Calibri" pitchFamily="34" charset="0"/>
+                          <a:ea typeface="Calibri" pitchFamily="34" charset="-122"/>
+                          <a:cs typeface="Calibri" pitchFamily="34" charset="-120"/>
+                        </a:rPr>
+                        <a:t>0.914</a:t>
+                      </a:r>
+                      <a:endParaRPr lang="en-US" sz="1100" dirty="0">
+                        <a:latin typeface="Calibri" charset="0"/>
+                        <a:ea typeface="Calibri" charset="0"/>
+                        <a:cs typeface="Calibri" charset="0"/>
+                      </a:endParaRPr>
+                    </a:p>
+                  </a:txBody>
+                  <a:tcPr marL="91440" marR="91440" marT="45720" marB="45720" anchor="ctr">
+                    <a:lnL w="12700" cap="flat" cmpd="sng" algn="ctr">
+                      <a:solidFill>
+                        <a:srgbClr val="D9E1E8"/>
+                      </a:solidFill>
+                      <a:prstDash val="solid"/>
+                      <a:round/>
+                      <a:headEnd type="none" w="med" len="med"/>
+                      <a:tailEnd type="none" w="med" len="med"/>
+                    </a:lnL>
+                    <a:lnR w="12700" cap="flat" cmpd="sng" algn="ctr">
+                      <a:solidFill>
+                        <a:srgbClr val="D9E1E8"/>
+                      </a:solidFill>
+                      <a:prstDash val="solid"/>
+                      <a:round/>
+                      <a:headEnd type="none" w="med" len="med"/>
+                      <a:tailEnd type="none" w="med" len="med"/>
+                    </a:lnR>
+                    <a:lnT w="12700" cap="flat" cmpd="sng" algn="ctr">
+                      <a:solidFill>
+                        <a:srgbClr val="D9E1E8"/>
+                      </a:solidFill>
+                      <a:prstDash val="solid"/>
+                      <a:round/>
+                      <a:headEnd type="none" w="med" len="med"/>
+                      <a:tailEnd type="none" w="med" len="med"/>
+                    </a:lnT>
+                    <a:lnB w="12700" cap="flat" cmpd="sng" algn="ctr">
+                      <a:solidFill>
+                        <a:srgbClr val="D9E1E8"/>
+                      </a:solidFill>
+                      <a:prstDash val="solid"/>
+                      <a:round/>
+                      <a:headEnd type="none" w="med" len="med"/>
+                      <a:tailEnd type="none" w="med" len="med"/>
+                    </a:lnB>
+                    <a:solidFill>
+                      <a:srgbClr val="FFFFFF"/>
+                    </a:solidFill>
+                  </a:tcPr>
+                </a:tc>
+              </a:tr>
+              <a:tr h="320040">
+                <a:tc>
+                  <a:txBody>
+                    <a:bodyPr/>
+                    <a:lstStyle/>
+                    <a:p>
+                      <a:pPr indent="0" marL="0">
+                        <a:buNone/>
+                      </a:pPr>
+                      <a:r>
+                        <a:rPr lang="en-US" sz="1100" dirty="0">
+                          <a:solidFill>
+                            <a:srgbClr val="000000"/>
+                          </a:solidFill>
+                          <a:latin typeface="Calibri" pitchFamily="34" charset="0"/>
+                          <a:ea typeface="Calibri" pitchFamily="34" charset="-122"/>
+                          <a:cs typeface="Calibri" pitchFamily="34" charset="-120"/>
+                        </a:rPr>
+                        <a:t>Boyut / Hız</a:t>
+                      </a:r>
+                      <a:endParaRPr lang="en-US" sz="1100" dirty="0">
+                        <a:latin typeface="Calibri" charset="0"/>
+                        <a:ea typeface="Calibri" charset="0"/>
+                        <a:cs typeface="Calibri" charset="0"/>
+                      </a:endParaRPr>
+                    </a:p>
+                  </a:txBody>
+                  <a:tcPr marL="91440" marR="91440" marT="45720" marB="45720" anchor="ctr">
+                    <a:lnL w="12700" cap="flat" cmpd="sng" algn="ctr">
+                      <a:solidFill>
+                        <a:srgbClr val="D9E1E8"/>
+                      </a:solidFill>
+                      <a:prstDash val="solid"/>
+                      <a:round/>
+                      <a:headEnd type="none" w="med" len="med"/>
+                      <a:tailEnd type="none" w="med" len="med"/>
+                    </a:lnL>
+                    <a:lnR w="12700" cap="flat" cmpd="sng" algn="ctr">
+                      <a:solidFill>
+                        <a:srgbClr val="D9E1E8"/>
+                      </a:solidFill>
+                      <a:prstDash val="solid"/>
+                      <a:round/>
+                      <a:headEnd type="none" w="med" len="med"/>
+                      <a:tailEnd type="none" w="med" len="med"/>
+                    </a:lnR>
+                    <a:lnT w="12700" cap="flat" cmpd="sng" algn="ctr">
+                      <a:solidFill>
+                        <a:srgbClr val="D9E1E8"/>
+                      </a:solidFill>
+                      <a:prstDash val="solid"/>
+                      <a:round/>
+                      <a:headEnd type="none" w="med" len="med"/>
+                      <a:tailEnd type="none" w="med" len="med"/>
+                    </a:lnT>
+                    <a:lnB w="12700" cap="flat" cmpd="sng" algn="ctr">
+                      <a:solidFill>
+                        <a:srgbClr val="D9E1E8"/>
+                      </a:solidFill>
+                      <a:prstDash val="solid"/>
+                      <a:round/>
+                      <a:headEnd type="none" w="med" len="med"/>
+                      <a:tailEnd type="none" w="med" len="med"/>
+                    </a:lnB>
+                    <a:solidFill>
+                      <a:srgbClr val="FFFFFF"/>
+                    </a:solidFill>
+                  </a:tcPr>
+                </a:tc>
+                <a:tc>
+                  <a:txBody>
+                    <a:bodyPr/>
+                    <a:lstStyle/>
+                    <a:p>
+                      <a:pPr algn="ctr" indent="0" marL="0">
+                        <a:buNone/>
+                      </a:pPr>
+                      <a:r>
+                        <a:rPr lang="en-US" sz="1100" dirty="0">
+                          <a:solidFill>
+                            <a:srgbClr val="000000"/>
+                          </a:solidFill>
+                          <a:latin typeface="Calibri" pitchFamily="34" charset="0"/>
+                          <a:ea typeface="Calibri" pitchFamily="34" charset="-122"/>
+                          <a:cs typeface="Calibri" pitchFamily="34" charset="-120"/>
+                        </a:rPr>
+                        <a:t>2944 MB · 58 ms</a:t>
+                      </a:r>
+                      <a:endParaRPr lang="en-US" sz="1100" dirty="0">
+                        <a:latin typeface="Calibri" charset="0"/>
+                        <a:ea typeface="Calibri" charset="0"/>
+                        <a:cs typeface="Calibri" charset="0"/>
+                      </a:endParaRPr>
+                    </a:p>
+                  </a:txBody>
+                  <a:tcPr marL="91440" marR="91440" marT="45720" marB="45720" anchor="ctr">
+                    <a:lnL w="12700" cap="flat" cmpd="sng" algn="ctr">
+                      <a:solidFill>
+                        <a:srgbClr val="D9E1E8"/>
+                      </a:solidFill>
+                      <a:prstDash val="solid"/>
+                      <a:round/>
+                      <a:headEnd type="none" w="med" len="med"/>
+                      <a:tailEnd type="none" w="med" len="med"/>
+                    </a:lnL>
+                    <a:lnR w="12700" cap="flat" cmpd="sng" algn="ctr">
+                      <a:solidFill>
+                        <a:srgbClr val="D9E1E8"/>
+                      </a:solidFill>
+                      <a:prstDash val="solid"/>
+                      <a:round/>
+                      <a:headEnd type="none" w="med" len="med"/>
+                      <a:tailEnd type="none" w="med" len="med"/>
+                    </a:lnR>
+                    <a:lnT w="12700" cap="flat" cmpd="sng" algn="ctr">
+                      <a:solidFill>
+                        <a:srgbClr val="D9E1E8"/>
+                      </a:solidFill>
+                      <a:prstDash val="solid"/>
+                      <a:round/>
+                      <a:headEnd type="none" w="med" len="med"/>
+                      <a:tailEnd type="none" w="med" len="med"/>
+                    </a:lnT>
+                    <a:lnB w="12700" cap="flat" cmpd="sng" algn="ctr">
+                      <a:solidFill>
+                        <a:srgbClr val="D9E1E8"/>
+                      </a:solidFill>
+                      <a:prstDash val="solid"/>
+                      <a:round/>
+                      <a:headEnd type="none" w="med" len="med"/>
+                      <a:tailEnd type="none" w="med" len="med"/>
+                    </a:lnB>
+                    <a:solidFill>
+                      <a:srgbClr val="FFFFFF"/>
+                    </a:solidFill>
+                  </a:tcPr>
+                </a:tc>
+                <a:tc>
+                  <a:txBody>
+                    <a:bodyPr/>
+                    <a:lstStyle/>
+                    <a:p>
+                      <a:pPr algn="ctr" indent="0" marL="0">
+                        <a:buNone/>
+                      </a:pPr>
+                      <a:r>
+                        <a:rPr lang="en-US" sz="1100" dirty="0">
+                          <a:solidFill>
+                            <a:srgbClr val="000000"/>
+                          </a:solidFill>
+                          <a:latin typeface="Calibri" pitchFamily="34" charset="0"/>
+                          <a:ea typeface="Calibri" pitchFamily="34" charset="-122"/>
+                          <a:cs typeface="Calibri" pitchFamily="34" charset="-120"/>
+                        </a:rPr>
+                        <a:t>8.7 MB · 1120 ms</a:t>
+                      </a:r>
+                      <a:endParaRPr lang="en-US" sz="1100" dirty="0">
+                        <a:latin typeface="Calibri" charset="0"/>
+                        <a:ea typeface="Calibri" charset="0"/>
+                        <a:cs typeface="Calibri" charset="0"/>
+                      </a:endParaRPr>
+                    </a:p>
+                  </a:txBody>
+                  <a:tcPr marL="91440" marR="91440" marT="45720" marB="45720" anchor="ctr">
+                    <a:lnL w="12700" cap="flat" cmpd="sng" algn="ctr">
+                      <a:solidFill>
+                        <a:srgbClr val="D9E1E8"/>
+                      </a:solidFill>
+                      <a:prstDash val="solid"/>
+                      <a:round/>
+                      <a:headEnd type="none" w="med" len="med"/>
+                      <a:tailEnd type="none" w="med" len="med"/>
+                    </a:lnL>
+                    <a:lnR w="12700" cap="flat" cmpd="sng" algn="ctr">
+                      <a:solidFill>
+                        <a:srgbClr val="D9E1E8"/>
+                      </a:solidFill>
+                      <a:prstDash val="solid"/>
+                      <a:round/>
+                      <a:headEnd type="none" w="med" len="med"/>
+                      <a:tailEnd type="none" w="med" len="med"/>
+                    </a:lnR>
+                    <a:lnT w="12700" cap="flat" cmpd="sng" algn="ctr">
+                      <a:solidFill>
+                        <a:srgbClr val="D9E1E8"/>
+                      </a:solidFill>
+                      <a:prstDash val="solid"/>
+                      <a:round/>
+                      <a:headEnd type="none" w="med" len="med"/>
+                      <a:tailEnd type="none" w="med" len="med"/>
+                    </a:lnT>
+                    <a:lnB w="12700" cap="flat" cmpd="sng" algn="ctr">
+                      <a:solidFill>
+                        <a:srgbClr val="D9E1E8"/>
+                      </a:solidFill>
+                      <a:prstDash val="solid"/>
+                      <a:round/>
+                      <a:headEnd type="none" w="med" len="med"/>
+                      <a:tailEnd type="none" w="med" len="med"/>
+                    </a:lnB>
+                    <a:solidFill>
+                      <a:srgbClr val="FFFFFF"/>
+                    </a:solidFill>
+                  </a:tcPr>
+                </a:tc>
+              </a:tr>
+              <a:tr h="320040">
+                <a:tc>
+                  <a:txBody>
+                    <a:bodyPr/>
+                    <a:lstStyle/>
+                    <a:p>
+                      <a:pPr indent="0" marL="0">
+                        <a:buNone/>
+                      </a:pPr>
+                      <a:r>
+                        <a:rPr lang="en-US" sz="1100" b="1" dirty="0">
+                          <a:solidFill>
+                            <a:srgbClr val="000000"/>
+                          </a:solidFill>
+                          <a:latin typeface="Calibri" pitchFamily="34" charset="0"/>
+                          <a:ea typeface="Calibri" pitchFamily="34" charset="-122"/>
+                          <a:cs typeface="Calibri" pitchFamily="34" charset="-120"/>
+                        </a:rPr>
+                        <a:t>Gemma-4</a:t>
+                      </a:r>
+                      <a:endParaRPr lang="en-US" sz="1100" dirty="0">
+                        <a:latin typeface="Calibri" charset="0"/>
+                        <a:ea typeface="Calibri" charset="0"/>
+                        <a:cs typeface="Calibri" charset="0"/>
+                      </a:endParaRPr>
+                    </a:p>
+                  </a:txBody>
+                  <a:tcPr marL="91440" marR="91440" marT="45720" marB="45720" anchor="ctr">
+                    <a:lnL w="12700" cap="flat" cmpd="sng" algn="ctr">
+                      <a:solidFill>
+                        <a:srgbClr val="D9E1E8"/>
+                      </a:solidFill>
+                      <a:prstDash val="solid"/>
+                      <a:round/>
+                      <a:headEnd type="none" w="med" len="med"/>
+                      <a:tailEnd type="none" w="med" len="med"/>
+                    </a:lnL>
+                    <a:lnR w="12700" cap="flat" cmpd="sng" algn="ctr">
+                      <a:solidFill>
+                        <a:srgbClr val="D9E1E8"/>
+                      </a:solidFill>
+                      <a:prstDash val="solid"/>
+                      <a:round/>
+                      <a:headEnd type="none" w="med" len="med"/>
+                      <a:tailEnd type="none" w="med" len="med"/>
+                    </a:lnR>
+                    <a:lnT w="12700" cap="flat" cmpd="sng" algn="ctr">
+                      <a:solidFill>
+                        <a:srgbClr val="D9E1E8"/>
+                      </a:solidFill>
+                      <a:prstDash val="solid"/>
+                      <a:round/>
+                      <a:headEnd type="none" w="med" len="med"/>
+                      <a:tailEnd type="none" w="med" len="med"/>
+                    </a:lnT>
+                    <a:lnB w="12700" cap="flat" cmpd="sng" algn="ctr">
+                      <a:solidFill>
+                        <a:srgbClr val="D9E1E8"/>
+                      </a:solidFill>
+                      <a:prstDash val="solid"/>
+                      <a:round/>
+                      <a:headEnd type="none" w="med" len="med"/>
+                      <a:tailEnd type="none" w="med" len="med"/>
+                    </a:lnB>
+                    <a:solidFill>
+                      <a:srgbClr val="FFF3E6"/>
+                    </a:solidFill>
+                  </a:tcPr>
+                </a:tc>
+                <a:tc>
+                  <a:txBody>
+                    <a:bodyPr/>
+                    <a:lstStyle/>
+                    <a:p>
+                      <a:pPr indent="0" marL="0">
+                        <a:buNone/>
+                      </a:pPr>
+                      <a:r>
+                        <a:rPr lang="en-US" sz="1100" dirty="0">
+                          <a:solidFill>
+                            <a:srgbClr val="000000"/>
+                          </a:solidFill>
+                          <a:latin typeface="Calibri" pitchFamily="34" charset="0"/>
+                          <a:ea typeface="Calibri" pitchFamily="34" charset="-122"/>
+                          <a:cs typeface="Calibri" pitchFamily="34" charset="-120"/>
+                        </a:rPr>
+                        <a:t>Macro-F1</a:t>
+                      </a:r>
+                      <a:endParaRPr lang="en-US" sz="1100" dirty="0">
+                        <a:latin typeface="Calibri" charset="0"/>
+                        <a:ea typeface="Calibri" charset="0"/>
+                        <a:cs typeface="Calibri" charset="0"/>
+                      </a:endParaRPr>
+                    </a:p>
+                  </a:txBody>
+                  <a:tcPr marL="91440" marR="91440" marT="45720" marB="45720" anchor="ctr">
+                    <a:lnL w="12700" cap="flat" cmpd="sng" algn="ctr">
+                      <a:solidFill>
+                        <a:srgbClr val="D9E1E8"/>
+                      </a:solidFill>
+                      <a:prstDash val="solid"/>
+                      <a:round/>
+                      <a:headEnd type="none" w="med" len="med"/>
+                      <a:tailEnd type="none" w="med" len="med"/>
+                    </a:lnL>
+                    <a:lnR w="12700" cap="flat" cmpd="sng" algn="ctr">
+                      <a:solidFill>
+                        <a:srgbClr val="D9E1E8"/>
+                      </a:solidFill>
+                      <a:prstDash val="solid"/>
+                      <a:round/>
+                      <a:headEnd type="none" w="med" len="med"/>
+                      <a:tailEnd type="none" w="med" len="med"/>
+                    </a:lnR>
+                    <a:lnT w="12700" cap="flat" cmpd="sng" algn="ctr">
+                      <a:solidFill>
+                        <a:srgbClr val="D9E1E8"/>
+                      </a:solidFill>
+                      <a:prstDash val="solid"/>
+                      <a:round/>
+                      <a:headEnd type="none" w="med" len="med"/>
+                      <a:tailEnd type="none" w="med" len="med"/>
+                    </a:lnT>
+                    <a:lnB w="12700" cap="flat" cmpd="sng" algn="ctr">
+                      <a:solidFill>
+                        <a:srgbClr val="D9E1E8"/>
+                      </a:solidFill>
+                      <a:prstDash val="solid"/>
+                      <a:round/>
+                      <a:headEnd type="none" w="med" len="med"/>
+                      <a:tailEnd type="none" w="med" len="med"/>
+                    </a:lnB>
+                    <a:solidFill>
+                      <a:srgbClr val="FFF3E6"/>
+                    </a:solidFill>
+                  </a:tcPr>
+                </a:tc>
+                <a:tc>
+                  <a:txBody>
+                    <a:bodyPr/>
+                    <a:lstStyle/>
+                    <a:p>
+                      <a:pPr algn="ctr" indent="0" marL="0">
+                        <a:buNone/>
+                      </a:pPr>
+                      <a:r>
+                        <a:rPr lang="en-US" sz="1100" b="1" dirty="0">
+                          <a:solidFill>
+                            <a:srgbClr val="2E7D32"/>
+                          </a:solidFill>
+                          <a:latin typeface="Calibri" pitchFamily="34" charset="0"/>
+                          <a:ea typeface="Calibri" pitchFamily="34" charset="-122"/>
+                          <a:cs typeface="Calibri" pitchFamily="34" charset="-120"/>
+                        </a:rPr>
+                        <a:t>0.982 ± 0.020  ⭐</a:t>
+                      </a:r>
+                      <a:endParaRPr lang="en-US" sz="1100" dirty="0">
+                        <a:latin typeface="Calibri" charset="0"/>
+                        <a:ea typeface="Calibri" charset="0"/>
+                        <a:cs typeface="Calibri" charset="0"/>
+                      </a:endParaRPr>
+                    </a:p>
+                  </a:txBody>
+                  <a:tcPr marL="91440" marR="91440" marT="45720" marB="45720" anchor="ctr">
+                    <a:lnL w="12700" cap="flat" cmpd="sng" algn="ctr">
+                      <a:solidFill>
+                        <a:srgbClr val="D9E1E8"/>
+                      </a:solidFill>
+                      <a:prstDash val="solid"/>
+                      <a:round/>
+                      <a:headEnd type="none" w="med" len="med"/>
+                      <a:tailEnd type="none" w="med" len="med"/>
+                    </a:lnL>
+                    <a:lnR w="12700" cap="flat" cmpd="sng" algn="ctr">
+                      <a:solidFill>
+                        <a:srgbClr val="D9E1E8"/>
+                      </a:solidFill>
+                      <a:prstDash val="solid"/>
+                      <a:round/>
+                      <a:headEnd type="none" w="med" len="med"/>
+                      <a:tailEnd type="none" w="med" len="med"/>
+                    </a:lnR>
+                    <a:lnT w="12700" cap="flat" cmpd="sng" algn="ctr">
+                      <a:solidFill>
+                        <a:srgbClr val="D9E1E8"/>
+                      </a:solidFill>
+                      <a:prstDash val="solid"/>
+                      <a:round/>
+                      <a:headEnd type="none" w="med" len="med"/>
+                      <a:tailEnd type="none" w="med" len="med"/>
+                    </a:lnT>
+                    <a:lnB w="12700" cap="flat" cmpd="sng" algn="ctr">
+                      <a:solidFill>
+                        <a:srgbClr val="D9E1E8"/>
+                      </a:solidFill>
+                      <a:prstDash val="solid"/>
+                      <a:round/>
+                      <a:headEnd type="none" w="med" len="med"/>
+                      <a:tailEnd type="none" w="med" len="med"/>
+                    </a:lnB>
+                    <a:solidFill>
+                      <a:srgbClr val="FFF3E6"/>
+                    </a:solidFill>
+                  </a:tcPr>
+                </a:tc>
+                <a:tc>
+                  <a:txBody>
+                    <a:bodyPr/>
+                    <a:lstStyle/>
+                    <a:p>
+                      <a:pPr algn="ctr" indent="0" marL="0">
+                        <a:buNone/>
+                      </a:pPr>
+                      <a:r>
+                        <a:rPr lang="en-US" sz="1100" dirty="0">
+                          <a:solidFill>
+                            <a:srgbClr val="C0392B"/>
+                          </a:solidFill>
+                          <a:latin typeface="Calibri" pitchFamily="34" charset="0"/>
+                          <a:ea typeface="Calibri" pitchFamily="34" charset="-122"/>
+                          <a:cs typeface="Calibri" pitchFamily="34" charset="-120"/>
+                        </a:rPr>
+                        <a:t>0.740  (overfit)</a:t>
+                      </a:r>
+                      <a:endParaRPr lang="en-US" sz="1100" dirty="0">
+                        <a:latin typeface="Calibri" charset="0"/>
+                        <a:ea typeface="Calibri" charset="0"/>
+                        <a:cs typeface="Calibri" charset="0"/>
+                      </a:endParaRPr>
+                    </a:p>
+                  </a:txBody>
+                  <a:tcPr marL="91440" marR="91440" marT="45720" marB="45720" anchor="ctr">
+                    <a:lnL w="12700" cap="flat" cmpd="sng" algn="ctr">
+                      <a:solidFill>
+                        <a:srgbClr val="D9E1E8"/>
+                      </a:solidFill>
+                      <a:prstDash val="solid"/>
+                      <a:round/>
+                      <a:headEnd type="none" w="med" len="med"/>
+                      <a:tailEnd type="none" w="med" len="med"/>
+                    </a:lnL>
+                    <a:lnR w="12700" cap="flat" cmpd="sng" algn="ctr">
+                      <a:solidFill>
+                        <a:srgbClr val="D9E1E8"/>
+                      </a:solidFill>
+                      <a:prstDash val="solid"/>
+                      <a:round/>
+                      <a:headEnd type="none" w="med" len="med"/>
+                      <a:tailEnd type="none" w="med" len="med"/>
+                    </a:lnR>
+                    <a:lnT w="12700" cap="flat" cmpd="sng" algn="ctr">
+                      <a:solidFill>
+                        <a:srgbClr val="D9E1E8"/>
+                      </a:solidFill>
+                      <a:prstDash val="solid"/>
+                      <a:round/>
+                      <a:headEnd type="none" w="med" len="med"/>
+                      <a:tailEnd type="none" w="med" len="med"/>
+                    </a:lnT>
+                    <a:lnB w="12700" cap="flat" cmpd="sng" algn="ctr">
+                      <a:solidFill>
+                        <a:srgbClr val="D9E1E8"/>
+                      </a:solidFill>
+                      <a:prstDash val="solid"/>
+                      <a:round/>
+                      <a:headEnd type="none" w="med" len="med"/>
+                      <a:tailEnd type="none" w="med" len="med"/>
+                    </a:lnB>
+                    <a:solidFill>
+                      <a:srgbClr val="FFF3E6"/>
+                    </a:solidFill>
+                  </a:tcPr>
+                </a:tc>
+              </a:tr>
+              <a:tr h="320040">
+                <a:tc>
+                  <a:txBody>
+                    <a:bodyPr/>
+                    <a:lstStyle/>
+                    <a:p>
+                      <a:pPr indent="0" marL="0">
+                        <a:buNone/>
+                      </a:pPr>
+                      <a:r>
+                        <a:rPr lang="en-US" sz="1100" dirty="0">
+                          <a:solidFill>
+                            <a:srgbClr val="000000"/>
+                          </a:solidFill>
+                          <a:latin typeface="Calibri" pitchFamily="34" charset="0"/>
+                          <a:ea typeface="Calibri" pitchFamily="34" charset="-122"/>
+                          <a:cs typeface="Calibri" pitchFamily="34" charset="-120"/>
+                        </a:rPr>
+                        <a:t>Boyut / Hız</a:t>
+                      </a:r>
+                      <a:endParaRPr lang="en-US" sz="1100" dirty="0">
+                        <a:latin typeface="Calibri" charset="0"/>
+                        <a:ea typeface="Calibri" charset="0"/>
+                        <a:cs typeface="Calibri" charset="0"/>
+                      </a:endParaRPr>
+                    </a:p>
+                  </a:txBody>
+                  <a:tcPr marL="91440" marR="91440" marT="45720" marB="45720" anchor="ctr">
+                    <a:lnL w="12700" cap="flat" cmpd="sng" algn="ctr">
+                      <a:solidFill>
+                        <a:srgbClr val="D9E1E8"/>
+                      </a:solidFill>
+                      <a:prstDash val="solid"/>
+                      <a:round/>
+                      <a:headEnd type="none" w="med" len="med"/>
+                      <a:tailEnd type="none" w="med" len="med"/>
+                    </a:lnL>
+                    <a:lnR w="12700" cap="flat" cmpd="sng" algn="ctr">
+                      <a:solidFill>
+                        <a:srgbClr val="D9E1E8"/>
+                      </a:solidFill>
+                      <a:prstDash val="solid"/>
+                      <a:round/>
+                      <a:headEnd type="none" w="med" len="med"/>
+                      <a:tailEnd type="none" w="med" len="med"/>
+                    </a:lnR>
+                    <a:lnT w="12700" cap="flat" cmpd="sng" algn="ctr">
+                      <a:solidFill>
+                        <a:srgbClr val="D9E1E8"/>
+                      </a:solidFill>
+                      <a:prstDash val="solid"/>
+                      <a:round/>
+                      <a:headEnd type="none" w="med" len="med"/>
+                      <a:tailEnd type="none" w="med" len="med"/>
+                    </a:lnT>
+                    <a:lnB w="12700" cap="flat" cmpd="sng" algn="ctr">
+                      <a:solidFill>
+                        <a:srgbClr val="D9E1E8"/>
+                      </a:solidFill>
+                      <a:prstDash val="solid"/>
+                      <a:round/>
+                      <a:headEnd type="none" w="med" len="med"/>
+                      <a:tailEnd type="none" w="med" len="med"/>
+                    </a:lnB>
+                    <a:solidFill>
+                      <a:srgbClr val="FFF3E6"/>
+                    </a:solidFill>
+                  </a:tcPr>
+                </a:tc>
+                <a:tc>
+                  <a:txBody>
+                    <a:bodyPr/>
+                    <a:lstStyle/>
+                    <a:p>
+                      <a:pPr algn="ctr" indent="0" marL="0">
+                        <a:buNone/>
+                      </a:pPr>
+                      <a:r>
+                        <a:rPr lang="en-US" sz="1100" dirty="0">
+                          <a:solidFill>
+                            <a:srgbClr val="000000"/>
+                          </a:solidFill>
+                          <a:latin typeface="Calibri" pitchFamily="34" charset="0"/>
+                          <a:ea typeface="Calibri" pitchFamily="34" charset="-122"/>
+                          <a:cs typeface="Calibri" pitchFamily="34" charset="-120"/>
+                        </a:rPr>
+                        <a:t>4987 MB · 64 ms</a:t>
+                      </a:r>
+                      <a:endParaRPr lang="en-US" sz="1100" dirty="0">
+                        <a:latin typeface="Calibri" charset="0"/>
+                        <a:ea typeface="Calibri" charset="0"/>
+                        <a:cs typeface="Calibri" charset="0"/>
+                      </a:endParaRPr>
+                    </a:p>
+                  </a:txBody>
+                  <a:tcPr marL="91440" marR="91440" marT="45720" marB="45720" anchor="ctr">
+                    <a:lnL w="12700" cap="flat" cmpd="sng" algn="ctr">
+                      <a:solidFill>
+                        <a:srgbClr val="D9E1E8"/>
+                      </a:solidFill>
+                      <a:prstDash val="solid"/>
+                      <a:round/>
+                      <a:headEnd type="none" w="med" len="med"/>
+                      <a:tailEnd type="none" w="med" len="med"/>
+                    </a:lnL>
+                    <a:lnR w="12700" cap="flat" cmpd="sng" algn="ctr">
+                      <a:solidFill>
+                        <a:srgbClr val="D9E1E8"/>
+                      </a:solidFill>
+                      <a:prstDash val="solid"/>
+                      <a:round/>
+                      <a:headEnd type="none" w="med" len="med"/>
+                      <a:tailEnd type="none" w="med" len="med"/>
+                    </a:lnR>
+                    <a:lnT w="12700" cap="flat" cmpd="sng" algn="ctr">
+                      <a:solidFill>
+                        <a:srgbClr val="D9E1E8"/>
+                      </a:solidFill>
+                      <a:prstDash val="solid"/>
+                      <a:round/>
+                      <a:headEnd type="none" w="med" len="med"/>
+                      <a:tailEnd type="none" w="med" len="med"/>
+                    </a:lnT>
+                    <a:lnB w="12700" cap="flat" cmpd="sng" algn="ctr">
+                      <a:solidFill>
+                        <a:srgbClr val="D9E1E8"/>
+                      </a:solidFill>
+                      <a:prstDash val="solid"/>
+                      <a:round/>
+                      <a:headEnd type="none" w="med" len="med"/>
+                      <a:tailEnd type="none" w="med" len="med"/>
+                    </a:lnB>
+                    <a:solidFill>
+                      <a:srgbClr val="FFF3E6"/>
+                    </a:solidFill>
+                  </a:tcPr>
+                </a:tc>
+                <a:tc>
+                  <a:txBody>
+                    <a:bodyPr/>
+                    <a:lstStyle/>
+                    <a:p>
+                      <a:pPr algn="ctr" indent="0" marL="0">
+                        <a:buNone/>
+                      </a:pPr>
+                      <a:r>
+                        <a:rPr lang="en-US" sz="1100" dirty="0">
+                          <a:solidFill>
+                            <a:srgbClr val="000000"/>
+                          </a:solidFill>
+                          <a:latin typeface="Calibri" pitchFamily="34" charset="0"/>
+                          <a:ea typeface="Calibri" pitchFamily="34" charset="-122"/>
+                          <a:cs typeface="Calibri" pitchFamily="34" charset="-120"/>
+                        </a:rPr>
+                        <a:t>62 MB · 1798 ms</a:t>
+                      </a:r>
+                      <a:endParaRPr lang="en-US" sz="1100" dirty="0">
+                        <a:latin typeface="Calibri" charset="0"/>
+                        <a:ea typeface="Calibri" charset="0"/>
+                        <a:cs typeface="Calibri" charset="0"/>
+                      </a:endParaRPr>
+                    </a:p>
+                  </a:txBody>
+                  <a:tcPr marL="91440" marR="91440" marT="45720" marB="45720" anchor="ctr">
+                    <a:lnL w="12700" cap="flat" cmpd="sng" algn="ctr">
+                      <a:solidFill>
+                        <a:srgbClr val="D9E1E8"/>
+                      </a:solidFill>
+                      <a:prstDash val="solid"/>
+                      <a:round/>
+                      <a:headEnd type="none" w="med" len="med"/>
+                      <a:tailEnd type="none" w="med" len="med"/>
+                    </a:lnL>
+                    <a:lnR w="12700" cap="flat" cmpd="sng" algn="ctr">
+                      <a:solidFill>
+                        <a:srgbClr val="D9E1E8"/>
+                      </a:solidFill>
+                      <a:prstDash val="solid"/>
+                      <a:round/>
+                      <a:headEnd type="none" w="med" len="med"/>
+                      <a:tailEnd type="none" w="med" len="med"/>
+                    </a:lnR>
+                    <a:lnT w="12700" cap="flat" cmpd="sng" algn="ctr">
+                      <a:solidFill>
+                        <a:srgbClr val="D9E1E8"/>
+                      </a:solidFill>
+                      <a:prstDash val="solid"/>
+                      <a:round/>
+                      <a:headEnd type="none" w="med" len="med"/>
+                      <a:tailEnd type="none" w="med" len="med"/>
+                    </a:lnT>
+                    <a:lnB w="12700" cap="flat" cmpd="sng" algn="ctr">
+                      <a:solidFill>
+                        <a:srgbClr val="D9E1E8"/>
+                      </a:solidFill>
+                      <a:prstDash val="solid"/>
+                      <a:round/>
+                      <a:headEnd type="none" w="med" len="med"/>
+                      <a:tailEnd type="none" w="med" len="med"/>
+                    </a:lnB>
+                    <a:solidFill>
+                      <a:srgbClr val="FFF3E6"/>
                     </a:solidFill>
                   </a:tcPr>
                 </a:tc>
@@ -4332,22 +5717,22 @@
         </p:nvSpPr>
         <p:spPr>
           <a:xfrm>
-            <a:off x="8229600" y="2468880"/>
-            <a:ext cx="3383280" cy="2377440"/>
+            <a:off x="640080" y="5257800"/>
+            <a:ext cx="10972800" cy="960120"/>
           </a:xfrm>
           <a:prstGeom prst="roundRect">
             <a:avLst>
-              <a:gd name="adj" fmla="val 3077"/>
+              <a:gd name="adj" fmla="val 5714"/>
             </a:avLst>
           </a:prstGeom>
           <a:solidFill>
             <a:srgbClr val="FFF3E6"/>
           </a:solidFill>
-          <a:ln w="19050">
+          <a:ln w="12700">
             <a:solidFill>
               <a:srgbClr val="E8833A"/>
             </a:solidFill>
-            <a:prstDash val="dash"/>
+            <a:prstDash val="solid"/>
           </a:ln>
         </p:spPr>
       </p:sp>
@@ -4359,8 +5744,8 @@
         </p:nvSpPr>
         <p:spPr>
           <a:xfrm>
-            <a:off x="8412480" y="2697480"/>
-            <a:ext cx="3017520" cy="365760"/>
+            <a:off x="868680" y="5321808"/>
+            <a:ext cx="10515600" cy="868680"/>
           </a:xfrm>
           <a:prstGeom prst="rect">
             <a:avLst/>
@@ -4384,7 +5769,97 @@
                 <a:ea typeface="Calibri" pitchFamily="34" charset="-122"/>
                 <a:cs typeface="Calibri" pitchFamily="34" charset="-120"/>
               </a:rPr>
-              <a:t>YER TUTUCU</a:t>
+              <a:t>Sonuç:  </a:t>
+            </a:r>
+            <a:pPr indent="0" marL="0">
+              <a:buNone/>
+            </a:pPr>
+            <a:r>
+              <a:rPr lang="en-US" sz="1200" dirty="0">
+                <a:solidFill>
+                  <a:srgbClr val="1B2733"/>
+                </a:solidFill>
+                <a:latin typeface="Calibri" pitchFamily="34" charset="0"/>
+                <a:ea typeface="Calibri" pitchFamily="34" charset="-122"/>
+                <a:cs typeface="Calibri" pitchFamily="34" charset="-120"/>
+              </a:rPr>
+              <a:t>QLoRA boyutta </a:t>
+            </a:r>
+            <a:pPr indent="0" marL="0">
+              <a:buNone/>
+            </a:pPr>
+            <a:r>
+              <a:rPr lang="en-US" sz="1200" b="1" dirty="0">
+                <a:solidFill>
+                  <a:srgbClr val="2E7D32"/>
+                </a:solidFill>
+                <a:latin typeface="Calibri" pitchFamily="34" charset="0"/>
+                <a:ea typeface="Calibri" pitchFamily="34" charset="-122"/>
+                <a:cs typeface="Calibri" pitchFamily="34" charset="-120"/>
+              </a:rPr>
+              <a:t>~200× küçük</a:t>
+            </a:r>
+            <a:pPr indent="0" marL="0">
+              <a:buNone/>
+            </a:pPr>
+            <a:r>
+              <a:rPr lang="en-US" sz="1200" dirty="0">
+                <a:solidFill>
+                  <a:srgbClr val="1B2733"/>
+                </a:solidFill>
+                <a:latin typeface="Calibri" pitchFamily="34" charset="0"/>
+                <a:ea typeface="Calibri" pitchFamily="34" charset="-122"/>
+                <a:cs typeface="Calibri" pitchFamily="34" charset="-120"/>
+              </a:rPr>
+              <a:t> (adaptör 7–62 MB vs 700–5000 MB) — edge için kazanan. LoRA hızda </a:t>
+            </a:r>
+            <a:pPr indent="0" marL="0">
+              <a:buNone/>
+            </a:pPr>
+            <a:r>
+              <a:rPr lang="en-US" sz="1200" b="1" dirty="0">
+                <a:solidFill>
+                  <a:srgbClr val="2E7D32"/>
+                </a:solidFill>
+                <a:latin typeface="Calibri" pitchFamily="34" charset="0"/>
+                <a:ea typeface="Calibri" pitchFamily="34" charset="-122"/>
+                <a:cs typeface="Calibri" pitchFamily="34" charset="-120"/>
+              </a:rPr>
+              <a:t>~20× hızlı</a:t>
+            </a:r>
+            <a:pPr indent="0" marL="0">
+              <a:spcAft>
+                <a:spcPts val="400"/>
+              </a:spcAft>
+              <a:buNone/>
+            </a:pPr>
+            <a:r>
+              <a:rPr lang="en-US" sz="1200" dirty="0">
+                <a:solidFill>
+                  <a:srgbClr val="1B2733"/>
+                </a:solidFill>
+                <a:latin typeface="Calibri" pitchFamily="34" charset="0"/>
+                <a:ea typeface="Calibri" pitchFamily="34" charset="-122"/>
+                <a:cs typeface="Calibri" pitchFamily="34" charset="-120"/>
+              </a:rPr>
+              <a:t> (T4 emülasyonu altında) — eğitim/sunucu için kazanan. </a:t>
+            </a:r>
+            <a:endParaRPr lang="en-US" sz="1300" dirty="0"/>
+          </a:p>
+          <a:p>
+            <a:pPr indent="0" marL="0">
+              <a:buNone/>
+            </a:pPr>
+            <a:r>
+              <a:rPr lang="en-US" sz="1200" i="1" dirty="0">
+                <a:solidFill>
+                  <a:srgbClr val="C96A28"/>
+                </a:solidFill>
+                <a:latin typeface="Calibri" pitchFamily="34" charset="0"/>
+                <a:ea typeface="Calibri" pitchFamily="34" charset="-122"/>
+                <a:cs typeface="Calibri" pitchFamily="34" charset="-120"/>
+              </a:rPr>
+              <a:t>İki yöntem birbirinin yerini tutmaz — farklı senaryolara hizmet eder.</a:t>
             </a:r>
             <a:endParaRPr lang="en-US" sz="1300" dirty="0"/>
           </a:p>
@@ -4392,85 +5867,7 @@
       </p:sp>
       <p:sp>
         <p:nvSpPr>
-          <p:cNvPr id="10" name="Text 7"/>
-          <p:cNvSpPr/>
-          <p:nvPr/>
-        </p:nvSpPr>
-        <p:spPr>
-          <a:xfrm>
-            <a:off x="8412480" y="3154680"/>
-            <a:ext cx="3017520" cy="1463040"/>
-          </a:xfrm>
-          <a:prstGeom prst="rect">
-            <a:avLst/>
-          </a:prstGeom>
-          <a:noFill/>
-          <a:ln/>
-        </p:spPr>
-        <p:txBody>
-          <a:bodyPr wrap="square" rtlCol="0" anchor="t"/>
-          <a:lstStyle/>
-          <a:p>
-            <a:pPr indent="0" marL="0">
-              <a:buNone/>
-            </a:pPr>
-            <a:r>
-              <a:rPr lang="en-US" sz="1300" dirty="0">
-                <a:solidFill>
-                  <a:srgbClr val="1B2733"/>
-                </a:solidFill>
-                <a:latin typeface="Calibri" pitchFamily="34" charset="0"/>
-                <a:ea typeface="Calibri" pitchFamily="34" charset="-122"/>
-                <a:cs typeface="Calibri" pitchFamily="34" charset="-120"/>
-              </a:rPr>
-              <a:t>Saliha'nın LoRA sonuçları gelince bu tablo gerçek değerlerle doldurulacak.</a:t>
-            </a:r>
-            <a:endParaRPr lang="en-US" sz="1300" dirty="0"/>
-          </a:p>
-        </p:txBody>
-      </p:sp>
-      <p:sp>
-        <p:nvSpPr>
-          <p:cNvPr id="11" name="Text 8"/>
-          <p:cNvSpPr/>
-          <p:nvPr/>
-        </p:nvSpPr>
-        <p:spPr>
-          <a:xfrm>
-            <a:off x="640080" y="5120640"/>
-            <a:ext cx="10972800" cy="731520"/>
-          </a:xfrm>
-          <a:prstGeom prst="rect">
-            <a:avLst/>
-          </a:prstGeom>
-          <a:noFill/>
-          <a:ln/>
-        </p:spPr>
-        <p:txBody>
-          <a:bodyPr wrap="square" rtlCol="0" anchor="ctr"/>
-          <a:lstStyle/>
-          <a:p>
-            <a:pPr indent="0" marL="0">
-              <a:buNone/>
-            </a:pPr>
-            <a:r>
-              <a:rPr lang="en-US" sz="1400" i="1" dirty="0">
-                <a:solidFill>
-                  <a:srgbClr val="5B6B7B"/>
-                </a:solidFill>
-                <a:latin typeface="Calibri" pitchFamily="34" charset="0"/>
-                <a:ea typeface="Calibri" pitchFamily="34" charset="-122"/>
-                <a:cs typeface="Calibri" pitchFamily="34" charset="-120"/>
-              </a:rPr>
-              <a:t>Beklenti: benzer doğruluk, QLoRA lehine belirgin bellek tasarrufu — düşük maliyetli donanım için QLoRA avantajlı.</a:t>
-            </a:r>
-            <a:endParaRPr lang="en-US" sz="1400" dirty="0"/>
-          </a:p>
-        </p:txBody>
-      </p:sp>
-      <p:sp>
-        <p:nvSpPr>
-          <p:cNvPr id="12" name="Shape 9"/>
+          <p:cNvPr id="10" name="Shape 7"/>
           <p:cNvSpPr/>
           <p:nvPr/>
         </p:nvSpPr>
@@ -4493,7 +5890,7 @@
       </p:sp>
       <p:sp>
         <p:nvSpPr>
-          <p:cNvPr id="13" name="Text 10"/>
+          <p:cNvPr id="11" name="Text 8"/>
           <p:cNvSpPr/>
           <p:nvPr/>
         </p:nvSpPr>
@@ -4532,7 +5929,7 @@
       </p:sp>
       <p:sp>
         <p:nvSpPr>
-          <p:cNvPr id="14" name="Text 11"/>
+          <p:cNvPr id="12" name="Text 9"/>
           <p:cNvSpPr/>
           <p:nvPr/>
         </p:nvSpPr>
@@ -4571,7 +5968,7 @@
       </p:sp>
       <p:sp>
         <p:nvSpPr>
-          <p:cNvPr id="15" name="Text 12"/>
+          <p:cNvPr id="13" name="Text 10"/>
           <p:cNvSpPr/>
           <p:nvPr/>
         </p:nvSpPr>
